--- a/AUTOCAD INTECAP/apuntes powerpoint/CLASE BLOQUES 11 MARZO.pptx
+++ b/AUTOCAD INTECAP/apuntes powerpoint/CLASE BLOQUES 11 MARZO.pptx
@@ -27,8 +27,11 @@
     <p:sldId id="262" r:id="rId21"/>
     <p:sldId id="263" r:id="rId22"/>
     <p:sldId id="264" r:id="rId23"/>
-    <p:sldId id="265" r:id="rId24"/>
-    <p:sldId id="259" r:id="rId25"/>
+    <p:sldId id="280" r:id="rId24"/>
+    <p:sldId id="281" r:id="rId25"/>
+    <p:sldId id="282" r:id="rId26"/>
+    <p:sldId id="265" r:id="rId27"/>
+    <p:sldId id="259" r:id="rId28"/>
   </p:sldIdLst>
   <p:sldSz cx="12192000" cy="6858000"/>
   <p:notesSz cx="6858000" cy="9144000"/>
@@ -127,7 +130,128 @@
       </a:defRPr>
     </a:lvl9pPr>
   </p:defaultTextStyle>
+  <p:extLst>
+    <p:ext uri="{EFAFB233-063F-42B5-8137-9DF3F51BA10A}">
+      <p15:sldGuideLst xmlns:p15="http://schemas.microsoft.com/office/powerpoint/2012/main"/>
+    </p:ext>
+  </p:extLst>
 </p:presentation>
+</file>
+
+<file path=ppt/ink/ink1.xml><?xml version="1.0" encoding="utf-8"?>
+<inkml:ink xmlns:inkml="http://www.w3.org/2003/InkML">
+  <inkml:definitions>
+    <inkml:context xml:id="ctx0">
+      <inkml:inkSource xml:id="inkSrc0">
+        <inkml:traceFormat>
+          <inkml:channel name="X" type="integer" min="-2.14748E9" max="2.14748E9" units="cm"/>
+          <inkml:channel name="Y" type="integer" min="-2.14748E9" max="2.14748E9" units="cm"/>
+        </inkml:traceFormat>
+        <inkml:channelProperties>
+          <inkml:channelProperty channel="X" name="resolution" value="1000" units="1/cm"/>
+          <inkml:channelProperty channel="Y" name="resolution" value="1000" units="1/cm"/>
+        </inkml:channelProperties>
+      </inkml:inkSource>
+      <inkml:timestamp xml:id="ts0" timeString="2026-03-22T06:26:21.709"/>
+    </inkml:context>
+    <inkml:brush xml:id="br0">
+      <inkml:brushProperty name="width" value="0.3" units="cm"/>
+      <inkml:brushProperty name="height" value="0.6" units="cm"/>
+      <inkml:brushProperty name="color" value="#FFFC00"/>
+      <inkml:brushProperty name="tip" value="rectangle"/>
+      <inkml:brushProperty name="rasterOp" value="maskPen"/>
+      <inkml:brushProperty name="ignorePressure" value="1"/>
+    </inkml:brush>
+  </inkml:definitions>
+  <inkml:trace contextRef="#ctx0" brushRef="#br0">0 213,'15'14,"1"-1,0 0,1-1,0-1,25 12,103 36,-31-22,177 33,133-10,-203-43,1-9,255-24,-179-15,322-75,-203 13,633-121,-377 134,-501 71,326 25,-282 17,-153-18</inkml:trace>
+</inkml:ink>
+</file>
+
+<file path=ppt/ink/ink2.xml><?xml version="1.0" encoding="utf-8"?>
+<inkml:ink xmlns:inkml="http://www.w3.org/2003/InkML">
+  <inkml:definitions>
+    <inkml:context xml:id="ctx0">
+      <inkml:inkSource xml:id="inkSrc0">
+        <inkml:traceFormat>
+          <inkml:channel name="X" type="integer" min="-2.14748E9" max="2.14748E9" units="cm"/>
+          <inkml:channel name="Y" type="integer" min="-2.14748E9" max="2.14748E9" units="cm"/>
+        </inkml:traceFormat>
+        <inkml:channelProperties>
+          <inkml:channelProperty channel="X" name="resolution" value="1000" units="1/cm"/>
+          <inkml:channelProperty channel="Y" name="resolution" value="1000" units="1/cm"/>
+        </inkml:channelProperties>
+      </inkml:inkSource>
+      <inkml:timestamp xml:id="ts0" timeString="2026-03-22T06:26:22.326"/>
+    </inkml:context>
+    <inkml:brush xml:id="br0">
+      <inkml:brushProperty name="width" value="0.3" units="cm"/>
+      <inkml:brushProperty name="height" value="0.6" units="cm"/>
+      <inkml:brushProperty name="color" value="#FFFC00"/>
+      <inkml:brushProperty name="tip" value="rectangle"/>
+      <inkml:brushProperty name="rasterOp" value="maskPen"/>
+      <inkml:brushProperty name="ignorePressure" value="1"/>
+    </inkml:brush>
+  </inkml:definitions>
+  <inkml:trace contextRef="#ctx0" brushRef="#br0">0 0,'969'189,"-960"-187,1147 150,14-93,-1159-59,66 1,0-3,138-22,-203 21,0 0,0-1,0 0,21-11,-28 12,0 0,0 0,0-1,-1 1,1-1,-1 0,0 0,0-1,0 1,-1-1,0 0,4-7,4-16</inkml:trace>
+</inkml:ink>
+</file>
+
+<file path=ppt/ink/ink3.xml><?xml version="1.0" encoding="utf-8"?>
+<inkml:ink xmlns:inkml="http://www.w3.org/2003/InkML">
+  <inkml:definitions>
+    <inkml:context xml:id="ctx0">
+      <inkml:inkSource xml:id="inkSrc0">
+        <inkml:traceFormat>
+          <inkml:channel name="X" type="integer" min="-2.14748E9" max="2.14748E9" units="cm"/>
+          <inkml:channel name="Y" type="integer" min="-2.14748E9" max="2.14748E9" units="cm"/>
+        </inkml:traceFormat>
+        <inkml:channelProperties>
+          <inkml:channelProperty channel="X" name="resolution" value="1000" units="1/cm"/>
+          <inkml:channelProperty channel="Y" name="resolution" value="1000" units="1/cm"/>
+        </inkml:channelProperties>
+      </inkml:inkSource>
+      <inkml:timestamp xml:id="ts0" timeString="2026-03-22T06:26:23.648"/>
+    </inkml:context>
+    <inkml:brush xml:id="br0">
+      <inkml:brushProperty name="width" value="0.3" units="cm"/>
+      <inkml:brushProperty name="height" value="0.6" units="cm"/>
+      <inkml:brushProperty name="color" value="#FFFC00"/>
+      <inkml:brushProperty name="tip" value="rectangle"/>
+      <inkml:brushProperty name="rasterOp" value="maskPen"/>
+      <inkml:brushProperty name="ignorePressure" value="1"/>
+    </inkml:brush>
+  </inkml:definitions>
+  <inkml:trace contextRef="#ctx0" brushRef="#br0">1 1,'63'2,"118"20,-166-20,209 34,99 17,119 20,107 13,886 103,11-92,-1149-97,-237-4,-58 4,-1-1,1 1,-1 0,1 0,0-1,-1 1,1-1,-1 0,1 1,-1-1,0 0,1 0,-1 0,2-1,-2 1,-1 0,1 0,-1 0,0 0,1 0,-1 0,0 0,0 0,1 0,-1 0,0 0,0 0,0 0,0 0,0-1,-1 1,1 0,0-1,-9-23</inkml:trace>
+</inkml:ink>
+</file>
+
+<file path=ppt/ink/ink4.xml><?xml version="1.0" encoding="utf-8"?>
+<inkml:ink xmlns:inkml="http://www.w3.org/2003/InkML">
+  <inkml:definitions>
+    <inkml:context xml:id="ctx0">
+      <inkml:inkSource xml:id="inkSrc0">
+        <inkml:traceFormat>
+          <inkml:channel name="X" type="integer" min="-2.14748E9" max="2.14748E9" units="cm"/>
+          <inkml:channel name="Y" type="integer" min="-2.14748E9" max="2.14748E9" units="cm"/>
+        </inkml:traceFormat>
+        <inkml:channelProperties>
+          <inkml:channelProperty channel="X" name="resolution" value="1000" units="1/cm"/>
+          <inkml:channelProperty channel="Y" name="resolution" value="1000" units="1/cm"/>
+        </inkml:channelProperties>
+      </inkml:inkSource>
+      <inkml:timestamp xml:id="ts0" timeString="2026-03-22T06:26:24.546"/>
+    </inkml:context>
+    <inkml:brush xml:id="br0">
+      <inkml:brushProperty name="width" value="0.3" units="cm"/>
+      <inkml:brushProperty name="height" value="0.6" units="cm"/>
+      <inkml:brushProperty name="color" value="#FFFC00"/>
+      <inkml:brushProperty name="tip" value="rectangle"/>
+      <inkml:brushProperty name="rasterOp" value="maskPen"/>
+      <inkml:brushProperty name="ignorePressure" value="1"/>
+    </inkml:brush>
+  </inkml:definitions>
+  <inkml:trace contextRef="#ctx0" brushRef="#br0">0 47,'160'0,"21"0,85 2,711 20,63 1,-822-20,876 0,-1050-4,82-11,-113 10,0-1,0-1,0 0,-1-1,0 0,0-1,0 0,-1 0,0-2,14-10,-3-2</inkml:trace>
+</inkml:ink>
 </file>
 
 <file path=ppt/slideLayouts/slideLayout1.xml><?xml version="1.0" encoding="utf-8"?>
@@ -279,7 +403,7 @@
           <a:p>
             <a:fld id="{149D4704-9F6E-43D2-B3DF-484A4E6A9E7A}" type="datetimeFigureOut">
               <a:rPr lang="es-GT" smtClean="0"/>
-              <a:t>11/03/2026</a:t>
+              <a:t>22/03/2026</a:t>
             </a:fld>
             <a:endParaRPr lang="es-GT"/>
           </a:p>
@@ -479,7 +603,7 @@
           <a:p>
             <a:fld id="{149D4704-9F6E-43D2-B3DF-484A4E6A9E7A}" type="datetimeFigureOut">
               <a:rPr lang="es-GT" smtClean="0"/>
-              <a:t>11/03/2026</a:t>
+              <a:t>22/03/2026</a:t>
             </a:fld>
             <a:endParaRPr lang="es-GT"/>
           </a:p>
@@ -689,7 +813,7 @@
           <a:p>
             <a:fld id="{149D4704-9F6E-43D2-B3DF-484A4E6A9E7A}" type="datetimeFigureOut">
               <a:rPr lang="es-GT" smtClean="0"/>
-              <a:t>11/03/2026</a:t>
+              <a:t>22/03/2026</a:t>
             </a:fld>
             <a:endParaRPr lang="es-GT"/>
           </a:p>
@@ -889,7 +1013,7 @@
           <a:p>
             <a:fld id="{149D4704-9F6E-43D2-B3DF-484A4E6A9E7A}" type="datetimeFigureOut">
               <a:rPr lang="es-GT" smtClean="0"/>
-              <a:t>11/03/2026</a:t>
+              <a:t>22/03/2026</a:t>
             </a:fld>
             <a:endParaRPr lang="es-GT"/>
           </a:p>
@@ -1165,7 +1289,7 @@
           <a:p>
             <a:fld id="{149D4704-9F6E-43D2-B3DF-484A4E6A9E7A}" type="datetimeFigureOut">
               <a:rPr lang="es-GT" smtClean="0"/>
-              <a:t>11/03/2026</a:t>
+              <a:t>22/03/2026</a:t>
             </a:fld>
             <a:endParaRPr lang="es-GT"/>
           </a:p>
@@ -1433,7 +1557,7 @@
           <a:p>
             <a:fld id="{149D4704-9F6E-43D2-B3DF-484A4E6A9E7A}" type="datetimeFigureOut">
               <a:rPr lang="es-GT" smtClean="0"/>
-              <a:t>11/03/2026</a:t>
+              <a:t>22/03/2026</a:t>
             </a:fld>
             <a:endParaRPr lang="es-GT"/>
           </a:p>
@@ -1848,7 +1972,7 @@
           <a:p>
             <a:fld id="{149D4704-9F6E-43D2-B3DF-484A4E6A9E7A}" type="datetimeFigureOut">
               <a:rPr lang="es-GT" smtClean="0"/>
-              <a:t>11/03/2026</a:t>
+              <a:t>22/03/2026</a:t>
             </a:fld>
             <a:endParaRPr lang="es-GT"/>
           </a:p>
@@ -1990,7 +2114,7 @@
           <a:p>
             <a:fld id="{149D4704-9F6E-43D2-B3DF-484A4E6A9E7A}" type="datetimeFigureOut">
               <a:rPr lang="es-GT" smtClean="0"/>
-              <a:t>11/03/2026</a:t>
+              <a:t>22/03/2026</a:t>
             </a:fld>
             <a:endParaRPr lang="es-GT"/>
           </a:p>
@@ -2103,7 +2227,7 @@
           <a:p>
             <a:fld id="{149D4704-9F6E-43D2-B3DF-484A4E6A9E7A}" type="datetimeFigureOut">
               <a:rPr lang="es-GT" smtClean="0"/>
-              <a:t>11/03/2026</a:t>
+              <a:t>22/03/2026</a:t>
             </a:fld>
             <a:endParaRPr lang="es-GT"/>
           </a:p>
@@ -2416,7 +2540,7 @@
           <a:p>
             <a:fld id="{149D4704-9F6E-43D2-B3DF-484A4E6A9E7A}" type="datetimeFigureOut">
               <a:rPr lang="es-GT" smtClean="0"/>
-              <a:t>11/03/2026</a:t>
+              <a:t>22/03/2026</a:t>
             </a:fld>
             <a:endParaRPr lang="es-GT"/>
           </a:p>
@@ -2705,7 +2829,7 @@
           <a:p>
             <a:fld id="{149D4704-9F6E-43D2-B3DF-484A4E6A9E7A}" type="datetimeFigureOut">
               <a:rPr lang="es-GT" smtClean="0"/>
-              <a:t>11/03/2026</a:t>
+              <a:t>22/03/2026</a:t>
             </a:fld>
             <a:endParaRPr lang="es-GT"/>
           </a:p>
@@ -2948,7 +3072,7 @@
           <a:p>
             <a:fld id="{149D4704-9F6E-43D2-B3DF-484A4E6A9E7A}" type="datetimeFigureOut">
               <a:rPr lang="es-GT" smtClean="0"/>
-              <a:t>11/03/2026</a:t>
+              <a:t>22/03/2026</a:t>
             </a:fld>
             <a:endParaRPr lang="es-GT"/>
           </a:p>
@@ -4405,6 +4529,499 @@
       </p:grpSpPr>
       <p:sp>
         <p:nvSpPr>
+          <p:cNvPr id="4" name="Título 3">
+            <a:extLst>
+              <a:ext uri="{FF2B5EF4-FFF2-40B4-BE49-F238E27FC236}">
+                <a16:creationId xmlns:a16="http://schemas.microsoft.com/office/drawing/2014/main" id="{EC6C9D70-E596-0D80-AF5A-8A0CBA0660AA}"/>
+              </a:ext>
+            </a:extLst>
+          </p:cNvPr>
+          <p:cNvSpPr>
+            <a:spLocks noGrp="1"/>
+          </p:cNvSpPr>
+          <p:nvPr>
+            <p:ph type="title"/>
+          </p:nvPr>
+        </p:nvSpPr>
+        <p:spPr/>
+        <p:txBody>
+          <a:bodyPr/>
+          <a:lstStyle/>
+          <a:p>
+            <a:endParaRPr lang="es-GT"/>
+          </a:p>
+        </p:txBody>
+      </p:sp>
+      <p:pic>
+        <p:nvPicPr>
+          <p:cNvPr id="6" name="Imagen 5">
+            <a:extLst>
+              <a:ext uri="{FF2B5EF4-FFF2-40B4-BE49-F238E27FC236}">
+                <a16:creationId xmlns:a16="http://schemas.microsoft.com/office/drawing/2014/main" id="{6BD406EC-9E93-E72E-2C77-A64E152E8F5E}"/>
+              </a:ext>
+            </a:extLst>
+          </p:cNvPr>
+          <p:cNvPicPr>
+            <a:picLocks noChangeAspect="1"/>
+          </p:cNvPicPr>
+          <p:nvPr/>
+        </p:nvPicPr>
+        <p:blipFill>
+          <a:blip r:embed="rId2"/>
+          <a:stretch>
+            <a:fillRect/>
+          </a:stretch>
+        </p:blipFill>
+        <p:spPr>
+          <a:xfrm>
+            <a:off x="2380731" y="971207"/>
+            <a:ext cx="7430537" cy="4915586"/>
+          </a:xfrm>
+          <a:prstGeom prst="rect">
+            <a:avLst/>
+          </a:prstGeom>
+        </p:spPr>
+      </p:pic>
+    </p:spTree>
+    <p:extLst>
+      <p:ext uri="{BB962C8B-B14F-4D97-AF65-F5344CB8AC3E}">
+        <p14:creationId xmlns:p14="http://schemas.microsoft.com/office/powerpoint/2010/main" val="2656104024"/>
+      </p:ext>
+    </p:extLst>
+  </p:cSld>
+  <p:clrMapOvr>
+    <a:masterClrMapping/>
+  </p:clrMapOvr>
+</p:sld>
+</file>
+
+<file path=ppt/slides/slide24.xml><?xml version="1.0" encoding="utf-8"?>
+<p:sld xmlns:a="http://schemas.openxmlformats.org/drawingml/2006/main" xmlns:r="http://schemas.openxmlformats.org/officeDocument/2006/relationships" xmlns:p="http://schemas.openxmlformats.org/presentationml/2006/main">
+  <p:cSld>
+    <p:spTree>
+      <p:nvGrpSpPr>
+        <p:cNvPr id="1" name=""/>
+        <p:cNvGrpSpPr/>
+        <p:nvPr/>
+      </p:nvGrpSpPr>
+      <p:grpSpPr>
+        <a:xfrm>
+          <a:off x="0" y="0"/>
+          <a:ext cx="0" cy="0"/>
+          <a:chOff x="0" y="0"/>
+          <a:chExt cx="0" cy="0"/>
+        </a:xfrm>
+      </p:grpSpPr>
+      <p:sp>
+        <p:nvSpPr>
+          <p:cNvPr id="2" name="Título 1">
+            <a:extLst>
+              <a:ext uri="{FF2B5EF4-FFF2-40B4-BE49-F238E27FC236}">
+                <a16:creationId xmlns:a16="http://schemas.microsoft.com/office/drawing/2014/main" id="{780F7C3F-C33D-C37D-9DED-704CBE1D0865}"/>
+              </a:ext>
+            </a:extLst>
+          </p:cNvPr>
+          <p:cNvSpPr>
+            <a:spLocks noGrp="1"/>
+          </p:cNvSpPr>
+          <p:nvPr>
+            <p:ph type="title"/>
+          </p:nvPr>
+        </p:nvSpPr>
+        <p:spPr/>
+        <p:txBody>
+          <a:bodyPr/>
+          <a:lstStyle/>
+          <a:p>
+            <a:endParaRPr lang="es-GT"/>
+          </a:p>
+        </p:txBody>
+      </p:sp>
+      <p:pic>
+        <p:nvPicPr>
+          <p:cNvPr id="4" name="Imagen 3">
+            <a:extLst>
+              <a:ext uri="{FF2B5EF4-FFF2-40B4-BE49-F238E27FC236}">
+                <a16:creationId xmlns:a16="http://schemas.microsoft.com/office/drawing/2014/main" id="{233A9B55-0C90-6CB2-60D9-865DB43E0AB2}"/>
+              </a:ext>
+            </a:extLst>
+          </p:cNvPr>
+          <p:cNvPicPr>
+            <a:picLocks noChangeAspect="1"/>
+          </p:cNvPicPr>
+          <p:nvPr/>
+        </p:nvPicPr>
+        <p:blipFill>
+          <a:blip r:embed="rId2"/>
+          <a:stretch>
+            <a:fillRect/>
+          </a:stretch>
+        </p:blipFill>
+        <p:spPr>
+          <a:xfrm>
+            <a:off x="2366442" y="971207"/>
+            <a:ext cx="7459116" cy="4915586"/>
+          </a:xfrm>
+          <a:prstGeom prst="rect">
+            <a:avLst/>
+          </a:prstGeom>
+        </p:spPr>
+      </p:pic>
+      <mc:AlternateContent xmlns:mc="http://schemas.openxmlformats.org/markup-compatibility/2006">
+        <mc:Choice xmlns:p14="http://schemas.microsoft.com/office/powerpoint/2010/main" Requires="p14">
+          <p:contentPart p14:bwMode="auto" r:id="rId3">
+            <p14:nvContentPartPr>
+              <p14:cNvPr id="5" name="Entrada de lápiz 4">
+                <a:extLst>
+                  <a:ext uri="{FF2B5EF4-FFF2-40B4-BE49-F238E27FC236}">
+                    <a16:creationId xmlns:a16="http://schemas.microsoft.com/office/drawing/2014/main" id="{3683741B-B837-66D2-4B9B-FEA7F7491394}"/>
+                  </a:ext>
+                </a:extLst>
+              </p14:cNvPr>
+              <p14:cNvContentPartPr/>
+              <p14:nvPr/>
+            </p14:nvContentPartPr>
+            <p14:xfrm>
+              <a:off x="6969688" y="2936873"/>
+              <a:ext cx="2169000" cy="198000"/>
+            </p14:xfrm>
+          </p:contentPart>
+        </mc:Choice>
+        <mc:Fallback>
+          <p:pic>
+            <p:nvPicPr>
+              <p:cNvPr id="5" name="Entrada de lápiz 4">
+                <a:extLst>
+                  <a:ext uri="{FF2B5EF4-FFF2-40B4-BE49-F238E27FC236}">
+                    <a16:creationId xmlns:a16="http://schemas.microsoft.com/office/drawing/2014/main" id="{3683741B-B837-66D2-4B9B-FEA7F7491394}"/>
+                  </a:ext>
+                </a:extLst>
+              </p:cNvPr>
+              <p:cNvPicPr/>
+              <p:nvPr/>
+            </p:nvPicPr>
+            <p:blipFill>
+              <a:blip r:embed="rId4"/>
+              <a:stretch>
+                <a:fillRect/>
+              </a:stretch>
+            </p:blipFill>
+            <p:spPr>
+              <a:xfrm>
+                <a:off x="6915688" y="2829233"/>
+                <a:ext cx="2276640" cy="413640"/>
+              </a:xfrm>
+              <a:prstGeom prst="rect">
+                <a:avLst/>
+              </a:prstGeom>
+            </p:spPr>
+          </p:pic>
+        </mc:Fallback>
+      </mc:AlternateContent>
+      <mc:AlternateContent xmlns:mc="http://schemas.openxmlformats.org/markup-compatibility/2006">
+        <mc:Choice xmlns:p14="http://schemas.microsoft.com/office/powerpoint/2010/main" Requires="p14">
+          <p:contentPart p14:bwMode="auto" r:id="rId5">
+            <p14:nvContentPartPr>
+              <p14:cNvPr id="6" name="Entrada de lápiz 5">
+                <a:extLst>
+                  <a:ext uri="{FF2B5EF4-FFF2-40B4-BE49-F238E27FC236}">
+                    <a16:creationId xmlns:a16="http://schemas.microsoft.com/office/drawing/2014/main" id="{E6F5ED1F-821B-C418-0A6E-7493F485347F}"/>
+                  </a:ext>
+                </a:extLst>
+              </p14:cNvPr>
+              <p14:cNvContentPartPr/>
+              <p14:nvPr/>
+            </p14:nvContentPartPr>
+            <p14:xfrm>
+              <a:off x="7268128" y="3423953"/>
+              <a:ext cx="1380600" cy="145440"/>
+            </p14:xfrm>
+          </p:contentPart>
+        </mc:Choice>
+        <mc:Fallback>
+          <p:pic>
+            <p:nvPicPr>
+              <p:cNvPr id="6" name="Entrada de lápiz 5">
+                <a:extLst>
+                  <a:ext uri="{FF2B5EF4-FFF2-40B4-BE49-F238E27FC236}">
+                    <a16:creationId xmlns:a16="http://schemas.microsoft.com/office/drawing/2014/main" id="{E6F5ED1F-821B-C418-0A6E-7493F485347F}"/>
+                  </a:ext>
+                </a:extLst>
+              </p:cNvPr>
+              <p:cNvPicPr/>
+              <p:nvPr/>
+            </p:nvPicPr>
+            <p:blipFill>
+              <a:blip r:embed="rId6"/>
+              <a:stretch>
+                <a:fillRect/>
+              </a:stretch>
+            </p:blipFill>
+            <p:spPr>
+              <a:xfrm>
+                <a:off x="7214128" y="3315953"/>
+                <a:ext cx="1488240" cy="361080"/>
+              </a:xfrm>
+              <a:prstGeom prst="rect">
+                <a:avLst/>
+              </a:prstGeom>
+            </p:spPr>
+          </p:pic>
+        </mc:Fallback>
+      </mc:AlternateContent>
+      <mc:AlternateContent xmlns:mc="http://schemas.openxmlformats.org/markup-compatibility/2006">
+        <mc:Choice xmlns:p14="http://schemas.microsoft.com/office/powerpoint/2010/main" Requires="p14">
+          <p:contentPart p14:bwMode="auto" r:id="rId7">
+            <p14:nvContentPartPr>
+              <p14:cNvPr id="7" name="Entrada de lápiz 6">
+                <a:extLst>
+                  <a:ext uri="{FF2B5EF4-FFF2-40B4-BE49-F238E27FC236}">
+                    <a16:creationId xmlns:a16="http://schemas.microsoft.com/office/drawing/2014/main" id="{7FDAD511-2D57-678A-F209-895B606A43D5}"/>
+                  </a:ext>
+                </a:extLst>
+              </p14:cNvPr>
+              <p14:cNvContentPartPr/>
+              <p14:nvPr/>
+            </p14:nvContentPartPr>
+            <p14:xfrm>
+              <a:off x="5336728" y="3741113"/>
+              <a:ext cx="1823040" cy="201960"/>
+            </p14:xfrm>
+          </p:contentPart>
+        </mc:Choice>
+        <mc:Fallback>
+          <p:pic>
+            <p:nvPicPr>
+              <p:cNvPr id="7" name="Entrada de lápiz 6">
+                <a:extLst>
+                  <a:ext uri="{FF2B5EF4-FFF2-40B4-BE49-F238E27FC236}">
+                    <a16:creationId xmlns:a16="http://schemas.microsoft.com/office/drawing/2014/main" id="{7FDAD511-2D57-678A-F209-895B606A43D5}"/>
+                  </a:ext>
+                </a:extLst>
+              </p:cNvPr>
+              <p:cNvPicPr/>
+              <p:nvPr/>
+            </p:nvPicPr>
+            <p:blipFill>
+              <a:blip r:embed="rId8"/>
+              <a:stretch>
+                <a:fillRect/>
+              </a:stretch>
+            </p:blipFill>
+            <p:spPr>
+              <a:xfrm>
+                <a:off x="5283088" y="3633473"/>
+                <a:ext cx="1930680" cy="417600"/>
+              </a:xfrm>
+              <a:prstGeom prst="rect">
+                <a:avLst/>
+              </a:prstGeom>
+            </p:spPr>
+          </p:pic>
+        </mc:Fallback>
+      </mc:AlternateContent>
+      <mc:AlternateContent xmlns:mc="http://schemas.openxmlformats.org/markup-compatibility/2006">
+        <mc:Choice xmlns:p14="http://schemas.microsoft.com/office/powerpoint/2010/main" Requires="p14">
+          <p:contentPart p14:bwMode="auto" r:id="rId9">
+            <p14:nvContentPartPr>
+              <p14:cNvPr id="8" name="Entrada de lápiz 7">
+                <a:extLst>
+                  <a:ext uri="{FF2B5EF4-FFF2-40B4-BE49-F238E27FC236}">
+                    <a16:creationId xmlns:a16="http://schemas.microsoft.com/office/drawing/2014/main" id="{72E4F749-C98A-FCFE-0D93-8A5C002DD1B5}"/>
+                  </a:ext>
+                </a:extLst>
+              </p14:cNvPr>
+              <p14:cNvContentPartPr/>
+              <p14:nvPr/>
+            </p14:nvContentPartPr>
+            <p14:xfrm>
+              <a:off x="5196688" y="3323153"/>
+              <a:ext cx="1539000" cy="36360"/>
+            </p14:xfrm>
+          </p:contentPart>
+        </mc:Choice>
+        <mc:Fallback>
+          <p:pic>
+            <p:nvPicPr>
+              <p:cNvPr id="8" name="Entrada de lápiz 7">
+                <a:extLst>
+                  <a:ext uri="{FF2B5EF4-FFF2-40B4-BE49-F238E27FC236}">
+                    <a16:creationId xmlns:a16="http://schemas.microsoft.com/office/drawing/2014/main" id="{72E4F749-C98A-FCFE-0D93-8A5C002DD1B5}"/>
+                  </a:ext>
+                </a:extLst>
+              </p:cNvPr>
+              <p:cNvPicPr/>
+              <p:nvPr/>
+            </p:nvPicPr>
+            <p:blipFill>
+              <a:blip r:embed="rId10"/>
+              <a:stretch>
+                <a:fillRect/>
+              </a:stretch>
+            </p:blipFill>
+            <p:spPr>
+              <a:xfrm>
+                <a:off x="5142688" y="3215153"/>
+                <a:ext cx="1646640" cy="252000"/>
+              </a:xfrm>
+              <a:prstGeom prst="rect">
+                <a:avLst/>
+              </a:prstGeom>
+            </p:spPr>
+          </p:pic>
+        </mc:Fallback>
+      </mc:AlternateContent>
+      <p:pic>
+        <p:nvPicPr>
+          <p:cNvPr id="10" name="Imagen 9">
+            <a:extLst>
+              <a:ext uri="{FF2B5EF4-FFF2-40B4-BE49-F238E27FC236}">
+                <a16:creationId xmlns:a16="http://schemas.microsoft.com/office/drawing/2014/main" id="{4D9E7F59-D377-C33C-EA94-A77653D57BC1}"/>
+              </a:ext>
+            </a:extLst>
+          </p:cNvPr>
+          <p:cNvPicPr>
+            <a:picLocks noChangeAspect="1"/>
+          </p:cNvPicPr>
+          <p:nvPr/>
+        </p:nvPicPr>
+        <p:blipFill>
+          <a:blip r:embed="rId11"/>
+          <a:stretch>
+            <a:fillRect/>
+          </a:stretch>
+        </p:blipFill>
+        <p:spPr>
+          <a:xfrm>
+            <a:off x="8648728" y="5342070"/>
+            <a:ext cx="2753109" cy="847843"/>
+          </a:xfrm>
+          <a:prstGeom prst="rect">
+            <a:avLst/>
+          </a:prstGeom>
+        </p:spPr>
+      </p:pic>
+    </p:spTree>
+    <p:extLst>
+      <p:ext uri="{BB962C8B-B14F-4D97-AF65-F5344CB8AC3E}">
+        <p14:creationId xmlns:p14="http://schemas.microsoft.com/office/powerpoint/2010/main" val="3407899864"/>
+      </p:ext>
+    </p:extLst>
+  </p:cSld>
+  <p:clrMapOvr>
+    <a:masterClrMapping/>
+  </p:clrMapOvr>
+</p:sld>
+</file>
+
+<file path=ppt/slides/slide25.xml><?xml version="1.0" encoding="utf-8"?>
+<p:sld xmlns:a="http://schemas.openxmlformats.org/drawingml/2006/main" xmlns:r="http://schemas.openxmlformats.org/officeDocument/2006/relationships" xmlns:p="http://schemas.openxmlformats.org/presentationml/2006/main">
+  <p:cSld>
+    <p:spTree>
+      <p:nvGrpSpPr>
+        <p:cNvPr id="1" name=""/>
+        <p:cNvGrpSpPr/>
+        <p:nvPr/>
+      </p:nvGrpSpPr>
+      <p:grpSpPr>
+        <a:xfrm>
+          <a:off x="0" y="0"/>
+          <a:ext cx="0" cy="0"/>
+          <a:chOff x="0" y="0"/>
+          <a:chExt cx="0" cy="0"/>
+        </a:xfrm>
+      </p:grpSpPr>
+      <p:sp>
+        <p:nvSpPr>
+          <p:cNvPr id="2" name="Título 1">
+            <a:extLst>
+              <a:ext uri="{FF2B5EF4-FFF2-40B4-BE49-F238E27FC236}">
+                <a16:creationId xmlns:a16="http://schemas.microsoft.com/office/drawing/2014/main" id="{89EE0D1C-2158-9550-0944-E5A3BA1BD1B2}"/>
+              </a:ext>
+            </a:extLst>
+          </p:cNvPr>
+          <p:cNvSpPr>
+            <a:spLocks noGrp="1"/>
+          </p:cNvSpPr>
+          <p:nvPr>
+            <p:ph type="title"/>
+          </p:nvPr>
+        </p:nvSpPr>
+        <p:spPr/>
+        <p:txBody>
+          <a:bodyPr/>
+          <a:lstStyle/>
+          <a:p>
+            <a:r>
+              <a:rPr lang="es-MX" dirty="0"/>
+              <a:t>AHORA TODO EL DIBUJO SE SELECCIONA TODO</a:t>
+            </a:r>
+            <a:endParaRPr lang="es-GT" dirty="0"/>
+          </a:p>
+        </p:txBody>
+      </p:sp>
+      <p:pic>
+        <p:nvPicPr>
+          <p:cNvPr id="4" name="Imagen 3">
+            <a:extLst>
+              <a:ext uri="{FF2B5EF4-FFF2-40B4-BE49-F238E27FC236}">
+                <a16:creationId xmlns:a16="http://schemas.microsoft.com/office/drawing/2014/main" id="{3C5E98E7-E2AA-4A34-000F-D56F8B529998}"/>
+              </a:ext>
+            </a:extLst>
+          </p:cNvPr>
+          <p:cNvPicPr>
+            <a:picLocks noChangeAspect="1"/>
+          </p:cNvPicPr>
+          <p:nvPr/>
+        </p:nvPicPr>
+        <p:blipFill>
+          <a:blip r:embed="rId2"/>
+          <a:stretch>
+            <a:fillRect/>
+          </a:stretch>
+        </p:blipFill>
+        <p:spPr>
+          <a:xfrm>
+            <a:off x="3266680" y="1376076"/>
+            <a:ext cx="5658640" cy="4105848"/>
+          </a:xfrm>
+          <a:prstGeom prst="rect">
+            <a:avLst/>
+          </a:prstGeom>
+        </p:spPr>
+      </p:pic>
+    </p:spTree>
+    <p:extLst>
+      <p:ext uri="{BB962C8B-B14F-4D97-AF65-F5344CB8AC3E}">
+        <p14:creationId xmlns:p14="http://schemas.microsoft.com/office/powerpoint/2010/main" val="3120023892"/>
+      </p:ext>
+    </p:extLst>
+  </p:cSld>
+  <p:clrMapOvr>
+    <a:masterClrMapping/>
+  </p:clrMapOvr>
+</p:sld>
+</file>
+
+<file path=ppt/slides/slide26.xml><?xml version="1.0" encoding="utf-8"?>
+<p:sld xmlns:a="http://schemas.openxmlformats.org/drawingml/2006/main" xmlns:r="http://schemas.openxmlformats.org/officeDocument/2006/relationships" xmlns:p="http://schemas.openxmlformats.org/presentationml/2006/main">
+  <p:cSld>
+    <p:spTree>
+      <p:nvGrpSpPr>
+        <p:cNvPr id="1" name=""/>
+        <p:cNvGrpSpPr/>
+        <p:nvPr/>
+      </p:nvGrpSpPr>
+      <p:grpSpPr>
+        <a:xfrm>
+          <a:off x="0" y="0"/>
+          <a:ext cx="0" cy="0"/>
+          <a:chOff x="0" y="0"/>
+          <a:chExt cx="0" cy="0"/>
+        </a:xfrm>
+      </p:grpSpPr>
+      <p:sp>
+        <p:nvSpPr>
           <p:cNvPr id="2" name="Título 1">
             <a:extLst>
               <a:ext uri="{FF2B5EF4-FFF2-40B4-BE49-F238E27FC236}">
@@ -4441,7 +5058,7 @@
 </p:sld>
 </file>
 
-<file path=ppt/slides/slide24.xml><?xml version="1.0" encoding="utf-8"?>
+<file path=ppt/slides/slide27.xml><?xml version="1.0" encoding="utf-8"?>
 <p:sld xmlns:a="http://schemas.openxmlformats.org/drawingml/2006/main" xmlns:r="http://schemas.openxmlformats.org/officeDocument/2006/relationships" xmlns:p="http://schemas.openxmlformats.org/presentationml/2006/main">
   <p:cSld>
     <p:spTree>

--- a/AUTOCAD INTECAP/apuntes powerpoint/CLASE BLOQUES 11 MARZO.pptx
+++ b/AUTOCAD INTECAP/apuntes powerpoint/CLASE BLOQUES 11 MARZO.pptx
@@ -32,6 +32,33 @@
     <p:sldId id="282" r:id="rId26"/>
     <p:sldId id="265" r:id="rId27"/>
     <p:sldId id="259" r:id="rId28"/>
+    <p:sldId id="283" r:id="rId29"/>
+    <p:sldId id="284" r:id="rId30"/>
+    <p:sldId id="285" r:id="rId31"/>
+    <p:sldId id="286" r:id="rId32"/>
+    <p:sldId id="288" r:id="rId33"/>
+    <p:sldId id="289" r:id="rId34"/>
+    <p:sldId id="290" r:id="rId35"/>
+    <p:sldId id="291" r:id="rId36"/>
+    <p:sldId id="292" r:id="rId37"/>
+    <p:sldId id="293" r:id="rId38"/>
+    <p:sldId id="294" r:id="rId39"/>
+    <p:sldId id="295" r:id="rId40"/>
+    <p:sldId id="296" r:id="rId41"/>
+    <p:sldId id="297" r:id="rId42"/>
+    <p:sldId id="298" r:id="rId43"/>
+    <p:sldId id="299" r:id="rId44"/>
+    <p:sldId id="300" r:id="rId45"/>
+    <p:sldId id="301" r:id="rId46"/>
+    <p:sldId id="302" r:id="rId47"/>
+    <p:sldId id="303" r:id="rId48"/>
+    <p:sldId id="304" r:id="rId49"/>
+    <p:sldId id="305" r:id="rId50"/>
+    <p:sldId id="306" r:id="rId51"/>
+    <p:sldId id="307" r:id="rId52"/>
+    <p:sldId id="308" r:id="rId53"/>
+    <p:sldId id="309" r:id="rId54"/>
+    <p:sldId id="287" r:id="rId55"/>
   </p:sldIdLst>
   <p:sldSz cx="12192000" cy="6858000"/>
   <p:notesSz cx="6858000" cy="9144000"/>
@@ -4667,8 +4694,8 @@
           </a:prstGeom>
         </p:spPr>
       </p:pic>
-      <mc:AlternateContent xmlns:mc="http://schemas.openxmlformats.org/markup-compatibility/2006">
-        <mc:Choice xmlns:p14="http://schemas.microsoft.com/office/powerpoint/2010/main" Requires="p14">
+      <mc:AlternateContent xmlns:mc="http://schemas.openxmlformats.org/markup-compatibility/2006" xmlns:p14="http://schemas.microsoft.com/office/powerpoint/2010/main">
+        <mc:Choice Requires="p14">
           <p:contentPart p14:bwMode="auto" r:id="rId3">
             <p14:nvContentPartPr>
               <p14:cNvPr id="5" name="Entrada de lápiz 4">
@@ -4687,7 +4714,7 @@
             </p14:xfrm>
           </p:contentPart>
         </mc:Choice>
-        <mc:Fallback>
+        <mc:Fallback xmlns="">
           <p:pic>
             <p:nvPicPr>
               <p:cNvPr id="5" name="Entrada de lápiz 4">
@@ -4718,8 +4745,8 @@
           </p:pic>
         </mc:Fallback>
       </mc:AlternateContent>
-      <mc:AlternateContent xmlns:mc="http://schemas.openxmlformats.org/markup-compatibility/2006">
-        <mc:Choice xmlns:p14="http://schemas.microsoft.com/office/powerpoint/2010/main" Requires="p14">
+      <mc:AlternateContent xmlns:mc="http://schemas.openxmlformats.org/markup-compatibility/2006" xmlns:p14="http://schemas.microsoft.com/office/powerpoint/2010/main">
+        <mc:Choice Requires="p14">
           <p:contentPart p14:bwMode="auto" r:id="rId5">
             <p14:nvContentPartPr>
               <p14:cNvPr id="6" name="Entrada de lápiz 5">
@@ -4738,7 +4765,7 @@
             </p14:xfrm>
           </p:contentPart>
         </mc:Choice>
-        <mc:Fallback>
+        <mc:Fallback xmlns="">
           <p:pic>
             <p:nvPicPr>
               <p:cNvPr id="6" name="Entrada de lápiz 5">
@@ -4769,8 +4796,8 @@
           </p:pic>
         </mc:Fallback>
       </mc:AlternateContent>
-      <mc:AlternateContent xmlns:mc="http://schemas.openxmlformats.org/markup-compatibility/2006">
-        <mc:Choice xmlns:p14="http://schemas.microsoft.com/office/powerpoint/2010/main" Requires="p14">
+      <mc:AlternateContent xmlns:mc="http://schemas.openxmlformats.org/markup-compatibility/2006" xmlns:p14="http://schemas.microsoft.com/office/powerpoint/2010/main">
+        <mc:Choice Requires="p14">
           <p:contentPart p14:bwMode="auto" r:id="rId7">
             <p14:nvContentPartPr>
               <p14:cNvPr id="7" name="Entrada de lápiz 6">
@@ -4789,7 +4816,7 @@
             </p14:xfrm>
           </p:contentPart>
         </mc:Choice>
-        <mc:Fallback>
+        <mc:Fallback xmlns="">
           <p:pic>
             <p:nvPicPr>
               <p:cNvPr id="7" name="Entrada de lápiz 6">
@@ -4820,8 +4847,8 @@
           </p:pic>
         </mc:Fallback>
       </mc:AlternateContent>
-      <mc:AlternateContent xmlns:mc="http://schemas.openxmlformats.org/markup-compatibility/2006">
-        <mc:Choice xmlns:p14="http://schemas.microsoft.com/office/powerpoint/2010/main" Requires="p14">
+      <mc:AlternateContent xmlns:mc="http://schemas.openxmlformats.org/markup-compatibility/2006" xmlns:p14="http://schemas.microsoft.com/office/powerpoint/2010/main">
+        <mc:Choice Requires="p14">
           <p:contentPart p14:bwMode="auto" r:id="rId9">
             <p14:nvContentPartPr>
               <p14:cNvPr id="8" name="Entrada de lápiz 7">
@@ -4840,7 +4867,7 @@
             </p14:xfrm>
           </p:contentPart>
         </mc:Choice>
-        <mc:Fallback>
+        <mc:Fallback xmlns="">
           <p:pic>
             <p:nvPicPr>
               <p:cNvPr id="8" name="Entrada de lápiz 7">
@@ -5041,10 +5068,43 @@
           <a:bodyPr/>
           <a:lstStyle/>
           <a:p>
-            <a:endParaRPr lang="es-GT"/>
-          </a:p>
-        </p:txBody>
-      </p:sp>
+            <a:r>
+              <a:rPr lang="es-GT" dirty="0"/>
+              <a:t>pasar a una capa de muebles </a:t>
+            </a:r>
+          </a:p>
+        </p:txBody>
+      </p:sp>
+      <p:pic>
+        <p:nvPicPr>
+          <p:cNvPr id="6" name="Imagen 5">
+            <a:extLst>
+              <a:ext uri="{FF2B5EF4-FFF2-40B4-BE49-F238E27FC236}">
+                <a16:creationId xmlns:a16="http://schemas.microsoft.com/office/drawing/2014/main" id="{C6569C97-1CB9-BEED-31BB-C9927AEE597C}"/>
+              </a:ext>
+            </a:extLst>
+          </p:cNvPr>
+          <p:cNvPicPr>
+            <a:picLocks noChangeAspect="1"/>
+          </p:cNvPicPr>
+          <p:nvPr/>
+        </p:nvPicPr>
+        <p:blipFill>
+          <a:blip r:embed="rId2"/>
+          <a:stretch>
+            <a:fillRect/>
+          </a:stretch>
+        </p:blipFill>
+        <p:spPr>
+          <a:xfrm>
+            <a:off x="4828331" y="1507808"/>
+            <a:ext cx="3479050" cy="5167312"/>
+          </a:xfrm>
+          <a:prstGeom prst="rect">
+            <a:avLst/>
+          </a:prstGeom>
+        </p:spPr>
+      </p:pic>
     </p:spTree>
     <p:extLst>
       <p:ext uri="{BB962C8B-B14F-4D97-AF65-F5344CB8AC3E}">
@@ -5096,7 +5156,10 @@
           <a:bodyPr/>
           <a:lstStyle/>
           <a:p>
-            <a:endParaRPr lang="es-GT"/>
+            <a:r>
+              <a:rPr lang="es-GT" dirty="0"/>
+              <a:t>Tienen esa propiedad de adaptarse </a:t>
+            </a:r>
           </a:p>
         </p:txBody>
       </p:sp>
@@ -5104,6 +5167,179 @@
     <p:extLst>
       <p:ext uri="{BB962C8B-B14F-4D97-AF65-F5344CB8AC3E}">
         <p14:creationId xmlns:p14="http://schemas.microsoft.com/office/powerpoint/2010/main" val="3591443831"/>
+      </p:ext>
+    </p:extLst>
+  </p:cSld>
+  <p:clrMapOvr>
+    <a:masterClrMapping/>
+  </p:clrMapOvr>
+</p:sld>
+</file>
+
+<file path=ppt/slides/slide28.xml><?xml version="1.0" encoding="utf-8"?>
+<p:sld xmlns:a="http://schemas.openxmlformats.org/drawingml/2006/main" xmlns:r="http://schemas.openxmlformats.org/officeDocument/2006/relationships" xmlns:p="http://schemas.openxmlformats.org/presentationml/2006/main">
+  <p:cSld>
+    <p:spTree>
+      <p:nvGrpSpPr>
+        <p:cNvPr id="1" name=""/>
+        <p:cNvGrpSpPr/>
+        <p:nvPr/>
+      </p:nvGrpSpPr>
+      <p:grpSpPr>
+        <a:xfrm>
+          <a:off x="0" y="0"/>
+          <a:ext cx="0" cy="0"/>
+          <a:chOff x="0" y="0"/>
+          <a:chExt cx="0" cy="0"/>
+        </a:xfrm>
+      </p:grpSpPr>
+      <p:sp>
+        <p:nvSpPr>
+          <p:cNvPr id="2" name="Título 1">
+            <a:extLst>
+              <a:ext uri="{FF2B5EF4-FFF2-40B4-BE49-F238E27FC236}">
+                <a16:creationId xmlns:a16="http://schemas.microsoft.com/office/drawing/2014/main" id="{F93B2766-7B95-4A59-61C8-5AB9D2A420EC}"/>
+              </a:ext>
+            </a:extLst>
+          </p:cNvPr>
+          <p:cNvSpPr>
+            <a:spLocks noGrp="1"/>
+          </p:cNvSpPr>
+          <p:nvPr>
+            <p:ph type="title"/>
+          </p:nvPr>
+        </p:nvSpPr>
+        <p:spPr/>
+        <p:txBody>
+          <a:bodyPr/>
+          <a:lstStyle/>
+          <a:p>
+            <a:r>
+              <a:rPr lang="es-GT" dirty="0"/>
+              <a:t>Array, multiplicar un objeto </a:t>
+            </a:r>
+          </a:p>
+        </p:txBody>
+      </p:sp>
+      <p:pic>
+        <p:nvPicPr>
+          <p:cNvPr id="4" name="Imagen 3">
+            <a:extLst>
+              <a:ext uri="{FF2B5EF4-FFF2-40B4-BE49-F238E27FC236}">
+                <a16:creationId xmlns:a16="http://schemas.microsoft.com/office/drawing/2014/main" id="{42611827-2CE6-ADA1-BAC3-E69DF65FE7B6}"/>
+              </a:ext>
+            </a:extLst>
+          </p:cNvPr>
+          <p:cNvPicPr>
+            <a:picLocks noChangeAspect="1"/>
+          </p:cNvPicPr>
+          <p:nvPr/>
+        </p:nvPicPr>
+        <p:blipFill>
+          <a:blip r:embed="rId2"/>
+          <a:stretch>
+            <a:fillRect/>
+          </a:stretch>
+        </p:blipFill>
+        <p:spPr>
+          <a:xfrm>
+            <a:off x="1245017" y="1470074"/>
+            <a:ext cx="9476882" cy="4424290"/>
+          </a:xfrm>
+          <a:prstGeom prst="rect">
+            <a:avLst/>
+          </a:prstGeom>
+        </p:spPr>
+      </p:pic>
+    </p:spTree>
+    <p:extLst>
+      <p:ext uri="{BB962C8B-B14F-4D97-AF65-F5344CB8AC3E}">
+        <p14:creationId xmlns:p14="http://schemas.microsoft.com/office/powerpoint/2010/main" val="2931318483"/>
+      </p:ext>
+    </p:extLst>
+  </p:cSld>
+  <p:clrMapOvr>
+    <a:masterClrMapping/>
+  </p:clrMapOvr>
+</p:sld>
+</file>
+
+<file path=ppt/slides/slide29.xml><?xml version="1.0" encoding="utf-8"?>
+<p:sld xmlns:a="http://schemas.openxmlformats.org/drawingml/2006/main" xmlns:r="http://schemas.openxmlformats.org/officeDocument/2006/relationships" xmlns:p="http://schemas.openxmlformats.org/presentationml/2006/main">
+  <p:cSld>
+    <p:spTree>
+      <p:nvGrpSpPr>
+        <p:cNvPr id="1" name=""/>
+        <p:cNvGrpSpPr/>
+        <p:nvPr/>
+      </p:nvGrpSpPr>
+      <p:grpSpPr>
+        <a:xfrm>
+          <a:off x="0" y="0"/>
+          <a:ext cx="0" cy="0"/>
+          <a:chOff x="0" y="0"/>
+          <a:chExt cx="0" cy="0"/>
+        </a:xfrm>
+      </p:grpSpPr>
+      <p:sp>
+        <p:nvSpPr>
+          <p:cNvPr id="2" name="Título 1">
+            <a:extLst>
+              <a:ext uri="{FF2B5EF4-FFF2-40B4-BE49-F238E27FC236}">
+                <a16:creationId xmlns:a16="http://schemas.microsoft.com/office/drawing/2014/main" id="{D37832BE-7BE6-0BBE-CBB4-D786A28D41CE}"/>
+              </a:ext>
+            </a:extLst>
+          </p:cNvPr>
+          <p:cNvSpPr>
+            <a:spLocks noGrp="1"/>
+          </p:cNvSpPr>
+          <p:nvPr>
+            <p:ph type="title"/>
+          </p:nvPr>
+        </p:nvSpPr>
+        <p:spPr/>
+        <p:txBody>
+          <a:bodyPr/>
+          <a:lstStyle/>
+          <a:p>
+            <a:endParaRPr lang="es-GT"/>
+          </a:p>
+        </p:txBody>
+      </p:sp>
+      <p:pic>
+        <p:nvPicPr>
+          <p:cNvPr id="4" name="Imagen 3">
+            <a:extLst>
+              <a:ext uri="{FF2B5EF4-FFF2-40B4-BE49-F238E27FC236}">
+                <a16:creationId xmlns:a16="http://schemas.microsoft.com/office/drawing/2014/main" id="{44BFAC3D-4BAF-72F5-14C0-D01C6C72A754}"/>
+              </a:ext>
+            </a:extLst>
+          </p:cNvPr>
+          <p:cNvPicPr>
+            <a:picLocks noChangeAspect="1"/>
+          </p:cNvPicPr>
+          <p:nvPr/>
+        </p:nvPicPr>
+        <p:blipFill>
+          <a:blip r:embed="rId2"/>
+          <a:stretch>
+            <a:fillRect/>
+          </a:stretch>
+        </p:blipFill>
+        <p:spPr>
+          <a:xfrm>
+            <a:off x="2652232" y="1295102"/>
+            <a:ext cx="6887536" cy="4267796"/>
+          </a:xfrm>
+          <a:prstGeom prst="rect">
+            <a:avLst/>
+          </a:prstGeom>
+        </p:spPr>
+      </p:pic>
+    </p:spTree>
+    <p:extLst>
+      <p:ext uri="{BB962C8B-B14F-4D97-AF65-F5344CB8AC3E}">
+        <p14:creationId xmlns:p14="http://schemas.microsoft.com/office/powerpoint/2010/main" val="53185839"/>
       </p:ext>
     </p:extLst>
   </p:cSld>
@@ -5198,6 +5434,619 @@
 </p:sld>
 </file>
 
+<file path=ppt/slides/slide30.xml><?xml version="1.0" encoding="utf-8"?>
+<p:sld xmlns:a="http://schemas.openxmlformats.org/drawingml/2006/main" xmlns:r="http://schemas.openxmlformats.org/officeDocument/2006/relationships" xmlns:p="http://schemas.openxmlformats.org/presentationml/2006/main">
+  <p:cSld>
+    <p:spTree>
+      <p:nvGrpSpPr>
+        <p:cNvPr id="1" name=""/>
+        <p:cNvGrpSpPr/>
+        <p:nvPr/>
+      </p:nvGrpSpPr>
+      <p:grpSpPr>
+        <a:xfrm>
+          <a:off x="0" y="0"/>
+          <a:ext cx="0" cy="0"/>
+          <a:chOff x="0" y="0"/>
+          <a:chExt cx="0" cy="0"/>
+        </a:xfrm>
+      </p:grpSpPr>
+      <p:sp>
+        <p:nvSpPr>
+          <p:cNvPr id="2" name="Título 1">
+            <a:extLst>
+              <a:ext uri="{FF2B5EF4-FFF2-40B4-BE49-F238E27FC236}">
+                <a16:creationId xmlns:a16="http://schemas.microsoft.com/office/drawing/2014/main" id="{4271DD81-FDD3-28F0-0772-026801F7FDF2}"/>
+              </a:ext>
+            </a:extLst>
+          </p:cNvPr>
+          <p:cNvSpPr>
+            <a:spLocks noGrp="1"/>
+          </p:cNvSpPr>
+          <p:nvPr>
+            <p:ph type="title"/>
+          </p:nvPr>
+        </p:nvSpPr>
+        <p:spPr/>
+        <p:txBody>
+          <a:bodyPr/>
+          <a:lstStyle/>
+          <a:p>
+            <a:r>
+              <a:rPr lang="es-GT" dirty="0"/>
+              <a:t>DOBLE CLICK</a:t>
+            </a:r>
+          </a:p>
+        </p:txBody>
+      </p:sp>
+      <p:pic>
+        <p:nvPicPr>
+          <p:cNvPr id="4" name="Imagen 3">
+            <a:extLst>
+              <a:ext uri="{FF2B5EF4-FFF2-40B4-BE49-F238E27FC236}">
+                <a16:creationId xmlns:a16="http://schemas.microsoft.com/office/drawing/2014/main" id="{9E4DDBCF-A885-1F76-75A0-DE72DC123EFE}"/>
+              </a:ext>
+            </a:extLst>
+          </p:cNvPr>
+          <p:cNvPicPr>
+            <a:picLocks noChangeAspect="1"/>
+          </p:cNvPicPr>
+          <p:nvPr/>
+        </p:nvPicPr>
+        <p:blipFill>
+          <a:blip r:embed="rId2"/>
+          <a:stretch>
+            <a:fillRect/>
+          </a:stretch>
+        </p:blipFill>
+        <p:spPr>
+          <a:xfrm>
+            <a:off x="2799890" y="1476102"/>
+            <a:ext cx="6592220" cy="3905795"/>
+          </a:xfrm>
+          <a:prstGeom prst="rect">
+            <a:avLst/>
+          </a:prstGeom>
+        </p:spPr>
+      </p:pic>
+    </p:spTree>
+    <p:extLst>
+      <p:ext uri="{BB962C8B-B14F-4D97-AF65-F5344CB8AC3E}">
+        <p14:creationId xmlns:p14="http://schemas.microsoft.com/office/powerpoint/2010/main" val="1014756198"/>
+      </p:ext>
+    </p:extLst>
+  </p:cSld>
+  <p:clrMapOvr>
+    <a:masterClrMapping/>
+  </p:clrMapOvr>
+</p:sld>
+</file>
+
+<file path=ppt/slides/slide31.xml><?xml version="1.0" encoding="utf-8"?>
+<p:sld xmlns:a="http://schemas.openxmlformats.org/drawingml/2006/main" xmlns:r="http://schemas.openxmlformats.org/officeDocument/2006/relationships" xmlns:p="http://schemas.openxmlformats.org/presentationml/2006/main">
+  <p:cSld>
+    <p:spTree>
+      <p:nvGrpSpPr>
+        <p:cNvPr id="1" name=""/>
+        <p:cNvGrpSpPr/>
+        <p:nvPr/>
+      </p:nvGrpSpPr>
+      <p:grpSpPr>
+        <a:xfrm>
+          <a:off x="0" y="0"/>
+          <a:ext cx="0" cy="0"/>
+          <a:chOff x="0" y="0"/>
+          <a:chExt cx="0" cy="0"/>
+        </a:xfrm>
+      </p:grpSpPr>
+      <p:sp>
+        <p:nvSpPr>
+          <p:cNvPr id="2" name="Título 1">
+            <a:extLst>
+              <a:ext uri="{FF2B5EF4-FFF2-40B4-BE49-F238E27FC236}">
+                <a16:creationId xmlns:a16="http://schemas.microsoft.com/office/drawing/2014/main" id="{582499D8-57F6-7E72-7A84-F03B6DA56545}"/>
+              </a:ext>
+            </a:extLst>
+          </p:cNvPr>
+          <p:cNvSpPr>
+            <a:spLocks noGrp="1"/>
+          </p:cNvSpPr>
+          <p:nvPr>
+            <p:ph type="title"/>
+          </p:nvPr>
+        </p:nvSpPr>
+        <p:spPr/>
+        <p:txBody>
+          <a:bodyPr/>
+          <a:lstStyle/>
+          <a:p>
+            <a:endParaRPr lang="es-GT"/>
+          </a:p>
+        </p:txBody>
+      </p:sp>
+      <p:pic>
+        <p:nvPicPr>
+          <p:cNvPr id="4" name="Imagen 3">
+            <a:extLst>
+              <a:ext uri="{FF2B5EF4-FFF2-40B4-BE49-F238E27FC236}">
+                <a16:creationId xmlns:a16="http://schemas.microsoft.com/office/drawing/2014/main" id="{E17D0022-ADDF-59EF-F229-1FA3166903EA}"/>
+              </a:ext>
+            </a:extLst>
+          </p:cNvPr>
+          <p:cNvPicPr>
+            <a:picLocks noChangeAspect="1"/>
+          </p:cNvPicPr>
+          <p:nvPr/>
+        </p:nvPicPr>
+        <p:blipFill>
+          <a:blip r:embed="rId2"/>
+          <a:stretch>
+            <a:fillRect/>
+          </a:stretch>
+        </p:blipFill>
+        <p:spPr>
+          <a:xfrm>
+            <a:off x="375138" y="1285979"/>
+            <a:ext cx="11441724" cy="5383322"/>
+          </a:xfrm>
+          <a:prstGeom prst="rect">
+            <a:avLst/>
+          </a:prstGeom>
+        </p:spPr>
+      </p:pic>
+    </p:spTree>
+    <p:extLst>
+      <p:ext uri="{BB962C8B-B14F-4D97-AF65-F5344CB8AC3E}">
+        <p14:creationId xmlns:p14="http://schemas.microsoft.com/office/powerpoint/2010/main" val="2958353684"/>
+      </p:ext>
+    </p:extLst>
+  </p:cSld>
+  <p:clrMapOvr>
+    <a:masterClrMapping/>
+  </p:clrMapOvr>
+</p:sld>
+</file>
+
+<file path=ppt/slides/slide32.xml><?xml version="1.0" encoding="utf-8"?>
+<p:sld xmlns:a="http://schemas.openxmlformats.org/drawingml/2006/main" xmlns:r="http://schemas.openxmlformats.org/officeDocument/2006/relationships" xmlns:p="http://schemas.openxmlformats.org/presentationml/2006/main">
+  <p:cSld>
+    <p:spTree>
+      <p:nvGrpSpPr>
+        <p:cNvPr id="1" name=""/>
+        <p:cNvGrpSpPr/>
+        <p:nvPr/>
+      </p:nvGrpSpPr>
+      <p:grpSpPr>
+        <a:xfrm>
+          <a:off x="0" y="0"/>
+          <a:ext cx="0" cy="0"/>
+          <a:chOff x="0" y="0"/>
+          <a:chExt cx="0" cy="0"/>
+        </a:xfrm>
+      </p:grpSpPr>
+      <p:sp>
+        <p:nvSpPr>
+          <p:cNvPr id="2" name="Título 1">
+            <a:extLst>
+              <a:ext uri="{FF2B5EF4-FFF2-40B4-BE49-F238E27FC236}">
+                <a16:creationId xmlns:a16="http://schemas.microsoft.com/office/drawing/2014/main" id="{1AEE8ADE-F49E-64D3-F97C-0AACD7D30A67}"/>
+              </a:ext>
+            </a:extLst>
+          </p:cNvPr>
+          <p:cNvSpPr>
+            <a:spLocks noGrp="1"/>
+          </p:cNvSpPr>
+          <p:nvPr>
+            <p:ph type="title"/>
+          </p:nvPr>
+        </p:nvSpPr>
+        <p:spPr/>
+        <p:txBody>
+          <a:bodyPr/>
+          <a:lstStyle/>
+          <a:p>
+            <a:endParaRPr lang="es-GT"/>
+          </a:p>
+        </p:txBody>
+      </p:sp>
+    </p:spTree>
+    <p:extLst>
+      <p:ext uri="{BB962C8B-B14F-4D97-AF65-F5344CB8AC3E}">
+        <p14:creationId xmlns:p14="http://schemas.microsoft.com/office/powerpoint/2010/main" val="2282131269"/>
+      </p:ext>
+    </p:extLst>
+  </p:cSld>
+  <p:clrMapOvr>
+    <a:masterClrMapping/>
+  </p:clrMapOvr>
+</p:sld>
+</file>
+
+<file path=ppt/slides/slide33.xml><?xml version="1.0" encoding="utf-8"?>
+<p:sld xmlns:a="http://schemas.openxmlformats.org/drawingml/2006/main" xmlns:r="http://schemas.openxmlformats.org/officeDocument/2006/relationships" xmlns:p="http://schemas.openxmlformats.org/presentationml/2006/main">
+  <p:cSld>
+    <p:spTree>
+      <p:nvGrpSpPr>
+        <p:cNvPr id="1" name=""/>
+        <p:cNvGrpSpPr/>
+        <p:nvPr/>
+      </p:nvGrpSpPr>
+      <p:grpSpPr>
+        <a:xfrm>
+          <a:off x="0" y="0"/>
+          <a:ext cx="0" cy="0"/>
+          <a:chOff x="0" y="0"/>
+          <a:chExt cx="0" cy="0"/>
+        </a:xfrm>
+      </p:grpSpPr>
+      <p:sp>
+        <p:nvSpPr>
+          <p:cNvPr id="2" name="Título 1">
+            <a:extLst>
+              <a:ext uri="{FF2B5EF4-FFF2-40B4-BE49-F238E27FC236}">
+                <a16:creationId xmlns:a16="http://schemas.microsoft.com/office/drawing/2014/main" id="{68F9746D-2BCB-039B-F54D-7A286B8555D9}"/>
+              </a:ext>
+            </a:extLst>
+          </p:cNvPr>
+          <p:cNvSpPr>
+            <a:spLocks noGrp="1"/>
+          </p:cNvSpPr>
+          <p:nvPr>
+            <p:ph type="title"/>
+          </p:nvPr>
+        </p:nvSpPr>
+        <p:spPr/>
+        <p:txBody>
+          <a:bodyPr/>
+          <a:lstStyle/>
+          <a:p>
+            <a:endParaRPr lang="es-GT"/>
+          </a:p>
+        </p:txBody>
+      </p:sp>
+    </p:spTree>
+    <p:extLst>
+      <p:ext uri="{BB962C8B-B14F-4D97-AF65-F5344CB8AC3E}">
+        <p14:creationId xmlns:p14="http://schemas.microsoft.com/office/powerpoint/2010/main" val="1915134932"/>
+      </p:ext>
+    </p:extLst>
+  </p:cSld>
+  <p:clrMapOvr>
+    <a:masterClrMapping/>
+  </p:clrMapOvr>
+</p:sld>
+</file>
+
+<file path=ppt/slides/slide34.xml><?xml version="1.0" encoding="utf-8"?>
+<p:sld xmlns:a="http://schemas.openxmlformats.org/drawingml/2006/main" xmlns:r="http://schemas.openxmlformats.org/officeDocument/2006/relationships" xmlns:p="http://schemas.openxmlformats.org/presentationml/2006/main">
+  <p:cSld>
+    <p:spTree>
+      <p:nvGrpSpPr>
+        <p:cNvPr id="1" name=""/>
+        <p:cNvGrpSpPr/>
+        <p:nvPr/>
+      </p:nvGrpSpPr>
+      <p:grpSpPr>
+        <a:xfrm>
+          <a:off x="0" y="0"/>
+          <a:ext cx="0" cy="0"/>
+          <a:chOff x="0" y="0"/>
+          <a:chExt cx="0" cy="0"/>
+        </a:xfrm>
+      </p:grpSpPr>
+      <p:sp>
+        <p:nvSpPr>
+          <p:cNvPr id="2" name="Título 1">
+            <a:extLst>
+              <a:ext uri="{FF2B5EF4-FFF2-40B4-BE49-F238E27FC236}">
+                <a16:creationId xmlns:a16="http://schemas.microsoft.com/office/drawing/2014/main" id="{F7DF2C17-C762-028B-6410-8368E04F53C6}"/>
+              </a:ext>
+            </a:extLst>
+          </p:cNvPr>
+          <p:cNvSpPr>
+            <a:spLocks noGrp="1"/>
+          </p:cNvSpPr>
+          <p:nvPr>
+            <p:ph type="title"/>
+          </p:nvPr>
+        </p:nvSpPr>
+        <p:spPr/>
+        <p:txBody>
+          <a:bodyPr/>
+          <a:lstStyle/>
+          <a:p>
+            <a:endParaRPr lang="es-GT"/>
+          </a:p>
+        </p:txBody>
+      </p:sp>
+    </p:spTree>
+    <p:extLst>
+      <p:ext uri="{BB962C8B-B14F-4D97-AF65-F5344CB8AC3E}">
+        <p14:creationId xmlns:p14="http://schemas.microsoft.com/office/powerpoint/2010/main" val="1598403952"/>
+      </p:ext>
+    </p:extLst>
+  </p:cSld>
+  <p:clrMapOvr>
+    <a:masterClrMapping/>
+  </p:clrMapOvr>
+</p:sld>
+</file>
+
+<file path=ppt/slides/slide35.xml><?xml version="1.0" encoding="utf-8"?>
+<p:sld xmlns:a="http://schemas.openxmlformats.org/drawingml/2006/main" xmlns:r="http://schemas.openxmlformats.org/officeDocument/2006/relationships" xmlns:p="http://schemas.openxmlformats.org/presentationml/2006/main">
+  <p:cSld>
+    <p:spTree>
+      <p:nvGrpSpPr>
+        <p:cNvPr id="1" name=""/>
+        <p:cNvGrpSpPr/>
+        <p:nvPr/>
+      </p:nvGrpSpPr>
+      <p:grpSpPr>
+        <a:xfrm>
+          <a:off x="0" y="0"/>
+          <a:ext cx="0" cy="0"/>
+          <a:chOff x="0" y="0"/>
+          <a:chExt cx="0" cy="0"/>
+        </a:xfrm>
+      </p:grpSpPr>
+      <p:sp>
+        <p:nvSpPr>
+          <p:cNvPr id="2" name="Título 1">
+            <a:extLst>
+              <a:ext uri="{FF2B5EF4-FFF2-40B4-BE49-F238E27FC236}">
+                <a16:creationId xmlns:a16="http://schemas.microsoft.com/office/drawing/2014/main" id="{5CD24D82-22B6-19D4-19B5-80765E504879}"/>
+              </a:ext>
+            </a:extLst>
+          </p:cNvPr>
+          <p:cNvSpPr>
+            <a:spLocks noGrp="1"/>
+          </p:cNvSpPr>
+          <p:nvPr>
+            <p:ph type="title"/>
+          </p:nvPr>
+        </p:nvSpPr>
+        <p:spPr/>
+        <p:txBody>
+          <a:bodyPr/>
+          <a:lstStyle/>
+          <a:p>
+            <a:endParaRPr lang="es-GT"/>
+          </a:p>
+        </p:txBody>
+      </p:sp>
+    </p:spTree>
+    <p:extLst>
+      <p:ext uri="{BB962C8B-B14F-4D97-AF65-F5344CB8AC3E}">
+        <p14:creationId xmlns:p14="http://schemas.microsoft.com/office/powerpoint/2010/main" val="461575834"/>
+      </p:ext>
+    </p:extLst>
+  </p:cSld>
+  <p:clrMapOvr>
+    <a:masterClrMapping/>
+  </p:clrMapOvr>
+</p:sld>
+</file>
+
+<file path=ppt/slides/slide36.xml><?xml version="1.0" encoding="utf-8"?>
+<p:sld xmlns:a="http://schemas.openxmlformats.org/drawingml/2006/main" xmlns:r="http://schemas.openxmlformats.org/officeDocument/2006/relationships" xmlns:p="http://schemas.openxmlformats.org/presentationml/2006/main">
+  <p:cSld>
+    <p:spTree>
+      <p:nvGrpSpPr>
+        <p:cNvPr id="1" name=""/>
+        <p:cNvGrpSpPr/>
+        <p:nvPr/>
+      </p:nvGrpSpPr>
+      <p:grpSpPr>
+        <a:xfrm>
+          <a:off x="0" y="0"/>
+          <a:ext cx="0" cy="0"/>
+          <a:chOff x="0" y="0"/>
+          <a:chExt cx="0" cy="0"/>
+        </a:xfrm>
+      </p:grpSpPr>
+      <p:sp>
+        <p:nvSpPr>
+          <p:cNvPr id="2" name="Título 1">
+            <a:extLst>
+              <a:ext uri="{FF2B5EF4-FFF2-40B4-BE49-F238E27FC236}">
+                <a16:creationId xmlns:a16="http://schemas.microsoft.com/office/drawing/2014/main" id="{9E7BF8BF-5797-6802-AFE4-04A7397847A4}"/>
+              </a:ext>
+            </a:extLst>
+          </p:cNvPr>
+          <p:cNvSpPr>
+            <a:spLocks noGrp="1"/>
+          </p:cNvSpPr>
+          <p:nvPr>
+            <p:ph type="title"/>
+          </p:nvPr>
+        </p:nvSpPr>
+        <p:spPr/>
+        <p:txBody>
+          <a:bodyPr/>
+          <a:lstStyle/>
+          <a:p>
+            <a:endParaRPr lang="es-GT"/>
+          </a:p>
+        </p:txBody>
+      </p:sp>
+    </p:spTree>
+    <p:extLst>
+      <p:ext uri="{BB962C8B-B14F-4D97-AF65-F5344CB8AC3E}">
+        <p14:creationId xmlns:p14="http://schemas.microsoft.com/office/powerpoint/2010/main" val="2170519594"/>
+      </p:ext>
+    </p:extLst>
+  </p:cSld>
+  <p:clrMapOvr>
+    <a:masterClrMapping/>
+  </p:clrMapOvr>
+</p:sld>
+</file>
+
+<file path=ppt/slides/slide37.xml><?xml version="1.0" encoding="utf-8"?>
+<p:sld xmlns:a="http://schemas.openxmlformats.org/drawingml/2006/main" xmlns:r="http://schemas.openxmlformats.org/officeDocument/2006/relationships" xmlns:p="http://schemas.openxmlformats.org/presentationml/2006/main">
+  <p:cSld>
+    <p:spTree>
+      <p:nvGrpSpPr>
+        <p:cNvPr id="1" name=""/>
+        <p:cNvGrpSpPr/>
+        <p:nvPr/>
+      </p:nvGrpSpPr>
+      <p:grpSpPr>
+        <a:xfrm>
+          <a:off x="0" y="0"/>
+          <a:ext cx="0" cy="0"/>
+          <a:chOff x="0" y="0"/>
+          <a:chExt cx="0" cy="0"/>
+        </a:xfrm>
+      </p:grpSpPr>
+      <p:sp>
+        <p:nvSpPr>
+          <p:cNvPr id="2" name="Título 1">
+            <a:extLst>
+              <a:ext uri="{FF2B5EF4-FFF2-40B4-BE49-F238E27FC236}">
+                <a16:creationId xmlns:a16="http://schemas.microsoft.com/office/drawing/2014/main" id="{844AE76E-4CAA-D75C-3AFA-8F5D9CAF43C1}"/>
+              </a:ext>
+            </a:extLst>
+          </p:cNvPr>
+          <p:cNvSpPr>
+            <a:spLocks noGrp="1"/>
+          </p:cNvSpPr>
+          <p:nvPr>
+            <p:ph type="title"/>
+          </p:nvPr>
+        </p:nvSpPr>
+        <p:spPr/>
+        <p:txBody>
+          <a:bodyPr/>
+          <a:lstStyle/>
+          <a:p>
+            <a:endParaRPr lang="es-GT"/>
+          </a:p>
+        </p:txBody>
+      </p:sp>
+    </p:spTree>
+    <p:extLst>
+      <p:ext uri="{BB962C8B-B14F-4D97-AF65-F5344CB8AC3E}">
+        <p14:creationId xmlns:p14="http://schemas.microsoft.com/office/powerpoint/2010/main" val="3752563038"/>
+      </p:ext>
+    </p:extLst>
+  </p:cSld>
+  <p:clrMapOvr>
+    <a:masterClrMapping/>
+  </p:clrMapOvr>
+</p:sld>
+</file>
+
+<file path=ppt/slides/slide38.xml><?xml version="1.0" encoding="utf-8"?>
+<p:sld xmlns:a="http://schemas.openxmlformats.org/drawingml/2006/main" xmlns:r="http://schemas.openxmlformats.org/officeDocument/2006/relationships" xmlns:p="http://schemas.openxmlformats.org/presentationml/2006/main">
+  <p:cSld>
+    <p:spTree>
+      <p:nvGrpSpPr>
+        <p:cNvPr id="1" name=""/>
+        <p:cNvGrpSpPr/>
+        <p:nvPr/>
+      </p:nvGrpSpPr>
+      <p:grpSpPr>
+        <a:xfrm>
+          <a:off x="0" y="0"/>
+          <a:ext cx="0" cy="0"/>
+          <a:chOff x="0" y="0"/>
+          <a:chExt cx="0" cy="0"/>
+        </a:xfrm>
+      </p:grpSpPr>
+      <p:sp>
+        <p:nvSpPr>
+          <p:cNvPr id="2" name="Título 1">
+            <a:extLst>
+              <a:ext uri="{FF2B5EF4-FFF2-40B4-BE49-F238E27FC236}">
+                <a16:creationId xmlns:a16="http://schemas.microsoft.com/office/drawing/2014/main" id="{64940584-3498-69B0-CEC8-102F8B311630}"/>
+              </a:ext>
+            </a:extLst>
+          </p:cNvPr>
+          <p:cNvSpPr>
+            <a:spLocks noGrp="1"/>
+          </p:cNvSpPr>
+          <p:nvPr>
+            <p:ph type="title"/>
+          </p:nvPr>
+        </p:nvSpPr>
+        <p:spPr/>
+        <p:txBody>
+          <a:bodyPr/>
+          <a:lstStyle/>
+          <a:p>
+            <a:endParaRPr lang="es-GT"/>
+          </a:p>
+        </p:txBody>
+      </p:sp>
+    </p:spTree>
+    <p:extLst>
+      <p:ext uri="{BB962C8B-B14F-4D97-AF65-F5344CB8AC3E}">
+        <p14:creationId xmlns:p14="http://schemas.microsoft.com/office/powerpoint/2010/main" val="383295996"/>
+      </p:ext>
+    </p:extLst>
+  </p:cSld>
+  <p:clrMapOvr>
+    <a:masterClrMapping/>
+  </p:clrMapOvr>
+</p:sld>
+</file>
+
+<file path=ppt/slides/slide39.xml><?xml version="1.0" encoding="utf-8"?>
+<p:sld xmlns:a="http://schemas.openxmlformats.org/drawingml/2006/main" xmlns:r="http://schemas.openxmlformats.org/officeDocument/2006/relationships" xmlns:p="http://schemas.openxmlformats.org/presentationml/2006/main">
+  <p:cSld>
+    <p:spTree>
+      <p:nvGrpSpPr>
+        <p:cNvPr id="1" name=""/>
+        <p:cNvGrpSpPr/>
+        <p:nvPr/>
+      </p:nvGrpSpPr>
+      <p:grpSpPr>
+        <a:xfrm>
+          <a:off x="0" y="0"/>
+          <a:ext cx="0" cy="0"/>
+          <a:chOff x="0" y="0"/>
+          <a:chExt cx="0" cy="0"/>
+        </a:xfrm>
+      </p:grpSpPr>
+      <p:sp>
+        <p:nvSpPr>
+          <p:cNvPr id="2" name="Título 1">
+            <a:extLst>
+              <a:ext uri="{FF2B5EF4-FFF2-40B4-BE49-F238E27FC236}">
+                <a16:creationId xmlns:a16="http://schemas.microsoft.com/office/drawing/2014/main" id="{E78BDF73-473A-A649-BC54-E74F3CA72854}"/>
+              </a:ext>
+            </a:extLst>
+          </p:cNvPr>
+          <p:cNvSpPr>
+            <a:spLocks noGrp="1"/>
+          </p:cNvSpPr>
+          <p:nvPr>
+            <p:ph type="title"/>
+          </p:nvPr>
+        </p:nvSpPr>
+        <p:spPr/>
+        <p:txBody>
+          <a:bodyPr/>
+          <a:lstStyle/>
+          <a:p>
+            <a:endParaRPr lang="es-GT"/>
+          </a:p>
+        </p:txBody>
+      </p:sp>
+    </p:spTree>
+    <p:extLst>
+      <p:ext uri="{BB962C8B-B14F-4D97-AF65-F5344CB8AC3E}">
+        <p14:creationId xmlns:p14="http://schemas.microsoft.com/office/powerpoint/2010/main" val="681710076"/>
+      </p:ext>
+    </p:extLst>
+  </p:cSld>
+  <p:clrMapOvr>
+    <a:masterClrMapping/>
+  </p:clrMapOvr>
+</p:sld>
+</file>
+
 <file path=ppt/slides/slide4.xml><?xml version="1.0" encoding="utf-8"?>
 <p:sld xmlns:a="http://schemas.openxmlformats.org/drawingml/2006/main" xmlns:r="http://schemas.openxmlformats.org/officeDocument/2006/relationships" xmlns:p="http://schemas.openxmlformats.org/presentationml/2006/main">
   <p:cSld>
@@ -5283,6 +6132,556 @@
 </p:sld>
 </file>
 
+<file path=ppt/slides/slide40.xml><?xml version="1.0" encoding="utf-8"?>
+<p:sld xmlns:a="http://schemas.openxmlformats.org/drawingml/2006/main" xmlns:r="http://schemas.openxmlformats.org/officeDocument/2006/relationships" xmlns:p="http://schemas.openxmlformats.org/presentationml/2006/main">
+  <p:cSld>
+    <p:spTree>
+      <p:nvGrpSpPr>
+        <p:cNvPr id="1" name=""/>
+        <p:cNvGrpSpPr/>
+        <p:nvPr/>
+      </p:nvGrpSpPr>
+      <p:grpSpPr>
+        <a:xfrm>
+          <a:off x="0" y="0"/>
+          <a:ext cx="0" cy="0"/>
+          <a:chOff x="0" y="0"/>
+          <a:chExt cx="0" cy="0"/>
+        </a:xfrm>
+      </p:grpSpPr>
+      <p:sp>
+        <p:nvSpPr>
+          <p:cNvPr id="2" name="Título 1">
+            <a:extLst>
+              <a:ext uri="{FF2B5EF4-FFF2-40B4-BE49-F238E27FC236}">
+                <a16:creationId xmlns:a16="http://schemas.microsoft.com/office/drawing/2014/main" id="{E4EAA3E2-AD38-D914-A39C-8CEA701F9726}"/>
+              </a:ext>
+            </a:extLst>
+          </p:cNvPr>
+          <p:cNvSpPr>
+            <a:spLocks noGrp="1"/>
+          </p:cNvSpPr>
+          <p:nvPr>
+            <p:ph type="title"/>
+          </p:nvPr>
+        </p:nvSpPr>
+        <p:spPr/>
+        <p:txBody>
+          <a:bodyPr/>
+          <a:lstStyle/>
+          <a:p>
+            <a:endParaRPr lang="es-GT"/>
+          </a:p>
+        </p:txBody>
+      </p:sp>
+    </p:spTree>
+    <p:extLst>
+      <p:ext uri="{BB962C8B-B14F-4D97-AF65-F5344CB8AC3E}">
+        <p14:creationId xmlns:p14="http://schemas.microsoft.com/office/powerpoint/2010/main" val="965352654"/>
+      </p:ext>
+    </p:extLst>
+  </p:cSld>
+  <p:clrMapOvr>
+    <a:masterClrMapping/>
+  </p:clrMapOvr>
+</p:sld>
+</file>
+
+<file path=ppt/slides/slide41.xml><?xml version="1.0" encoding="utf-8"?>
+<p:sld xmlns:a="http://schemas.openxmlformats.org/drawingml/2006/main" xmlns:r="http://schemas.openxmlformats.org/officeDocument/2006/relationships" xmlns:p="http://schemas.openxmlformats.org/presentationml/2006/main">
+  <p:cSld>
+    <p:spTree>
+      <p:nvGrpSpPr>
+        <p:cNvPr id="1" name=""/>
+        <p:cNvGrpSpPr/>
+        <p:nvPr/>
+      </p:nvGrpSpPr>
+      <p:grpSpPr>
+        <a:xfrm>
+          <a:off x="0" y="0"/>
+          <a:ext cx="0" cy="0"/>
+          <a:chOff x="0" y="0"/>
+          <a:chExt cx="0" cy="0"/>
+        </a:xfrm>
+      </p:grpSpPr>
+      <p:sp>
+        <p:nvSpPr>
+          <p:cNvPr id="2" name="Título 1">
+            <a:extLst>
+              <a:ext uri="{FF2B5EF4-FFF2-40B4-BE49-F238E27FC236}">
+                <a16:creationId xmlns:a16="http://schemas.microsoft.com/office/drawing/2014/main" id="{0E27DFE3-82A7-40C9-7CA5-68D745E8E2FD}"/>
+              </a:ext>
+            </a:extLst>
+          </p:cNvPr>
+          <p:cNvSpPr>
+            <a:spLocks noGrp="1"/>
+          </p:cNvSpPr>
+          <p:nvPr>
+            <p:ph type="title"/>
+          </p:nvPr>
+        </p:nvSpPr>
+        <p:spPr/>
+        <p:txBody>
+          <a:bodyPr/>
+          <a:lstStyle/>
+          <a:p>
+            <a:endParaRPr lang="es-GT"/>
+          </a:p>
+        </p:txBody>
+      </p:sp>
+    </p:spTree>
+    <p:extLst>
+      <p:ext uri="{BB962C8B-B14F-4D97-AF65-F5344CB8AC3E}">
+        <p14:creationId xmlns:p14="http://schemas.microsoft.com/office/powerpoint/2010/main" val="1406935068"/>
+      </p:ext>
+    </p:extLst>
+  </p:cSld>
+  <p:clrMapOvr>
+    <a:masterClrMapping/>
+  </p:clrMapOvr>
+</p:sld>
+</file>
+
+<file path=ppt/slides/slide42.xml><?xml version="1.0" encoding="utf-8"?>
+<p:sld xmlns:a="http://schemas.openxmlformats.org/drawingml/2006/main" xmlns:r="http://schemas.openxmlformats.org/officeDocument/2006/relationships" xmlns:p="http://schemas.openxmlformats.org/presentationml/2006/main">
+  <p:cSld>
+    <p:spTree>
+      <p:nvGrpSpPr>
+        <p:cNvPr id="1" name=""/>
+        <p:cNvGrpSpPr/>
+        <p:nvPr/>
+      </p:nvGrpSpPr>
+      <p:grpSpPr>
+        <a:xfrm>
+          <a:off x="0" y="0"/>
+          <a:ext cx="0" cy="0"/>
+          <a:chOff x="0" y="0"/>
+          <a:chExt cx="0" cy="0"/>
+        </a:xfrm>
+      </p:grpSpPr>
+      <p:sp>
+        <p:nvSpPr>
+          <p:cNvPr id="2" name="Título 1">
+            <a:extLst>
+              <a:ext uri="{FF2B5EF4-FFF2-40B4-BE49-F238E27FC236}">
+                <a16:creationId xmlns:a16="http://schemas.microsoft.com/office/drawing/2014/main" id="{D48433DA-0E97-72EE-092C-262AF39D0A86}"/>
+              </a:ext>
+            </a:extLst>
+          </p:cNvPr>
+          <p:cNvSpPr>
+            <a:spLocks noGrp="1"/>
+          </p:cNvSpPr>
+          <p:nvPr>
+            <p:ph type="title"/>
+          </p:nvPr>
+        </p:nvSpPr>
+        <p:spPr/>
+        <p:txBody>
+          <a:bodyPr/>
+          <a:lstStyle/>
+          <a:p>
+            <a:endParaRPr lang="es-GT"/>
+          </a:p>
+        </p:txBody>
+      </p:sp>
+    </p:spTree>
+    <p:extLst>
+      <p:ext uri="{BB962C8B-B14F-4D97-AF65-F5344CB8AC3E}">
+        <p14:creationId xmlns:p14="http://schemas.microsoft.com/office/powerpoint/2010/main" val="2817359393"/>
+      </p:ext>
+    </p:extLst>
+  </p:cSld>
+  <p:clrMapOvr>
+    <a:masterClrMapping/>
+  </p:clrMapOvr>
+</p:sld>
+</file>
+
+<file path=ppt/slides/slide43.xml><?xml version="1.0" encoding="utf-8"?>
+<p:sld xmlns:a="http://schemas.openxmlformats.org/drawingml/2006/main" xmlns:r="http://schemas.openxmlformats.org/officeDocument/2006/relationships" xmlns:p="http://schemas.openxmlformats.org/presentationml/2006/main">
+  <p:cSld>
+    <p:spTree>
+      <p:nvGrpSpPr>
+        <p:cNvPr id="1" name=""/>
+        <p:cNvGrpSpPr/>
+        <p:nvPr/>
+      </p:nvGrpSpPr>
+      <p:grpSpPr>
+        <a:xfrm>
+          <a:off x="0" y="0"/>
+          <a:ext cx="0" cy="0"/>
+          <a:chOff x="0" y="0"/>
+          <a:chExt cx="0" cy="0"/>
+        </a:xfrm>
+      </p:grpSpPr>
+      <p:sp>
+        <p:nvSpPr>
+          <p:cNvPr id="2" name="Título 1">
+            <a:extLst>
+              <a:ext uri="{FF2B5EF4-FFF2-40B4-BE49-F238E27FC236}">
+                <a16:creationId xmlns:a16="http://schemas.microsoft.com/office/drawing/2014/main" id="{C9BEB94A-5B0A-1968-6513-BE3BDD297E9D}"/>
+              </a:ext>
+            </a:extLst>
+          </p:cNvPr>
+          <p:cNvSpPr>
+            <a:spLocks noGrp="1"/>
+          </p:cNvSpPr>
+          <p:nvPr>
+            <p:ph type="title"/>
+          </p:nvPr>
+        </p:nvSpPr>
+        <p:spPr/>
+        <p:txBody>
+          <a:bodyPr/>
+          <a:lstStyle/>
+          <a:p>
+            <a:endParaRPr lang="es-GT"/>
+          </a:p>
+        </p:txBody>
+      </p:sp>
+    </p:spTree>
+    <p:extLst>
+      <p:ext uri="{BB962C8B-B14F-4D97-AF65-F5344CB8AC3E}">
+        <p14:creationId xmlns:p14="http://schemas.microsoft.com/office/powerpoint/2010/main" val="1193874336"/>
+      </p:ext>
+    </p:extLst>
+  </p:cSld>
+  <p:clrMapOvr>
+    <a:masterClrMapping/>
+  </p:clrMapOvr>
+</p:sld>
+</file>
+
+<file path=ppt/slides/slide44.xml><?xml version="1.0" encoding="utf-8"?>
+<p:sld xmlns:a="http://schemas.openxmlformats.org/drawingml/2006/main" xmlns:r="http://schemas.openxmlformats.org/officeDocument/2006/relationships" xmlns:p="http://schemas.openxmlformats.org/presentationml/2006/main">
+  <p:cSld>
+    <p:spTree>
+      <p:nvGrpSpPr>
+        <p:cNvPr id="1" name=""/>
+        <p:cNvGrpSpPr/>
+        <p:nvPr/>
+      </p:nvGrpSpPr>
+      <p:grpSpPr>
+        <a:xfrm>
+          <a:off x="0" y="0"/>
+          <a:ext cx="0" cy="0"/>
+          <a:chOff x="0" y="0"/>
+          <a:chExt cx="0" cy="0"/>
+        </a:xfrm>
+      </p:grpSpPr>
+      <p:sp>
+        <p:nvSpPr>
+          <p:cNvPr id="2" name="Título 1">
+            <a:extLst>
+              <a:ext uri="{FF2B5EF4-FFF2-40B4-BE49-F238E27FC236}">
+                <a16:creationId xmlns:a16="http://schemas.microsoft.com/office/drawing/2014/main" id="{45608A79-6B5F-5CF4-AAF6-0D888EC5A6A2}"/>
+              </a:ext>
+            </a:extLst>
+          </p:cNvPr>
+          <p:cNvSpPr>
+            <a:spLocks noGrp="1"/>
+          </p:cNvSpPr>
+          <p:nvPr>
+            <p:ph type="title"/>
+          </p:nvPr>
+        </p:nvSpPr>
+        <p:spPr/>
+        <p:txBody>
+          <a:bodyPr/>
+          <a:lstStyle/>
+          <a:p>
+            <a:endParaRPr lang="es-GT"/>
+          </a:p>
+        </p:txBody>
+      </p:sp>
+    </p:spTree>
+    <p:extLst>
+      <p:ext uri="{BB962C8B-B14F-4D97-AF65-F5344CB8AC3E}">
+        <p14:creationId xmlns:p14="http://schemas.microsoft.com/office/powerpoint/2010/main" val="2665951535"/>
+      </p:ext>
+    </p:extLst>
+  </p:cSld>
+  <p:clrMapOvr>
+    <a:masterClrMapping/>
+  </p:clrMapOvr>
+</p:sld>
+</file>
+
+<file path=ppt/slides/slide45.xml><?xml version="1.0" encoding="utf-8"?>
+<p:sld xmlns:a="http://schemas.openxmlformats.org/drawingml/2006/main" xmlns:r="http://schemas.openxmlformats.org/officeDocument/2006/relationships" xmlns:p="http://schemas.openxmlformats.org/presentationml/2006/main">
+  <p:cSld>
+    <p:spTree>
+      <p:nvGrpSpPr>
+        <p:cNvPr id="1" name=""/>
+        <p:cNvGrpSpPr/>
+        <p:nvPr/>
+      </p:nvGrpSpPr>
+      <p:grpSpPr>
+        <a:xfrm>
+          <a:off x="0" y="0"/>
+          <a:ext cx="0" cy="0"/>
+          <a:chOff x="0" y="0"/>
+          <a:chExt cx="0" cy="0"/>
+        </a:xfrm>
+      </p:grpSpPr>
+      <p:sp>
+        <p:nvSpPr>
+          <p:cNvPr id="2" name="Título 1">
+            <a:extLst>
+              <a:ext uri="{FF2B5EF4-FFF2-40B4-BE49-F238E27FC236}">
+                <a16:creationId xmlns:a16="http://schemas.microsoft.com/office/drawing/2014/main" id="{6545DD49-BECF-C8C9-2DF4-16F3A0AC629D}"/>
+              </a:ext>
+            </a:extLst>
+          </p:cNvPr>
+          <p:cNvSpPr>
+            <a:spLocks noGrp="1"/>
+          </p:cNvSpPr>
+          <p:nvPr>
+            <p:ph type="title"/>
+          </p:nvPr>
+        </p:nvSpPr>
+        <p:spPr/>
+        <p:txBody>
+          <a:bodyPr/>
+          <a:lstStyle/>
+          <a:p>
+            <a:endParaRPr lang="es-GT"/>
+          </a:p>
+        </p:txBody>
+      </p:sp>
+    </p:spTree>
+    <p:extLst>
+      <p:ext uri="{BB962C8B-B14F-4D97-AF65-F5344CB8AC3E}">
+        <p14:creationId xmlns:p14="http://schemas.microsoft.com/office/powerpoint/2010/main" val="225726432"/>
+      </p:ext>
+    </p:extLst>
+  </p:cSld>
+  <p:clrMapOvr>
+    <a:masterClrMapping/>
+  </p:clrMapOvr>
+</p:sld>
+</file>
+
+<file path=ppt/slides/slide46.xml><?xml version="1.0" encoding="utf-8"?>
+<p:sld xmlns:a="http://schemas.openxmlformats.org/drawingml/2006/main" xmlns:r="http://schemas.openxmlformats.org/officeDocument/2006/relationships" xmlns:p="http://schemas.openxmlformats.org/presentationml/2006/main">
+  <p:cSld>
+    <p:spTree>
+      <p:nvGrpSpPr>
+        <p:cNvPr id="1" name=""/>
+        <p:cNvGrpSpPr/>
+        <p:nvPr/>
+      </p:nvGrpSpPr>
+      <p:grpSpPr>
+        <a:xfrm>
+          <a:off x="0" y="0"/>
+          <a:ext cx="0" cy="0"/>
+          <a:chOff x="0" y="0"/>
+          <a:chExt cx="0" cy="0"/>
+        </a:xfrm>
+      </p:grpSpPr>
+      <p:sp>
+        <p:nvSpPr>
+          <p:cNvPr id="2" name="Título 1">
+            <a:extLst>
+              <a:ext uri="{FF2B5EF4-FFF2-40B4-BE49-F238E27FC236}">
+                <a16:creationId xmlns:a16="http://schemas.microsoft.com/office/drawing/2014/main" id="{8B42FF43-CE5D-8AF1-B995-615F91DC003C}"/>
+              </a:ext>
+            </a:extLst>
+          </p:cNvPr>
+          <p:cNvSpPr>
+            <a:spLocks noGrp="1"/>
+          </p:cNvSpPr>
+          <p:nvPr>
+            <p:ph type="title"/>
+          </p:nvPr>
+        </p:nvSpPr>
+        <p:spPr/>
+        <p:txBody>
+          <a:bodyPr/>
+          <a:lstStyle/>
+          <a:p>
+            <a:endParaRPr lang="es-GT"/>
+          </a:p>
+        </p:txBody>
+      </p:sp>
+    </p:spTree>
+    <p:extLst>
+      <p:ext uri="{BB962C8B-B14F-4D97-AF65-F5344CB8AC3E}">
+        <p14:creationId xmlns:p14="http://schemas.microsoft.com/office/powerpoint/2010/main" val="102454729"/>
+      </p:ext>
+    </p:extLst>
+  </p:cSld>
+  <p:clrMapOvr>
+    <a:masterClrMapping/>
+  </p:clrMapOvr>
+</p:sld>
+</file>
+
+<file path=ppt/slides/slide47.xml><?xml version="1.0" encoding="utf-8"?>
+<p:sld xmlns:a="http://schemas.openxmlformats.org/drawingml/2006/main" xmlns:r="http://schemas.openxmlformats.org/officeDocument/2006/relationships" xmlns:p="http://schemas.openxmlformats.org/presentationml/2006/main">
+  <p:cSld>
+    <p:spTree>
+      <p:nvGrpSpPr>
+        <p:cNvPr id="1" name=""/>
+        <p:cNvGrpSpPr/>
+        <p:nvPr/>
+      </p:nvGrpSpPr>
+      <p:grpSpPr>
+        <a:xfrm>
+          <a:off x="0" y="0"/>
+          <a:ext cx="0" cy="0"/>
+          <a:chOff x="0" y="0"/>
+          <a:chExt cx="0" cy="0"/>
+        </a:xfrm>
+      </p:grpSpPr>
+      <p:sp>
+        <p:nvSpPr>
+          <p:cNvPr id="2" name="Título 1">
+            <a:extLst>
+              <a:ext uri="{FF2B5EF4-FFF2-40B4-BE49-F238E27FC236}">
+                <a16:creationId xmlns:a16="http://schemas.microsoft.com/office/drawing/2014/main" id="{58B2AEE7-1736-8BD2-3C6B-39CD2680249E}"/>
+              </a:ext>
+            </a:extLst>
+          </p:cNvPr>
+          <p:cNvSpPr>
+            <a:spLocks noGrp="1"/>
+          </p:cNvSpPr>
+          <p:nvPr>
+            <p:ph type="title"/>
+          </p:nvPr>
+        </p:nvSpPr>
+        <p:spPr/>
+        <p:txBody>
+          <a:bodyPr/>
+          <a:lstStyle/>
+          <a:p>
+            <a:endParaRPr lang="es-GT"/>
+          </a:p>
+        </p:txBody>
+      </p:sp>
+    </p:spTree>
+    <p:extLst>
+      <p:ext uri="{BB962C8B-B14F-4D97-AF65-F5344CB8AC3E}">
+        <p14:creationId xmlns:p14="http://schemas.microsoft.com/office/powerpoint/2010/main" val="1638782381"/>
+      </p:ext>
+    </p:extLst>
+  </p:cSld>
+  <p:clrMapOvr>
+    <a:masterClrMapping/>
+  </p:clrMapOvr>
+</p:sld>
+</file>
+
+<file path=ppt/slides/slide48.xml><?xml version="1.0" encoding="utf-8"?>
+<p:sld xmlns:a="http://schemas.openxmlformats.org/drawingml/2006/main" xmlns:r="http://schemas.openxmlformats.org/officeDocument/2006/relationships" xmlns:p="http://schemas.openxmlformats.org/presentationml/2006/main">
+  <p:cSld>
+    <p:spTree>
+      <p:nvGrpSpPr>
+        <p:cNvPr id="1" name=""/>
+        <p:cNvGrpSpPr/>
+        <p:nvPr/>
+      </p:nvGrpSpPr>
+      <p:grpSpPr>
+        <a:xfrm>
+          <a:off x="0" y="0"/>
+          <a:ext cx="0" cy="0"/>
+          <a:chOff x="0" y="0"/>
+          <a:chExt cx="0" cy="0"/>
+        </a:xfrm>
+      </p:grpSpPr>
+      <p:sp>
+        <p:nvSpPr>
+          <p:cNvPr id="2" name="Título 1">
+            <a:extLst>
+              <a:ext uri="{FF2B5EF4-FFF2-40B4-BE49-F238E27FC236}">
+                <a16:creationId xmlns:a16="http://schemas.microsoft.com/office/drawing/2014/main" id="{7A902615-8498-3DAB-3F7A-A79805761463}"/>
+              </a:ext>
+            </a:extLst>
+          </p:cNvPr>
+          <p:cNvSpPr>
+            <a:spLocks noGrp="1"/>
+          </p:cNvSpPr>
+          <p:nvPr>
+            <p:ph type="title"/>
+          </p:nvPr>
+        </p:nvSpPr>
+        <p:spPr/>
+        <p:txBody>
+          <a:bodyPr/>
+          <a:lstStyle/>
+          <a:p>
+            <a:endParaRPr lang="es-GT"/>
+          </a:p>
+        </p:txBody>
+      </p:sp>
+    </p:spTree>
+    <p:extLst>
+      <p:ext uri="{BB962C8B-B14F-4D97-AF65-F5344CB8AC3E}">
+        <p14:creationId xmlns:p14="http://schemas.microsoft.com/office/powerpoint/2010/main" val="2279885882"/>
+      </p:ext>
+    </p:extLst>
+  </p:cSld>
+  <p:clrMapOvr>
+    <a:masterClrMapping/>
+  </p:clrMapOvr>
+</p:sld>
+</file>
+
+<file path=ppt/slides/slide49.xml><?xml version="1.0" encoding="utf-8"?>
+<p:sld xmlns:a="http://schemas.openxmlformats.org/drawingml/2006/main" xmlns:r="http://schemas.openxmlformats.org/officeDocument/2006/relationships" xmlns:p="http://schemas.openxmlformats.org/presentationml/2006/main">
+  <p:cSld>
+    <p:spTree>
+      <p:nvGrpSpPr>
+        <p:cNvPr id="1" name=""/>
+        <p:cNvGrpSpPr/>
+        <p:nvPr/>
+      </p:nvGrpSpPr>
+      <p:grpSpPr>
+        <a:xfrm>
+          <a:off x="0" y="0"/>
+          <a:ext cx="0" cy="0"/>
+          <a:chOff x="0" y="0"/>
+          <a:chExt cx="0" cy="0"/>
+        </a:xfrm>
+      </p:grpSpPr>
+      <p:sp>
+        <p:nvSpPr>
+          <p:cNvPr id="2" name="Título 1">
+            <a:extLst>
+              <a:ext uri="{FF2B5EF4-FFF2-40B4-BE49-F238E27FC236}">
+                <a16:creationId xmlns:a16="http://schemas.microsoft.com/office/drawing/2014/main" id="{8E8094F2-D8C5-AD01-6420-01A2FCA93E5D}"/>
+              </a:ext>
+            </a:extLst>
+          </p:cNvPr>
+          <p:cNvSpPr>
+            <a:spLocks noGrp="1"/>
+          </p:cNvSpPr>
+          <p:nvPr>
+            <p:ph type="title"/>
+          </p:nvPr>
+        </p:nvSpPr>
+        <p:spPr/>
+        <p:txBody>
+          <a:bodyPr/>
+          <a:lstStyle/>
+          <a:p>
+            <a:endParaRPr lang="es-GT"/>
+          </a:p>
+        </p:txBody>
+      </p:sp>
+    </p:spTree>
+    <p:extLst>
+      <p:ext uri="{BB962C8B-B14F-4D97-AF65-F5344CB8AC3E}">
+        <p14:creationId xmlns:p14="http://schemas.microsoft.com/office/powerpoint/2010/main" val="394983608"/>
+      </p:ext>
+    </p:extLst>
+  </p:cSld>
+  <p:clrMapOvr>
+    <a:masterClrMapping/>
+  </p:clrMapOvr>
+</p:sld>
+</file>
+
 <file path=ppt/slides/slide5.xml><?xml version="1.0" encoding="utf-8"?>
 <p:sld xmlns:a="http://schemas.openxmlformats.org/drawingml/2006/main" xmlns:r="http://schemas.openxmlformats.org/officeDocument/2006/relationships" xmlns:p="http://schemas.openxmlformats.org/presentationml/2006/main">
   <p:cSld>
@@ -5359,6 +6758,281 @@
     <p:extLst>
       <p:ext uri="{BB962C8B-B14F-4D97-AF65-F5344CB8AC3E}">
         <p14:creationId xmlns:p14="http://schemas.microsoft.com/office/powerpoint/2010/main" val="3547986348"/>
+      </p:ext>
+    </p:extLst>
+  </p:cSld>
+  <p:clrMapOvr>
+    <a:masterClrMapping/>
+  </p:clrMapOvr>
+</p:sld>
+</file>
+
+<file path=ppt/slides/slide50.xml><?xml version="1.0" encoding="utf-8"?>
+<p:sld xmlns:a="http://schemas.openxmlformats.org/drawingml/2006/main" xmlns:r="http://schemas.openxmlformats.org/officeDocument/2006/relationships" xmlns:p="http://schemas.openxmlformats.org/presentationml/2006/main">
+  <p:cSld>
+    <p:spTree>
+      <p:nvGrpSpPr>
+        <p:cNvPr id="1" name=""/>
+        <p:cNvGrpSpPr/>
+        <p:nvPr/>
+      </p:nvGrpSpPr>
+      <p:grpSpPr>
+        <a:xfrm>
+          <a:off x="0" y="0"/>
+          <a:ext cx="0" cy="0"/>
+          <a:chOff x="0" y="0"/>
+          <a:chExt cx="0" cy="0"/>
+        </a:xfrm>
+      </p:grpSpPr>
+      <p:sp>
+        <p:nvSpPr>
+          <p:cNvPr id="2" name="Título 1">
+            <a:extLst>
+              <a:ext uri="{FF2B5EF4-FFF2-40B4-BE49-F238E27FC236}">
+                <a16:creationId xmlns:a16="http://schemas.microsoft.com/office/drawing/2014/main" id="{1C509C3F-F87B-A99A-879D-8547DBA86514}"/>
+              </a:ext>
+            </a:extLst>
+          </p:cNvPr>
+          <p:cNvSpPr>
+            <a:spLocks noGrp="1"/>
+          </p:cNvSpPr>
+          <p:nvPr>
+            <p:ph type="title"/>
+          </p:nvPr>
+        </p:nvSpPr>
+        <p:spPr/>
+        <p:txBody>
+          <a:bodyPr/>
+          <a:lstStyle/>
+          <a:p>
+            <a:endParaRPr lang="es-GT"/>
+          </a:p>
+        </p:txBody>
+      </p:sp>
+    </p:spTree>
+    <p:extLst>
+      <p:ext uri="{BB962C8B-B14F-4D97-AF65-F5344CB8AC3E}">
+        <p14:creationId xmlns:p14="http://schemas.microsoft.com/office/powerpoint/2010/main" val="2935884083"/>
+      </p:ext>
+    </p:extLst>
+  </p:cSld>
+  <p:clrMapOvr>
+    <a:masterClrMapping/>
+  </p:clrMapOvr>
+</p:sld>
+</file>
+
+<file path=ppt/slides/slide51.xml><?xml version="1.0" encoding="utf-8"?>
+<p:sld xmlns:a="http://schemas.openxmlformats.org/drawingml/2006/main" xmlns:r="http://schemas.openxmlformats.org/officeDocument/2006/relationships" xmlns:p="http://schemas.openxmlformats.org/presentationml/2006/main">
+  <p:cSld>
+    <p:spTree>
+      <p:nvGrpSpPr>
+        <p:cNvPr id="1" name=""/>
+        <p:cNvGrpSpPr/>
+        <p:nvPr/>
+      </p:nvGrpSpPr>
+      <p:grpSpPr>
+        <a:xfrm>
+          <a:off x="0" y="0"/>
+          <a:ext cx="0" cy="0"/>
+          <a:chOff x="0" y="0"/>
+          <a:chExt cx="0" cy="0"/>
+        </a:xfrm>
+      </p:grpSpPr>
+      <p:sp>
+        <p:nvSpPr>
+          <p:cNvPr id="2" name="Título 1">
+            <a:extLst>
+              <a:ext uri="{FF2B5EF4-FFF2-40B4-BE49-F238E27FC236}">
+                <a16:creationId xmlns:a16="http://schemas.microsoft.com/office/drawing/2014/main" id="{4FD3BFDF-9FCC-8D8D-ED25-B0EDA7D1123C}"/>
+              </a:ext>
+            </a:extLst>
+          </p:cNvPr>
+          <p:cNvSpPr>
+            <a:spLocks noGrp="1"/>
+          </p:cNvSpPr>
+          <p:nvPr>
+            <p:ph type="title"/>
+          </p:nvPr>
+        </p:nvSpPr>
+        <p:spPr/>
+        <p:txBody>
+          <a:bodyPr/>
+          <a:lstStyle/>
+          <a:p>
+            <a:endParaRPr lang="es-GT"/>
+          </a:p>
+        </p:txBody>
+      </p:sp>
+    </p:spTree>
+    <p:extLst>
+      <p:ext uri="{BB962C8B-B14F-4D97-AF65-F5344CB8AC3E}">
+        <p14:creationId xmlns:p14="http://schemas.microsoft.com/office/powerpoint/2010/main" val="1363416865"/>
+      </p:ext>
+    </p:extLst>
+  </p:cSld>
+  <p:clrMapOvr>
+    <a:masterClrMapping/>
+  </p:clrMapOvr>
+</p:sld>
+</file>
+
+<file path=ppt/slides/slide52.xml><?xml version="1.0" encoding="utf-8"?>
+<p:sld xmlns:a="http://schemas.openxmlformats.org/drawingml/2006/main" xmlns:r="http://schemas.openxmlformats.org/officeDocument/2006/relationships" xmlns:p="http://schemas.openxmlformats.org/presentationml/2006/main">
+  <p:cSld>
+    <p:spTree>
+      <p:nvGrpSpPr>
+        <p:cNvPr id="1" name=""/>
+        <p:cNvGrpSpPr/>
+        <p:nvPr/>
+      </p:nvGrpSpPr>
+      <p:grpSpPr>
+        <a:xfrm>
+          <a:off x="0" y="0"/>
+          <a:ext cx="0" cy="0"/>
+          <a:chOff x="0" y="0"/>
+          <a:chExt cx="0" cy="0"/>
+        </a:xfrm>
+      </p:grpSpPr>
+      <p:sp>
+        <p:nvSpPr>
+          <p:cNvPr id="2" name="Título 1">
+            <a:extLst>
+              <a:ext uri="{FF2B5EF4-FFF2-40B4-BE49-F238E27FC236}">
+                <a16:creationId xmlns:a16="http://schemas.microsoft.com/office/drawing/2014/main" id="{98ECB0CE-B0B5-10D8-F00B-B6EA2A4FFE8D}"/>
+              </a:ext>
+            </a:extLst>
+          </p:cNvPr>
+          <p:cNvSpPr>
+            <a:spLocks noGrp="1"/>
+          </p:cNvSpPr>
+          <p:nvPr>
+            <p:ph type="title"/>
+          </p:nvPr>
+        </p:nvSpPr>
+        <p:spPr/>
+        <p:txBody>
+          <a:bodyPr/>
+          <a:lstStyle/>
+          <a:p>
+            <a:endParaRPr lang="es-GT"/>
+          </a:p>
+        </p:txBody>
+      </p:sp>
+    </p:spTree>
+    <p:extLst>
+      <p:ext uri="{BB962C8B-B14F-4D97-AF65-F5344CB8AC3E}">
+        <p14:creationId xmlns:p14="http://schemas.microsoft.com/office/powerpoint/2010/main" val="123172610"/>
+      </p:ext>
+    </p:extLst>
+  </p:cSld>
+  <p:clrMapOvr>
+    <a:masterClrMapping/>
+  </p:clrMapOvr>
+</p:sld>
+</file>
+
+<file path=ppt/slides/slide53.xml><?xml version="1.0" encoding="utf-8"?>
+<p:sld xmlns:a="http://schemas.openxmlformats.org/drawingml/2006/main" xmlns:r="http://schemas.openxmlformats.org/officeDocument/2006/relationships" xmlns:p="http://schemas.openxmlformats.org/presentationml/2006/main">
+  <p:cSld>
+    <p:spTree>
+      <p:nvGrpSpPr>
+        <p:cNvPr id="1" name=""/>
+        <p:cNvGrpSpPr/>
+        <p:nvPr/>
+      </p:nvGrpSpPr>
+      <p:grpSpPr>
+        <a:xfrm>
+          <a:off x="0" y="0"/>
+          <a:ext cx="0" cy="0"/>
+          <a:chOff x="0" y="0"/>
+          <a:chExt cx="0" cy="0"/>
+        </a:xfrm>
+      </p:grpSpPr>
+      <p:sp>
+        <p:nvSpPr>
+          <p:cNvPr id="2" name="Título 1">
+            <a:extLst>
+              <a:ext uri="{FF2B5EF4-FFF2-40B4-BE49-F238E27FC236}">
+                <a16:creationId xmlns:a16="http://schemas.microsoft.com/office/drawing/2014/main" id="{A7386C69-38DA-9BE5-57F4-6EA92756509E}"/>
+              </a:ext>
+            </a:extLst>
+          </p:cNvPr>
+          <p:cNvSpPr>
+            <a:spLocks noGrp="1"/>
+          </p:cNvSpPr>
+          <p:nvPr>
+            <p:ph type="title"/>
+          </p:nvPr>
+        </p:nvSpPr>
+        <p:spPr/>
+        <p:txBody>
+          <a:bodyPr/>
+          <a:lstStyle/>
+          <a:p>
+            <a:endParaRPr lang="es-GT"/>
+          </a:p>
+        </p:txBody>
+      </p:sp>
+    </p:spTree>
+    <p:extLst>
+      <p:ext uri="{BB962C8B-B14F-4D97-AF65-F5344CB8AC3E}">
+        <p14:creationId xmlns:p14="http://schemas.microsoft.com/office/powerpoint/2010/main" val="1490314433"/>
+      </p:ext>
+    </p:extLst>
+  </p:cSld>
+  <p:clrMapOvr>
+    <a:masterClrMapping/>
+  </p:clrMapOvr>
+</p:sld>
+</file>
+
+<file path=ppt/slides/slide54.xml><?xml version="1.0" encoding="utf-8"?>
+<p:sld xmlns:a="http://schemas.openxmlformats.org/drawingml/2006/main" xmlns:r="http://schemas.openxmlformats.org/officeDocument/2006/relationships" xmlns:p="http://schemas.openxmlformats.org/presentationml/2006/main">
+  <p:cSld>
+    <p:spTree>
+      <p:nvGrpSpPr>
+        <p:cNvPr id="1" name=""/>
+        <p:cNvGrpSpPr/>
+        <p:nvPr/>
+      </p:nvGrpSpPr>
+      <p:grpSpPr>
+        <a:xfrm>
+          <a:off x="0" y="0"/>
+          <a:ext cx="0" cy="0"/>
+          <a:chOff x="0" y="0"/>
+          <a:chExt cx="0" cy="0"/>
+        </a:xfrm>
+      </p:grpSpPr>
+      <p:sp>
+        <p:nvSpPr>
+          <p:cNvPr id="2" name="Título 1">
+            <a:extLst>
+              <a:ext uri="{FF2B5EF4-FFF2-40B4-BE49-F238E27FC236}">
+                <a16:creationId xmlns:a16="http://schemas.microsoft.com/office/drawing/2014/main" id="{EEF01E30-01FC-E6FE-83BF-AD056652A2E8}"/>
+              </a:ext>
+            </a:extLst>
+          </p:cNvPr>
+          <p:cNvSpPr>
+            <a:spLocks noGrp="1"/>
+          </p:cNvSpPr>
+          <p:nvPr>
+            <p:ph type="title"/>
+          </p:nvPr>
+        </p:nvSpPr>
+        <p:spPr/>
+        <p:txBody>
+          <a:bodyPr/>
+          <a:lstStyle/>
+          <a:p>
+            <a:endParaRPr lang="es-GT"/>
+          </a:p>
+        </p:txBody>
+      </p:sp>
+    </p:spTree>
+    <p:extLst>
+      <p:ext uri="{BB962C8B-B14F-4D97-AF65-F5344CB8AC3E}">
+        <p14:creationId xmlns:p14="http://schemas.microsoft.com/office/powerpoint/2010/main" val="1206364583"/>
       </p:ext>
     </p:extLst>
   </p:cSld>

--- a/AUTOCAD INTECAP/apuntes powerpoint/CLASE BLOQUES 11 MARZO.pptx
+++ b/AUTOCAD INTECAP/apuntes powerpoint/CLASE BLOQUES 11 MARZO.pptx
@@ -25,17 +25,17 @@
     <p:sldId id="260" r:id="rId19"/>
     <p:sldId id="261" r:id="rId20"/>
     <p:sldId id="262" r:id="rId21"/>
-    <p:sldId id="263" r:id="rId22"/>
-    <p:sldId id="264" r:id="rId23"/>
-    <p:sldId id="280" r:id="rId24"/>
-    <p:sldId id="281" r:id="rId25"/>
-    <p:sldId id="282" r:id="rId26"/>
-    <p:sldId id="265" r:id="rId27"/>
-    <p:sldId id="259" r:id="rId28"/>
-    <p:sldId id="283" r:id="rId29"/>
-    <p:sldId id="284" r:id="rId30"/>
-    <p:sldId id="285" r:id="rId31"/>
-    <p:sldId id="286" r:id="rId32"/>
+    <p:sldId id="264" r:id="rId22"/>
+    <p:sldId id="280" r:id="rId23"/>
+    <p:sldId id="281" r:id="rId24"/>
+    <p:sldId id="282" r:id="rId25"/>
+    <p:sldId id="265" r:id="rId26"/>
+    <p:sldId id="259" r:id="rId27"/>
+    <p:sldId id="283" r:id="rId28"/>
+    <p:sldId id="284" r:id="rId29"/>
+    <p:sldId id="285" r:id="rId30"/>
+    <p:sldId id="286" r:id="rId31"/>
+    <p:sldId id="263" r:id="rId32"/>
     <p:sldId id="288" r:id="rId33"/>
     <p:sldId id="289" r:id="rId34"/>
     <p:sldId id="290" r:id="rId35"/>
@@ -281,6 +281,93 @@
 </inkml:ink>
 </file>
 
+<file path=ppt/ink/ink5.xml><?xml version="1.0" encoding="utf-8"?>
+<inkml:ink xmlns:inkml="http://www.w3.org/2003/InkML">
+  <inkml:definitions>
+    <inkml:context xml:id="ctx0">
+      <inkml:inkSource xml:id="inkSrc0">
+        <inkml:traceFormat>
+          <inkml:channel name="X" type="integer" min="-2.14748E9" max="2.14748E9" units="cm"/>
+          <inkml:channel name="Y" type="integer" min="-2.14748E9" max="2.14748E9" units="cm"/>
+        </inkml:traceFormat>
+        <inkml:channelProperties>
+          <inkml:channelProperty channel="X" name="resolution" value="1000" units="1/cm"/>
+          <inkml:channelProperty channel="Y" name="resolution" value="1000" units="1/cm"/>
+        </inkml:channelProperties>
+      </inkml:inkSource>
+      <inkml:timestamp xml:id="ts0" timeString="2026-03-23T18:07:59.020"/>
+    </inkml:context>
+    <inkml:brush xml:id="br0">
+      <inkml:brushProperty name="width" value="0.3" units="cm"/>
+      <inkml:brushProperty name="height" value="0.6" units="cm"/>
+      <inkml:brushProperty name="color" value="#FFFC00"/>
+      <inkml:brushProperty name="tip" value="rectangle"/>
+      <inkml:brushProperty name="rasterOp" value="maskPen"/>
+      <inkml:brushProperty name="ignorePressure" value="1"/>
+    </inkml:brush>
+  </inkml:definitions>
+  <inkml:trace contextRef="#ctx0" brushRef="#br0">36 0,'-7'27,"-2"22,1 22,1 6,3 3,7-5,11-9,9-9,8-14,5-15,9-11,11-9,9-13,0-12,-4-3,-13 2</inkml:trace>
+</inkml:ink>
+</file>
+
+<file path=ppt/ink/ink6.xml><?xml version="1.0" encoding="utf-8"?>
+<inkml:ink xmlns:inkml="http://www.w3.org/2003/InkML">
+  <inkml:definitions>
+    <inkml:context xml:id="ctx0">
+      <inkml:inkSource xml:id="inkSrc0">
+        <inkml:traceFormat>
+          <inkml:channel name="X" type="integer" min="-2.14748E9" max="2.14748E9" units="cm"/>
+          <inkml:channel name="Y" type="integer" min="-2.14748E9" max="2.14748E9" units="cm"/>
+        </inkml:traceFormat>
+        <inkml:channelProperties>
+          <inkml:channelProperty channel="X" name="resolution" value="1000" units="1/cm"/>
+          <inkml:channelProperty channel="Y" name="resolution" value="1000" units="1/cm"/>
+        </inkml:channelProperties>
+      </inkml:inkSource>
+      <inkml:timestamp xml:id="ts0" timeString="2026-03-23T18:08:02.004"/>
+    </inkml:context>
+    <inkml:brush xml:id="br0">
+      <inkml:brushProperty name="width" value="0.3" units="cm"/>
+      <inkml:brushProperty name="height" value="0.6" units="cm"/>
+      <inkml:brushProperty name="color" value="#FFFC00"/>
+      <inkml:brushProperty name="tip" value="rectangle"/>
+      <inkml:brushProperty name="rasterOp" value="maskPen"/>
+      <inkml:brushProperty name="ignorePressure" value="1"/>
+    </inkml:brush>
+  </inkml:definitions>
+  <inkml:trace contextRef="#ctx0" brushRef="#br0">7591 1444,'30'1,"3"0,-1-2,0-1,0-1,37-9,-61 10,0 0,1-1,-2 0,1 0,0-1,-1 0,1-1,-1 1,0-1,-1-1,1 1,-1-1,0 0,-1-1,1 1,-1-1,-1 0,1 0,-1-1,5-13,-1-4,-2 0,0-1,-2 0,-1 1,-1-1,-1 0,-1 0,-2 0,-5-28,6 45,0 0,-1 0,-1 0,0 1,0-1,0 1,-1-1,0 1,-6-7,8 11,-1 1,0 0,0 0,0 0,0 1,0-1,0 1,-1-1,1 1,-1 0,0 0,1 1,-1-1,0 1,0 0,0 0,0 0,0 1,0-1,0 1,-8 0,3 1,-1 1,1 0,0 1,0 0,0 0,0 1,0 0,1 1,0 0,0 0,0 1,0 0,1 0,0 0,0 1,1 0,-8 12,1-1,0 0,1 2,2-1,0 1,0 1,-10 36,6 2,3 0,2 1,3 0,2 1,3-1,3 0,2 1,3-1,25 102,-23-133,1-1,1 0,1 0,2-1,1-1,1 0,1-1,1-1,1-1,1 0,1-2,1 0,36 25,-11-13,2-3,1-2,1-2,1-3,1-1,64 15,-79-25,1-2,0-2,0-2,1-1,0-2,53-3,-74-1,-1-1,0-1,-1-1,1-1,0 0,-1-1,0-1,-1 0,1-1,-2-1,1-1,-1 0,0-1,-1 0,-1-2,17-17,-2-7,-1 0,-3-2,-1-1,-1-1,-3 0,-1-2,-2 0,15-70,-11 20,-4-1,-4 0,0-116,-12 145,-2 1,-4-1,-2 1,-3 0,-2 0,-4 2,-2 0,-3 1,-2 1,-3 1,-3 1,-2 2,-3 1,-2 1,-58-64,40 58,-119-101,148 140,-2 1,0 1,-2 1,0 2,0 1,-2 1,-36-10,57 21,0 1,-1 0,1 1,0 0,-1 1,1 0,0 1,-1 0,1 1,0 0,0 1,0 0,0 0,0 1,1 1,0 0,0 1,0 0,1 0,-1 1,-14 14,-7 10,2 1,1 1,2 2,-27 46,47-72,-46 74,4 1,-67 167,95-198,2 1,3 1,2 0,3 1,2 0,-1 74,9-124,0 0,1 0,-1 0,1 0,1 0,-1-1,1 1,0 0,0-1,0 1,1-1,0 0,0 0,0 0,8 8,-8-10,0-1,0 1,0-1,0 0,1 0,-1 0,1 0,0-1,0 1,-1-1,1 0,0 0,0-1,0 1,0-1,0 0,0 0,0 0,0 0,0-1,0 1,0-1,0 0,3-2,6-2,-1 0,-1-1,1 0,-1-1,0-1,0 0,-1 0,0-1,-1 0,0 0,0-1,-1-1,-1 1,1-1,-2 0,9-20,-3 5,-1 0,-2-1,-1 0,0-1,-3 0,5-49,-8 57,-2 0,0 1,-2-1,0 0,-1 0,-1 1,-1 0,0 0,-12-27,13 38,0 0,-1 0,1 0,-2 1,1 0,-1 0,0 0,0 1,-1 0,0 0,0 0,0 1,-1 0,1 1,-1 0,-1 0,1 0,0 1,-1 0,0 1,1 0,-1 0,-12 0,6 2,0 1,1 0,-1 1,0 1,1 0,-1 1,1 1,0 0,1 1,-1 0,1 1,0 0,1 2,-14 9,-20 18,1 1,2 2,2 3,1 0,2 3,-57 89,39-42,5 2,-74 186,80-152,-42 184,71-232,3 1,4 0,1 128,8-186,2 1,0-1,2 0,0 0,9 25,-11-43,0 1,0-1,0 1,1-1,0 0,0 0,0 0,1 0,-1-1,1 1,0-1,1 0,-1 0,1 0,0-1,0 0,0 0,0 0,0 0,1-1,-1 0,1 0,-1 0,11 1,-4-3,-1 0,1 0,0-1,-1 0,1-1,-1-1,1 0,-1 0,0-1,0-1,-1 0,1 0,12-9,9-8,-1-1,-2-1,27-28,43-51,-5-5,-5-4,-5-4,-5-3,108-221,-182 329,19-30,-24 41,0-1,0 1,1 0,-1 0,0-1,0 1,0 0,1 0,-1 0,0-1,0 1,1 0,-1 0,0 0,0 0,1 0,-1 0,0-1,1 1,-1 0,0 0,1 0,-1 0,0 0,0 0,1 0,-1 0,0 0,1 0,-1 1,0-1,1 0,-1 0,0 0,0 0,1 0,-1 0,0 1,1-1,6 25,0 69,-11 165,-1-81,4-129,13 400,-7-394,3-1,2 1,2-2,3 0,2 0,26 54,-33-86,1-1,1 0,1-1,0 0,2-1,0-1,0 0,32 25,-34-33,0 0,1-1,0 0,1-1,-1 0,2-1,-1-1,0-1,1 0,0-1,0 0,0-2,17 1,-7-3,1-1,-1-1,0-2,0 0,0-2,-1 0,0-2,0-1,-1-1,-1-1,0-1,0-1,-1-1,-1-1,0-1,-2 0,28-32,-10 5,-2-1,-2-3,-2 0,-2-2,-3-1,-1-1,17-57,-17 35,-4 0,-3-1,16-152,-30 170,-3 0,-2 0,-2 0,-3 1,-2 0,-17-58,18 88,-1 0,-1 1,-2 0,0 1,-2 0,-1 0,-17-22,24 38,0-1,0 1,-1 0,0 1,-1 0,0 0,0 1,0 0,-1 1,1 0,-1 0,-1 1,1 0,-1 1,1 0,-1 1,0 0,0 1,0 0,-15 1,-12 4,1 2,0 2,0 2,1 1,0 1,-57 30,-17 13,3 4,3 5,-142 114,77-36,-154 167,283-268,21-24,1 2,0 0,1 1,1 1,-18 30,34-50,0-1,0 0,0 0,0 0,0 0,-1 0,1 0,0 0,0 0,0 0,0 0,0 1,0-1,0 0,0 0,-1 0,1 0,0 0,0 0,0 0,0 1,0-1,0 0,0 0,0 0,0 0,0 0,0 1,0-1,0 0,0 0,0 0,0 0,0 0,0 1,0-1,0 0,0 0,0 0,0 0,1 0,-1 0,0 1,0-1,0 0,0 0,0 0,0 0,0 0,0 0,1 0,-1 0,0 1,0-1,0 0,0 0,0 0,0 0,1 0,-1 0,0 0,0 0,0 0,16-10,25-29,0-2,-3-2,47-67,-54 69,4-5,58-100,-89 139,-1 0,0 0,0-1,0 1,2-15,-5 21,1 0,-1 1,0-1,0 1,1-1,-1 1,0-1,0 0,0 1,0-1,0 1,0-1,0 0,0 1,0-1,0 1,0-1,0 0,0 1,-1-1,1 1,0-1,0 1,-1-1,1 0,0 1,-1-1,1 1,-1 0,1-1,0 1,-1-1,1 1,-1 0,1-1,-1 1,1 0,-1-1,0 1,1 0,-1 0,1-1,-1 1,1 0,-1 0,0 0,1 0,-1 0,0 0,1 0,-1 0,1 0,-1 0,0 1,1-1,-1 0,1 0,-1 0,1 1,-1-1,0 1,-42 30,-67 74,-175 218,274-310,-68 84,-90 144,164-233,0 0,1 0,0 0,1 0,-5 18,8-26,0 0,0 0,0 1,0-1,0 0,0 1,0-1,0 0,0 1,0-1,0 0,0 1,0-1,0 0,0 1,0-1,0 0,0 0,1 1,-1-1,0 0,0 1,0-1,0 0,1 0,-1 1,0-1,0 0,1 0,-1 0,0 1,0-1,1 0,-1 0,0 0,1 0,-1 0,0 0,0 1,1-1,-1 0,0 0,1 0,-1 0,0 0,1 0,0 0,31-19,18-28,-2-1,67-89,-104 123,88-110,101-168,-166 234,-2-1,-3-1,-3-2,-2-1,26-113,-49 173,0 1,-1-1,0 1,1-1,-1 1,0-1,0 1,0-1,0 0,-1 1,1-1,-2-4,1 7,1-1,0 1,-1-1,1 1,-1-1,1 1,-1-1,1 1,-1-1,0 1,1 0,-1-1,1 1,-1 0,0 0,1-1,-1 1,0 0,1 0,-1 0,-1 0,-26 6,0 8,1 0,-30 23,-157 111,-126 84,-154 97,-145 98,-117 79,-718 508,49 85,908-646,80-50,78-50,70-43,-281 424,522-663</inkml:trace>
+</inkml:ink>
+</file>
+
+<file path=ppt/ink/ink7.xml><?xml version="1.0" encoding="utf-8"?>
+<inkml:ink xmlns:inkml="http://www.w3.org/2003/InkML">
+  <inkml:definitions>
+    <inkml:context xml:id="ctx0">
+      <inkml:inkSource xml:id="inkSrc0">
+        <inkml:traceFormat>
+          <inkml:channel name="X" type="integer" min="-2.14748E9" max="2.14748E9" units="cm"/>
+          <inkml:channel name="Y" type="integer" min="-2.14748E9" max="2.14748E9" units="cm"/>
+        </inkml:traceFormat>
+        <inkml:channelProperties>
+          <inkml:channelProperty channel="X" name="resolution" value="1000" units="1/cm"/>
+          <inkml:channelProperty channel="Y" name="resolution" value="1000" units="1/cm"/>
+        </inkml:channelProperties>
+      </inkml:inkSource>
+      <inkml:timestamp xml:id="ts0" timeString="2026-03-23T18:10:56.248"/>
+    </inkml:context>
+    <inkml:brush xml:id="br0">
+      <inkml:brushProperty name="width" value="0.3" units="cm"/>
+      <inkml:brushProperty name="height" value="0.6" units="cm"/>
+      <inkml:brushProperty name="color" value="#FFFC00"/>
+      <inkml:brushProperty name="tip" value="rectangle"/>
+      <inkml:brushProperty name="rasterOp" value="maskPen"/>
+      <inkml:brushProperty name="ignorePressure" value="1"/>
+    </inkml:brush>
+  </inkml:definitions>
+  <inkml:trace contextRef="#ctx0" brushRef="#br0">1 1,'0'0</inkml:trace>
+</inkml:ink>
+</file>
+
 <file path=ppt/slideLayouts/slideLayout1.xml><?xml version="1.0" encoding="utf-8"?>
 <p:sldLayout xmlns:a="http://schemas.openxmlformats.org/drawingml/2006/main" xmlns:r="http://schemas.openxmlformats.org/officeDocument/2006/relationships" xmlns:p="http://schemas.openxmlformats.org/presentationml/2006/main" type="title" preserve="1">
   <p:cSld name="Diapositiva de título">
@@ -430,7 +517,7 @@
           <a:p>
             <a:fld id="{149D4704-9F6E-43D2-B3DF-484A4E6A9E7A}" type="datetimeFigureOut">
               <a:rPr lang="es-GT" smtClean="0"/>
-              <a:t>22/03/2026</a:t>
+              <a:t>23/03/2026</a:t>
             </a:fld>
             <a:endParaRPr lang="es-GT"/>
           </a:p>
@@ -630,7 +717,7 @@
           <a:p>
             <a:fld id="{149D4704-9F6E-43D2-B3DF-484A4E6A9E7A}" type="datetimeFigureOut">
               <a:rPr lang="es-GT" smtClean="0"/>
-              <a:t>22/03/2026</a:t>
+              <a:t>23/03/2026</a:t>
             </a:fld>
             <a:endParaRPr lang="es-GT"/>
           </a:p>
@@ -840,7 +927,7 @@
           <a:p>
             <a:fld id="{149D4704-9F6E-43D2-B3DF-484A4E6A9E7A}" type="datetimeFigureOut">
               <a:rPr lang="es-GT" smtClean="0"/>
-              <a:t>22/03/2026</a:t>
+              <a:t>23/03/2026</a:t>
             </a:fld>
             <a:endParaRPr lang="es-GT"/>
           </a:p>
@@ -1040,7 +1127,7 @@
           <a:p>
             <a:fld id="{149D4704-9F6E-43D2-B3DF-484A4E6A9E7A}" type="datetimeFigureOut">
               <a:rPr lang="es-GT" smtClean="0"/>
-              <a:t>22/03/2026</a:t>
+              <a:t>23/03/2026</a:t>
             </a:fld>
             <a:endParaRPr lang="es-GT"/>
           </a:p>
@@ -1316,7 +1403,7 @@
           <a:p>
             <a:fld id="{149D4704-9F6E-43D2-B3DF-484A4E6A9E7A}" type="datetimeFigureOut">
               <a:rPr lang="es-GT" smtClean="0"/>
-              <a:t>22/03/2026</a:t>
+              <a:t>23/03/2026</a:t>
             </a:fld>
             <a:endParaRPr lang="es-GT"/>
           </a:p>
@@ -1584,7 +1671,7 @@
           <a:p>
             <a:fld id="{149D4704-9F6E-43D2-B3DF-484A4E6A9E7A}" type="datetimeFigureOut">
               <a:rPr lang="es-GT" smtClean="0"/>
-              <a:t>22/03/2026</a:t>
+              <a:t>23/03/2026</a:t>
             </a:fld>
             <a:endParaRPr lang="es-GT"/>
           </a:p>
@@ -1999,7 +2086,7 @@
           <a:p>
             <a:fld id="{149D4704-9F6E-43D2-B3DF-484A4E6A9E7A}" type="datetimeFigureOut">
               <a:rPr lang="es-GT" smtClean="0"/>
-              <a:t>22/03/2026</a:t>
+              <a:t>23/03/2026</a:t>
             </a:fld>
             <a:endParaRPr lang="es-GT"/>
           </a:p>
@@ -2141,7 +2228,7 @@
           <a:p>
             <a:fld id="{149D4704-9F6E-43D2-B3DF-484A4E6A9E7A}" type="datetimeFigureOut">
               <a:rPr lang="es-GT" smtClean="0"/>
-              <a:t>22/03/2026</a:t>
+              <a:t>23/03/2026</a:t>
             </a:fld>
             <a:endParaRPr lang="es-GT"/>
           </a:p>
@@ -2254,7 +2341,7 @@
           <a:p>
             <a:fld id="{149D4704-9F6E-43D2-B3DF-484A4E6A9E7A}" type="datetimeFigureOut">
               <a:rPr lang="es-GT" smtClean="0"/>
-              <a:t>22/03/2026</a:t>
+              <a:t>23/03/2026</a:t>
             </a:fld>
             <a:endParaRPr lang="es-GT"/>
           </a:p>
@@ -2567,7 +2654,7 @@
           <a:p>
             <a:fld id="{149D4704-9F6E-43D2-B3DF-484A4E6A9E7A}" type="datetimeFigureOut">
               <a:rPr lang="es-GT" smtClean="0"/>
-              <a:t>22/03/2026</a:t>
+              <a:t>23/03/2026</a:t>
             </a:fld>
             <a:endParaRPr lang="es-GT"/>
           </a:p>
@@ -2856,7 +2943,7 @@
           <a:p>
             <a:fld id="{149D4704-9F6E-43D2-B3DF-484A4E6A9E7A}" type="datetimeFigureOut">
               <a:rPr lang="es-GT" smtClean="0"/>
-              <a:t>22/03/2026</a:t>
+              <a:t>23/03/2026</a:t>
             </a:fld>
             <a:endParaRPr lang="es-GT"/>
           </a:p>
@@ -3099,7 +3186,7 @@
           <a:p>
             <a:fld id="{149D4704-9F6E-43D2-B3DF-484A4E6A9E7A}" type="datetimeFigureOut">
               <a:rPr lang="es-GT" smtClean="0"/>
-              <a:t>22/03/2026</a:t>
+              <a:t>23/03/2026</a:t>
             </a:fld>
             <a:endParaRPr lang="es-GT"/>
           </a:p>
@@ -4109,6 +4196,36 @@
           </a:p>
         </p:txBody>
       </p:sp>
+      <p:pic>
+        <p:nvPicPr>
+          <p:cNvPr id="4" name="Imagen 3">
+            <a:extLst>
+              <a:ext uri="{FF2B5EF4-FFF2-40B4-BE49-F238E27FC236}">
+                <a16:creationId xmlns:a16="http://schemas.microsoft.com/office/drawing/2014/main" id="{A099C80A-13C5-393D-6FB1-D1FD7332988B}"/>
+              </a:ext>
+            </a:extLst>
+          </p:cNvPr>
+          <p:cNvPicPr>
+            <a:picLocks noChangeAspect="1"/>
+          </p:cNvPicPr>
+          <p:nvPr/>
+        </p:nvPicPr>
+        <p:blipFill>
+          <a:blip r:embed="rId2"/>
+          <a:stretch>
+            <a:fillRect/>
+          </a:stretch>
+        </p:blipFill>
+        <p:spPr>
+          <a:xfrm>
+            <a:off x="2818942" y="2366814"/>
+            <a:ext cx="6554115" cy="2124371"/>
+          </a:xfrm>
+          <a:prstGeom prst="rect">
+            <a:avLst/>
+          </a:prstGeom>
+        </p:spPr>
+      </p:pic>
     </p:spTree>
     <p:extLst>
       <p:ext uri="{BB962C8B-B14F-4D97-AF65-F5344CB8AC3E}">
@@ -4164,6 +4281,36 @@
           </a:p>
         </p:txBody>
       </p:sp>
+      <p:pic>
+        <p:nvPicPr>
+          <p:cNvPr id="4" name="Imagen 3">
+            <a:extLst>
+              <a:ext uri="{FF2B5EF4-FFF2-40B4-BE49-F238E27FC236}">
+                <a16:creationId xmlns:a16="http://schemas.microsoft.com/office/drawing/2014/main" id="{ECF6A798-2812-8771-31F0-C40FB764627A}"/>
+              </a:ext>
+            </a:extLst>
+          </p:cNvPr>
+          <p:cNvPicPr>
+            <a:picLocks noChangeAspect="1"/>
+          </p:cNvPicPr>
+          <p:nvPr/>
+        </p:nvPicPr>
+        <p:blipFill>
+          <a:blip r:embed="rId2"/>
+          <a:stretch>
+            <a:fillRect/>
+          </a:stretch>
+        </p:blipFill>
+        <p:spPr>
+          <a:xfrm>
+            <a:off x="1961573" y="1304628"/>
+            <a:ext cx="8268854" cy="4248743"/>
+          </a:xfrm>
+          <a:prstGeom prst="rect">
+            <a:avLst/>
+          </a:prstGeom>
+        </p:spPr>
+      </p:pic>
     </p:spTree>
     <p:extLst>
       <p:ext uri="{BB962C8B-B14F-4D97-AF65-F5344CB8AC3E}">
@@ -4215,10 +4362,51 @@
           <a:bodyPr/>
           <a:lstStyle/>
           <a:p>
-            <a:endParaRPr lang="es-GT"/>
-          </a:p>
-        </p:txBody>
-      </p:sp>
+            <a:r>
+              <a:rPr lang="es-GT" dirty="0"/>
+              <a:t>Doble </a:t>
+            </a:r>
+            <a:r>
+              <a:rPr lang="es-GT" dirty="0" err="1"/>
+              <a:t>click</a:t>
+            </a:r>
+            <a:r>
+              <a:rPr lang="es-GT" dirty="0"/>
+              <a:t> </a:t>
+            </a:r>
+          </a:p>
+        </p:txBody>
+      </p:sp>
+      <p:pic>
+        <p:nvPicPr>
+          <p:cNvPr id="4" name="Imagen 3">
+            <a:extLst>
+              <a:ext uri="{FF2B5EF4-FFF2-40B4-BE49-F238E27FC236}">
+                <a16:creationId xmlns:a16="http://schemas.microsoft.com/office/drawing/2014/main" id="{6253F7F9-76FE-698C-52A1-CBBE85C91B40}"/>
+              </a:ext>
+            </a:extLst>
+          </p:cNvPr>
+          <p:cNvPicPr>
+            <a:picLocks noChangeAspect="1"/>
+          </p:cNvPicPr>
+          <p:nvPr/>
+        </p:nvPicPr>
+        <p:blipFill>
+          <a:blip r:embed="rId2"/>
+          <a:stretch>
+            <a:fillRect/>
+          </a:stretch>
+        </p:blipFill>
+        <p:spPr>
+          <a:xfrm>
+            <a:off x="3209405" y="1891658"/>
+            <a:ext cx="6392167" cy="4601217"/>
+          </a:xfrm>
+          <a:prstGeom prst="rect">
+            <a:avLst/>
+          </a:prstGeom>
+        </p:spPr>
+      </p:pic>
     </p:spTree>
     <p:extLst>
       <p:ext uri="{BB962C8B-B14F-4D97-AF65-F5344CB8AC3E}">
@@ -4270,10 +4458,43 @@
           <a:bodyPr/>
           <a:lstStyle/>
           <a:p>
-            <a:endParaRPr lang="es-GT"/>
-          </a:p>
-        </p:txBody>
-      </p:sp>
+            <a:r>
+              <a:rPr lang="es-GT" dirty="0"/>
+              <a:t>Ok, en comedores </a:t>
+            </a:r>
+          </a:p>
+        </p:txBody>
+      </p:sp>
+      <p:pic>
+        <p:nvPicPr>
+          <p:cNvPr id="4" name="Imagen 3">
+            <a:extLst>
+              <a:ext uri="{FF2B5EF4-FFF2-40B4-BE49-F238E27FC236}">
+                <a16:creationId xmlns:a16="http://schemas.microsoft.com/office/drawing/2014/main" id="{297B29DF-B3D6-BF4F-45EA-1F1480BDCBFD}"/>
+              </a:ext>
+            </a:extLst>
+          </p:cNvPr>
+          <p:cNvPicPr>
+            <a:picLocks noChangeAspect="1"/>
+          </p:cNvPicPr>
+          <p:nvPr/>
+        </p:nvPicPr>
+        <p:blipFill>
+          <a:blip r:embed="rId2"/>
+          <a:stretch>
+            <a:fillRect/>
+          </a:stretch>
+        </p:blipFill>
+        <p:spPr>
+          <a:xfrm>
+            <a:off x="838200" y="1659036"/>
+            <a:ext cx="10818055" cy="5421635"/>
+          </a:xfrm>
+          <a:prstGeom prst="rect">
+            <a:avLst/>
+          </a:prstGeom>
+        </p:spPr>
+      </p:pic>
     </p:spTree>
     <p:extLst>
       <p:ext uri="{BB962C8B-B14F-4D97-AF65-F5344CB8AC3E}">
@@ -4410,10 +4631,55 @@
           <a:bodyPr/>
           <a:lstStyle/>
           <a:p>
-            <a:endParaRPr lang="es-GT"/>
-          </a:p>
-        </p:txBody>
-      </p:sp>
+            <a:r>
+              <a:rPr lang="es-GT" dirty="0" err="1"/>
+              <a:t>Hbilitar</a:t>
+            </a:r>
+            <a:r>
+              <a:rPr lang="es-GT" dirty="0"/>
+              <a:t> </a:t>
+            </a:r>
+            <a:r>
+              <a:rPr lang="es-GT" dirty="0" err="1"/>
+              <a:t>visiviliti</a:t>
+            </a:r>
+            <a:r>
+              <a:rPr lang="es-GT" dirty="0"/>
+              <a:t> </a:t>
+            </a:r>
+          </a:p>
+        </p:txBody>
+      </p:sp>
+      <p:pic>
+        <p:nvPicPr>
+          <p:cNvPr id="4" name="Imagen 3">
+            <a:extLst>
+              <a:ext uri="{FF2B5EF4-FFF2-40B4-BE49-F238E27FC236}">
+                <a16:creationId xmlns:a16="http://schemas.microsoft.com/office/drawing/2014/main" id="{6EE4AA0A-BBBC-AB80-A3FF-CE054DFB7016}"/>
+              </a:ext>
+            </a:extLst>
+          </p:cNvPr>
+          <p:cNvPicPr>
+            <a:picLocks noChangeAspect="1"/>
+          </p:cNvPicPr>
+          <p:nvPr/>
+        </p:nvPicPr>
+        <p:blipFill>
+          <a:blip r:embed="rId2"/>
+          <a:stretch>
+            <a:fillRect/>
+          </a:stretch>
+        </p:blipFill>
+        <p:spPr>
+          <a:xfrm>
+            <a:off x="931996" y="1508102"/>
+            <a:ext cx="10421804" cy="5220429"/>
+          </a:xfrm>
+          <a:prstGeom prst="rect">
+            <a:avLst/>
+          </a:prstGeom>
+        </p:spPr>
+      </p:pic>
     </p:spTree>
     <p:extLst>
       <p:ext uri="{BB962C8B-B14F-4D97-AF65-F5344CB8AC3E}">
@@ -4449,61 +4715,6 @@
           <p:cNvPr id="2" name="Título 1">
             <a:extLst>
               <a:ext uri="{FF2B5EF4-FFF2-40B4-BE49-F238E27FC236}">
-                <a16:creationId xmlns:a16="http://schemas.microsoft.com/office/drawing/2014/main" id="{333B42A4-99BD-B8BA-4EF5-AB3859A29ED3}"/>
-              </a:ext>
-            </a:extLst>
-          </p:cNvPr>
-          <p:cNvSpPr>
-            <a:spLocks noGrp="1"/>
-          </p:cNvSpPr>
-          <p:nvPr>
-            <p:ph type="title"/>
-          </p:nvPr>
-        </p:nvSpPr>
-        <p:spPr/>
-        <p:txBody>
-          <a:bodyPr/>
-          <a:lstStyle/>
-          <a:p>
-            <a:endParaRPr lang="es-GT"/>
-          </a:p>
-        </p:txBody>
-      </p:sp>
-    </p:spTree>
-    <p:extLst>
-      <p:ext uri="{BB962C8B-B14F-4D97-AF65-F5344CB8AC3E}">
-        <p14:creationId xmlns:p14="http://schemas.microsoft.com/office/powerpoint/2010/main" val="728492847"/>
-      </p:ext>
-    </p:extLst>
-  </p:cSld>
-  <p:clrMapOvr>
-    <a:masterClrMapping/>
-  </p:clrMapOvr>
-</p:sld>
-</file>
-
-<file path=ppt/slides/slide22.xml><?xml version="1.0" encoding="utf-8"?>
-<p:sld xmlns:a="http://schemas.openxmlformats.org/drawingml/2006/main" xmlns:r="http://schemas.openxmlformats.org/officeDocument/2006/relationships" xmlns:p="http://schemas.openxmlformats.org/presentationml/2006/main">
-  <p:cSld>
-    <p:spTree>
-      <p:nvGrpSpPr>
-        <p:cNvPr id="1" name=""/>
-        <p:cNvGrpSpPr/>
-        <p:nvPr/>
-      </p:nvGrpSpPr>
-      <p:grpSpPr>
-        <a:xfrm>
-          <a:off x="0" y="0"/>
-          <a:ext cx="0" cy="0"/>
-          <a:chOff x="0" y="0"/>
-          <a:chExt cx="0" cy="0"/>
-        </a:xfrm>
-      </p:grpSpPr>
-      <p:sp>
-        <p:nvSpPr>
-          <p:cNvPr id="2" name="Título 1">
-            <a:extLst>
-              <a:ext uri="{FF2B5EF4-FFF2-40B4-BE49-F238E27FC236}">
                 <a16:creationId xmlns:a16="http://schemas.microsoft.com/office/drawing/2014/main" id="{74789727-1C8D-4F0A-EEBB-12C4FCB8053B}"/>
               </a:ext>
             </a:extLst>
@@ -4537,7 +4748,7 @@
 </p:sld>
 </file>
 
-<file path=ppt/slides/slide23.xml><?xml version="1.0" encoding="utf-8"?>
+<file path=ppt/slides/slide22.xml><?xml version="1.0" encoding="utf-8"?>
 <p:sld xmlns:a="http://schemas.openxmlformats.org/drawingml/2006/main" xmlns:r="http://schemas.openxmlformats.org/officeDocument/2006/relationships" xmlns:p="http://schemas.openxmlformats.org/presentationml/2006/main">
   <p:cSld>
     <p:spTree>
@@ -4622,7 +4833,7 @@
 </p:sld>
 </file>
 
-<file path=ppt/slides/slide24.xml><?xml version="1.0" encoding="utf-8"?>
+<file path=ppt/slides/slide23.xml><?xml version="1.0" encoding="utf-8"?>
 <p:sld xmlns:a="http://schemas.openxmlformats.org/drawingml/2006/main" xmlns:r="http://schemas.openxmlformats.org/officeDocument/2006/relationships" xmlns:p="http://schemas.openxmlformats.org/presentationml/2006/main">
   <p:cSld>
     <p:spTree>
@@ -4941,7 +5152,7 @@
 </p:sld>
 </file>
 
-<file path=ppt/slides/slide25.xml><?xml version="1.0" encoding="utf-8"?>
+<file path=ppt/slides/slide24.xml><?xml version="1.0" encoding="utf-8"?>
 <p:sld xmlns:a="http://schemas.openxmlformats.org/drawingml/2006/main" xmlns:r="http://schemas.openxmlformats.org/officeDocument/2006/relationships" xmlns:p="http://schemas.openxmlformats.org/presentationml/2006/main">
   <p:cSld>
     <p:spTree>
@@ -5030,7 +5241,7 @@
 </p:sld>
 </file>
 
-<file path=ppt/slides/slide26.xml><?xml version="1.0" encoding="utf-8"?>
+<file path=ppt/slides/slide25.xml><?xml version="1.0" encoding="utf-8"?>
 <p:sld xmlns:a="http://schemas.openxmlformats.org/drawingml/2006/main" xmlns:r="http://schemas.openxmlformats.org/officeDocument/2006/relationships" xmlns:p="http://schemas.openxmlformats.org/presentationml/2006/main">
   <p:cSld>
     <p:spTree>
@@ -5118,7 +5329,7 @@
 </p:sld>
 </file>
 
-<file path=ppt/slides/slide27.xml><?xml version="1.0" encoding="utf-8"?>
+<file path=ppt/slides/slide26.xml><?xml version="1.0" encoding="utf-8"?>
 <p:sld xmlns:a="http://schemas.openxmlformats.org/drawingml/2006/main" xmlns:r="http://schemas.openxmlformats.org/officeDocument/2006/relationships" xmlns:p="http://schemas.openxmlformats.org/presentationml/2006/main">
   <p:cSld>
     <p:spTree>
@@ -5176,7 +5387,7 @@
 </p:sld>
 </file>
 
-<file path=ppt/slides/slide28.xml><?xml version="1.0" encoding="utf-8"?>
+<file path=ppt/slides/slide27.xml><?xml version="1.0" encoding="utf-8"?>
 <p:sld xmlns:a="http://schemas.openxmlformats.org/drawingml/2006/main" xmlns:r="http://schemas.openxmlformats.org/officeDocument/2006/relationships" xmlns:p="http://schemas.openxmlformats.org/presentationml/2006/main">
   <p:cSld>
     <p:spTree>
@@ -5264,7 +5475,7 @@
 </p:sld>
 </file>
 
-<file path=ppt/slides/slide29.xml><?xml version="1.0" encoding="utf-8"?>
+<file path=ppt/slides/slide28.xml><?xml version="1.0" encoding="utf-8"?>
 <p:sld xmlns:a="http://schemas.openxmlformats.org/drawingml/2006/main" xmlns:r="http://schemas.openxmlformats.org/officeDocument/2006/relationships" xmlns:p="http://schemas.openxmlformats.org/presentationml/2006/main">
   <p:cSld>
     <p:spTree>
@@ -5340,6 +5551,94 @@
     <p:extLst>
       <p:ext uri="{BB962C8B-B14F-4D97-AF65-F5344CB8AC3E}">
         <p14:creationId xmlns:p14="http://schemas.microsoft.com/office/powerpoint/2010/main" val="53185839"/>
+      </p:ext>
+    </p:extLst>
+  </p:cSld>
+  <p:clrMapOvr>
+    <a:masterClrMapping/>
+  </p:clrMapOvr>
+</p:sld>
+</file>
+
+<file path=ppt/slides/slide29.xml><?xml version="1.0" encoding="utf-8"?>
+<p:sld xmlns:a="http://schemas.openxmlformats.org/drawingml/2006/main" xmlns:r="http://schemas.openxmlformats.org/officeDocument/2006/relationships" xmlns:p="http://schemas.openxmlformats.org/presentationml/2006/main">
+  <p:cSld>
+    <p:spTree>
+      <p:nvGrpSpPr>
+        <p:cNvPr id="1" name=""/>
+        <p:cNvGrpSpPr/>
+        <p:nvPr/>
+      </p:nvGrpSpPr>
+      <p:grpSpPr>
+        <a:xfrm>
+          <a:off x="0" y="0"/>
+          <a:ext cx="0" cy="0"/>
+          <a:chOff x="0" y="0"/>
+          <a:chExt cx="0" cy="0"/>
+        </a:xfrm>
+      </p:grpSpPr>
+      <p:sp>
+        <p:nvSpPr>
+          <p:cNvPr id="2" name="Título 1">
+            <a:extLst>
+              <a:ext uri="{FF2B5EF4-FFF2-40B4-BE49-F238E27FC236}">
+                <a16:creationId xmlns:a16="http://schemas.microsoft.com/office/drawing/2014/main" id="{4271DD81-FDD3-28F0-0772-026801F7FDF2}"/>
+              </a:ext>
+            </a:extLst>
+          </p:cNvPr>
+          <p:cNvSpPr>
+            <a:spLocks noGrp="1"/>
+          </p:cNvSpPr>
+          <p:nvPr>
+            <p:ph type="title"/>
+          </p:nvPr>
+        </p:nvSpPr>
+        <p:spPr/>
+        <p:txBody>
+          <a:bodyPr/>
+          <a:lstStyle/>
+          <a:p>
+            <a:r>
+              <a:rPr lang="es-GT" dirty="0"/>
+              <a:t>DOBLE CLICK</a:t>
+            </a:r>
+          </a:p>
+        </p:txBody>
+      </p:sp>
+      <p:pic>
+        <p:nvPicPr>
+          <p:cNvPr id="4" name="Imagen 3">
+            <a:extLst>
+              <a:ext uri="{FF2B5EF4-FFF2-40B4-BE49-F238E27FC236}">
+                <a16:creationId xmlns:a16="http://schemas.microsoft.com/office/drawing/2014/main" id="{9E4DDBCF-A885-1F76-75A0-DE72DC123EFE}"/>
+              </a:ext>
+            </a:extLst>
+          </p:cNvPr>
+          <p:cNvPicPr>
+            <a:picLocks noChangeAspect="1"/>
+          </p:cNvPicPr>
+          <p:nvPr/>
+        </p:nvPicPr>
+        <p:blipFill>
+          <a:blip r:embed="rId2"/>
+          <a:stretch>
+            <a:fillRect/>
+          </a:stretch>
+        </p:blipFill>
+        <p:spPr>
+          <a:xfrm>
+            <a:off x="2799890" y="1476102"/>
+            <a:ext cx="6592220" cy="3905795"/>
+          </a:xfrm>
+          <a:prstGeom prst="rect">
+            <a:avLst/>
+          </a:prstGeom>
+        </p:spPr>
+      </p:pic>
+    </p:spTree>
+    <p:extLst>
+      <p:ext uri="{BB962C8B-B14F-4D97-AF65-F5344CB8AC3E}">
+        <p14:creationId xmlns:p14="http://schemas.microsoft.com/office/powerpoint/2010/main" val="1014756198"/>
       </p:ext>
     </p:extLst>
   </p:cSld>
@@ -5456,94 +5755,6 @@
           <p:cNvPr id="2" name="Título 1">
             <a:extLst>
               <a:ext uri="{FF2B5EF4-FFF2-40B4-BE49-F238E27FC236}">
-                <a16:creationId xmlns:a16="http://schemas.microsoft.com/office/drawing/2014/main" id="{4271DD81-FDD3-28F0-0772-026801F7FDF2}"/>
-              </a:ext>
-            </a:extLst>
-          </p:cNvPr>
-          <p:cNvSpPr>
-            <a:spLocks noGrp="1"/>
-          </p:cNvSpPr>
-          <p:nvPr>
-            <p:ph type="title"/>
-          </p:nvPr>
-        </p:nvSpPr>
-        <p:spPr/>
-        <p:txBody>
-          <a:bodyPr/>
-          <a:lstStyle/>
-          <a:p>
-            <a:r>
-              <a:rPr lang="es-GT" dirty="0"/>
-              <a:t>DOBLE CLICK</a:t>
-            </a:r>
-          </a:p>
-        </p:txBody>
-      </p:sp>
-      <p:pic>
-        <p:nvPicPr>
-          <p:cNvPr id="4" name="Imagen 3">
-            <a:extLst>
-              <a:ext uri="{FF2B5EF4-FFF2-40B4-BE49-F238E27FC236}">
-                <a16:creationId xmlns:a16="http://schemas.microsoft.com/office/drawing/2014/main" id="{9E4DDBCF-A885-1F76-75A0-DE72DC123EFE}"/>
-              </a:ext>
-            </a:extLst>
-          </p:cNvPr>
-          <p:cNvPicPr>
-            <a:picLocks noChangeAspect="1"/>
-          </p:cNvPicPr>
-          <p:nvPr/>
-        </p:nvPicPr>
-        <p:blipFill>
-          <a:blip r:embed="rId2"/>
-          <a:stretch>
-            <a:fillRect/>
-          </a:stretch>
-        </p:blipFill>
-        <p:spPr>
-          <a:xfrm>
-            <a:off x="2799890" y="1476102"/>
-            <a:ext cx="6592220" cy="3905795"/>
-          </a:xfrm>
-          <a:prstGeom prst="rect">
-            <a:avLst/>
-          </a:prstGeom>
-        </p:spPr>
-      </p:pic>
-    </p:spTree>
-    <p:extLst>
-      <p:ext uri="{BB962C8B-B14F-4D97-AF65-F5344CB8AC3E}">
-        <p14:creationId xmlns:p14="http://schemas.microsoft.com/office/powerpoint/2010/main" val="1014756198"/>
-      </p:ext>
-    </p:extLst>
-  </p:cSld>
-  <p:clrMapOvr>
-    <a:masterClrMapping/>
-  </p:clrMapOvr>
-</p:sld>
-</file>
-
-<file path=ppt/slides/slide31.xml><?xml version="1.0" encoding="utf-8"?>
-<p:sld xmlns:a="http://schemas.openxmlformats.org/drawingml/2006/main" xmlns:r="http://schemas.openxmlformats.org/officeDocument/2006/relationships" xmlns:p="http://schemas.openxmlformats.org/presentationml/2006/main">
-  <p:cSld>
-    <p:spTree>
-      <p:nvGrpSpPr>
-        <p:cNvPr id="1" name=""/>
-        <p:cNvGrpSpPr/>
-        <p:nvPr/>
-      </p:nvGrpSpPr>
-      <p:grpSpPr>
-        <a:xfrm>
-          <a:off x="0" y="0"/>
-          <a:ext cx="0" cy="0"/>
-          <a:chOff x="0" y="0"/>
-          <a:chExt cx="0" cy="0"/>
-        </a:xfrm>
-      </p:grpSpPr>
-      <p:sp>
-        <p:nvSpPr>
-          <p:cNvPr id="2" name="Título 1">
-            <a:extLst>
-              <a:ext uri="{FF2B5EF4-FFF2-40B4-BE49-F238E27FC236}">
                 <a16:creationId xmlns:a16="http://schemas.microsoft.com/office/drawing/2014/main" id="{582499D8-57F6-7E72-7A84-F03B6DA56545}"/>
               </a:ext>
             </a:extLst>
@@ -5607,6 +5818,193 @@
 </p:sld>
 </file>
 
+<file path=ppt/slides/slide31.xml><?xml version="1.0" encoding="utf-8"?>
+<p:sld xmlns:a="http://schemas.openxmlformats.org/drawingml/2006/main" xmlns:r="http://schemas.openxmlformats.org/officeDocument/2006/relationships" xmlns:p="http://schemas.openxmlformats.org/presentationml/2006/main">
+  <p:cSld>
+    <p:spTree>
+      <p:nvGrpSpPr>
+        <p:cNvPr id="1" name=""/>
+        <p:cNvGrpSpPr/>
+        <p:nvPr/>
+      </p:nvGrpSpPr>
+      <p:grpSpPr>
+        <a:xfrm>
+          <a:off x="0" y="0"/>
+          <a:ext cx="0" cy="0"/>
+          <a:chOff x="0" y="0"/>
+          <a:chExt cx="0" cy="0"/>
+        </a:xfrm>
+      </p:grpSpPr>
+      <p:sp>
+        <p:nvSpPr>
+          <p:cNvPr id="2" name="Título 1">
+            <a:extLst>
+              <a:ext uri="{FF2B5EF4-FFF2-40B4-BE49-F238E27FC236}">
+                <a16:creationId xmlns:a16="http://schemas.microsoft.com/office/drawing/2014/main" id="{333B42A4-99BD-B8BA-4EF5-AB3859A29ED3}"/>
+              </a:ext>
+            </a:extLst>
+          </p:cNvPr>
+          <p:cNvSpPr>
+            <a:spLocks noGrp="1"/>
+          </p:cNvSpPr>
+          <p:nvPr>
+            <p:ph type="title"/>
+          </p:nvPr>
+        </p:nvSpPr>
+        <p:spPr/>
+        <p:txBody>
+          <a:bodyPr/>
+          <a:lstStyle/>
+          <a:p>
+            <a:endParaRPr lang="es-GT"/>
+          </a:p>
+        </p:txBody>
+      </p:sp>
+      <p:pic>
+        <p:nvPicPr>
+          <p:cNvPr id="4" name="Imagen 3">
+            <a:extLst>
+              <a:ext uri="{FF2B5EF4-FFF2-40B4-BE49-F238E27FC236}">
+                <a16:creationId xmlns:a16="http://schemas.microsoft.com/office/drawing/2014/main" id="{E72672C8-E48F-A66F-2675-649C0A8664C9}"/>
+              </a:ext>
+            </a:extLst>
+          </p:cNvPr>
+          <p:cNvPicPr>
+            <a:picLocks noChangeAspect="1"/>
+          </p:cNvPicPr>
+          <p:nvPr/>
+        </p:nvPicPr>
+        <p:blipFill>
+          <a:blip r:embed="rId2"/>
+          <a:stretch>
+            <a:fillRect/>
+          </a:stretch>
+        </p:blipFill>
+        <p:spPr>
+          <a:xfrm>
+            <a:off x="3009469" y="685417"/>
+            <a:ext cx="6173061" cy="5487166"/>
+          </a:xfrm>
+          <a:prstGeom prst="rect">
+            <a:avLst/>
+          </a:prstGeom>
+        </p:spPr>
+      </p:pic>
+      <mc:AlternateContent xmlns:mc="http://schemas.openxmlformats.org/markup-compatibility/2006">
+        <mc:Choice xmlns:p14="http://schemas.microsoft.com/office/powerpoint/2010/main" Requires="p14">
+          <p:contentPart p14:bwMode="auto" r:id="rId3">
+            <p14:nvContentPartPr>
+              <p14:cNvPr id="5" name="Entrada de lápiz 4">
+                <a:extLst>
+                  <a:ext uri="{FF2B5EF4-FFF2-40B4-BE49-F238E27FC236}">
+                    <a16:creationId xmlns:a16="http://schemas.microsoft.com/office/drawing/2014/main" id="{FB84C731-754C-D808-0980-D96C719965B9}"/>
+                  </a:ext>
+                </a:extLst>
+              </p14:cNvPr>
+              <p14:cNvContentPartPr/>
+              <p14:nvPr/>
+            </p14:nvContentPartPr>
+            <p14:xfrm>
+              <a:off x="8216474" y="1406548"/>
+              <a:ext cx="161640" cy="215280"/>
+            </p14:xfrm>
+          </p:contentPart>
+        </mc:Choice>
+        <mc:Fallback>
+          <p:pic>
+            <p:nvPicPr>
+              <p:cNvPr id="5" name="Entrada de lápiz 4">
+                <a:extLst>
+                  <a:ext uri="{FF2B5EF4-FFF2-40B4-BE49-F238E27FC236}">
+                    <a16:creationId xmlns:a16="http://schemas.microsoft.com/office/drawing/2014/main" id="{FB84C731-754C-D808-0980-D96C719965B9}"/>
+                  </a:ext>
+                </a:extLst>
+              </p:cNvPr>
+              <p:cNvPicPr/>
+              <p:nvPr/>
+            </p:nvPicPr>
+            <p:blipFill>
+              <a:blip r:embed="rId4"/>
+              <a:stretch>
+                <a:fillRect/>
+              </a:stretch>
+            </p:blipFill>
+            <p:spPr>
+              <a:xfrm>
+                <a:off x="8162834" y="1298548"/>
+                <a:ext cx="269280" cy="430920"/>
+              </a:xfrm>
+              <a:prstGeom prst="rect">
+                <a:avLst/>
+              </a:prstGeom>
+            </p:spPr>
+          </p:pic>
+        </mc:Fallback>
+      </mc:AlternateContent>
+      <mc:AlternateContent xmlns:mc="http://schemas.openxmlformats.org/markup-compatibility/2006">
+        <mc:Choice xmlns:p14="http://schemas.microsoft.com/office/powerpoint/2010/main" Requires="p14">
+          <p:contentPart p14:bwMode="auto" r:id="rId5">
+            <p14:nvContentPartPr>
+              <p14:cNvPr id="6" name="Entrada de lápiz 5">
+                <a:extLst>
+                  <a:ext uri="{FF2B5EF4-FFF2-40B4-BE49-F238E27FC236}">
+                    <a16:creationId xmlns:a16="http://schemas.microsoft.com/office/drawing/2014/main" id="{C49FA81B-0E1D-FD9E-FA22-8731E680A189}"/>
+                  </a:ext>
+                </a:extLst>
+              </p14:cNvPr>
+              <p14:cNvContentPartPr/>
+              <p14:nvPr/>
+            </p14:nvContentPartPr>
+            <p14:xfrm>
+              <a:off x="5792234" y="1055188"/>
+              <a:ext cx="3311280" cy="2784600"/>
+            </p14:xfrm>
+          </p:contentPart>
+        </mc:Choice>
+        <mc:Fallback>
+          <p:pic>
+            <p:nvPicPr>
+              <p:cNvPr id="6" name="Entrada de lápiz 5">
+                <a:extLst>
+                  <a:ext uri="{FF2B5EF4-FFF2-40B4-BE49-F238E27FC236}">
+                    <a16:creationId xmlns:a16="http://schemas.microsoft.com/office/drawing/2014/main" id="{C49FA81B-0E1D-FD9E-FA22-8731E680A189}"/>
+                  </a:ext>
+                </a:extLst>
+              </p:cNvPr>
+              <p:cNvPicPr/>
+              <p:nvPr/>
+            </p:nvPicPr>
+            <p:blipFill>
+              <a:blip r:embed="rId6"/>
+              <a:stretch>
+                <a:fillRect/>
+              </a:stretch>
+            </p:blipFill>
+            <p:spPr>
+              <a:xfrm>
+                <a:off x="5738234" y="947548"/>
+                <a:ext cx="3418920" cy="3000240"/>
+              </a:xfrm>
+              <a:prstGeom prst="rect">
+                <a:avLst/>
+              </a:prstGeom>
+            </p:spPr>
+          </p:pic>
+        </mc:Fallback>
+      </mc:AlternateContent>
+    </p:spTree>
+    <p:extLst>
+      <p:ext uri="{BB962C8B-B14F-4D97-AF65-F5344CB8AC3E}">
+        <p14:creationId xmlns:p14="http://schemas.microsoft.com/office/powerpoint/2010/main" val="3479038906"/>
+      </p:ext>
+    </p:extLst>
+  </p:cSld>
+  <p:clrMapOvr>
+    <a:masterClrMapping/>
+  </p:clrMapOvr>
+</p:sld>
+</file>
+
 <file path=ppt/slides/slide32.xml><?xml version="1.0" encoding="utf-8"?>
 <p:sld xmlns:a="http://schemas.openxmlformats.org/drawingml/2006/main" xmlns:r="http://schemas.openxmlformats.org/officeDocument/2006/relationships" xmlns:p="http://schemas.openxmlformats.org/presentationml/2006/main">
   <p:cSld>
@@ -5649,6 +6047,36 @@
           </a:p>
         </p:txBody>
       </p:sp>
+      <p:pic>
+        <p:nvPicPr>
+          <p:cNvPr id="4" name="Imagen 3">
+            <a:extLst>
+              <a:ext uri="{FF2B5EF4-FFF2-40B4-BE49-F238E27FC236}">
+                <a16:creationId xmlns:a16="http://schemas.microsoft.com/office/drawing/2014/main" id="{D8F2DF5D-B6F1-F0C2-C958-C0F521265B6D}"/>
+              </a:ext>
+            </a:extLst>
+          </p:cNvPr>
+          <p:cNvPicPr>
+            <a:picLocks noChangeAspect="1"/>
+          </p:cNvPicPr>
+          <p:nvPr/>
+        </p:nvPicPr>
+        <p:blipFill>
+          <a:blip r:embed="rId2"/>
+          <a:stretch>
+            <a:fillRect/>
+          </a:stretch>
+        </p:blipFill>
+        <p:spPr>
+          <a:xfrm>
+            <a:off x="4124050" y="1885734"/>
+            <a:ext cx="3943900" cy="3086531"/>
+          </a:xfrm>
+          <a:prstGeom prst="rect">
+            <a:avLst/>
+          </a:prstGeom>
+        </p:spPr>
+      </p:pic>
     </p:spTree>
     <p:extLst>
       <p:ext uri="{BB962C8B-B14F-4D97-AF65-F5344CB8AC3E}">
@@ -5704,6 +6132,36 @@
           </a:p>
         </p:txBody>
       </p:sp>
+      <p:pic>
+        <p:nvPicPr>
+          <p:cNvPr id="4" name="Imagen 3">
+            <a:extLst>
+              <a:ext uri="{FF2B5EF4-FFF2-40B4-BE49-F238E27FC236}">
+                <a16:creationId xmlns:a16="http://schemas.microsoft.com/office/drawing/2014/main" id="{531846FF-EBF7-3BC4-A02E-A346EAB36129}"/>
+              </a:ext>
+            </a:extLst>
+          </p:cNvPr>
+          <p:cNvPicPr>
+            <a:picLocks noChangeAspect="1"/>
+          </p:cNvPicPr>
+          <p:nvPr/>
+        </p:nvPicPr>
+        <p:blipFill>
+          <a:blip r:embed="rId2"/>
+          <a:stretch>
+            <a:fillRect/>
+          </a:stretch>
+        </p:blipFill>
+        <p:spPr>
+          <a:xfrm>
+            <a:off x="4104997" y="1933366"/>
+            <a:ext cx="3982006" cy="2991267"/>
+          </a:xfrm>
+          <a:prstGeom prst="rect">
+            <a:avLst/>
+          </a:prstGeom>
+        </p:spPr>
+      </p:pic>
     </p:spTree>
     <p:extLst>
       <p:ext uri="{BB962C8B-B14F-4D97-AF65-F5344CB8AC3E}">
@@ -5755,10 +6213,94 @@
           <a:bodyPr/>
           <a:lstStyle/>
           <a:p>
-            <a:endParaRPr lang="es-GT"/>
-          </a:p>
-        </p:txBody>
-      </p:sp>
+            <a:r>
+              <a:rPr lang="es-GT" dirty="0"/>
+              <a:t>VISIVILIDAD ASI COMO ESTA, HASTA QUE CAMBIENMOS A ACCION </a:t>
+            </a:r>
+          </a:p>
+        </p:txBody>
+      </p:sp>
+      <mc:AlternateContent xmlns:mc="http://schemas.openxmlformats.org/markup-compatibility/2006">
+        <mc:Choice xmlns:p14="http://schemas.microsoft.com/office/powerpoint/2010/main" Requires="p14">
+          <p:contentPart p14:bwMode="auto" r:id="rId2">
+            <p14:nvContentPartPr>
+              <p14:cNvPr id="3" name="Entrada de lápiz 2">
+                <a:extLst>
+                  <a:ext uri="{FF2B5EF4-FFF2-40B4-BE49-F238E27FC236}">
+                    <a16:creationId xmlns:a16="http://schemas.microsoft.com/office/drawing/2014/main" id="{30736DCD-368A-7FB6-0892-6113393ACC2F}"/>
+                  </a:ext>
+                </a:extLst>
+              </p14:cNvPr>
+              <p14:cNvContentPartPr/>
+              <p14:nvPr/>
+            </p14:nvContentPartPr>
+            <p14:xfrm>
+              <a:off x="1068674" y="4360348"/>
+              <a:ext cx="360" cy="360"/>
+            </p14:xfrm>
+          </p:contentPart>
+        </mc:Choice>
+        <mc:Fallback>
+          <p:pic>
+            <p:nvPicPr>
+              <p:cNvPr id="3" name="Entrada de lápiz 2">
+                <a:extLst>
+                  <a:ext uri="{FF2B5EF4-FFF2-40B4-BE49-F238E27FC236}">
+                    <a16:creationId xmlns:a16="http://schemas.microsoft.com/office/drawing/2014/main" id="{30736DCD-368A-7FB6-0892-6113393ACC2F}"/>
+                  </a:ext>
+                </a:extLst>
+              </p:cNvPr>
+              <p:cNvPicPr/>
+              <p:nvPr/>
+            </p:nvPicPr>
+            <p:blipFill>
+              <a:blip r:embed="rId3"/>
+              <a:stretch>
+                <a:fillRect/>
+              </a:stretch>
+            </p:blipFill>
+            <p:spPr>
+              <a:xfrm>
+                <a:off x="1015034" y="4252708"/>
+                <a:ext cx="108000" cy="216000"/>
+              </a:xfrm>
+              <a:prstGeom prst="rect">
+                <a:avLst/>
+              </a:prstGeom>
+            </p:spPr>
+          </p:pic>
+        </mc:Fallback>
+      </mc:AlternateContent>
+      <p:pic>
+        <p:nvPicPr>
+          <p:cNvPr id="7" name="Imagen 6">
+            <a:extLst>
+              <a:ext uri="{FF2B5EF4-FFF2-40B4-BE49-F238E27FC236}">
+                <a16:creationId xmlns:a16="http://schemas.microsoft.com/office/drawing/2014/main" id="{FC01C55D-7B26-8903-F8C0-68BBF624B394}"/>
+              </a:ext>
+            </a:extLst>
+          </p:cNvPr>
+          <p:cNvPicPr>
+            <a:picLocks noChangeAspect="1"/>
+          </p:cNvPicPr>
+          <p:nvPr/>
+        </p:nvPicPr>
+        <p:blipFill>
+          <a:blip r:embed="rId4"/>
+          <a:stretch>
+            <a:fillRect/>
+          </a:stretch>
+        </p:blipFill>
+        <p:spPr>
+          <a:xfrm>
+            <a:off x="3561996" y="1580892"/>
+            <a:ext cx="5068007" cy="3696216"/>
+          </a:xfrm>
+          <a:prstGeom prst="rect">
+            <a:avLst/>
+          </a:prstGeom>
+        </p:spPr>
+      </p:pic>
     </p:spTree>
     <p:extLst>
       <p:ext uri="{BB962C8B-B14F-4D97-AF65-F5344CB8AC3E}">
@@ -5814,6 +6356,36 @@
           </a:p>
         </p:txBody>
       </p:sp>
+      <p:pic>
+        <p:nvPicPr>
+          <p:cNvPr id="4" name="Imagen 3">
+            <a:extLst>
+              <a:ext uri="{FF2B5EF4-FFF2-40B4-BE49-F238E27FC236}">
+                <a16:creationId xmlns:a16="http://schemas.microsoft.com/office/drawing/2014/main" id="{39CCE510-0B6D-7A5A-6F41-61999E95BD5E}"/>
+              </a:ext>
+            </a:extLst>
+          </p:cNvPr>
+          <p:cNvPicPr>
+            <a:picLocks noChangeAspect="1"/>
+          </p:cNvPicPr>
+          <p:nvPr/>
+        </p:nvPicPr>
+        <p:blipFill>
+          <a:blip r:embed="rId2"/>
+          <a:stretch>
+            <a:fillRect/>
+          </a:stretch>
+        </p:blipFill>
+        <p:spPr>
+          <a:xfrm>
+            <a:off x="3566759" y="1671392"/>
+            <a:ext cx="5058481" cy="3515216"/>
+          </a:xfrm>
+          <a:prstGeom prst="rect">
+            <a:avLst/>
+          </a:prstGeom>
+        </p:spPr>
+      </p:pic>
     </p:spTree>
     <p:extLst>
       <p:ext uri="{BB962C8B-B14F-4D97-AF65-F5344CB8AC3E}">

--- a/AUTOCAD INTECAP/apuntes powerpoint/CLASE BLOQUES 11 MARZO.pptx
+++ b/AUTOCAD INTECAP/apuntes powerpoint/CLASE BLOQUES 11 MARZO.pptx
@@ -53,12 +53,31 @@
     <p:sldId id="302" r:id="rId47"/>
     <p:sldId id="303" r:id="rId48"/>
     <p:sldId id="304" r:id="rId49"/>
-    <p:sldId id="305" r:id="rId50"/>
-    <p:sldId id="306" r:id="rId51"/>
-    <p:sldId id="307" r:id="rId52"/>
-    <p:sldId id="308" r:id="rId53"/>
-    <p:sldId id="309" r:id="rId54"/>
-    <p:sldId id="287" r:id="rId55"/>
+    <p:sldId id="310" r:id="rId50"/>
+    <p:sldId id="311" r:id="rId51"/>
+    <p:sldId id="312" r:id="rId52"/>
+    <p:sldId id="313" r:id="rId53"/>
+    <p:sldId id="314" r:id="rId54"/>
+    <p:sldId id="315" r:id="rId55"/>
+    <p:sldId id="316" r:id="rId56"/>
+    <p:sldId id="317" r:id="rId57"/>
+    <p:sldId id="318" r:id="rId58"/>
+    <p:sldId id="319" r:id="rId59"/>
+    <p:sldId id="320" r:id="rId60"/>
+    <p:sldId id="321" r:id="rId61"/>
+    <p:sldId id="327" r:id="rId62"/>
+    <p:sldId id="328" r:id="rId63"/>
+    <p:sldId id="322" r:id="rId64"/>
+    <p:sldId id="323" r:id="rId65"/>
+    <p:sldId id="324" r:id="rId66"/>
+    <p:sldId id="325" r:id="rId67"/>
+    <p:sldId id="326" r:id="rId68"/>
+    <p:sldId id="305" r:id="rId69"/>
+    <p:sldId id="306" r:id="rId70"/>
+    <p:sldId id="307" r:id="rId71"/>
+    <p:sldId id="308" r:id="rId72"/>
+    <p:sldId id="309" r:id="rId73"/>
+    <p:sldId id="287" r:id="rId74"/>
   </p:sldIdLst>
   <p:sldSz cx="12192000" cy="6858000"/>
   <p:notesSz cx="6858000" cy="9144000"/>
@@ -194,6 +213,296 @@
 </inkml:ink>
 </file>
 
+<file path=ppt/ink/ink10.xml><?xml version="1.0" encoding="utf-8"?>
+<inkml:ink xmlns:inkml="http://www.w3.org/2003/InkML">
+  <inkml:definitions>
+    <inkml:context xml:id="ctx0">
+      <inkml:inkSource xml:id="inkSrc0">
+        <inkml:traceFormat>
+          <inkml:channel name="X" type="integer" min="-2.14748E9" max="2.14748E9" units="cm"/>
+          <inkml:channel name="Y" type="integer" min="-2.14748E9" max="2.14748E9" units="cm"/>
+        </inkml:traceFormat>
+        <inkml:channelProperties>
+          <inkml:channelProperty channel="X" name="resolution" value="1000" units="1/cm"/>
+          <inkml:channelProperty channel="Y" name="resolution" value="1000" units="1/cm"/>
+        </inkml:channelProperties>
+      </inkml:inkSource>
+      <inkml:timestamp xml:id="ts0" timeString="2026-03-24T20:54:05.043"/>
+    </inkml:context>
+    <inkml:brush xml:id="br0">
+      <inkml:brushProperty name="width" value="0.3" units="cm"/>
+      <inkml:brushProperty name="height" value="0.6" units="cm"/>
+      <inkml:brushProperty name="color" value="#FFFC00"/>
+      <inkml:brushProperty name="tip" value="rectangle"/>
+      <inkml:brushProperty name="rasterOp" value="maskPen"/>
+      <inkml:brushProperty name="ignorePressure" value="1"/>
+    </inkml:brush>
+  </inkml:definitions>
+  <inkml:trace contextRef="#ctx0" brushRef="#br0">0 22,'0'-1,"0"0,0 0,1 0,-1 1,0-1,0 0,1 0,-1 0,0 0,1 0,-1 0,1 1,-1-1,1 0,-1 0,1 1,0-1,-1 0,1 1,0-1,0 1,-1-1,1 1,0-1,0 1,0-1,0 1,-1 0,1-1,0 1,0 0,1 0,37 0,25 15,69 24,-34-8,1463 389,-1502-405,-8 0,58 7,-95-20,1-1,-1 0,0-1,0 0,0-2,0 1,0-2,22-6,-14 1,0 1,0 1,0 1,1 1,0 1,0 1,44 2,227 28,-147-11,-71-10</inkml:trace>
+</inkml:ink>
+</file>
+
+<file path=ppt/ink/ink11.xml><?xml version="1.0" encoding="utf-8"?>
+<inkml:ink xmlns:inkml="http://www.w3.org/2003/InkML">
+  <inkml:definitions>
+    <inkml:context xml:id="ctx0">
+      <inkml:inkSource xml:id="inkSrc0">
+        <inkml:traceFormat>
+          <inkml:channel name="X" type="integer" min="-2.14748E9" max="2.14748E9" units="cm"/>
+          <inkml:channel name="Y" type="integer" min="-2.14748E9" max="2.14748E9" units="cm"/>
+        </inkml:traceFormat>
+        <inkml:channelProperties>
+          <inkml:channelProperty channel="X" name="resolution" value="1000" units="1/cm"/>
+          <inkml:channelProperty channel="Y" name="resolution" value="1000" units="1/cm"/>
+        </inkml:channelProperties>
+      </inkml:inkSource>
+      <inkml:timestamp xml:id="ts0" timeString="2026-03-24T20:56:02.011"/>
+    </inkml:context>
+    <inkml:brush xml:id="br0">
+      <inkml:brushProperty name="width" value="0.3" units="cm"/>
+      <inkml:brushProperty name="height" value="0.6" units="cm"/>
+      <inkml:brushProperty name="color" value="#FFFC00"/>
+      <inkml:brushProperty name="tip" value="rectangle"/>
+      <inkml:brushProperty name="rasterOp" value="maskPen"/>
+      <inkml:brushProperty name="ignorePressure" value="1"/>
+    </inkml:brush>
+  </inkml:definitions>
+  <inkml:trace contextRef="#ctx0" brushRef="#br0">0 32,'7'-14,"2"-3</inkml:trace>
+</inkml:ink>
+</file>
+
+<file path=ppt/ink/ink12.xml><?xml version="1.0" encoding="utf-8"?>
+<inkml:ink xmlns:inkml="http://www.w3.org/2003/InkML">
+  <inkml:definitions>
+    <inkml:context xml:id="ctx0">
+      <inkml:inkSource xml:id="inkSrc0">
+        <inkml:traceFormat>
+          <inkml:channel name="X" type="integer" min="-2.14748E9" max="2.14748E9" units="cm"/>
+          <inkml:channel name="Y" type="integer" min="-2.14748E9" max="2.14748E9" units="cm"/>
+        </inkml:traceFormat>
+        <inkml:channelProperties>
+          <inkml:channelProperty channel="X" name="resolution" value="1000" units="1/cm"/>
+          <inkml:channelProperty channel="Y" name="resolution" value="1000" units="1/cm"/>
+        </inkml:channelProperties>
+      </inkml:inkSource>
+      <inkml:timestamp xml:id="ts0" timeString="2026-03-24T20:56:59.747"/>
+    </inkml:context>
+    <inkml:brush xml:id="br0">
+      <inkml:brushProperty name="width" value="0.3" units="cm"/>
+      <inkml:brushProperty name="height" value="0.6" units="cm"/>
+      <inkml:brushProperty name="color" value="#FFFC00"/>
+      <inkml:brushProperty name="tip" value="rectangle"/>
+      <inkml:brushProperty name="rasterOp" value="maskPen"/>
+      <inkml:brushProperty name="ignorePressure" value="1"/>
+    </inkml:brush>
+  </inkml:definitions>
+  <inkml:trace contextRef="#ctx0" brushRef="#br0">0 0,'0'0</inkml:trace>
+</inkml:ink>
+</file>
+
+<file path=ppt/ink/ink13.xml><?xml version="1.0" encoding="utf-8"?>
+<inkml:ink xmlns:inkml="http://www.w3.org/2003/InkML">
+  <inkml:definitions>
+    <inkml:context xml:id="ctx0">
+      <inkml:inkSource xml:id="inkSrc0">
+        <inkml:traceFormat>
+          <inkml:channel name="X" type="integer" min="-2.14748E9" max="2.14748E9" units="cm"/>
+          <inkml:channel name="Y" type="integer" min="-2.14748E9" max="2.14748E9" units="cm"/>
+        </inkml:traceFormat>
+        <inkml:channelProperties>
+          <inkml:channelProperty channel="X" name="resolution" value="1000" units="1/cm"/>
+          <inkml:channelProperty channel="Y" name="resolution" value="1000" units="1/cm"/>
+        </inkml:channelProperties>
+      </inkml:inkSource>
+      <inkml:timestamp xml:id="ts0" timeString="2026-03-24T22:17:29.621"/>
+    </inkml:context>
+    <inkml:brush xml:id="br0">
+      <inkml:brushProperty name="width" value="0.3" units="cm"/>
+      <inkml:brushProperty name="height" value="0.6" units="cm"/>
+      <inkml:brushProperty name="color" value="#FFFC00"/>
+      <inkml:brushProperty name="tip" value="rectangle"/>
+      <inkml:brushProperty name="rasterOp" value="maskPen"/>
+      <inkml:brushProperty name="ignorePressure" value="1"/>
+    </inkml:brush>
+  </inkml:definitions>
+  <inkml:trace contextRef="#ctx0" brushRef="#br0">1591 1189,'2'-1,"0"0,0 0,0 0,0 0,0 0,0 0,-1-1,1 1,0-1,-1 0,3-2,10-9,-1 6,1 0,0 1,0 0,1 1,0 1,-1 0,25-3,-31 6,354-46,16 26,-217 13,345-13,433-29,-569 22,367-34,-580 38,-152 24,0-1,0 0,0-1,0 1,0-1,0 0,-1 0,1 0,-1-1,1 0,-1 0,0 0,4-4,-7 6,-1 1,0-1,1 0,-1 0,0 0,0 0,1 0,-1 0,0 1,0-1,0 0,0 0,0 0,-1 0,1 0,0 0,0 0,0 0,-1 1,1-1,0 0,-1 0,1 0,-1 1,1-1,-2-1,-2-3,0 1,-1 0,1 0,-1 1,0-1,-9-4,-36-17,-77-26,-179-51,-124-12,-350-54,-1039-87,1449 223,-436 19,778 13,21-1,1 1,-1 0,1 0,-1 1,1-1,-1 1,1 1,0-1,-11 5,17-5,0-1,0 1,-1-1,1 1,0 0,0-1,0 1,0 0,0-1,0 1,1-1,-1 1,0 0,0-1,0 1,0-1,1 1,-1-1,0 1,1-1,-1 1,0-1,1 1,-1-1,1 1,-1-1,1 1,-1-1,1 0,-1 1,1-1,-1 0,1 1,-1-1,1 0,0 0,23 18,0-2,1-1,1-1,53 21,-63-28,225 85,270 67,-377-121,1185 328,-872-244,504 120,-809-208,-106-22,-34-9,-10-3,-72-8,-142-25,-129-26,-119-26,-841-116,-6 116,978 96,265-8,1 3,-1 4,-96 25,162-33,0 0,0 1,1 0,-1 0,1 1,0 0,0 0,1 1,-1-1,-10 11,14-10,0-1,0 1,0 0,1 0,0 0,0 0,0 0,0 1,1-1,0 0,0 1,0-1,1 1,0-1,0 1,0 0,2 7,2 10,1 0,1 0,1 0,1-1,1 0,21 37,163 234,53 26</inkml:trace>
+</inkml:ink>
+</file>
+
+<file path=ppt/ink/ink14.xml><?xml version="1.0" encoding="utf-8"?>
+<inkml:ink xmlns:inkml="http://www.w3.org/2003/InkML">
+  <inkml:definitions>
+    <inkml:context xml:id="ctx0">
+      <inkml:inkSource xml:id="inkSrc0">
+        <inkml:traceFormat>
+          <inkml:channel name="X" type="integer" min="-2.14748E9" max="2.14748E9" units="cm"/>
+          <inkml:channel name="Y" type="integer" min="-2.14748E9" max="2.14748E9" units="cm"/>
+        </inkml:traceFormat>
+        <inkml:channelProperties>
+          <inkml:channelProperty channel="X" name="resolution" value="1000" units="1/cm"/>
+          <inkml:channelProperty channel="Y" name="resolution" value="1000" units="1/cm"/>
+        </inkml:channelProperties>
+      </inkml:inkSource>
+      <inkml:timestamp xml:id="ts0" timeString="2026-03-24T22:17:31.566"/>
+    </inkml:context>
+    <inkml:brush xml:id="br0">
+      <inkml:brushProperty name="width" value="0.3" units="cm"/>
+      <inkml:brushProperty name="height" value="0.6" units="cm"/>
+      <inkml:brushProperty name="color" value="#FFFC00"/>
+      <inkml:brushProperty name="tip" value="rectangle"/>
+      <inkml:brushProperty name="rasterOp" value="maskPen"/>
+      <inkml:brushProperty name="ignorePressure" value="1"/>
+    </inkml:brush>
+  </inkml:definitions>
+  <inkml:trace contextRef="#ctx0" brushRef="#br0">1646 846,'27'0,"13"-1,0 2,-1 2,76 15,85 37,94 35,1025 280,-867-279,4-20,2-20,2-20,588-35,121-99,-347-46,-253 36,323 15,-332 42,130-5,19 24,-21 1,1299 31,-1483 46,-3 41,181 22,-601-94,0-5,135-7,-324-2,-108 3,-149 0,-193 0,-237 1,-213 0,-183-2,-141-12,-1463-84,4-87,1673 90,168-5,155-5,151 2,135 6,-694-200,923 226,206 51,61 13,27 4,129 23,194 38,244 39,263 32,248 35,191 22,887 152,632 92,-2024-322,-232-37,-395-52,211 35,-353-53,-1 1,0 0,0 0,0 0,11 7,-18-9,-1 0,0 0,0 0,1 1,-1-1,0 0,0 0,0 1,1-1,-1 0,0 0,0 1,0-1,0 0,0 0,0 1,1-1,-1 0,0 0,0 1,0-1,0 0,0 1,0-1,0 0,0 0,0 1,0-1,-1 0,1 1,0-1,0 0,0 0,0 1,0-1,0 0,-1 0,1 1,0-1,0 0,0 0,-1 0,1 1,0-1,0 0,0 0,-1 0,1 0,0 1,0-1,-1 0</inkml:trace>
+</inkml:ink>
+</file>
+
+<file path=ppt/ink/ink15.xml><?xml version="1.0" encoding="utf-8"?>
+<inkml:ink xmlns:inkml="http://www.w3.org/2003/InkML">
+  <inkml:definitions>
+    <inkml:context xml:id="ctx0">
+      <inkml:inkSource xml:id="inkSrc0">
+        <inkml:traceFormat>
+          <inkml:channel name="X" type="integer" min="-2.14748E9" max="2.14748E9" units="cm"/>
+          <inkml:channel name="Y" type="integer" min="-2.14748E9" max="2.14748E9" units="cm"/>
+        </inkml:traceFormat>
+        <inkml:channelProperties>
+          <inkml:channelProperty channel="X" name="resolution" value="1000" units="1/cm"/>
+          <inkml:channelProperty channel="Y" name="resolution" value="1000" units="1/cm"/>
+        </inkml:channelProperties>
+      </inkml:inkSource>
+      <inkml:timestamp xml:id="ts0" timeString="2026-03-24T22:17:33.442"/>
+    </inkml:context>
+    <inkml:brush xml:id="br0">
+      <inkml:brushProperty name="width" value="0.3" units="cm"/>
+      <inkml:brushProperty name="height" value="0.6" units="cm"/>
+      <inkml:brushProperty name="color" value="#FFFC00"/>
+      <inkml:brushProperty name="tip" value="rectangle"/>
+      <inkml:brushProperty name="rasterOp" value="maskPen"/>
+      <inkml:brushProperty name="ignorePressure" value="1"/>
+    </inkml:brush>
+  </inkml:definitions>
+  <inkml:trace contextRef="#ctx0" brushRef="#br0">0 0,'0'0</inkml:trace>
+</inkml:ink>
+</file>
+
+<file path=ppt/ink/ink16.xml><?xml version="1.0" encoding="utf-8"?>
+<inkml:ink xmlns:inkml="http://www.w3.org/2003/InkML">
+  <inkml:definitions>
+    <inkml:context xml:id="ctx0">
+      <inkml:inkSource xml:id="inkSrc0">
+        <inkml:traceFormat>
+          <inkml:channel name="X" type="integer" min="-2.14748E9" max="2.14748E9" units="cm"/>
+          <inkml:channel name="Y" type="integer" min="-2.14748E9" max="2.14748E9" units="cm"/>
+        </inkml:traceFormat>
+        <inkml:channelProperties>
+          <inkml:channelProperty channel="X" name="resolution" value="1000" units="1/cm"/>
+          <inkml:channelProperty channel="Y" name="resolution" value="1000" units="1/cm"/>
+        </inkml:channelProperties>
+      </inkml:inkSource>
+      <inkml:timestamp xml:id="ts0" timeString="2026-03-24T22:17:34.235"/>
+    </inkml:context>
+    <inkml:brush xml:id="br0">
+      <inkml:brushProperty name="width" value="0.3" units="cm"/>
+      <inkml:brushProperty name="height" value="0.6" units="cm"/>
+      <inkml:brushProperty name="color" value="#FFFC00"/>
+      <inkml:brushProperty name="tip" value="rectangle"/>
+      <inkml:brushProperty name="rasterOp" value="maskPen"/>
+      <inkml:brushProperty name="ignorePressure" value="1"/>
+    </inkml:brush>
+  </inkml:definitions>
+  <inkml:trace contextRef="#ctx0" brushRef="#br0">0 17,'0'-7,"0"-2</inkml:trace>
+</inkml:ink>
+</file>
+
+<file path=ppt/ink/ink17.xml><?xml version="1.0" encoding="utf-8"?>
+<inkml:ink xmlns:inkml="http://www.w3.org/2003/InkML">
+  <inkml:definitions>
+    <inkml:context xml:id="ctx0">
+      <inkml:inkSource xml:id="inkSrc0">
+        <inkml:traceFormat>
+          <inkml:channel name="X" type="integer" min="-2.14748E9" max="2.14748E9" units="cm"/>
+          <inkml:channel name="Y" type="integer" min="-2.14748E9" max="2.14748E9" units="cm"/>
+        </inkml:traceFormat>
+        <inkml:channelProperties>
+          <inkml:channelProperty channel="X" name="resolution" value="1000" units="1/cm"/>
+          <inkml:channelProperty channel="Y" name="resolution" value="1000" units="1/cm"/>
+        </inkml:channelProperties>
+      </inkml:inkSource>
+      <inkml:timestamp xml:id="ts0" timeString="2026-03-24T22:19:21.397"/>
+    </inkml:context>
+    <inkml:brush xml:id="br0">
+      <inkml:brushProperty name="width" value="0.3" units="cm"/>
+      <inkml:brushProperty name="height" value="0.6" units="cm"/>
+      <inkml:brushProperty name="color" value="#FFFC00"/>
+      <inkml:brushProperty name="tip" value="rectangle"/>
+      <inkml:brushProperty name="rasterOp" value="maskPen"/>
+      <inkml:brushProperty name="ignorePressure" value="1"/>
+    </inkml:brush>
+  </inkml:definitions>
+  <inkml:trace contextRef="#ctx0" brushRef="#br0">29 79,'9'-8,"0"0,1 1,0 0,0 1,1 0,0 0,0 1,0 1,1-1,-1 2,1 0,0 0,18-1,19 1,-1 2,62 6,155 28,127 35,130 27,99 14,1753 322,-943-167,-1313-241,-105-17,-29-2,-194-3,83-3,-921 13,-9 56,558-13,-567 47,1006-97,1-2,-1-3,-118-16,157 11,-1-1,1 0,0-2,1 0,-35-22,-35-16,-21 1,-125-34,-128-18,193 53,137 36,-341-102,357 105,1-1,0-1,0 0,-16-12,32 20,-1-1,1 0,0 0,0 0,0 0,0-1,0 1,0 0,0 0,0 0,0-1,1 1,-1-1,0-2,1 3,0 1,0-1,0 0,0 0,0 1,0-1,0 0,1 0,-1 0,0 1,1-1,-1 0,0 1,1-1,-1 0,1 1,-1-1,1 1,-1-1,1 1,0-1,-1 1,1-1,1 0,6-4,1 1,-1 1,1-1,0 1,0 1,1-1,9 0,85-8,-54 6,-41 4,243-38,-249 39,1-1,-1 1,0-1,0 0,0 0,0-1,0 1,0-1,0 1,-1-1,1 0,0 0,2-3,-5 5,1-1,-1 0,0 0,0 1,0-1,0 0,0 0,0 1,0-1,0 0,0 0,0 1,0-1,0 0,0 1,0-1,-1 0,1 0,0 1,-1-1,1 0,0 1,-1-1,1 1,-1-1,1 1,-1-1,1 0,-1 1,1 0,-1-1,0 1,0-1,-10-6,-1 1,1 0,-1 0,0 2,-14-5,-226-49,-8-3,256 60,-1 0,1-1,-1 0,1 0,0 0,0 0,0-1,-6-4,10 6,-1 1,1-1,0 1,-1-1,1 1,0-1,-1 0,1 1,0-1,0 1,-1-1,1 1,0-1,0 0,0 1,0-1,0 0,0 1,0-1,0 0,0 1,0-1,0 1,0-1,1 0,0-1,0 0,0 1,0-1,1 1,-1-1,0 1,1 0,-1-1,1 1,0 0,-1 0,3-1,7-4,1 1,-1 1,1 0,0 0,0 1,1 1,-1 0,20 0,118 5,-127-1,522 66,3 45,281 123,-343-90,84 5,-376-101</inkml:trace>
+</inkml:ink>
+</file>
+
+<file path=ppt/ink/ink18.xml><?xml version="1.0" encoding="utf-8"?>
+<inkml:ink xmlns:inkml="http://www.w3.org/2003/InkML">
+  <inkml:definitions>
+    <inkml:context xml:id="ctx0">
+      <inkml:inkSource xml:id="inkSrc0">
+        <inkml:traceFormat>
+          <inkml:channel name="X" type="integer" min="-2.14748E9" max="2.14748E9" units="cm"/>
+          <inkml:channel name="Y" type="integer" min="-2.14748E9" max="2.14748E9" units="cm"/>
+        </inkml:traceFormat>
+        <inkml:channelProperties>
+          <inkml:channelProperty channel="X" name="resolution" value="1000" units="1/cm"/>
+          <inkml:channelProperty channel="Y" name="resolution" value="1000" units="1/cm"/>
+        </inkml:channelProperties>
+      </inkml:inkSource>
+      <inkml:timestamp xml:id="ts0" timeString="2026-03-24T22:27:27.156"/>
+    </inkml:context>
+    <inkml:brush xml:id="br0">
+      <inkml:brushProperty name="width" value="0.3" units="cm"/>
+      <inkml:brushProperty name="height" value="0.6" units="cm"/>
+      <inkml:brushProperty name="color" value="#FFFC00"/>
+      <inkml:brushProperty name="tip" value="rectangle"/>
+      <inkml:brushProperty name="rasterOp" value="maskPen"/>
+      <inkml:brushProperty name="ignorePressure" value="1"/>
+    </inkml:brush>
+  </inkml:definitions>
+  <inkml:trace contextRef="#ctx0" brushRef="#br0">1 1,'0'0</inkml:trace>
+</inkml:ink>
+</file>
+
+<file path=ppt/ink/ink19.xml><?xml version="1.0" encoding="utf-8"?>
+<inkml:ink xmlns:inkml="http://www.w3.org/2003/InkML">
+  <inkml:definitions>
+    <inkml:context xml:id="ctx0">
+      <inkml:inkSource xml:id="inkSrc0">
+        <inkml:traceFormat>
+          <inkml:channel name="X" type="integer" min="-2.14748E9" max="2.14748E9" units="cm"/>
+          <inkml:channel name="Y" type="integer" min="-2.14748E9" max="2.14748E9" units="cm"/>
+        </inkml:traceFormat>
+        <inkml:channelProperties>
+          <inkml:channelProperty channel="X" name="resolution" value="1000" units="1/cm"/>
+          <inkml:channelProperty channel="Y" name="resolution" value="1000" units="1/cm"/>
+        </inkml:channelProperties>
+      </inkml:inkSource>
+      <inkml:timestamp xml:id="ts0" timeString="2026-03-24T22:27:34.060"/>
+    </inkml:context>
+    <inkml:brush xml:id="br0">
+      <inkml:brushProperty name="width" value="0.3" units="cm"/>
+      <inkml:brushProperty name="height" value="0.6" units="cm"/>
+      <inkml:brushProperty name="color" value="#FFFC00"/>
+      <inkml:brushProperty name="tip" value="rectangle"/>
+      <inkml:brushProperty name="rasterOp" value="maskPen"/>
+      <inkml:brushProperty name="ignorePressure" value="1"/>
+    </inkml:brush>
+  </inkml:definitions>
+  <inkml:trace contextRef="#ctx0" brushRef="#br0">1 17,'0'-6,"6"-3,16 7,37 18,82 25,116 19,122 6,95-7,54-15,16-15,-24-11,-60-10,-103-6,-118-3,-99-1</inkml:trace>
+</inkml:ink>
+</file>
+
 <file path=ppt/ink/ink2.xml><?xml version="1.0" encoding="utf-8"?>
 <inkml:ink xmlns:inkml="http://www.w3.org/2003/InkML">
   <inkml:definitions>
@@ -220,6 +529,296 @@
     </inkml:brush>
   </inkml:definitions>
   <inkml:trace contextRef="#ctx0" brushRef="#br0">0 0,'969'189,"-960"-187,1147 150,14-93,-1159-59,66 1,0-3,138-22,-203 21,0 0,0-1,0 0,21-11,-28 12,0 0,0 0,0-1,-1 1,1-1,-1 0,0 0,0-1,0 1,-1-1,0 0,4-7,4-16</inkml:trace>
+</inkml:ink>
+</file>
+
+<file path=ppt/ink/ink20.xml><?xml version="1.0" encoding="utf-8"?>
+<inkml:ink xmlns:inkml="http://www.w3.org/2003/InkML">
+  <inkml:definitions>
+    <inkml:context xml:id="ctx0">
+      <inkml:inkSource xml:id="inkSrc0">
+        <inkml:traceFormat>
+          <inkml:channel name="X" type="integer" min="-2.14748E9" max="2.14748E9" units="cm"/>
+          <inkml:channel name="Y" type="integer" min="-2.14748E9" max="2.14748E9" units="cm"/>
+        </inkml:traceFormat>
+        <inkml:channelProperties>
+          <inkml:channelProperty channel="X" name="resolution" value="1000" units="1/cm"/>
+          <inkml:channelProperty channel="Y" name="resolution" value="1000" units="1/cm"/>
+        </inkml:channelProperties>
+      </inkml:inkSource>
+      <inkml:timestamp xml:id="ts0" timeString="2026-03-24T22:27:56.595"/>
+    </inkml:context>
+    <inkml:brush xml:id="br0">
+      <inkml:brushProperty name="width" value="0.3" units="cm"/>
+      <inkml:brushProperty name="height" value="0.6" units="cm"/>
+      <inkml:brushProperty name="color" value="#FFFC00"/>
+      <inkml:brushProperty name="tip" value="rectangle"/>
+      <inkml:brushProperty name="rasterOp" value="maskPen"/>
+      <inkml:brushProperty name="ignorePressure" value="1"/>
+    </inkml:brush>
+  </inkml:definitions>
+  <inkml:trace contextRef="#ctx0" brushRef="#br0">0 1,'0'0</inkml:trace>
+</inkml:ink>
+</file>
+
+<file path=ppt/ink/ink21.xml><?xml version="1.0" encoding="utf-8"?>
+<inkml:ink xmlns:inkml="http://www.w3.org/2003/InkML">
+  <inkml:definitions>
+    <inkml:context xml:id="ctx0">
+      <inkml:inkSource xml:id="inkSrc0">
+        <inkml:traceFormat>
+          <inkml:channel name="X" type="integer" min="-2.14748E9" max="2.14748E9" units="cm"/>
+          <inkml:channel name="Y" type="integer" min="-2.14748E9" max="2.14748E9" units="cm"/>
+        </inkml:traceFormat>
+        <inkml:channelProperties>
+          <inkml:channelProperty channel="X" name="resolution" value="1000" units="1/cm"/>
+          <inkml:channelProperty channel="Y" name="resolution" value="1000" units="1/cm"/>
+        </inkml:channelProperties>
+      </inkml:inkSource>
+      <inkml:timestamp xml:id="ts0" timeString="2026-03-24T22:29:30.881"/>
+    </inkml:context>
+    <inkml:brush xml:id="br0">
+      <inkml:brushProperty name="width" value="0.3" units="cm"/>
+      <inkml:brushProperty name="height" value="0.6" units="cm"/>
+      <inkml:brushProperty name="color" value="#FFFC00"/>
+      <inkml:brushProperty name="tip" value="rectangle"/>
+      <inkml:brushProperty name="rasterOp" value="maskPen"/>
+      <inkml:brushProperty name="ignorePressure" value="1"/>
+    </inkml:brush>
+  </inkml:definitions>
+  <inkml:trace contextRef="#ctx0" brushRef="#br0">811 520,'291'0,"9"0,108-1,1512-75,-1610 41,-270 29,1-2,52-16,-90 23,0 0,0-1,0 1,0-1,0 1,0-1,0 0,-1 0,5-4,-7 5,1 1,-1-1,0 1,1-1,-1 1,0-1,0 1,0-1,1 1,-1-1,0 0,0 1,0-1,0 1,0-1,0 0,0 1,0-1,0 1,0-1,-1 0,1 1,0-1,0 1,0-1,-1 1,1-1,0 1,-1-1,1 1,0-1,-1 1,1-1,-1 1,1 0,-1-1,-11-6,1 1,-1 0,0 1,-1 0,1 1,-25-5,-186-40,-294-44,-4 23,-697-5,1134 74,-115 14,165-8,0 2,1 1,0 1,0 2,1 1,-32 18,-178 122,53-29,-300 126,442-230,-85 23,129-41,-4 2,18-2,40-5,942-159,-892 143,129-45,-217 60,0 0,-1 0,19-12,-30 16,0 1,0 0,0-1,-1 1,1-1,0 1,-1-1,1 1,0-1,-1 1,1-1,-1 0,1 1,-1-1,1 0,-1 0,0 1,1-1,-1 0,0 0,1 0,-1 1,0-1,0 0,0 0,0 0,0 0,0-1,-1 1,1 0,-1 0,0 0,0 0,0 0,0 0,0 0,0 1,0-1,0 0,0 1,-1-1,1 1,0-1,0 1,-2-1,-51-8,-2 6,3 3</inkml:trace>
+</inkml:ink>
+</file>
+
+<file path=ppt/ink/ink22.xml><?xml version="1.0" encoding="utf-8"?>
+<inkml:ink xmlns:inkml="http://www.w3.org/2003/InkML">
+  <inkml:definitions>
+    <inkml:context xml:id="ctx0">
+      <inkml:inkSource xml:id="inkSrc0">
+        <inkml:traceFormat>
+          <inkml:channel name="X" type="integer" min="-2.14748E9" max="2.14748E9" units="cm"/>
+          <inkml:channel name="Y" type="integer" min="-2.14748E9" max="2.14748E9" units="cm"/>
+        </inkml:traceFormat>
+        <inkml:channelProperties>
+          <inkml:channelProperty channel="X" name="resolution" value="1000" units="1/cm"/>
+          <inkml:channelProperty channel="Y" name="resolution" value="1000" units="1/cm"/>
+        </inkml:channelProperties>
+      </inkml:inkSource>
+      <inkml:timestamp xml:id="ts0" timeString="2026-03-24T22:29:32.202"/>
+    </inkml:context>
+    <inkml:brush xml:id="br0">
+      <inkml:brushProperty name="width" value="0.3" units="cm"/>
+      <inkml:brushProperty name="height" value="0.6" units="cm"/>
+      <inkml:brushProperty name="color" value="#FFFC00"/>
+      <inkml:brushProperty name="tip" value="rectangle"/>
+      <inkml:brushProperty name="rasterOp" value="maskPen"/>
+      <inkml:brushProperty name="ignorePressure" value="1"/>
+    </inkml:brush>
+  </inkml:definitions>
+  <inkml:trace contextRef="#ctx0" brushRef="#br0">1 212,'83'25,"2"-3,1-4,112 9,256-5,-406-21,781-30,-638 6,-2-8,244-72,-329 69,39-11,-63 35,-66 9,0 0,0-1,1 0,-2-1,27-10,-7-2,-5 0</inkml:trace>
+</inkml:ink>
+</file>
+
+<file path=ppt/ink/ink23.xml><?xml version="1.0" encoding="utf-8"?>
+<inkml:ink xmlns:inkml="http://www.w3.org/2003/InkML">
+  <inkml:definitions>
+    <inkml:context xml:id="ctx0">
+      <inkml:inkSource xml:id="inkSrc0">
+        <inkml:traceFormat>
+          <inkml:channel name="X" type="integer" min="-2.14748E9" max="2.14748E9" units="cm"/>
+          <inkml:channel name="Y" type="integer" min="-2.14748E9" max="2.14748E9" units="cm"/>
+        </inkml:traceFormat>
+        <inkml:channelProperties>
+          <inkml:channelProperty channel="X" name="resolution" value="1000" units="1/cm"/>
+          <inkml:channelProperty channel="Y" name="resolution" value="1000" units="1/cm"/>
+        </inkml:channelProperties>
+      </inkml:inkSource>
+      <inkml:timestamp xml:id="ts0" timeString="2026-03-24T22:29:33.056"/>
+    </inkml:context>
+    <inkml:brush xml:id="br0">
+      <inkml:brushProperty name="width" value="0.3" units="cm"/>
+      <inkml:brushProperty name="height" value="0.6" units="cm"/>
+      <inkml:brushProperty name="color" value="#FFFC00"/>
+      <inkml:brushProperty name="tip" value="rectangle"/>
+      <inkml:brushProperty name="rasterOp" value="maskPen"/>
+      <inkml:brushProperty name="ignorePressure" value="1"/>
+    </inkml:brush>
+  </inkml:definitions>
+  <inkml:trace contextRef="#ctx0" brushRef="#br0">1 199,'62'0,"2"2,-1-3,1-3,118-23,67-49,-32 9,-183 59,0 2,58-3,-44 7</inkml:trace>
+</inkml:ink>
+</file>
+
+<file path=ppt/ink/ink24.xml><?xml version="1.0" encoding="utf-8"?>
+<inkml:ink xmlns:inkml="http://www.w3.org/2003/InkML">
+  <inkml:definitions>
+    <inkml:context xml:id="ctx0">
+      <inkml:inkSource xml:id="inkSrc0">
+        <inkml:traceFormat>
+          <inkml:channel name="X" type="integer" min="-2.14748E9" max="2.14748E9" units="cm"/>
+          <inkml:channel name="Y" type="integer" min="-2.14748E9" max="2.14748E9" units="cm"/>
+        </inkml:traceFormat>
+        <inkml:channelProperties>
+          <inkml:channelProperty channel="X" name="resolution" value="1000" units="1/cm"/>
+          <inkml:channelProperty channel="Y" name="resolution" value="1000" units="1/cm"/>
+        </inkml:channelProperties>
+      </inkml:inkSource>
+      <inkml:timestamp xml:id="ts0" timeString="2026-03-24T22:29:35.145"/>
+    </inkml:context>
+    <inkml:brush xml:id="br0">
+      <inkml:brushProperty name="width" value="0.3" units="cm"/>
+      <inkml:brushProperty name="height" value="0.6" units="cm"/>
+      <inkml:brushProperty name="color" value="#FFFC00"/>
+      <inkml:brushProperty name="tip" value="rectangle"/>
+      <inkml:brushProperty name="rasterOp" value="maskPen"/>
+      <inkml:brushProperty name="ignorePressure" value="1"/>
+    </inkml:brush>
+  </inkml:definitions>
+  <inkml:trace contextRef="#ctx0" brushRef="#br0">1 1,'17'0,"-1"2,1 0,-1 1,0 1,31 11,-2-1,628 169,-117-33,387 103,13-77,-596-148,-97-9,-244-17,-5-1,-1 0,1 1,-1 0,25 8,-34-8,0 0,0 0,-1 0,1 1,0-1,-1 1,0 0,1-1,-1 2,0-1,-1 0,1 1,-1-1,1 1,-1 0,0 0,0-1,-1 1,2 6,13 49,-2 1,7 89,-3-19,76 406,211 680,-213-893,-43-142,-13-72,-36-107,1 0,-1 1,0-1,0 0,0 0,0 1,0-1,0 0,-1 0,1 0,-1 1,1-1,-1 0,0 0,0 0,0 0,0 0,0 0,0 0,-1-1,1 1,-1 0,1-1,-1 1,0-1,1 1,-1-1,0 0,-2 1,-7 4,1-2,-1 1,0-2,-18 5,20-6,-150 38,-211 64,-190 118,-320 105,669-272,-2-9,-2-9,-1-10,-282 0,395-29,1-5,0-3,1-6,-194-55,273 64,1-1,-1-1,-20-12,36 18,0 0,1-1,-1 0,1 0,0-1,0 1,1-1,-1 0,1 0,0-1,0 1,1-1,0 0,0 0,-2-6,-1-13,1 0,2 0,1-1,1 1,0 0,5-28,-2-16,13-3109,-15 2865,0 79</inkml:trace>
+</inkml:ink>
+</file>
+
+<file path=ppt/ink/ink25.xml><?xml version="1.0" encoding="utf-8"?>
+<inkml:ink xmlns:inkml="http://www.w3.org/2003/InkML">
+  <inkml:definitions>
+    <inkml:context xml:id="ctx0">
+      <inkml:inkSource xml:id="inkSrc0">
+        <inkml:traceFormat>
+          <inkml:channel name="X" type="integer" min="-2.14748E9" max="2.14748E9" units="cm"/>
+          <inkml:channel name="Y" type="integer" min="-2.14748E9" max="2.14748E9" units="cm"/>
+        </inkml:traceFormat>
+        <inkml:channelProperties>
+          <inkml:channelProperty channel="X" name="resolution" value="1000" units="1/cm"/>
+          <inkml:channelProperty channel="Y" name="resolution" value="1000" units="1/cm"/>
+        </inkml:channelProperties>
+      </inkml:inkSource>
+      <inkml:timestamp xml:id="ts0" timeString="2026-03-24T22:29:35.702"/>
+    </inkml:context>
+    <inkml:brush xml:id="br0">
+      <inkml:brushProperty name="width" value="0.3" units="cm"/>
+      <inkml:brushProperty name="height" value="0.6" units="cm"/>
+      <inkml:brushProperty name="color" value="#FFFC00"/>
+      <inkml:brushProperty name="tip" value="rectangle"/>
+      <inkml:brushProperty name="rasterOp" value="maskPen"/>
+      <inkml:brushProperty name="ignorePressure" value="1"/>
+    </inkml:brush>
+  </inkml:definitions>
+  <inkml:trace contextRef="#ctx0" brushRef="#br0">1 0,'0'7,"0"9,0 14,0 10,0 10,13-2,11-11,8-10,-1-11</inkml:trace>
+</inkml:ink>
+</file>
+
+<file path=ppt/ink/ink26.xml><?xml version="1.0" encoding="utf-8"?>
+<inkml:ink xmlns:inkml="http://www.w3.org/2003/InkML">
+  <inkml:definitions>
+    <inkml:context xml:id="ctx0">
+      <inkml:inkSource xml:id="inkSrc0">
+        <inkml:traceFormat>
+          <inkml:channel name="X" type="integer" min="-2.14748E9" max="2.14748E9" units="cm"/>
+          <inkml:channel name="Y" type="integer" min="-2.14748E9" max="2.14748E9" units="cm"/>
+        </inkml:traceFormat>
+        <inkml:channelProperties>
+          <inkml:channelProperty channel="X" name="resolution" value="1000" units="1/cm"/>
+          <inkml:channelProperty channel="Y" name="resolution" value="1000" units="1/cm"/>
+        </inkml:channelProperties>
+      </inkml:inkSource>
+      <inkml:timestamp xml:id="ts0" timeString="2026-03-24T22:29:35.934"/>
+    </inkml:context>
+    <inkml:brush xml:id="br0">
+      <inkml:brushProperty name="width" value="0.3" units="cm"/>
+      <inkml:brushProperty name="height" value="0.6" units="cm"/>
+      <inkml:brushProperty name="color" value="#FFFC00"/>
+      <inkml:brushProperty name="tip" value="rectangle"/>
+      <inkml:brushProperty name="rasterOp" value="maskPen"/>
+      <inkml:brushProperty name="ignorePressure" value="1"/>
+    </inkml:brush>
+  </inkml:definitions>
+  <inkml:trace contextRef="#ctx0" brushRef="#br0">452 106,'-7'-7,"-8"-8,-16-10,-8 1,-5 4,-1 5,-7 19,-1 15,3 11,2 21,9 7,19-5,12-12</inkml:trace>
+</inkml:ink>
+</file>
+
+<file path=ppt/ink/ink27.xml><?xml version="1.0" encoding="utf-8"?>
+<inkml:ink xmlns:inkml="http://www.w3.org/2003/InkML">
+  <inkml:definitions>
+    <inkml:context xml:id="ctx0">
+      <inkml:inkSource xml:id="inkSrc0">
+        <inkml:traceFormat>
+          <inkml:channel name="X" type="integer" min="-2.14748E9" max="2.14748E9" units="cm"/>
+          <inkml:channel name="Y" type="integer" min="-2.14748E9" max="2.14748E9" units="cm"/>
+        </inkml:traceFormat>
+        <inkml:channelProperties>
+          <inkml:channelProperty channel="X" name="resolution" value="1000" units="1/cm"/>
+          <inkml:channelProperty channel="Y" name="resolution" value="1000" units="1/cm"/>
+        </inkml:channelProperties>
+      </inkml:inkSource>
+      <inkml:timestamp xml:id="ts0" timeString="2026-03-24T22:29:36.792"/>
+    </inkml:context>
+    <inkml:brush xml:id="br0">
+      <inkml:brushProperty name="width" value="0.3" units="cm"/>
+      <inkml:brushProperty name="height" value="0.6" units="cm"/>
+      <inkml:brushProperty name="color" value="#FFFC00"/>
+      <inkml:brushProperty name="tip" value="rectangle"/>
+      <inkml:brushProperty name="rasterOp" value="maskPen"/>
+      <inkml:brushProperty name="ignorePressure" value="1"/>
+    </inkml:brush>
+  </inkml:definitions>
+  <inkml:trace contextRef="#ctx0" brushRef="#br0">1152 755,'0'-22,"0"0,-2 0,-1 0,0 0,-1 0,-11-30,11 42,-1 0,0 0,0 1,-1-1,-1 1,1 0,-1 1,-1 0,0 0,0 0,0 1,-1 0,0 1,-17-10,16 12,0-1,0 1,0 1,0 0,0 0,-1 1,0 0,1 1,-1 0,0 1,0 0,1 1,-1 0,0 1,1 0,-1 0,1 1,0 0,0 1,0 1,-14 7,-11 10,1 0,1 3,1 0,-36 38,51-46,0 0,1 1,1 1,-17 27,27-35,11-14,17-21,15-22,-2 0,-2-3,-3-1,-1-1,-3-1,-2-1,-3-2,17-60,-34 97,-1 0,2-29,-5 42,-1-1,0 0,0 0,-1 0,0 0,0 1,0-1,-1 0,1 1,-1-1,-3-5,4 9,0 0,0 1,0-1,-1 0,1 1,0-1,0 1,-1-1,1 1,-1 0,0 0,1 0,-1 0,0 0,1 0,-1 0,0 0,0 0,0 1,0-1,0 1,0 0,0-1,0 1,0 0,-3 1,-1 0,1 0,-1 1,1-1,0 1,-1 1,1-1,0 1,1 0,-8 5,-11 11,1 0,1 1,-31 38,-54 83,-131 234,193-292,3 1,-52 161,87-222,0-1,1 1,2-1,0 1,1 1,2-1,0 0,4 29,-3-44,1 0,0 0,0 0,0-1,1 1,0-1,1 0,-1 0,1 0,1 0,-1 0,1-1,0 0,1 0,-1-1,1 1,1-1,-1 0,0-1,1 1,0-1,0-1,1 1,-1-1,1-1,11 4,-6-4,1 0,-1 0,0-1,1-1,-1 0,1-1,-1 0,1-1,14-4,-6-1,-1 0,-1-1,1-1,-1-1,19-13,-1-3,-1-2,-1-2,-1-1,51-60,5-30,-62 80,2 1,46-46,-67 78,1 0,-1 1,1 0,1 1,-1 0,1 0,0 2,0-1,1 2,-1-1,20-1,35-12,-25 4,-2-3,1-1,-2-3,0 0,36-28,-49 30,-1-2,-1 0,-1-2,0 0,-2-2,-1 0,30-47,-44 61,-1 0,0 0,0 0,-1 0,-1-1,0 1,0-1,-1 0,0 0,-1 0,-1 0,1 0,-3-16,0 18,0 0,0 1,-1-1,0 1,0 0,-1 0,0 0,0 0,-1 1,0-1,-1 1,0 1,0-1,0 1,0 0,-1 0,-9-5,9 6,0 1,0 0,-1 0,1 1,-1 0,0 0,0 1,0 0,0 0,0 1,0 0,-1 1,1-1,0 2,0-1,0 1,-1 0,1 1,0 0,0 0,0 1,1 0,-1 0,1 1,0 0,-11 7,1 1,1 0,0 2,1 0,0 0,1 1,1 1,1 1,0 0,-15 28,-2 16,6-8</inkml:trace>
+</inkml:ink>
+</file>
+
+<file path=ppt/ink/ink28.xml><?xml version="1.0" encoding="utf-8"?>
+<inkml:ink xmlns:inkml="http://www.w3.org/2003/InkML">
+  <inkml:definitions>
+    <inkml:context xml:id="ctx0">
+      <inkml:inkSource xml:id="inkSrc0">
+        <inkml:traceFormat>
+          <inkml:channel name="X" type="integer" min="-2.14748E9" max="2.14748E9" units="cm"/>
+          <inkml:channel name="Y" type="integer" min="-2.14748E9" max="2.14748E9" units="cm"/>
+        </inkml:traceFormat>
+        <inkml:channelProperties>
+          <inkml:channelProperty channel="X" name="resolution" value="1000" units="1/cm"/>
+          <inkml:channelProperty channel="Y" name="resolution" value="1000" units="1/cm"/>
+        </inkml:channelProperties>
+      </inkml:inkSource>
+      <inkml:timestamp xml:id="ts0" timeString="2026-03-24T22:27:42.467"/>
+    </inkml:context>
+    <inkml:brush xml:id="br0">
+      <inkml:brushProperty name="width" value="0.3" units="cm"/>
+      <inkml:brushProperty name="height" value="0.6" units="cm"/>
+      <inkml:brushProperty name="color" value="#FFFC00"/>
+      <inkml:brushProperty name="tip" value="rectangle"/>
+      <inkml:brushProperty name="rasterOp" value="maskPen"/>
+      <inkml:brushProperty name="ignorePressure" value="1"/>
+    </inkml:brush>
+  </inkml:definitions>
+  <inkml:trace contextRef="#ctx0" brushRef="#br0">0 0,'0'0</inkml:trace>
+</inkml:ink>
+</file>
+
+<file path=ppt/ink/ink29.xml><?xml version="1.0" encoding="utf-8"?>
+<inkml:ink xmlns:inkml="http://www.w3.org/2003/InkML">
+  <inkml:definitions>
+    <inkml:context xml:id="ctx0">
+      <inkml:inkSource xml:id="inkSrc0">
+        <inkml:traceFormat>
+          <inkml:channel name="X" type="integer" min="-2.14748E9" max="2.14748E9" units="cm"/>
+          <inkml:channel name="Y" type="integer" min="-2.14748E9" max="2.14748E9" units="cm"/>
+        </inkml:traceFormat>
+        <inkml:channelProperties>
+          <inkml:channelProperty channel="X" name="resolution" value="1000" units="1/cm"/>
+          <inkml:channelProperty channel="Y" name="resolution" value="1000" units="1/cm"/>
+        </inkml:channelProperties>
+      </inkml:inkSource>
+      <inkml:timestamp xml:id="ts0" timeString="2026-03-24T22:27:43.022"/>
+    </inkml:context>
+    <inkml:brush xml:id="br0">
+      <inkml:brushProperty name="width" value="0.3" units="cm"/>
+      <inkml:brushProperty name="height" value="0.6" units="cm"/>
+      <inkml:brushProperty name="color" value="#FFFC00"/>
+      <inkml:brushProperty name="tip" value="rectangle"/>
+      <inkml:brushProperty name="rasterOp" value="maskPen"/>
+      <inkml:brushProperty name="ignorePressure" value="1"/>
+    </inkml:brush>
+  </inkml:definitions>
+  <inkml:trace contextRef="#ctx0" brushRef="#br0">0 1,'0'0</inkml:trace>
 </inkml:ink>
 </file>
 
@@ -252,6 +851,296 @@
 </inkml:ink>
 </file>
 
+<file path=ppt/ink/ink30.xml><?xml version="1.0" encoding="utf-8"?>
+<inkml:ink xmlns:inkml="http://www.w3.org/2003/InkML">
+  <inkml:definitions>
+    <inkml:context xml:id="ctx0">
+      <inkml:inkSource xml:id="inkSrc0">
+        <inkml:traceFormat>
+          <inkml:channel name="X" type="integer" min="-2.14748E9" max="2.14748E9" units="cm"/>
+          <inkml:channel name="Y" type="integer" min="-2.14748E9" max="2.14748E9" units="cm"/>
+        </inkml:traceFormat>
+        <inkml:channelProperties>
+          <inkml:channelProperty channel="X" name="resolution" value="1000" units="1/cm"/>
+          <inkml:channelProperty channel="Y" name="resolution" value="1000" units="1/cm"/>
+        </inkml:channelProperties>
+      </inkml:inkSource>
+      <inkml:timestamp xml:id="ts0" timeString="2026-03-24T22:27:43.628"/>
+    </inkml:context>
+    <inkml:brush xml:id="br0">
+      <inkml:brushProperty name="width" value="0.3" units="cm"/>
+      <inkml:brushProperty name="height" value="0.6" units="cm"/>
+      <inkml:brushProperty name="color" value="#FFFC00"/>
+      <inkml:brushProperty name="tip" value="rectangle"/>
+      <inkml:brushProperty name="rasterOp" value="maskPen"/>
+      <inkml:brushProperty name="ignorePressure" value="1"/>
+    </inkml:brush>
+  </inkml:definitions>
+  <inkml:trace contextRef="#ctx0" brushRef="#br0">1 1,'0'0</inkml:trace>
+</inkml:ink>
+</file>
+
+<file path=ppt/ink/ink31.xml><?xml version="1.0" encoding="utf-8"?>
+<inkml:ink xmlns:inkml="http://www.w3.org/2003/InkML">
+  <inkml:definitions>
+    <inkml:context xml:id="ctx0">
+      <inkml:inkSource xml:id="inkSrc0">
+        <inkml:traceFormat>
+          <inkml:channel name="X" type="integer" min="-2.14748E9" max="2.14748E9" units="cm"/>
+          <inkml:channel name="Y" type="integer" min="-2.14748E9" max="2.14748E9" units="cm"/>
+        </inkml:traceFormat>
+        <inkml:channelProperties>
+          <inkml:channelProperty channel="X" name="resolution" value="1000" units="1/cm"/>
+          <inkml:channelProperty channel="Y" name="resolution" value="1000" units="1/cm"/>
+        </inkml:channelProperties>
+      </inkml:inkSource>
+      <inkml:timestamp xml:id="ts0" timeString="2026-03-24T22:27:44.047"/>
+    </inkml:context>
+    <inkml:brush xml:id="br0">
+      <inkml:brushProperty name="width" value="0.3" units="cm"/>
+      <inkml:brushProperty name="height" value="0.6" units="cm"/>
+      <inkml:brushProperty name="color" value="#FFFC00"/>
+      <inkml:brushProperty name="tip" value="rectangle"/>
+      <inkml:brushProperty name="rasterOp" value="maskPen"/>
+      <inkml:brushProperty name="ignorePressure" value="1"/>
+    </inkml:brush>
+  </inkml:definitions>
+  <inkml:trace contextRef="#ctx0" brushRef="#br0">1 1</inkml:trace>
+</inkml:ink>
+</file>
+
+<file path=ppt/ink/ink32.xml><?xml version="1.0" encoding="utf-8"?>
+<inkml:ink xmlns:inkml="http://www.w3.org/2003/InkML">
+  <inkml:definitions>
+    <inkml:context xml:id="ctx0">
+      <inkml:inkSource xml:id="inkSrc0">
+        <inkml:traceFormat>
+          <inkml:channel name="X" type="integer" min="-2.14748E9" max="2.14748E9" units="cm"/>
+          <inkml:channel name="Y" type="integer" min="-2.14748E9" max="2.14748E9" units="cm"/>
+        </inkml:traceFormat>
+        <inkml:channelProperties>
+          <inkml:channelProperty channel="X" name="resolution" value="1000" units="1/cm"/>
+          <inkml:channelProperty channel="Y" name="resolution" value="1000" units="1/cm"/>
+        </inkml:channelProperties>
+      </inkml:inkSource>
+      <inkml:timestamp xml:id="ts0" timeString="2026-03-24T22:27:46.253"/>
+    </inkml:context>
+    <inkml:brush xml:id="br0">
+      <inkml:brushProperty name="width" value="0.3" units="cm"/>
+      <inkml:brushProperty name="height" value="0.6" units="cm"/>
+      <inkml:brushProperty name="color" value="#FFFC00"/>
+      <inkml:brushProperty name="tip" value="rectangle"/>
+      <inkml:brushProperty name="rasterOp" value="maskPen"/>
+      <inkml:brushProperty name="ignorePressure" value="1"/>
+    </inkml:brush>
+  </inkml:definitions>
+  <inkml:trace contextRef="#ctx0" brushRef="#br0">632 509,'1'4,"1"0,0-1,0 1,0 0,1-1,-1 1,1-1,0 0,0 0,0 0,0 0,1 0,-1-1,5 3,3 4,25 22,1-2,2-1,53 28,-69-44,1-1,-1-1,2-2,-1 0,1-2,0 0,44 3,-64-9,0 1,0-1,0 0,1 0,-1-1,0 0,0 0,0 0,0 0,0-1,0 0,-1 0,1 0,0-1,-1 1,0-1,1 0,-1 0,5-6,-7 6,1-1,-1 0,0 1,0-1,-1 0,1 0,-1-1,0 1,0 0,0 0,0 0,-1-1,1 1,-1 0,-1-1,1 1,0 0,-1-1,0 1,0 0,0 0,-1 0,-2-6,-2-2,1 1,-2 0,0 0,0 0,-1 1,0 0,-1 0,0 1,-1 1,1-1,-2 1,1 1,-15-8,-7-2,-1 1,0 2,-51-14,58 21,1 1,-1 1,-43-2,55 6,0 1,0 0,-1 1,1 1,0 0,0 1,0 1,-16 6,29-10,0 1,0-1,0 0,0 1,0-1,0 1,0 0,0-1,0 1,0 0,0 0,0 0,0 0,0-1,1 1,-1 0,0 0,0 2,1-2,0-1,0 1,0-1,0 1,0-1,0 1,1-1,-1 1,0-1,0 1,1-1,-1 1,0-1,1 1,-1-1,0 1,1-1,-1 0,1 1,-1-1,1 0,-1 1,1-1,-1 0,1 0,0 1,2 0,1 1,-1-1,1 0,-1 0,1-1,0 1,-1-1,1 1,0-1,6-1,-6 0,0-1,-1 1,1-1,-1 0,0 0,1 0,-1 0,0-1,0 1,0-1,-1 0,1 0,-1 0,1 0,-1 0,0-1,0 1,-1 0,1-1,-1 0,1 1,-1-1,0 0,-1 0,1 0,-1 1,1-8,0 1,-1-1,0 1,0-1,-1 1,0 0,-1-1,0 1,-1 0,-5-14,0 10,-1 0,0 0,0 1,-2 0,0 0,0 2,-1-1,-18-13,2 5,0 0,-61-29,78 43,0 1,-1 0,0 1,0 1,0 0,0 0,0 1,-1 1,1 0,-1 1,1 0,-1 1,1 0,-25 6,24-3,1 1,-1 1,1 0,0 0,1 1,-1 1,1 0,1 1,0 0,0 0,0 1,1 0,-11 17,7-7,0 0,2 0,0 2,1-1,-12 44,18-54,1 1,1 0,0 0,0 1,1-1,1 0,0 0,1 1,0-1,1 0,0 0,1 0,4 12,-5-19,1 0,0-1,0 1,0-1,0 0,1 1,-1-1,1-1,0 1,0-1,1 1,-1-1,1 0,-1-1,1 1,0-1,0 0,0 0,0 0,10 1,7 0,0 0,0-2,39-2,-41 1,-5 0,0-1,-1-1,1 0,23-7,-34 8,1-1,-1 1,0-1,0 0,1-1,-1 1,-1-1,1 1,0-1,-1 0,1 0,-1-1,0 1,0-1,0 0,-1 0,1 0,1-5,-1-2,-10 32,6-18,1 1,0-1,0 1,0 0,0-1,1 1,-1-1,1 1,0-1,0 1,0-1,0 1,1-1,0 0,-1 0,1 0,0 0,5 5,-2-3,0-1,0 0,1 0,-1 0,1 0,0-1,0 0,0-1,12 5,-6-4,-1 0,1-1,0 0,0-1,0 0,-1-1,1 0,0-1,0-1,0 1,18-6,15-16,-31 15,1 0,0 1,24-7,-36 13,0 0,0 0,0 0,0 1,1 0,-1-1,0 1,0 0,0 1,1-1,-1 0,0 1,0 0,0 0,0 0,0 0,0 0,0 1,0-1,0 1,-1 0,1 0,2 2,-3-2,0 0,-1 0,1 0,-1 0,0 1,1-1,-1 0,0 1,0-1,0 0,-1 1,1-1,-1 1,1 0,-1-1,0 1,0-1,0 1,0 0,0-1,-1 1,1-1,-1 1,0-1,1 1,-3 2,-2 7,-1 1,-1-1,-16 21,10-15,-31 50,-61 128,84-148,2 1,2 1,-19 89,34-126,0 0,1 0,0 0,2 15,-1-26,0-1,0 1,0 0,0-1,0 1,0 0,1-1,-1 1,0 0,1-1,0 1,-1-1,1 1,0-1,0 1,0-1,0 0,0 1,0-1,0 0,0 0,0 0,1 1,-1-1,0-1,1 1,-1 0,1 0,-1 0,1-1,-1 1,1-1,0 1,-1-1,1 0,0 0,-1 1,1-1,0 0,-1-1,4 1,1-2,-1 0,0 1,0-2,0 1,0-1,0 0,-1 0,1 0,-1 0,0-1,5-5,43-54,-23 22,-3-2,-1-1,-2-1,-2-1,23-78,-24 56,-3-1,-4-1,8-101,-20 152,1 1,-2-1,-1 0,0 1,-2-1,0 1,0-1,-12-29,14 45,0 0,0 1,0-1,-1 1,1 0,-1-1,1 1,-1 0,0 0,0 0,0 0,0 0,0 0,0 1,-1-1,1 1,0-1,-1 1,1 0,-1 0,0 0,1 0,-1 1,0-1,0 1,1 0,-1-1,0 1,0 0,1 1,-1-1,0 0,0 1,1 0,-4 1,-8 3,1 1,0 0,1 1,0 1,-17 13,11-9,13-7,13-9,16-16,-23 19,0 0,-1 0,1 0,0 0,-1 0,1 0,-1 0,1 0,-1 0,1 0,-1-1,0 1,0 0,1 0,-1 0,0-1,0 1,0 0,-1 0,1 0,0-1,0 1,-1 0,1 0,0 0,-1 0,1-1,-1 1,0 0,1 0,-1 0,0 0,1 0,-1 1,0-1,0 0,-2-1,1 1,-1 0,1 0,-1 0,1 1,-1-1,1 1,-1-1,0 1,1 0,-1 0,0 0,1 0,-1 1,0-1,1 1,-1 0,1-1,-4 3,-10 4,1 1,1 1,-1 0,2 1,-1 0,-21 22,-64 80,95-107,-73 93</inkml:trace>
+</inkml:ink>
+</file>
+
+<file path=ppt/ink/ink33.xml><?xml version="1.0" encoding="utf-8"?>
+<inkml:ink xmlns:inkml="http://www.w3.org/2003/InkML">
+  <inkml:definitions>
+    <inkml:context xml:id="ctx0">
+      <inkml:inkSource xml:id="inkSrc0">
+        <inkml:traceFormat>
+          <inkml:channel name="X" type="integer" min="-2.14748E9" max="2.14748E9" units="cm"/>
+          <inkml:channel name="Y" type="integer" min="-2.14748E9" max="2.14748E9" units="cm"/>
+        </inkml:traceFormat>
+        <inkml:channelProperties>
+          <inkml:channelProperty channel="X" name="resolution" value="1000" units="1/cm"/>
+          <inkml:channelProperty channel="Y" name="resolution" value="1000" units="1/cm"/>
+        </inkml:channelProperties>
+      </inkml:inkSource>
+      <inkml:timestamp xml:id="ts0" timeString="2026-03-24T22:29:40.913"/>
+    </inkml:context>
+    <inkml:brush xml:id="br0">
+      <inkml:brushProperty name="width" value="0.3" units="cm"/>
+      <inkml:brushProperty name="height" value="0.6" units="cm"/>
+      <inkml:brushProperty name="color" value="#FFFC00"/>
+      <inkml:brushProperty name="tip" value="rectangle"/>
+      <inkml:brushProperty name="rasterOp" value="maskPen"/>
+      <inkml:brushProperty name="ignorePressure" value="1"/>
+    </inkml:brush>
+  </inkml:definitions>
+  <inkml:trace contextRef="#ctx0" brushRef="#br0">1 1,'7'0,"0"1,0 0,0 1,0 0,13 4,19 7,548 81,5-42,-168-17,-247-13,-171-22,0 1,0 0,0 0,0 1,0 0,0 0,-1 0,1 1,8 5,-14-8,0 0,0 1,0-1,0 1,0-1,0 0,0 1,0-1,0 0,0 1,0-1,0 1,0-1,0 0,0 1,0-1,0 0,0 1,0-1,-1 0,1 1,0-1,0 0,0 1,-1-1,1 0,0 1,0-1,-1 0,1 0,0 1,-1-1,1 0,0 0,-1 0,1 1,0-1,-1 0,1 0,0 0,-1 0,-41 14,-78 7,-240 11,224-25,-458 43,565-49,0-2,0 0,-1-2,2-2,-1 0,-54-19,9-5,-82-44,149 69,-36-18,-52-37,46 23</inkml:trace>
+</inkml:ink>
+</file>
+
+<file path=ppt/ink/ink34.xml><?xml version="1.0" encoding="utf-8"?>
+<inkml:ink xmlns:inkml="http://www.w3.org/2003/InkML">
+  <inkml:definitions>
+    <inkml:context xml:id="ctx0">
+      <inkml:inkSource xml:id="inkSrc0">
+        <inkml:traceFormat>
+          <inkml:channel name="X" type="integer" min="-2.14748E9" max="2.14748E9" units="cm"/>
+          <inkml:channel name="Y" type="integer" min="-2.14748E9" max="2.14748E9" units="cm"/>
+        </inkml:traceFormat>
+        <inkml:channelProperties>
+          <inkml:channelProperty channel="X" name="resolution" value="1000" units="1/cm"/>
+          <inkml:channelProperty channel="Y" name="resolution" value="1000" units="1/cm"/>
+        </inkml:channelProperties>
+      </inkml:inkSource>
+      <inkml:timestamp xml:id="ts0" timeString="2026-03-24T22:42:20.889"/>
+    </inkml:context>
+    <inkml:brush xml:id="br0">
+      <inkml:brushProperty name="width" value="0.3" units="cm"/>
+      <inkml:brushProperty name="height" value="0.6" units="cm"/>
+      <inkml:brushProperty name="color" value="#FFFC00"/>
+      <inkml:brushProperty name="tip" value="rectangle"/>
+      <inkml:brushProperty name="rasterOp" value="maskPen"/>
+      <inkml:brushProperty name="ignorePressure" value="1"/>
+    </inkml:brush>
+  </inkml:definitions>
+  <inkml:trace contextRef="#ctx0" brushRef="#br0">513 533,'68'0,"436"-12,-411 4,0-4,0-4,118-37,-117 22,95-46,-149 59,-2-3,0-1,-2-1,61-52,-91 70,-1 1,-1-1,1 0,-1 0,1-1,-1 1,-1-1,5-9,-7 13,-1 1,0 0,1 0,-1 0,0 0,0-1,0 1,0 0,0 0,0 0,0 0,0-1,-1 1,1 0,0 0,-1 0,1 0,-1 0,0-2,-1 1,0 0,1 1,-1-1,0 1,0-1,0 1,0 0,0 0,0 0,0 0,0 0,-1 0,-3 0,-12-3,0 2,-1 0,1 1,-1 1,0 1,1 0,0 2,-1 0,-17 5,-12 5,1 2,-55 26,85-32,1 0,0 0,0 2,1 0,0 1,1 0,-23 26,36-36,-1 0,0 0,0-1,1 1,-1-1,-1 0,1 1,0-1,0 0,0 0,0 0,-1-1,1 1,0 0,-1-1,1 0,-3 1,-44-10,38 6,-319-97,-56-15,323 100,-1 3,-1 3,1 3,-73 2,116 5,0 0,0 1,0 2,0 0,1 1,-1 1,1 1,-21 10,31-12,0 1,0 1,1-1,-1 2,2-1,-1 1,1 0,0 1,1 0,0 0,0 1,1 0,0 0,1 0,-7 19,7-17,1 0,0 0,1 1,0-1,1 1,1 0,0 0,1 0,1 16,0-22,1 0,0 0,0 0,1-1,-1 1,2 0,-1-1,1 0,0 0,0 0,0 0,1-1,0 1,0-1,1 0,-1-1,1 0,8 5,12 7,1-2,1-1,0-1,1-2,0 0,1-2,38 5,223 14,-161-19,-97-6,0 2,0 1,0 1,-1 2,0 1,58 25,211 135,-75-39,-26-28,-10-10</inkml:trace>
+</inkml:ink>
+</file>
+
+<file path=ppt/ink/ink35.xml><?xml version="1.0" encoding="utf-8"?>
+<inkml:ink xmlns:inkml="http://www.w3.org/2003/InkML">
+  <inkml:definitions>
+    <inkml:context xml:id="ctx0">
+      <inkml:inkSource xml:id="inkSrc0">
+        <inkml:traceFormat>
+          <inkml:channel name="X" type="integer" min="-2.14748E9" max="2.14748E9" units="cm"/>
+          <inkml:channel name="Y" type="integer" min="-2.14748E9" max="2.14748E9" units="cm"/>
+        </inkml:traceFormat>
+        <inkml:channelProperties>
+          <inkml:channelProperty channel="X" name="resolution" value="1000" units="1/cm"/>
+          <inkml:channelProperty channel="Y" name="resolution" value="1000" units="1/cm"/>
+        </inkml:channelProperties>
+      </inkml:inkSource>
+      <inkml:timestamp xml:id="ts0" timeString="2026-03-24T22:42:22.870"/>
+    </inkml:context>
+    <inkml:brush xml:id="br0">
+      <inkml:brushProperty name="width" value="0.3" units="cm"/>
+      <inkml:brushProperty name="height" value="0.6" units="cm"/>
+      <inkml:brushProperty name="color" value="#FFFC00"/>
+      <inkml:brushProperty name="tip" value="rectangle"/>
+      <inkml:brushProperty name="rasterOp" value="maskPen"/>
+      <inkml:brushProperty name="ignorePressure" value="1"/>
+    </inkml:brush>
+  </inkml:definitions>
+  <inkml:trace contextRef="#ctx0" brushRef="#br0">2743 864,'30'-6,"-26"5,-1 0,0 0,1 0,-1 0,1 1,-1-1,1 1,-1 0,1 0,-1 1,1-1,-1 1,7 1,41 9,2-1,-1-3,1-3,91-3,219-35,-340 31,777-121,-547 70,272-96,-497 141,11-4,0-1,-1-2,49-27,-86 42,1 0,-1 0,0 0,1 0,-1 0,0 0,0 0,0 0,0 0,0 0,0-1,0 1,0 0,1-3,-2 3,0 1,0-1,0 1,0-1,-1 1,1-1,0 1,0-1,0 1,0-1,0 1,-1-1,1 1,0-1,0 1,-1-1,1 1,0-1,-1 1,1 0,-1-1,1 1,0-1,-1 1,1 0,-1 0,0-1,-7-3,0 1,-1 1,1-1,-14-1,14 2,-361-51,-22 24,141 13,-924-115,-208-14,1066 140,309 6,-48 6,53-7,1 0,-1 1,0-1,1 1,-1-1,1 1,-1 0,1-1,-1 1,1 0,-1 0,1 0,0 0,0 0,-1 1,1-1,0 0,0 0,0 1,0-1,1 1,-1-1,-1 3,2-3,0 1,0-1,0 1,1-1,-1 0,0 1,1-1,-1 1,1-1,-1 0,1 0,-1 1,1-1,0 0,0 0,0 0,0 0,-1 0,2 0,-1 0,0 0,2 1,16 13,0-2,2 0,-1-1,2-1,0-1,34 10,56 18,2-5,1-6,174 20,-131-32,0-8,179-14,-223-5,-111 12,-1-1,1 1,0 0,-1-1,1 0,-1 0,1 0,-1 0,0 0,1 0,-1 0,0-1,0 1,0-1,0 0,0 1,2-3,-4 3,0 0,0 1,0-1,0 0,0 0,0 1,0-1,0 0,0 1,0-1,0 0,-1 1,1-1,0 0,0 1,-1-1,1 0,0 1,-1-1,1 1,-1-1,1 0,-1 0,-26-20,-20-1,-1 1,0 2,-2 3,-93-19,-373-44,-14 43,-116 22,476 20,-296 49,437-51,0 2,0 1,1 1,0 1,0 2,-49 26,74-36,0 1,0 0,1-1,-1 1,1 0,0 0,-1 1,1-1,0 0,0 1,0-1,1 1,-1 0,1 0,-1-1,1 1,-2 6,4-6,-1 0,0 0,1 0,0 0,-1 0,1 0,0 0,1 0,-1 0,0 0,1 0,0-1,0 1,0-1,0 1,0-1,0 0,5 4,9 8,1 0,0-2,1 0,0-1,33 15,118 38,116 18,81 12,-319-82,1307 290,26-142,-1288-152,294 17,-292-24,0-3,99-17,-155 13,40-12,-72 17,1-1,-1 0,0 0,0 0,-1-1,1 0,0 0,-1-1,0 1,0-1,0 0,0 0,6-9,-10 12,-1 0,1 0,-1 0,0-1,1 1,-1 0,0-1,0 1,0 0,0 0,0-1,0 1,0 0,0-1,0 1,-1 0,1 0,-1-1,1 1,-1 0,1 0,-1 0,0 0,1 0,-1 0,0 0,0 0,0 0,0 0,0 0,0 0,0 0,0 1,-2-2,-7-4,0 0,-1 0,1 1,-1 0,0 1,-17-4,-77-13,-198-28,265 39,38 10,-1 0,1 0,0 0,0-1,-1 1,1 0,0 0,-1 0,1 0,0 0,0 0,-1-1,1 1,0 0,0 0,-1 0,1-1,0 1,0 0,0 0,0-1,-1 1,1 0,0 0,0-1,0 1,0 0,0 0,0-1,0 1,0 0,-1-1,1 1,0 0,0-1,0 1,1 0,-1-1,0 1,0 0,0 0,0-1,0 1,0 0,0 0,0-1,1 1,-1 0,0-1,0 1,0 0,1 0,-1 0,0-1,0 1,0 0,1 0,9-6,0 1,1 1,0 0,-1 0,1 1,1 0,16-1,-12 1,48-10,1 3,0 2,1 4,0 2,-1 3,1 3,99 19,126 58,78 17,-303-88</inkml:trace>
+</inkml:ink>
+</file>
+
+<file path=ppt/ink/ink36.xml><?xml version="1.0" encoding="utf-8"?>
+<inkml:ink xmlns:inkml="http://www.w3.org/2003/InkML">
+  <inkml:definitions>
+    <inkml:context xml:id="ctx0">
+      <inkml:inkSource xml:id="inkSrc0">
+        <inkml:traceFormat>
+          <inkml:channel name="X" type="integer" min="-2.14748E9" max="2.14748E9" units="cm"/>
+          <inkml:channel name="Y" type="integer" min="-2.14748E9" max="2.14748E9" units="cm"/>
+        </inkml:traceFormat>
+        <inkml:channelProperties>
+          <inkml:channelProperty channel="X" name="resolution" value="1000" units="1/cm"/>
+          <inkml:channelProperty channel="Y" name="resolution" value="1000" units="1/cm"/>
+        </inkml:channelProperties>
+      </inkml:inkSource>
+      <inkml:timestamp xml:id="ts0" timeString="2026-03-24T23:00:29.487"/>
+    </inkml:context>
+    <inkml:brush xml:id="br0">
+      <inkml:brushProperty name="width" value="0.3" units="cm"/>
+      <inkml:brushProperty name="height" value="0.6" units="cm"/>
+      <inkml:brushProperty name="color" value="#FFFC00"/>
+      <inkml:brushProperty name="tip" value="rectangle"/>
+      <inkml:brushProperty name="rasterOp" value="maskPen"/>
+      <inkml:brushProperty name="ignorePressure" value="1"/>
+    </inkml:brush>
+  </inkml:definitions>
+  <inkml:trace contextRef="#ctx0" brushRef="#br0">1721 580,'4'-1,"1"1,-1 1,0-1,0 0,1 1,-1 0,0 0,0 0,0 1,0-1,0 1,0 0,-1 0,1 0,-1 1,1-1,-1 1,0 0,0 0,0 0,0 0,-1 1,1-1,-1 1,0-1,2 5,-4-8,0 0,0 1,1-1,-1 0,0 0,0 1,0-1,0 0,0 1,0-1,0 0,0 0,0 1,0-1,0 0,-1 1,1-1,0 0,0 0,0 1,0-1,0 0,0 0,-1 1,1-1,0 0,0 0,0 0,-1 1,1-1,0 0,0 0,-1 0,1 0,0 0,0 1,-1-1,1 0,0 0,0 0,-1 0,1 0,0 0,-1 0,1 0,0 0,0 0,-1 0,1 0,0 0,0 0,-1 0,1 0,0-1,-1 1,1 0,0 0,-30-4,20 2,-718-47,723 49,-297 1,251 2,1 2,0 2,-87 24,91-11,46-20,-1 0,1 1,-1-1,1 0,-1 0,1 1,-1-1,1 0,-1 1,1-1,-1 0,1 1,-1-1,1 0,0 1,-1-1,1 1,0-1,0 1,-1-1,1 1,0-1,0 1,0-1,-1 1,1-1,0 1,0 0,0-1,0 1,0-1,0 1,0-1,0 1,0 0,1-1,-1 1,0-1,0 2,24 8,5-5,0-1,0-2,30-1,-20-1,1247 2,-768-6,-479 3,-62-3,-12-1,-826-182,692 147,143 34,-713-197,707 192,17 8,0-2,0 0,0-1,1-1,0 0,0 0,1-2,0 0,-13-11,25 19,0 0,0 0,0 0,0 0,0 0,0 0,0 0,0 0,0 0,1 0,-1-1,1 1,-1 0,1-1,-1 1,1 0,0-1,-1 1,1-1,0 1,0 0,0-1,0 1,0-1,1 1,-1 0,0-1,1 1,-1 0,0-1,1 1,0 0,-1 0,1-1,0 1,0 0,0 0,-1 0,1 0,0 0,1 0,-1 0,0 0,1 0,5-3,0 0,0 0,0 1,0 1,0-1,12-2,19-2,1 2,70-1,-87 4,-32-3,-43-7,51 12,-108-18,-2 4,-137 1,249 13,-77 4,73-4,0 0,0 0,0 1,0 0,0 0,0 0,0 0,0 1,1 0,-1-1,0 1,1 1,-5 2,8-4,-1-1,1 0,0 1,0-1,0 1,-1-1,1 0,0 1,0-1,0 1,0-1,0 1,0-1,0 1,0-1,0 1,0-1,0 1,0-1,0 0,0 1,0-1,0 1,0-1,1 1,-1-1,0 1,17 15,9-3,1-1,0 0,0-3,1 0,33 6,-20-5,64 18,697 169,-737-186,1-2,0-3,89-3,183-29,-254 17,35-4,0-4,-1-6,119-39,-190 47,0 3,1 2,74-7,-92 14,0-1,43-12,-26 0</inkml:trace>
+</inkml:ink>
+</file>
+
+<file path=ppt/ink/ink37.xml><?xml version="1.0" encoding="utf-8"?>
+<inkml:ink xmlns:inkml="http://www.w3.org/2003/InkML">
+  <inkml:definitions>
+    <inkml:context xml:id="ctx0">
+      <inkml:inkSource xml:id="inkSrc0">
+        <inkml:traceFormat>
+          <inkml:channel name="X" type="integer" min="-2.14748E9" max="2.14748E9" units="cm"/>
+          <inkml:channel name="Y" type="integer" min="-2.14748E9" max="2.14748E9" units="cm"/>
+        </inkml:traceFormat>
+        <inkml:channelProperties>
+          <inkml:channelProperty channel="X" name="resolution" value="1000" units="1/cm"/>
+          <inkml:channelProperty channel="Y" name="resolution" value="1000" units="1/cm"/>
+        </inkml:channelProperties>
+      </inkml:inkSource>
+      <inkml:timestamp xml:id="ts0" timeString="2026-03-24T23:00:44.895"/>
+    </inkml:context>
+    <inkml:brush xml:id="br0">
+      <inkml:brushProperty name="width" value="0.3" units="cm"/>
+      <inkml:brushProperty name="height" value="0.6" units="cm"/>
+      <inkml:brushProperty name="color" value="#FFFC00"/>
+      <inkml:brushProperty name="tip" value="rectangle"/>
+      <inkml:brushProperty name="rasterOp" value="maskPen"/>
+      <inkml:brushProperty name="ignorePressure" value="1"/>
+    </inkml:brush>
+  </inkml:definitions>
+  <inkml:trace contextRef="#ctx0" brushRef="#br0">0 0,'0'0</inkml:trace>
+</inkml:ink>
+</file>
+
+<file path=ppt/ink/ink38.xml><?xml version="1.0" encoding="utf-8"?>
+<inkml:ink xmlns:inkml="http://www.w3.org/2003/InkML">
+  <inkml:definitions>
+    <inkml:context xml:id="ctx0">
+      <inkml:inkSource xml:id="inkSrc0">
+        <inkml:traceFormat>
+          <inkml:channel name="X" type="integer" min="-2.14748E9" max="2.14748E9" units="cm"/>
+          <inkml:channel name="Y" type="integer" min="-2.14748E9" max="2.14748E9" units="cm"/>
+        </inkml:traceFormat>
+        <inkml:channelProperties>
+          <inkml:channelProperty channel="X" name="resolution" value="1000" units="1/cm"/>
+          <inkml:channelProperty channel="Y" name="resolution" value="1000" units="1/cm"/>
+        </inkml:channelProperties>
+      </inkml:inkSource>
+      <inkml:timestamp xml:id="ts0" timeString="2026-03-24T23:05:34.733"/>
+    </inkml:context>
+    <inkml:brush xml:id="br0">
+      <inkml:brushProperty name="width" value="0.3" units="cm"/>
+      <inkml:brushProperty name="height" value="0.6" units="cm"/>
+      <inkml:brushProperty name="color" value="#FFFC00"/>
+      <inkml:brushProperty name="tip" value="rectangle"/>
+      <inkml:brushProperty name="rasterOp" value="maskPen"/>
+      <inkml:brushProperty name="ignorePressure" value="1"/>
+    </inkml:brush>
+  </inkml:definitions>
+  <inkml:trace contextRef="#ctx0" brushRef="#br0">0 63,'0'-2,"0"-1,0 1,1 0,-1 0,1 0,-1-1,1 1,-1 0,1 0,0 0,0 0,0 0,0 0,1 0,-1 0,0 1,1-1,-1 0,1 1,3-3,-1 1,0 1,1 0,-1 0,1 0,-1 1,1-1,-1 1,1 0,7 0,6 0,0 1,0 0,0 2,21 3,120 19,176 3,161-21,-328-6,567-2,-678 2</inkml:trace>
+</inkml:ink>
+</file>
+
+<file path=ppt/ink/ink39.xml><?xml version="1.0" encoding="utf-8"?>
+<inkml:ink xmlns:inkml="http://www.w3.org/2003/InkML">
+  <inkml:definitions>
+    <inkml:context xml:id="ctx0">
+      <inkml:inkSource xml:id="inkSrc0">
+        <inkml:traceFormat>
+          <inkml:channel name="X" type="integer" min="-2.14748E9" max="2.14748E9" units="cm"/>
+          <inkml:channel name="Y" type="integer" min="-2.14748E9" max="2.14748E9" units="cm"/>
+        </inkml:traceFormat>
+        <inkml:channelProperties>
+          <inkml:channelProperty channel="X" name="resolution" value="1000" units="1/cm"/>
+          <inkml:channelProperty channel="Y" name="resolution" value="1000" units="1/cm"/>
+        </inkml:channelProperties>
+      </inkml:inkSource>
+      <inkml:timestamp xml:id="ts0" timeString="2026-03-24T23:05:35.558"/>
+    </inkml:context>
+    <inkml:brush xml:id="br0">
+      <inkml:brushProperty name="width" value="0.3" units="cm"/>
+      <inkml:brushProperty name="height" value="0.6" units="cm"/>
+      <inkml:brushProperty name="color" value="#FFFC00"/>
+      <inkml:brushProperty name="tip" value="rectangle"/>
+      <inkml:brushProperty name="rasterOp" value="maskPen"/>
+      <inkml:brushProperty name="ignorePressure" value="1"/>
+    </inkml:brush>
+  </inkml:definitions>
+  <inkml:trace contextRef="#ctx0" brushRef="#br0">0 0,'13'1,"-1"1,0 0,0 1,0 0,0 0,15 8,14 4,26 7,168 44,1142 152,-1051-180,675 67,-662-92,-265-15,-1-3,107-22,-105 6,-24 0</inkml:trace>
+</inkml:ink>
+</file>
+
 <file path=ppt/ink/ink4.xml><?xml version="1.0" encoding="utf-8"?>
 <inkml:ink xmlns:inkml="http://www.w3.org/2003/InkML">
   <inkml:definitions>
@@ -278,6 +1167,35 @@
     </inkml:brush>
   </inkml:definitions>
   <inkml:trace contextRef="#ctx0" brushRef="#br0">0 47,'160'0,"21"0,85 2,711 20,63 1,-822-20,876 0,-1050-4,82-11,-113 10,0-1,0-1,0 0,-1-1,0 0,0-1,0 0,-1 0,0-2,14-10,-3-2</inkml:trace>
+</inkml:ink>
+</file>
+
+<file path=ppt/ink/ink40.xml><?xml version="1.0" encoding="utf-8"?>
+<inkml:ink xmlns:inkml="http://www.w3.org/2003/InkML">
+  <inkml:definitions>
+    <inkml:context xml:id="ctx0">
+      <inkml:inkSource xml:id="inkSrc0">
+        <inkml:traceFormat>
+          <inkml:channel name="X" type="integer" min="-2.14748E9" max="2.14748E9" units="cm"/>
+          <inkml:channel name="Y" type="integer" min="-2.14748E9" max="2.14748E9" units="cm"/>
+        </inkml:traceFormat>
+        <inkml:channelProperties>
+          <inkml:channelProperty channel="X" name="resolution" value="1000" units="1/cm"/>
+          <inkml:channelProperty channel="Y" name="resolution" value="1000" units="1/cm"/>
+        </inkml:channelProperties>
+      </inkml:inkSource>
+      <inkml:timestamp xml:id="ts0" timeString="2026-03-24T23:07:33.050"/>
+    </inkml:context>
+    <inkml:brush xml:id="br0">
+      <inkml:brushProperty name="width" value="0.3" units="cm"/>
+      <inkml:brushProperty name="height" value="0.6" units="cm"/>
+      <inkml:brushProperty name="color" value="#FFFC00"/>
+      <inkml:brushProperty name="tip" value="rectangle"/>
+      <inkml:brushProperty name="rasterOp" value="maskPen"/>
+      <inkml:brushProperty name="ignorePressure" value="1"/>
+    </inkml:brush>
+  </inkml:definitions>
+  <inkml:trace contextRef="#ctx0" brushRef="#br0">0 63,'0'-13,"0"-11,0-2</inkml:trace>
 </inkml:ink>
 </file>
 
@@ -368,6 +1286,64 @@
 </inkml:ink>
 </file>
 
+<file path=ppt/ink/ink8.xml><?xml version="1.0" encoding="utf-8"?>
+<inkml:ink xmlns:inkml="http://www.w3.org/2003/InkML">
+  <inkml:definitions>
+    <inkml:context xml:id="ctx0">
+      <inkml:inkSource xml:id="inkSrc0">
+        <inkml:traceFormat>
+          <inkml:channel name="X" type="integer" min="-2.14748E9" max="2.14748E9" units="cm"/>
+          <inkml:channel name="Y" type="integer" min="-2.14748E9" max="2.14748E9" units="cm"/>
+        </inkml:traceFormat>
+        <inkml:channelProperties>
+          <inkml:channelProperty channel="X" name="resolution" value="1000" units="1/cm"/>
+          <inkml:channelProperty channel="Y" name="resolution" value="1000" units="1/cm"/>
+        </inkml:channelProperties>
+      </inkml:inkSource>
+      <inkml:timestamp xml:id="ts0" timeString="2026-03-24T20:53:58.858"/>
+    </inkml:context>
+    <inkml:brush xml:id="br0">
+      <inkml:brushProperty name="width" value="0.3" units="cm"/>
+      <inkml:brushProperty name="height" value="0.6" units="cm"/>
+      <inkml:brushProperty name="color" value="#FFFC00"/>
+      <inkml:brushProperty name="tip" value="rectangle"/>
+      <inkml:brushProperty name="rasterOp" value="maskPen"/>
+      <inkml:brushProperty name="ignorePressure" value="1"/>
+    </inkml:brush>
+  </inkml:definitions>
+  <inkml:trace contextRef="#ctx0" brushRef="#br0">2783 825,'-2'-2,"-1"0,1 0,0 0,-1 1,1-1,-1 1,0-1,1 1,-1 0,0 0,0 0,-4 0,-11-4,-143-36,89 25,-139-36,-402-87,-201-9,49 9,686 121,68 13,44 9,206 36,165 24,-314-52,999 102,-954-113,239-29,-304 21,353-50,-288 33,148-49,-279 72,90-33,-86 31,-1-1,0 1,0-2,0 1,-1-1,1 0,-1 0,0 0,5-8,-10 12,0 0,0-1,1 1,-1-1,-1 0,1 1,0-1,0 0,-1 1,1-1,-1 0,1 0,-1 0,0 1,0-1,1 0,-1 0,-1 0,1 0,0 0,0 1,-1-1,1 0,-2-3,0 2,0 0,0 0,-1 0,1 0,-1 0,0 0,1 1,-1-1,-1 1,1 0,-5-3,-10-4,0 1,-1 0,-30-7,45 14,-107-25,0 6,-1 4,-1 5,-156 4,188 7</inkml:trace>
+</inkml:ink>
+</file>
+
+<file path=ppt/ink/ink9.xml><?xml version="1.0" encoding="utf-8"?>
+<inkml:ink xmlns:inkml="http://www.w3.org/2003/InkML">
+  <inkml:definitions>
+    <inkml:context xml:id="ctx0">
+      <inkml:inkSource xml:id="inkSrc0">
+        <inkml:traceFormat>
+          <inkml:channel name="X" type="integer" min="-2.14748E9" max="2.14748E9" units="cm"/>
+          <inkml:channel name="Y" type="integer" min="-2.14748E9" max="2.14748E9" units="cm"/>
+        </inkml:traceFormat>
+        <inkml:channelProperties>
+          <inkml:channelProperty channel="X" name="resolution" value="1000" units="1/cm"/>
+          <inkml:channelProperty channel="Y" name="resolution" value="1000" units="1/cm"/>
+        </inkml:channelProperties>
+      </inkml:inkSource>
+      <inkml:timestamp xml:id="ts0" timeString="2026-03-24T20:54:01.411"/>
+    </inkml:context>
+    <inkml:brush xml:id="br0">
+      <inkml:brushProperty name="width" value="0.3" units="cm"/>
+      <inkml:brushProperty name="height" value="0.6" units="cm"/>
+      <inkml:brushProperty name="color" value="#FFFC00"/>
+      <inkml:brushProperty name="tip" value="rectangle"/>
+      <inkml:brushProperty name="rasterOp" value="maskPen"/>
+      <inkml:brushProperty name="ignorePressure" value="1"/>
+    </inkml:brush>
+  </inkml:definitions>
+  <inkml:trace contextRef="#ctx0" brushRef="#br0">1380 510,'0'1,"0"0,-1 0,1 0,0 0,-1 0,1 0,-1 0,1 0,-1-1,0 1,1 0,-1 0,0 0,0-1,0 1,1-1,-1 1,0 0,0-1,0 1,0-1,-2 1,-29 10,20-8,-101 34,-135 24,170-46,59-8,27-3,42 0,645-3,-457-3,-125 0,-75-4,-39 5,0 0,0 0,0 0,0 1,0-1,-1 0,1 1,0-1,0 0,0 1,-1 0,1-1,0 1,0 0,-1 0,1-1,0 1,-1 0,-1 1,-95-12,70 9,-1-1,1-1,0-1,-47-16,73 21,0 0,1-1,-1 1,1-1,-1 0,0 1,1-1,-1 0,1 0,0 0,-1 0,1 0,0 0,-1-1,1 1,0 0,0-1,0 1,0 0,0-1,1 1,-1-1,0 0,0-2,1 1,1 0,0 0,-1 0,1 1,0-1,1 0,-1 1,0-1,1 1,0-1,1-2,5-6,-7 10,-1 0,1 0,-1 0,1 0,-1 0,1 0,-1 0,0 0,0 0,1 0,-1 0,0 0,0 0,0 0,0 0,0 0,0 0,0 0,-1 0,1 0,0 0,-1 0,1 0,0 0,-1 0,1 0,-1 0,0 0,1 0,-1 0,1 1,-1-1,0 0,0 1,0-1,1 0,-1 1,0-1,0 1,0-1,-1 0,-52-17,43 15,-107-24,0 5,-2 5,0 5,0 6,-1 5,-232 27,320-21,1 1,0 1,1 1,-34 15,61-21,0-1,1 1,-1 0,1 1,-1-1,1 0,0 1,0 0,0 0,1 0,-4 4,6-7,-1 1,1 0,0 0,-1-1,1 1,0 0,0 0,0 0,0-1,-1 1,1 0,0 0,0 0,0-1,1 1,-1 0,0 0,0 0,0-1,1 1,-1 0,1 1,0-1,0 1,0-1,1 1,-1-1,1 0,-1 0,1 0,-1 0,1 0,0 0,0 0,-1 0,4 0,15 5,1-2,0 0,-1-1,40 0,-40-3,726 3,-630-4,-101 1,10-1,-43-1,-565-81,386 48,134 25,-174-34,186 32,1-2,-75-33,118 44,0 0,0-1,0 0,1 0,0 0,-8-8,13 12,0-2,0 1,0 0,0 0,0 0,1 0,-1-1,0 1,1 0,-1 0,1-1,-1 1,1-1,0 1,0 0,0-1,-1 1,1-1,0 1,1 0,-1-1,0 1,0-1,1 1,-1 0,1-1,-1 1,1 0,-1-1,1 1,0 0,-1 0,1 0,0 0,0-1,0 1,0 0,2-1,5-5,0 0,1 0,0 1,0 0,1 1,-1 0,17-6,85-25,-90 30,127-31,2 7,1 7,240-7,-341 27,-1 3,1 1,66 12,-90-7,42 17,-50-16,0-1,1-1,30 5,143-1,19 2,-187-8,1 2,0 0,-1 2,0 1,-1 0,35 19,21 16,3-3,163 54,-148-66,-21-7,-1 2,-1 4,100 51,-159-68,0 0,-1 0,0 2,-1 0,0 0,0 1,-2 1,0 0,0 1,9 18,26 20,-39-46,0 0,-1 0,1 1,-1 0,-1 0,8 12,-10 1,-7-7</inkml:trace>
+</inkml:ink>
+</file>
+
 <file path=ppt/slideLayouts/slideLayout1.xml><?xml version="1.0" encoding="utf-8"?>
 <p:sldLayout xmlns:a="http://schemas.openxmlformats.org/drawingml/2006/main" xmlns:r="http://schemas.openxmlformats.org/officeDocument/2006/relationships" xmlns:p="http://schemas.openxmlformats.org/presentationml/2006/main" type="title" preserve="1">
   <p:cSld name="Diapositiva de título">
@@ -517,7 +1493,7 @@
           <a:p>
             <a:fld id="{149D4704-9F6E-43D2-B3DF-484A4E6A9E7A}" type="datetimeFigureOut">
               <a:rPr lang="es-GT" smtClean="0"/>
-              <a:t>23/03/2026</a:t>
+              <a:t>24/03/2026</a:t>
             </a:fld>
             <a:endParaRPr lang="es-GT"/>
           </a:p>
@@ -717,7 +1693,7 @@
           <a:p>
             <a:fld id="{149D4704-9F6E-43D2-B3DF-484A4E6A9E7A}" type="datetimeFigureOut">
               <a:rPr lang="es-GT" smtClean="0"/>
-              <a:t>23/03/2026</a:t>
+              <a:t>24/03/2026</a:t>
             </a:fld>
             <a:endParaRPr lang="es-GT"/>
           </a:p>
@@ -927,7 +1903,7 @@
           <a:p>
             <a:fld id="{149D4704-9F6E-43D2-B3DF-484A4E6A9E7A}" type="datetimeFigureOut">
               <a:rPr lang="es-GT" smtClean="0"/>
-              <a:t>23/03/2026</a:t>
+              <a:t>24/03/2026</a:t>
             </a:fld>
             <a:endParaRPr lang="es-GT"/>
           </a:p>
@@ -1127,7 +2103,7 @@
           <a:p>
             <a:fld id="{149D4704-9F6E-43D2-B3DF-484A4E6A9E7A}" type="datetimeFigureOut">
               <a:rPr lang="es-GT" smtClean="0"/>
-              <a:t>23/03/2026</a:t>
+              <a:t>24/03/2026</a:t>
             </a:fld>
             <a:endParaRPr lang="es-GT"/>
           </a:p>
@@ -1403,7 +2379,7 @@
           <a:p>
             <a:fld id="{149D4704-9F6E-43D2-B3DF-484A4E6A9E7A}" type="datetimeFigureOut">
               <a:rPr lang="es-GT" smtClean="0"/>
-              <a:t>23/03/2026</a:t>
+              <a:t>24/03/2026</a:t>
             </a:fld>
             <a:endParaRPr lang="es-GT"/>
           </a:p>
@@ -1671,7 +2647,7 @@
           <a:p>
             <a:fld id="{149D4704-9F6E-43D2-B3DF-484A4E6A9E7A}" type="datetimeFigureOut">
               <a:rPr lang="es-GT" smtClean="0"/>
-              <a:t>23/03/2026</a:t>
+              <a:t>24/03/2026</a:t>
             </a:fld>
             <a:endParaRPr lang="es-GT"/>
           </a:p>
@@ -2086,7 +3062,7 @@
           <a:p>
             <a:fld id="{149D4704-9F6E-43D2-B3DF-484A4E6A9E7A}" type="datetimeFigureOut">
               <a:rPr lang="es-GT" smtClean="0"/>
-              <a:t>23/03/2026</a:t>
+              <a:t>24/03/2026</a:t>
             </a:fld>
             <a:endParaRPr lang="es-GT"/>
           </a:p>
@@ -2228,7 +3204,7 @@
           <a:p>
             <a:fld id="{149D4704-9F6E-43D2-B3DF-484A4E6A9E7A}" type="datetimeFigureOut">
               <a:rPr lang="es-GT" smtClean="0"/>
-              <a:t>23/03/2026</a:t>
+              <a:t>24/03/2026</a:t>
             </a:fld>
             <a:endParaRPr lang="es-GT"/>
           </a:p>
@@ -2341,7 +3317,7 @@
           <a:p>
             <a:fld id="{149D4704-9F6E-43D2-B3DF-484A4E6A9E7A}" type="datetimeFigureOut">
               <a:rPr lang="es-GT" smtClean="0"/>
-              <a:t>23/03/2026</a:t>
+              <a:t>24/03/2026</a:t>
             </a:fld>
             <a:endParaRPr lang="es-GT"/>
           </a:p>
@@ -2654,7 +3630,7 @@
           <a:p>
             <a:fld id="{149D4704-9F6E-43D2-B3DF-484A4E6A9E7A}" type="datetimeFigureOut">
               <a:rPr lang="es-GT" smtClean="0"/>
-              <a:t>23/03/2026</a:t>
+              <a:t>24/03/2026</a:t>
             </a:fld>
             <a:endParaRPr lang="es-GT"/>
           </a:p>
@@ -2943,7 +3919,7 @@
           <a:p>
             <a:fld id="{149D4704-9F6E-43D2-B3DF-484A4E6A9E7A}" type="datetimeFigureOut">
               <a:rPr lang="es-GT" smtClean="0"/>
-              <a:t>23/03/2026</a:t>
+              <a:t>24/03/2026</a:t>
             </a:fld>
             <a:endParaRPr lang="es-GT"/>
           </a:p>
@@ -3186,7 +4162,7 @@
           <a:p>
             <a:fld id="{149D4704-9F6E-43D2-B3DF-484A4E6A9E7A}" type="datetimeFigureOut">
               <a:rPr lang="es-GT" smtClean="0"/>
-              <a:t>23/03/2026</a:t>
+              <a:t>24/03/2026</a:t>
             </a:fld>
             <a:endParaRPr lang="es-GT"/>
           </a:p>
@@ -5890,8 +6866,8 @@
           </a:prstGeom>
         </p:spPr>
       </p:pic>
-      <mc:AlternateContent xmlns:mc="http://schemas.openxmlformats.org/markup-compatibility/2006">
-        <mc:Choice xmlns:p14="http://schemas.microsoft.com/office/powerpoint/2010/main" Requires="p14">
+      <mc:AlternateContent xmlns:mc="http://schemas.openxmlformats.org/markup-compatibility/2006" xmlns:p14="http://schemas.microsoft.com/office/powerpoint/2010/main">
+        <mc:Choice Requires="p14">
           <p:contentPart p14:bwMode="auto" r:id="rId3">
             <p14:nvContentPartPr>
               <p14:cNvPr id="5" name="Entrada de lápiz 4">
@@ -5910,7 +6886,7 @@
             </p14:xfrm>
           </p:contentPart>
         </mc:Choice>
-        <mc:Fallback>
+        <mc:Fallback xmlns="">
           <p:pic>
             <p:nvPicPr>
               <p:cNvPr id="5" name="Entrada de lápiz 4">
@@ -5941,8 +6917,8 @@
           </p:pic>
         </mc:Fallback>
       </mc:AlternateContent>
-      <mc:AlternateContent xmlns:mc="http://schemas.openxmlformats.org/markup-compatibility/2006">
-        <mc:Choice xmlns:p14="http://schemas.microsoft.com/office/powerpoint/2010/main" Requires="p14">
+      <mc:AlternateContent xmlns:mc="http://schemas.openxmlformats.org/markup-compatibility/2006" xmlns:p14="http://schemas.microsoft.com/office/powerpoint/2010/main">
+        <mc:Choice Requires="p14">
           <p:contentPart p14:bwMode="auto" r:id="rId5">
             <p14:nvContentPartPr>
               <p14:cNvPr id="6" name="Entrada de lápiz 5">
@@ -5961,7 +6937,7 @@
             </p14:xfrm>
           </p:contentPart>
         </mc:Choice>
-        <mc:Fallback>
+        <mc:Fallback xmlns="">
           <p:pic>
             <p:nvPicPr>
               <p:cNvPr id="6" name="Entrada de lápiz 5">
@@ -6220,8 +7196,8 @@
           </a:p>
         </p:txBody>
       </p:sp>
-      <mc:AlternateContent xmlns:mc="http://schemas.openxmlformats.org/markup-compatibility/2006">
-        <mc:Choice xmlns:p14="http://schemas.microsoft.com/office/powerpoint/2010/main" Requires="p14">
+      <mc:AlternateContent xmlns:mc="http://schemas.openxmlformats.org/markup-compatibility/2006" xmlns:p14="http://schemas.microsoft.com/office/powerpoint/2010/main">
+        <mc:Choice Requires="p14">
           <p:contentPart p14:bwMode="auto" r:id="rId2">
             <p14:nvContentPartPr>
               <p14:cNvPr id="3" name="Entrada de lápiz 2">
@@ -6240,7 +7216,7 @@
             </p14:xfrm>
           </p:contentPart>
         </mc:Choice>
-        <mc:Fallback>
+        <mc:Fallback xmlns="">
           <p:pic>
             <p:nvPicPr>
               <p:cNvPr id="3" name="Entrada de lápiz 2">
@@ -6441,6 +7417,36 @@
           </a:p>
         </p:txBody>
       </p:sp>
+      <p:pic>
+        <p:nvPicPr>
+          <p:cNvPr id="4" name="Imagen 3">
+            <a:extLst>
+              <a:ext uri="{FF2B5EF4-FFF2-40B4-BE49-F238E27FC236}">
+                <a16:creationId xmlns:a16="http://schemas.microsoft.com/office/drawing/2014/main" id="{9DCF4E8C-4971-86D4-79A0-62A0990B84E0}"/>
+              </a:ext>
+            </a:extLst>
+          </p:cNvPr>
+          <p:cNvPicPr>
+            <a:picLocks noChangeAspect="1"/>
+          </p:cNvPicPr>
+          <p:nvPr/>
+        </p:nvPicPr>
+        <p:blipFill>
+          <a:blip r:embed="rId2"/>
+          <a:stretch>
+            <a:fillRect/>
+          </a:stretch>
+        </p:blipFill>
+        <p:spPr>
+          <a:xfrm>
+            <a:off x="2971364" y="1914313"/>
+            <a:ext cx="6249272" cy="3029373"/>
+          </a:xfrm>
+          <a:prstGeom prst="rect">
+            <a:avLst/>
+          </a:prstGeom>
+        </p:spPr>
+      </p:pic>
     </p:spTree>
     <p:extLst>
       <p:ext uri="{BB962C8B-B14F-4D97-AF65-F5344CB8AC3E}">
@@ -6496,6 +7502,36 @@
           </a:p>
         </p:txBody>
       </p:sp>
+      <p:pic>
+        <p:nvPicPr>
+          <p:cNvPr id="4" name="Imagen 3">
+            <a:extLst>
+              <a:ext uri="{FF2B5EF4-FFF2-40B4-BE49-F238E27FC236}">
+                <a16:creationId xmlns:a16="http://schemas.microsoft.com/office/drawing/2014/main" id="{6E3F0E18-6074-2694-2C30-AE4BA4ACC3F7}"/>
+              </a:ext>
+            </a:extLst>
+          </p:cNvPr>
+          <p:cNvPicPr>
+            <a:picLocks noChangeAspect="1"/>
+          </p:cNvPicPr>
+          <p:nvPr/>
+        </p:nvPicPr>
+        <p:blipFill>
+          <a:blip r:embed="rId2"/>
+          <a:stretch>
+            <a:fillRect/>
+          </a:stretch>
+        </p:blipFill>
+        <p:spPr>
+          <a:xfrm>
+            <a:off x="1899652" y="2171524"/>
+            <a:ext cx="8392696" cy="2514951"/>
+          </a:xfrm>
+          <a:prstGeom prst="rect">
+            <a:avLst/>
+          </a:prstGeom>
+        </p:spPr>
+      </p:pic>
     </p:spTree>
     <p:extLst>
       <p:ext uri="{BB962C8B-B14F-4D97-AF65-F5344CB8AC3E}">
@@ -6551,6 +7587,36 @@
           </a:p>
         </p:txBody>
       </p:sp>
+      <p:pic>
+        <p:nvPicPr>
+          <p:cNvPr id="4" name="Imagen 3">
+            <a:extLst>
+              <a:ext uri="{FF2B5EF4-FFF2-40B4-BE49-F238E27FC236}">
+                <a16:creationId xmlns:a16="http://schemas.microsoft.com/office/drawing/2014/main" id="{543B7F44-91D8-E884-A9D1-611E428F37CA}"/>
+              </a:ext>
+            </a:extLst>
+          </p:cNvPr>
+          <p:cNvPicPr>
+            <a:picLocks noChangeAspect="1"/>
+          </p:cNvPicPr>
+          <p:nvPr/>
+        </p:nvPicPr>
+        <p:blipFill>
+          <a:blip r:embed="rId2"/>
+          <a:stretch>
+            <a:fillRect/>
+          </a:stretch>
+        </p:blipFill>
+        <p:spPr>
+          <a:xfrm>
+            <a:off x="919255" y="1283802"/>
+            <a:ext cx="10353489" cy="4863780"/>
+          </a:xfrm>
+          <a:prstGeom prst="rect">
+            <a:avLst/>
+          </a:prstGeom>
+        </p:spPr>
+      </p:pic>
     </p:spTree>
     <p:extLst>
       <p:ext uri="{BB962C8B-B14F-4D97-AF65-F5344CB8AC3E}">
@@ -6606,6 +7672,240 @@
           </a:p>
         </p:txBody>
       </p:sp>
+      <p:pic>
+        <p:nvPicPr>
+          <p:cNvPr id="6" name="Imagen 5">
+            <a:extLst>
+              <a:ext uri="{FF2B5EF4-FFF2-40B4-BE49-F238E27FC236}">
+                <a16:creationId xmlns:a16="http://schemas.microsoft.com/office/drawing/2014/main" id="{F4DE340F-A4B5-EF72-D619-22A55DC3DCF0}"/>
+              </a:ext>
+            </a:extLst>
+          </p:cNvPr>
+          <p:cNvPicPr>
+            <a:picLocks noChangeAspect="1"/>
+          </p:cNvPicPr>
+          <p:nvPr/>
+        </p:nvPicPr>
+        <p:blipFill>
+          <a:blip r:embed="rId2"/>
+          <a:stretch>
+            <a:fillRect/>
+          </a:stretch>
+        </p:blipFill>
+        <p:spPr>
+          <a:xfrm>
+            <a:off x="2472129" y="1027906"/>
+            <a:ext cx="5925377" cy="4210638"/>
+          </a:xfrm>
+          <a:prstGeom prst="rect">
+            <a:avLst/>
+          </a:prstGeom>
+        </p:spPr>
+      </p:pic>
+      <mc:AlternateContent xmlns:mc="http://schemas.openxmlformats.org/markup-compatibility/2006">
+        <mc:Choice xmlns:p14="http://schemas.microsoft.com/office/powerpoint/2010/main" Requires="p14">
+          <p:contentPart p14:bwMode="auto" r:id="rId3">
+            <p14:nvContentPartPr>
+              <p14:cNvPr id="7" name="Entrada de lápiz 6">
+                <a:extLst>
+                  <a:ext uri="{FF2B5EF4-FFF2-40B4-BE49-F238E27FC236}">
+                    <a16:creationId xmlns:a16="http://schemas.microsoft.com/office/drawing/2014/main" id="{627EADAC-F30A-AE99-8AA3-4B4D4D8BDB4C}"/>
+                  </a:ext>
+                </a:extLst>
+              </p14:cNvPr>
+              <p14:cNvContentPartPr/>
+              <p14:nvPr/>
+            </p14:nvContentPartPr>
+            <p14:xfrm>
+              <a:off x="2360354" y="2305468"/>
+              <a:ext cx="1244880" cy="297360"/>
+            </p14:xfrm>
+          </p:contentPart>
+        </mc:Choice>
+        <mc:Fallback>
+          <p:pic>
+            <p:nvPicPr>
+              <p:cNvPr id="7" name="Entrada de lápiz 6">
+                <a:extLst>
+                  <a:ext uri="{FF2B5EF4-FFF2-40B4-BE49-F238E27FC236}">
+                    <a16:creationId xmlns:a16="http://schemas.microsoft.com/office/drawing/2014/main" id="{627EADAC-F30A-AE99-8AA3-4B4D4D8BDB4C}"/>
+                  </a:ext>
+                </a:extLst>
+              </p:cNvPr>
+              <p:cNvPicPr/>
+              <p:nvPr/>
+            </p:nvPicPr>
+            <p:blipFill>
+              <a:blip r:embed="rId4"/>
+              <a:stretch>
+                <a:fillRect/>
+              </a:stretch>
+            </p:blipFill>
+            <p:spPr>
+              <a:xfrm>
+                <a:off x="2306714" y="2197468"/>
+                <a:ext cx="1352520" cy="513000"/>
+              </a:xfrm>
+              <a:prstGeom prst="rect">
+                <a:avLst/>
+              </a:prstGeom>
+            </p:spPr>
+          </p:pic>
+        </mc:Fallback>
+      </mc:AlternateContent>
+      <mc:AlternateContent xmlns:mc="http://schemas.openxmlformats.org/markup-compatibility/2006">
+        <mc:Choice xmlns:p14="http://schemas.microsoft.com/office/powerpoint/2010/main" Requires="p14">
+          <p:contentPart p14:bwMode="auto" r:id="rId5">
+            <p14:nvContentPartPr>
+              <p14:cNvPr id="8" name="Entrada de lápiz 7">
+                <a:extLst>
+                  <a:ext uri="{FF2B5EF4-FFF2-40B4-BE49-F238E27FC236}">
+                    <a16:creationId xmlns:a16="http://schemas.microsoft.com/office/drawing/2014/main" id="{4016E31D-DB57-246F-1D7F-EFBF9C9B11A7}"/>
+                  </a:ext>
+                </a:extLst>
+              </p14:cNvPr>
+              <p14:cNvContentPartPr/>
+              <p14:nvPr/>
+            </p14:nvContentPartPr>
+            <p14:xfrm>
+              <a:off x="4496954" y="2249668"/>
+              <a:ext cx="1186560" cy="294480"/>
+            </p14:xfrm>
+          </p:contentPart>
+        </mc:Choice>
+        <mc:Fallback>
+          <p:pic>
+            <p:nvPicPr>
+              <p:cNvPr id="8" name="Entrada de lápiz 7">
+                <a:extLst>
+                  <a:ext uri="{FF2B5EF4-FFF2-40B4-BE49-F238E27FC236}">
+                    <a16:creationId xmlns:a16="http://schemas.microsoft.com/office/drawing/2014/main" id="{4016E31D-DB57-246F-1D7F-EFBF9C9B11A7}"/>
+                  </a:ext>
+                </a:extLst>
+              </p:cNvPr>
+              <p:cNvPicPr/>
+              <p:nvPr/>
+            </p:nvPicPr>
+            <p:blipFill>
+              <a:blip r:embed="rId6"/>
+              <a:stretch>
+                <a:fillRect/>
+              </a:stretch>
+            </p:blipFill>
+            <p:spPr>
+              <a:xfrm>
+                <a:off x="4442954" y="2142028"/>
+                <a:ext cx="1294200" cy="510120"/>
+              </a:xfrm>
+              <a:prstGeom prst="rect">
+                <a:avLst/>
+              </a:prstGeom>
+            </p:spPr>
+          </p:pic>
+        </mc:Fallback>
+      </mc:AlternateContent>
+      <mc:AlternateContent xmlns:mc="http://schemas.openxmlformats.org/markup-compatibility/2006">
+        <mc:Choice xmlns:p14="http://schemas.microsoft.com/office/powerpoint/2010/main" Requires="p14">
+          <p:contentPart p14:bwMode="auto" r:id="rId7">
+            <p14:nvContentPartPr>
+              <p14:cNvPr id="9" name="Entrada de lápiz 8">
+                <a:extLst>
+                  <a:ext uri="{FF2B5EF4-FFF2-40B4-BE49-F238E27FC236}">
+                    <a16:creationId xmlns:a16="http://schemas.microsoft.com/office/drawing/2014/main" id="{777F210D-79E8-82D8-3B32-04EA222BAD6A}"/>
+                  </a:ext>
+                </a:extLst>
+              </p14:cNvPr>
+              <p14:cNvContentPartPr/>
+              <p14:nvPr/>
+            </p14:nvContentPartPr>
+            <p14:xfrm>
+              <a:off x="2532074" y="1651708"/>
+              <a:ext cx="1098000" cy="203040"/>
+            </p14:xfrm>
+          </p:contentPart>
+        </mc:Choice>
+        <mc:Fallback>
+          <p:pic>
+            <p:nvPicPr>
+              <p:cNvPr id="9" name="Entrada de lápiz 8">
+                <a:extLst>
+                  <a:ext uri="{FF2B5EF4-FFF2-40B4-BE49-F238E27FC236}">
+                    <a16:creationId xmlns:a16="http://schemas.microsoft.com/office/drawing/2014/main" id="{777F210D-79E8-82D8-3B32-04EA222BAD6A}"/>
+                  </a:ext>
+                </a:extLst>
+              </p:cNvPr>
+              <p:cNvPicPr/>
+              <p:nvPr/>
+            </p:nvPicPr>
+            <p:blipFill>
+              <a:blip r:embed="rId8"/>
+              <a:stretch>
+                <a:fillRect/>
+              </a:stretch>
+            </p:blipFill>
+            <p:spPr>
+              <a:xfrm>
+                <a:off x="2478074" y="1544068"/>
+                <a:ext cx="1205640" cy="418680"/>
+              </a:xfrm>
+              <a:prstGeom prst="rect">
+                <a:avLst/>
+              </a:prstGeom>
+            </p:spPr>
+          </p:pic>
+        </mc:Fallback>
+      </mc:AlternateContent>
+      <mc:AlternateContent xmlns:mc="http://schemas.openxmlformats.org/markup-compatibility/2006">
+        <mc:Choice xmlns:p14="http://schemas.microsoft.com/office/powerpoint/2010/main" Requires="p14">
+          <p:contentPart p14:bwMode="auto" r:id="rId9">
+            <p14:nvContentPartPr>
+              <p14:cNvPr id="10" name="Entrada de lápiz 9">
+                <a:extLst>
+                  <a:ext uri="{FF2B5EF4-FFF2-40B4-BE49-F238E27FC236}">
+                    <a16:creationId xmlns:a16="http://schemas.microsoft.com/office/drawing/2014/main" id="{B6F5A35C-6963-FF2C-EDAB-56FD7748303B}"/>
+                  </a:ext>
+                </a:extLst>
+              </p14:cNvPr>
+              <p14:cNvContentPartPr/>
+              <p14:nvPr/>
+            </p14:nvContentPartPr>
+            <p14:xfrm>
+              <a:off x="9945554" y="5024548"/>
+              <a:ext cx="6120" cy="11520"/>
+            </p14:xfrm>
+          </p:contentPart>
+        </mc:Choice>
+        <mc:Fallback>
+          <p:pic>
+            <p:nvPicPr>
+              <p:cNvPr id="10" name="Entrada de lápiz 9">
+                <a:extLst>
+                  <a:ext uri="{FF2B5EF4-FFF2-40B4-BE49-F238E27FC236}">
+                    <a16:creationId xmlns:a16="http://schemas.microsoft.com/office/drawing/2014/main" id="{B6F5A35C-6963-FF2C-EDAB-56FD7748303B}"/>
+                  </a:ext>
+                </a:extLst>
+              </p:cNvPr>
+              <p:cNvPicPr/>
+              <p:nvPr/>
+            </p:nvPicPr>
+            <p:blipFill>
+              <a:blip r:embed="rId10"/>
+              <a:stretch>
+                <a:fillRect/>
+              </a:stretch>
+            </p:blipFill>
+            <p:spPr>
+              <a:xfrm>
+                <a:off x="9891554" y="4916908"/>
+                <a:ext cx="113760" cy="227160"/>
+              </a:xfrm>
+              <a:prstGeom prst="rect">
+                <a:avLst/>
+              </a:prstGeom>
+            </p:spPr>
+          </p:pic>
+        </mc:Fallback>
+      </mc:AlternateContent>
     </p:spTree>
     <p:extLst>
       <p:ext uri="{BB962C8B-B14F-4D97-AF65-F5344CB8AC3E}">
@@ -6742,10 +8042,94 @@
           <a:bodyPr/>
           <a:lstStyle/>
           <a:p>
-            <a:endParaRPr lang="es-GT"/>
-          </a:p>
-        </p:txBody>
-      </p:sp>
+            <a:r>
+              <a:rPr lang="es-GT" dirty="0"/>
+              <a:t>DOBLE CLICK </a:t>
+            </a:r>
+          </a:p>
+        </p:txBody>
+      </p:sp>
+      <mc:AlternateContent xmlns:mc="http://schemas.openxmlformats.org/markup-compatibility/2006">
+        <mc:Choice xmlns:p14="http://schemas.microsoft.com/office/powerpoint/2010/main" Requires="p14">
+          <p:contentPart p14:bwMode="auto" r:id="rId2">
+            <p14:nvContentPartPr>
+              <p14:cNvPr id="3" name="Entrada de lápiz 2">
+                <a:extLst>
+                  <a:ext uri="{FF2B5EF4-FFF2-40B4-BE49-F238E27FC236}">
+                    <a16:creationId xmlns:a16="http://schemas.microsoft.com/office/drawing/2014/main" id="{19606B00-8362-B43A-29E9-8058DE73F3C5}"/>
+                  </a:ext>
+                </a:extLst>
+              </p14:cNvPr>
+              <p14:cNvContentPartPr/>
+              <p14:nvPr/>
+            </p14:nvContentPartPr>
+            <p14:xfrm>
+              <a:off x="4529714" y="1546948"/>
+              <a:ext cx="360" cy="360"/>
+            </p14:xfrm>
+          </p:contentPart>
+        </mc:Choice>
+        <mc:Fallback>
+          <p:pic>
+            <p:nvPicPr>
+              <p:cNvPr id="3" name="Entrada de lápiz 2">
+                <a:extLst>
+                  <a:ext uri="{FF2B5EF4-FFF2-40B4-BE49-F238E27FC236}">
+                    <a16:creationId xmlns:a16="http://schemas.microsoft.com/office/drawing/2014/main" id="{19606B00-8362-B43A-29E9-8058DE73F3C5}"/>
+                  </a:ext>
+                </a:extLst>
+              </p:cNvPr>
+              <p:cNvPicPr/>
+              <p:nvPr/>
+            </p:nvPicPr>
+            <p:blipFill>
+              <a:blip r:embed="rId3"/>
+              <a:stretch>
+                <a:fillRect/>
+              </a:stretch>
+            </p:blipFill>
+            <p:spPr>
+              <a:xfrm>
+                <a:off x="4475714" y="1438948"/>
+                <a:ext cx="108000" cy="216000"/>
+              </a:xfrm>
+              <a:prstGeom prst="rect">
+                <a:avLst/>
+              </a:prstGeom>
+            </p:spPr>
+          </p:pic>
+        </mc:Fallback>
+      </mc:AlternateContent>
+      <p:pic>
+        <p:nvPicPr>
+          <p:cNvPr id="5" name="Imagen 4">
+            <a:extLst>
+              <a:ext uri="{FF2B5EF4-FFF2-40B4-BE49-F238E27FC236}">
+                <a16:creationId xmlns:a16="http://schemas.microsoft.com/office/drawing/2014/main" id="{98737775-70E0-C60E-7D4D-B8B96AD0ECEF}"/>
+              </a:ext>
+            </a:extLst>
+          </p:cNvPr>
+          <p:cNvPicPr>
+            <a:picLocks noChangeAspect="1"/>
+          </p:cNvPicPr>
+          <p:nvPr/>
+        </p:nvPicPr>
+        <p:blipFill>
+          <a:blip r:embed="rId4"/>
+          <a:stretch>
+            <a:fillRect/>
+          </a:stretch>
+        </p:blipFill>
+        <p:spPr>
+          <a:xfrm>
+            <a:off x="2000347" y="1286738"/>
+            <a:ext cx="8191306" cy="5206137"/>
+          </a:xfrm>
+          <a:prstGeom prst="rect">
+            <a:avLst/>
+          </a:prstGeom>
+        </p:spPr>
+      </p:pic>
     </p:spTree>
     <p:extLst>
       <p:ext uri="{BB962C8B-B14F-4D97-AF65-F5344CB8AC3E}">
@@ -6797,10 +8181,47 @@
           <a:bodyPr/>
           <a:lstStyle/>
           <a:p>
-            <a:endParaRPr lang="es-GT"/>
-          </a:p>
-        </p:txBody>
-      </p:sp>
+            <a:r>
+              <a:rPr lang="es-GT" dirty="0" err="1"/>
+              <a:t>Despues</a:t>
+            </a:r>
+            <a:r>
+              <a:rPr lang="es-GT" dirty="0"/>
+              <a:t> aparece esto </a:t>
+            </a:r>
+          </a:p>
+        </p:txBody>
+      </p:sp>
+      <p:pic>
+        <p:nvPicPr>
+          <p:cNvPr id="4" name="Imagen 3">
+            <a:extLst>
+              <a:ext uri="{FF2B5EF4-FFF2-40B4-BE49-F238E27FC236}">
+                <a16:creationId xmlns:a16="http://schemas.microsoft.com/office/drawing/2014/main" id="{478E13FF-B566-A66A-6064-FD4272977A37}"/>
+              </a:ext>
+            </a:extLst>
+          </p:cNvPr>
+          <p:cNvPicPr>
+            <a:picLocks noChangeAspect="1"/>
+          </p:cNvPicPr>
+          <p:nvPr/>
+        </p:nvPicPr>
+        <p:blipFill>
+          <a:blip r:embed="rId2"/>
+          <a:stretch>
+            <a:fillRect/>
+          </a:stretch>
+        </p:blipFill>
+        <p:spPr>
+          <a:xfrm>
+            <a:off x="1105488" y="1406769"/>
+            <a:ext cx="8555629" cy="4930726"/>
+          </a:xfrm>
+          <a:prstGeom prst="rect">
+            <a:avLst/>
+          </a:prstGeom>
+        </p:spPr>
+      </p:pic>
     </p:spTree>
     <p:extLst>
       <p:ext uri="{BB962C8B-B14F-4D97-AF65-F5344CB8AC3E}">
@@ -6852,10 +8273,247 @@
           <a:bodyPr/>
           <a:lstStyle/>
           <a:p>
-            <a:endParaRPr lang="es-GT"/>
-          </a:p>
-        </p:txBody>
-      </p:sp>
+            <a:r>
+              <a:rPr lang="es-GT" dirty="0"/>
+              <a:t>Darle en line para poner una cota</a:t>
+            </a:r>
+          </a:p>
+        </p:txBody>
+      </p:sp>
+      <p:pic>
+        <p:nvPicPr>
+          <p:cNvPr id="4" name="Imagen 3">
+            <a:extLst>
+              <a:ext uri="{FF2B5EF4-FFF2-40B4-BE49-F238E27FC236}">
+                <a16:creationId xmlns:a16="http://schemas.microsoft.com/office/drawing/2014/main" id="{DA108F35-1010-CB82-6FF2-BFD38C05599A}"/>
+              </a:ext>
+            </a:extLst>
+          </p:cNvPr>
+          <p:cNvPicPr>
+            <a:picLocks noChangeAspect="1"/>
+          </p:cNvPicPr>
+          <p:nvPr/>
+        </p:nvPicPr>
+        <p:blipFill>
+          <a:blip r:embed="rId2"/>
+          <a:stretch>
+            <a:fillRect/>
+          </a:stretch>
+        </p:blipFill>
+        <p:spPr>
+          <a:xfrm>
+            <a:off x="1219402" y="1529760"/>
+            <a:ext cx="9280552" cy="4902295"/>
+          </a:xfrm>
+          <a:prstGeom prst="rect">
+            <a:avLst/>
+          </a:prstGeom>
+        </p:spPr>
+      </p:pic>
+      <mc:AlternateContent xmlns:mc="http://schemas.openxmlformats.org/markup-compatibility/2006">
+        <mc:Choice xmlns:p14="http://schemas.microsoft.com/office/powerpoint/2010/main" Requires="p14">
+          <p:contentPart p14:bwMode="auto" r:id="rId3">
+            <p14:nvContentPartPr>
+              <p14:cNvPr id="5" name="Entrada de lápiz 4">
+                <a:extLst>
+                  <a:ext uri="{FF2B5EF4-FFF2-40B4-BE49-F238E27FC236}">
+                    <a16:creationId xmlns:a16="http://schemas.microsoft.com/office/drawing/2014/main" id="{629DB673-E8AC-DF8D-FA9F-60306CE2291D}"/>
+                  </a:ext>
+                </a:extLst>
+              </p14:cNvPr>
+              <p14:cNvContentPartPr/>
+              <p14:nvPr/>
+            </p14:nvContentPartPr>
+            <p14:xfrm>
+              <a:off x="1467194" y="1935028"/>
+              <a:ext cx="1964520" cy="631800"/>
+            </p14:xfrm>
+          </p:contentPart>
+        </mc:Choice>
+        <mc:Fallback>
+          <p:pic>
+            <p:nvPicPr>
+              <p:cNvPr id="5" name="Entrada de lápiz 4">
+                <a:extLst>
+                  <a:ext uri="{FF2B5EF4-FFF2-40B4-BE49-F238E27FC236}">
+                    <a16:creationId xmlns:a16="http://schemas.microsoft.com/office/drawing/2014/main" id="{629DB673-E8AC-DF8D-FA9F-60306CE2291D}"/>
+                  </a:ext>
+                </a:extLst>
+              </p:cNvPr>
+              <p:cNvPicPr/>
+              <p:nvPr/>
+            </p:nvPicPr>
+            <p:blipFill>
+              <a:blip r:embed="rId4"/>
+              <a:stretch>
+                <a:fillRect/>
+              </a:stretch>
+            </p:blipFill>
+            <p:spPr>
+              <a:xfrm>
+                <a:off x="1413554" y="1827388"/>
+                <a:ext cx="2072160" cy="847440"/>
+              </a:xfrm>
+              <a:prstGeom prst="rect">
+                <a:avLst/>
+              </a:prstGeom>
+            </p:spPr>
+          </p:pic>
+        </mc:Fallback>
+      </mc:AlternateContent>
+      <mc:AlternateContent xmlns:mc="http://schemas.openxmlformats.org/markup-compatibility/2006">
+        <mc:Choice xmlns:p14="http://schemas.microsoft.com/office/powerpoint/2010/main" Requires="p14">
+          <p:contentPart p14:bwMode="auto" r:id="rId5">
+            <p14:nvContentPartPr>
+              <p14:cNvPr id="6" name="Entrada de lápiz 5">
+                <a:extLst>
+                  <a:ext uri="{FF2B5EF4-FFF2-40B4-BE49-F238E27FC236}">
+                    <a16:creationId xmlns:a16="http://schemas.microsoft.com/office/drawing/2014/main" id="{6C4569D6-767E-14CD-E1AA-3F9BE5BBDC02}"/>
+                  </a:ext>
+                </a:extLst>
+              </p14:cNvPr>
+              <p14:cNvContentPartPr/>
+              <p14:nvPr/>
+            </p14:nvContentPartPr>
+            <p14:xfrm>
+              <a:off x="4471394" y="3985948"/>
+              <a:ext cx="6028560" cy="613800"/>
+            </p14:xfrm>
+          </p:contentPart>
+        </mc:Choice>
+        <mc:Fallback>
+          <p:pic>
+            <p:nvPicPr>
+              <p:cNvPr id="6" name="Entrada de lápiz 5">
+                <a:extLst>
+                  <a:ext uri="{FF2B5EF4-FFF2-40B4-BE49-F238E27FC236}">
+                    <a16:creationId xmlns:a16="http://schemas.microsoft.com/office/drawing/2014/main" id="{6C4569D6-767E-14CD-E1AA-3F9BE5BBDC02}"/>
+                  </a:ext>
+                </a:extLst>
+              </p:cNvPr>
+              <p:cNvPicPr/>
+              <p:nvPr/>
+            </p:nvPicPr>
+            <p:blipFill>
+              <a:blip r:embed="rId6"/>
+              <a:stretch>
+                <a:fillRect/>
+              </a:stretch>
+            </p:blipFill>
+            <p:spPr>
+              <a:xfrm>
+                <a:off x="4417394" y="3877948"/>
+                <a:ext cx="6136200" cy="829440"/>
+              </a:xfrm>
+              <a:prstGeom prst="rect">
+                <a:avLst/>
+              </a:prstGeom>
+            </p:spPr>
+          </p:pic>
+        </mc:Fallback>
+      </mc:AlternateContent>
+      <mc:AlternateContent xmlns:mc="http://schemas.openxmlformats.org/markup-compatibility/2006">
+        <mc:Choice xmlns:p14="http://schemas.microsoft.com/office/powerpoint/2010/main" Requires="p14">
+          <p:contentPart p14:bwMode="auto" r:id="rId7">
+            <p14:nvContentPartPr>
+              <p14:cNvPr id="7" name="Entrada de lápiz 6">
+                <a:extLst>
+                  <a:ext uri="{FF2B5EF4-FFF2-40B4-BE49-F238E27FC236}">
+                    <a16:creationId xmlns:a16="http://schemas.microsoft.com/office/drawing/2014/main" id="{F7775E3F-D528-296F-51C7-B290B2334965}"/>
+                  </a:ext>
+                </a:extLst>
+              </p14:cNvPr>
+              <p14:cNvContentPartPr/>
+              <p14:nvPr/>
+            </p14:nvContentPartPr>
+            <p14:xfrm>
+              <a:off x="6976994" y="3980908"/>
+              <a:ext cx="360" cy="360"/>
+            </p14:xfrm>
+          </p:contentPart>
+        </mc:Choice>
+        <mc:Fallback>
+          <p:pic>
+            <p:nvPicPr>
+              <p:cNvPr id="7" name="Entrada de lápiz 6">
+                <a:extLst>
+                  <a:ext uri="{FF2B5EF4-FFF2-40B4-BE49-F238E27FC236}">
+                    <a16:creationId xmlns:a16="http://schemas.microsoft.com/office/drawing/2014/main" id="{F7775E3F-D528-296F-51C7-B290B2334965}"/>
+                  </a:ext>
+                </a:extLst>
+              </p:cNvPr>
+              <p:cNvPicPr/>
+              <p:nvPr/>
+            </p:nvPicPr>
+            <p:blipFill>
+              <a:blip r:embed="rId8"/>
+              <a:stretch>
+                <a:fillRect/>
+              </a:stretch>
+            </p:blipFill>
+            <p:spPr>
+              <a:xfrm>
+                <a:off x="6922994" y="3872908"/>
+                <a:ext cx="108000" cy="216000"/>
+              </a:xfrm>
+              <a:prstGeom prst="rect">
+                <a:avLst/>
+              </a:prstGeom>
+            </p:spPr>
+          </p:pic>
+        </mc:Fallback>
+      </mc:AlternateContent>
+      <mc:AlternateContent xmlns:mc="http://schemas.openxmlformats.org/markup-compatibility/2006">
+        <mc:Choice xmlns:p14="http://schemas.microsoft.com/office/powerpoint/2010/main" Requires="p14">
+          <p:contentPart p14:bwMode="auto" r:id="rId9">
+            <p14:nvContentPartPr>
+              <p14:cNvPr id="8" name="Entrada de lápiz 7">
+                <a:extLst>
+                  <a:ext uri="{FF2B5EF4-FFF2-40B4-BE49-F238E27FC236}">
+                    <a16:creationId xmlns:a16="http://schemas.microsoft.com/office/drawing/2014/main" id="{C7B1C77B-72E9-0296-5EA8-A5E0D4D65710}"/>
+                  </a:ext>
+                </a:extLst>
+              </p14:cNvPr>
+              <p14:cNvContentPartPr/>
+              <p14:nvPr/>
+            </p14:nvContentPartPr>
+            <p14:xfrm>
+              <a:off x="10241114" y="1794628"/>
+              <a:ext cx="360" cy="6120"/>
+            </p14:xfrm>
+          </p:contentPart>
+        </mc:Choice>
+        <mc:Fallback>
+          <p:pic>
+            <p:nvPicPr>
+              <p:cNvPr id="8" name="Entrada de lápiz 7">
+                <a:extLst>
+                  <a:ext uri="{FF2B5EF4-FFF2-40B4-BE49-F238E27FC236}">
+                    <a16:creationId xmlns:a16="http://schemas.microsoft.com/office/drawing/2014/main" id="{C7B1C77B-72E9-0296-5EA8-A5E0D4D65710}"/>
+                  </a:ext>
+                </a:extLst>
+              </p:cNvPr>
+              <p:cNvPicPr/>
+              <p:nvPr/>
+            </p:nvPicPr>
+            <p:blipFill>
+              <a:blip r:embed="rId10"/>
+              <a:stretch>
+                <a:fillRect/>
+              </a:stretch>
+            </p:blipFill>
+            <p:spPr>
+              <a:xfrm>
+                <a:off x="10187114" y="1686988"/>
+                <a:ext cx="108000" cy="221760"/>
+              </a:xfrm>
+              <a:prstGeom prst="rect">
+                <a:avLst/>
+              </a:prstGeom>
+            </p:spPr>
+          </p:pic>
+        </mc:Fallback>
+      </mc:AlternateContent>
     </p:spTree>
     <p:extLst>
       <p:ext uri="{BB962C8B-B14F-4D97-AF65-F5344CB8AC3E}">
@@ -6902,15 +8560,134 @@
             <p:ph type="title"/>
           </p:nvPr>
         </p:nvSpPr>
-        <p:spPr/>
-        <p:txBody>
-          <a:bodyPr/>
+        <p:spPr>
+          <a:xfrm>
+            <a:off x="7118252" y="2615956"/>
+            <a:ext cx="4685714" cy="1325563"/>
+          </a:xfrm>
+        </p:spPr>
+        <p:txBody>
+          <a:bodyPr>
+            <a:normAutofit fontScale="90000"/>
+          </a:bodyPr>
           <a:lstStyle/>
           <a:p>
-            <a:endParaRPr lang="es-GT"/>
-          </a:p>
-        </p:txBody>
-      </p:sp>
+            <a:r>
+              <a:rPr lang="es-GT" dirty="0" err="1"/>
+              <a:t>Utlilizamos</a:t>
+            </a:r>
+            <a:r>
+              <a:rPr lang="es-GT" dirty="0"/>
+              <a:t> </a:t>
+            </a:r>
+            <a:r>
+              <a:rPr lang="es-GT" dirty="0" err="1"/>
+              <a:t>strech</a:t>
+            </a:r>
+            <a:r>
+              <a:rPr lang="es-GT" dirty="0"/>
+              <a:t> es un modificador regular, para </a:t>
+            </a:r>
+            <a:r>
+              <a:rPr lang="es-GT" dirty="0" err="1"/>
+              <a:t>asiganrle</a:t>
+            </a:r>
+            <a:r>
+              <a:rPr lang="es-GT" dirty="0"/>
+              <a:t> una acción a </a:t>
+            </a:r>
+            <a:r>
+              <a:rPr lang="es-GT" dirty="0" err="1"/>
+              <a:t>nuestta</a:t>
+            </a:r>
+            <a:r>
+              <a:rPr lang="es-GT" dirty="0"/>
+              <a:t> figura </a:t>
+            </a:r>
+          </a:p>
+        </p:txBody>
+      </p:sp>
+      <p:pic>
+        <p:nvPicPr>
+          <p:cNvPr id="4" name="Imagen 3">
+            <a:extLst>
+              <a:ext uri="{FF2B5EF4-FFF2-40B4-BE49-F238E27FC236}">
+                <a16:creationId xmlns:a16="http://schemas.microsoft.com/office/drawing/2014/main" id="{D10CA5BD-1FD2-2DB3-E1A7-05004BC09ACE}"/>
+              </a:ext>
+            </a:extLst>
+          </p:cNvPr>
+          <p:cNvPicPr>
+            <a:picLocks noChangeAspect="1"/>
+          </p:cNvPicPr>
+          <p:nvPr/>
+        </p:nvPicPr>
+        <p:blipFill>
+          <a:blip r:embed="rId2"/>
+          <a:stretch>
+            <a:fillRect/>
+          </a:stretch>
+        </p:blipFill>
+        <p:spPr>
+          <a:xfrm>
+            <a:off x="388034" y="571018"/>
+            <a:ext cx="5447221" cy="4746570"/>
+          </a:xfrm>
+          <a:prstGeom prst="rect">
+            <a:avLst/>
+          </a:prstGeom>
+        </p:spPr>
+      </p:pic>
+      <mc:AlternateContent xmlns:mc="http://schemas.openxmlformats.org/markup-compatibility/2006">
+        <mc:Choice xmlns:p14="http://schemas.microsoft.com/office/powerpoint/2010/main" Requires="p14">
+          <p:contentPart p14:bwMode="auto" r:id="rId3">
+            <p14:nvContentPartPr>
+              <p14:cNvPr id="5" name="Entrada de lápiz 4">
+                <a:extLst>
+                  <a:ext uri="{FF2B5EF4-FFF2-40B4-BE49-F238E27FC236}">
+                    <a16:creationId xmlns:a16="http://schemas.microsoft.com/office/drawing/2014/main" id="{7EC71C35-82A8-E6BD-45E0-BD6568F4C7FB}"/>
+                  </a:ext>
+                </a:extLst>
+              </p14:cNvPr>
+              <p14:cNvContentPartPr/>
+              <p14:nvPr/>
+            </p14:nvContentPartPr>
+            <p14:xfrm>
+              <a:off x="650714" y="1785988"/>
+              <a:ext cx="2211120" cy="459720"/>
+            </p14:xfrm>
+          </p:contentPart>
+        </mc:Choice>
+        <mc:Fallback>
+          <p:pic>
+            <p:nvPicPr>
+              <p:cNvPr id="5" name="Entrada de lápiz 4">
+                <a:extLst>
+                  <a:ext uri="{FF2B5EF4-FFF2-40B4-BE49-F238E27FC236}">
+                    <a16:creationId xmlns:a16="http://schemas.microsoft.com/office/drawing/2014/main" id="{7EC71C35-82A8-E6BD-45E0-BD6568F4C7FB}"/>
+                  </a:ext>
+                </a:extLst>
+              </p:cNvPr>
+              <p:cNvPicPr/>
+              <p:nvPr/>
+            </p:nvPicPr>
+            <p:blipFill>
+              <a:blip r:embed="rId4"/>
+              <a:stretch>
+                <a:fillRect/>
+              </a:stretch>
+            </p:blipFill>
+            <p:spPr>
+              <a:xfrm>
+                <a:off x="597074" y="1677988"/>
+                <a:ext cx="2318760" cy="675360"/>
+              </a:xfrm>
+              <a:prstGeom prst="rect">
+                <a:avLst/>
+              </a:prstGeom>
+            </p:spPr>
+          </p:pic>
+        </mc:Fallback>
+      </mc:AlternateContent>
     </p:spTree>
     <p:extLst>
       <p:ext uri="{BB962C8B-B14F-4D97-AF65-F5344CB8AC3E}">
@@ -6941,31 +8718,576 @@
           <a:chExt cx="0" cy="0"/>
         </a:xfrm>
       </p:grpSpPr>
-      <p:sp>
-        <p:nvSpPr>
-          <p:cNvPr id="2" name="Título 1">
-            <a:extLst>
-              <a:ext uri="{FF2B5EF4-FFF2-40B4-BE49-F238E27FC236}">
-                <a16:creationId xmlns:a16="http://schemas.microsoft.com/office/drawing/2014/main" id="{45608A79-6B5F-5CF4-AAF6-0D888EC5A6A2}"/>
-              </a:ext>
-            </a:extLst>
-          </p:cNvPr>
-          <p:cNvSpPr>
-            <a:spLocks noGrp="1"/>
-          </p:cNvSpPr>
-          <p:nvPr>
-            <p:ph type="title"/>
-          </p:nvPr>
-        </p:nvSpPr>
-        <p:spPr/>
-        <p:txBody>
-          <a:bodyPr/>
-          <a:lstStyle/>
-          <a:p>
-            <a:endParaRPr lang="es-GT"/>
-          </a:p>
-        </p:txBody>
-      </p:sp>
+      <mc:AlternateContent xmlns:mc="http://schemas.openxmlformats.org/markup-compatibility/2006">
+        <mc:Choice xmlns:p14="http://schemas.microsoft.com/office/powerpoint/2010/main" Requires="p14">
+          <p:contentPart p14:bwMode="auto" r:id="rId2">
+            <p14:nvContentPartPr>
+              <p14:cNvPr id="3" name="Entrada de lápiz 2">
+                <a:extLst>
+                  <a:ext uri="{FF2B5EF4-FFF2-40B4-BE49-F238E27FC236}">
+                    <a16:creationId xmlns:a16="http://schemas.microsoft.com/office/drawing/2014/main" id="{0F99386B-C238-2853-3EF3-1F33F64DD897}"/>
+                  </a:ext>
+                </a:extLst>
+              </p14:cNvPr>
+              <p14:cNvContentPartPr/>
+              <p14:nvPr/>
+            </p14:nvContentPartPr>
+            <p14:xfrm>
+              <a:off x="1617314" y="4360348"/>
+              <a:ext cx="360" cy="360"/>
+            </p14:xfrm>
+          </p:contentPart>
+        </mc:Choice>
+        <mc:Fallback>
+          <p:pic>
+            <p:nvPicPr>
+              <p:cNvPr id="3" name="Entrada de lápiz 2">
+                <a:extLst>
+                  <a:ext uri="{FF2B5EF4-FFF2-40B4-BE49-F238E27FC236}">
+                    <a16:creationId xmlns:a16="http://schemas.microsoft.com/office/drawing/2014/main" id="{0F99386B-C238-2853-3EF3-1F33F64DD897}"/>
+                  </a:ext>
+                </a:extLst>
+              </p:cNvPr>
+              <p:cNvPicPr/>
+              <p:nvPr/>
+            </p:nvPicPr>
+            <p:blipFill>
+              <a:blip r:embed="rId3"/>
+              <a:stretch>
+                <a:fillRect/>
+              </a:stretch>
+            </p:blipFill>
+            <p:spPr>
+              <a:xfrm>
+                <a:off x="1563674" y="4252708"/>
+                <a:ext cx="108000" cy="216000"/>
+              </a:xfrm>
+              <a:prstGeom prst="rect">
+                <a:avLst/>
+              </a:prstGeom>
+            </p:spPr>
+          </p:pic>
+        </mc:Fallback>
+      </mc:AlternateContent>
+      <p:pic>
+        <p:nvPicPr>
+          <p:cNvPr id="5" name="Imagen 4">
+            <a:extLst>
+              <a:ext uri="{FF2B5EF4-FFF2-40B4-BE49-F238E27FC236}">
+                <a16:creationId xmlns:a16="http://schemas.microsoft.com/office/drawing/2014/main" id="{CC99193A-C938-023C-71A1-21D7942D2646}"/>
+              </a:ext>
+            </a:extLst>
+          </p:cNvPr>
+          <p:cNvPicPr>
+            <a:picLocks noChangeAspect="1"/>
+          </p:cNvPicPr>
+          <p:nvPr/>
+        </p:nvPicPr>
+        <p:blipFill>
+          <a:blip r:embed="rId4"/>
+          <a:stretch>
+            <a:fillRect/>
+          </a:stretch>
+        </p:blipFill>
+        <p:spPr>
+          <a:xfrm>
+            <a:off x="1195521" y="716971"/>
+            <a:ext cx="8711875" cy="3343742"/>
+          </a:xfrm>
+          <a:prstGeom prst="rect">
+            <a:avLst/>
+          </a:prstGeom>
+        </p:spPr>
+      </p:pic>
+      <mc:AlternateContent xmlns:mc="http://schemas.openxmlformats.org/markup-compatibility/2006">
+        <mc:Choice xmlns:p14="http://schemas.microsoft.com/office/powerpoint/2010/main" Requires="p14">
+          <p:contentPart p14:bwMode="auto" r:id="rId5">
+            <p14:nvContentPartPr>
+              <p14:cNvPr id="7" name="Entrada de lápiz 6">
+                <a:extLst>
+                  <a:ext uri="{FF2B5EF4-FFF2-40B4-BE49-F238E27FC236}">
+                    <a16:creationId xmlns:a16="http://schemas.microsoft.com/office/drawing/2014/main" id="{2138C939-1A40-ED34-FD42-002C6F01BEE8}"/>
+                  </a:ext>
+                </a:extLst>
+              </p14:cNvPr>
+              <p14:cNvContentPartPr/>
+              <p14:nvPr/>
+            </p14:nvContentPartPr>
+            <p14:xfrm>
+              <a:off x="6864674" y="4382668"/>
+              <a:ext cx="1485720" cy="123840"/>
+            </p14:xfrm>
+          </p:contentPart>
+        </mc:Choice>
+        <mc:Fallback>
+          <p:pic>
+            <p:nvPicPr>
+              <p:cNvPr id="7" name="Entrada de lápiz 6">
+                <a:extLst>
+                  <a:ext uri="{FF2B5EF4-FFF2-40B4-BE49-F238E27FC236}">
+                    <a16:creationId xmlns:a16="http://schemas.microsoft.com/office/drawing/2014/main" id="{2138C939-1A40-ED34-FD42-002C6F01BEE8}"/>
+                  </a:ext>
+                </a:extLst>
+              </p:cNvPr>
+              <p:cNvPicPr/>
+              <p:nvPr/>
+            </p:nvPicPr>
+            <p:blipFill>
+              <a:blip r:embed="rId6"/>
+              <a:stretch>
+                <a:fillRect/>
+              </a:stretch>
+            </p:blipFill>
+            <p:spPr>
+              <a:xfrm>
+                <a:off x="6811034" y="4274668"/>
+                <a:ext cx="1593360" cy="339480"/>
+              </a:xfrm>
+              <a:prstGeom prst="rect">
+                <a:avLst/>
+              </a:prstGeom>
+            </p:spPr>
+          </p:pic>
+        </mc:Fallback>
+      </mc:AlternateContent>
+      <mc:AlternateContent xmlns:mc="http://schemas.openxmlformats.org/markup-compatibility/2006">
+        <mc:Choice xmlns:p14="http://schemas.microsoft.com/office/powerpoint/2010/main" Requires="p14">
+          <p:contentPart p14:bwMode="auto" r:id="rId7">
+            <p14:nvContentPartPr>
+              <p14:cNvPr id="10" name="Entrada de lápiz 9">
+                <a:extLst>
+                  <a:ext uri="{FF2B5EF4-FFF2-40B4-BE49-F238E27FC236}">
+                    <a16:creationId xmlns:a16="http://schemas.microsoft.com/office/drawing/2014/main" id="{5A8222C4-499A-2B8C-DCF6-337A788AD15D}"/>
+                  </a:ext>
+                </a:extLst>
+              </p14:cNvPr>
+              <p14:cNvContentPartPr/>
+              <p14:nvPr/>
+            </p14:nvContentPartPr>
+            <p14:xfrm>
+              <a:off x="10269194" y="5851828"/>
+              <a:ext cx="360" cy="360"/>
+            </p14:xfrm>
+          </p:contentPart>
+        </mc:Choice>
+        <mc:Fallback>
+          <p:pic>
+            <p:nvPicPr>
+              <p:cNvPr id="10" name="Entrada de lápiz 9">
+                <a:extLst>
+                  <a:ext uri="{FF2B5EF4-FFF2-40B4-BE49-F238E27FC236}">
+                    <a16:creationId xmlns:a16="http://schemas.microsoft.com/office/drawing/2014/main" id="{5A8222C4-499A-2B8C-DCF6-337A788AD15D}"/>
+                  </a:ext>
+                </a:extLst>
+              </p:cNvPr>
+              <p:cNvPicPr/>
+              <p:nvPr/>
+            </p:nvPicPr>
+            <p:blipFill>
+              <a:blip r:embed="rId3"/>
+              <a:stretch>
+                <a:fillRect/>
+              </a:stretch>
+            </p:blipFill>
+            <p:spPr>
+              <a:xfrm>
+                <a:off x="10215194" y="5744188"/>
+                <a:ext cx="108000" cy="216000"/>
+              </a:xfrm>
+              <a:prstGeom prst="rect">
+                <a:avLst/>
+              </a:prstGeom>
+            </p:spPr>
+          </p:pic>
+        </mc:Fallback>
+      </mc:AlternateContent>
+      <p:pic>
+        <p:nvPicPr>
+          <p:cNvPr id="14" name="Imagen 13">
+            <a:extLst>
+              <a:ext uri="{FF2B5EF4-FFF2-40B4-BE49-F238E27FC236}">
+                <a16:creationId xmlns:a16="http://schemas.microsoft.com/office/drawing/2014/main" id="{B30E9BB4-092D-59BC-FCC6-FF579C54236E}"/>
+              </a:ext>
+            </a:extLst>
+          </p:cNvPr>
+          <p:cNvPicPr>
+            <a:picLocks noChangeAspect="1"/>
+          </p:cNvPicPr>
+          <p:nvPr/>
+        </p:nvPicPr>
+        <p:blipFill>
+          <a:blip r:embed="rId8"/>
+          <a:stretch>
+            <a:fillRect/>
+          </a:stretch>
+        </p:blipFill>
+        <p:spPr>
+          <a:xfrm>
+            <a:off x="1082980" y="3637221"/>
+            <a:ext cx="7638532" cy="2855654"/>
+          </a:xfrm>
+          <a:prstGeom prst="rect">
+            <a:avLst/>
+          </a:prstGeom>
+        </p:spPr>
+      </p:pic>
+      <mc:AlternateContent xmlns:mc="http://schemas.openxmlformats.org/markup-compatibility/2006">
+        <mc:Choice xmlns:p14="http://schemas.microsoft.com/office/powerpoint/2010/main" Requires="p14">
+          <p:contentPart p14:bwMode="auto" r:id="rId9">
+            <p14:nvContentPartPr>
+              <p14:cNvPr id="17" name="Entrada de lápiz 16">
+                <a:extLst>
+                  <a:ext uri="{FF2B5EF4-FFF2-40B4-BE49-F238E27FC236}">
+                    <a16:creationId xmlns:a16="http://schemas.microsoft.com/office/drawing/2014/main" id="{3F848234-4626-1FB4-EF2E-B2F978F706CA}"/>
+                  </a:ext>
+                </a:extLst>
+              </p14:cNvPr>
+              <p14:cNvContentPartPr/>
+              <p14:nvPr/>
+            </p14:nvContentPartPr>
+            <p14:xfrm>
+              <a:off x="1719554" y="1387828"/>
+              <a:ext cx="1530000" cy="246600"/>
+            </p14:xfrm>
+          </p:contentPart>
+        </mc:Choice>
+        <mc:Fallback>
+          <p:pic>
+            <p:nvPicPr>
+              <p:cNvPr id="17" name="Entrada de lápiz 16">
+                <a:extLst>
+                  <a:ext uri="{FF2B5EF4-FFF2-40B4-BE49-F238E27FC236}">
+                    <a16:creationId xmlns:a16="http://schemas.microsoft.com/office/drawing/2014/main" id="{3F848234-4626-1FB4-EF2E-B2F978F706CA}"/>
+                  </a:ext>
+                </a:extLst>
+              </p:cNvPr>
+              <p:cNvPicPr/>
+              <p:nvPr/>
+            </p:nvPicPr>
+            <p:blipFill>
+              <a:blip r:embed="rId10"/>
+              <a:stretch>
+                <a:fillRect/>
+              </a:stretch>
+            </p:blipFill>
+            <p:spPr>
+              <a:xfrm>
+                <a:off x="1665914" y="1279828"/>
+                <a:ext cx="1637640" cy="462240"/>
+              </a:xfrm>
+              <a:prstGeom prst="rect">
+                <a:avLst/>
+              </a:prstGeom>
+            </p:spPr>
+          </p:pic>
+        </mc:Fallback>
+      </mc:AlternateContent>
+      <mc:AlternateContent xmlns:mc="http://schemas.openxmlformats.org/markup-compatibility/2006">
+        <mc:Choice xmlns:p14="http://schemas.microsoft.com/office/powerpoint/2010/main" Requires="p14">
+          <p:contentPart p14:bwMode="auto" r:id="rId11">
+            <p14:nvContentPartPr>
+              <p14:cNvPr id="18" name="Entrada de lápiz 17">
+                <a:extLst>
+                  <a:ext uri="{FF2B5EF4-FFF2-40B4-BE49-F238E27FC236}">
+                    <a16:creationId xmlns:a16="http://schemas.microsoft.com/office/drawing/2014/main" id="{9742B9CE-AA2E-87B7-9964-BB5CD30C8CD7}"/>
+                  </a:ext>
+                </a:extLst>
+              </p14:cNvPr>
+              <p14:cNvContentPartPr/>
+              <p14:nvPr/>
+            </p14:nvContentPartPr>
+            <p14:xfrm>
+              <a:off x="5908154" y="3187108"/>
+              <a:ext cx="1114560" cy="118080"/>
+            </p14:xfrm>
+          </p:contentPart>
+        </mc:Choice>
+        <mc:Fallback>
+          <p:pic>
+            <p:nvPicPr>
+              <p:cNvPr id="18" name="Entrada de lápiz 17">
+                <a:extLst>
+                  <a:ext uri="{FF2B5EF4-FFF2-40B4-BE49-F238E27FC236}">
+                    <a16:creationId xmlns:a16="http://schemas.microsoft.com/office/drawing/2014/main" id="{9742B9CE-AA2E-87B7-9964-BB5CD30C8CD7}"/>
+                  </a:ext>
+                </a:extLst>
+              </p:cNvPr>
+              <p:cNvPicPr/>
+              <p:nvPr/>
+            </p:nvPicPr>
+            <p:blipFill>
+              <a:blip r:embed="rId12"/>
+              <a:stretch>
+                <a:fillRect/>
+              </a:stretch>
+            </p:blipFill>
+            <p:spPr>
+              <a:xfrm>
+                <a:off x="5854514" y="3079108"/>
+                <a:ext cx="1222200" cy="333720"/>
+              </a:xfrm>
+              <a:prstGeom prst="rect">
+                <a:avLst/>
+              </a:prstGeom>
+            </p:spPr>
+          </p:pic>
+        </mc:Fallback>
+      </mc:AlternateContent>
+      <mc:AlternateContent xmlns:mc="http://schemas.openxmlformats.org/markup-compatibility/2006">
+        <mc:Choice xmlns:p14="http://schemas.microsoft.com/office/powerpoint/2010/main" Requires="p14">
+          <p:contentPart p14:bwMode="auto" r:id="rId13">
+            <p14:nvContentPartPr>
+              <p14:cNvPr id="19" name="Entrada de lápiz 18">
+                <a:extLst>
+                  <a:ext uri="{FF2B5EF4-FFF2-40B4-BE49-F238E27FC236}">
+                    <a16:creationId xmlns:a16="http://schemas.microsoft.com/office/drawing/2014/main" id="{1578C749-04BE-59DE-E139-39516D61E503}"/>
+                  </a:ext>
+                </a:extLst>
+              </p14:cNvPr>
+              <p14:cNvContentPartPr/>
+              <p14:nvPr/>
+            </p14:nvContentPartPr>
+            <p14:xfrm>
+              <a:off x="8693114" y="2755828"/>
+              <a:ext cx="399600" cy="72360"/>
+            </p14:xfrm>
+          </p:contentPart>
+        </mc:Choice>
+        <mc:Fallback>
+          <p:pic>
+            <p:nvPicPr>
+              <p:cNvPr id="19" name="Entrada de lápiz 18">
+                <a:extLst>
+                  <a:ext uri="{FF2B5EF4-FFF2-40B4-BE49-F238E27FC236}">
+                    <a16:creationId xmlns:a16="http://schemas.microsoft.com/office/drawing/2014/main" id="{1578C749-04BE-59DE-E139-39516D61E503}"/>
+                  </a:ext>
+                </a:extLst>
+              </p:cNvPr>
+              <p:cNvPicPr/>
+              <p:nvPr/>
+            </p:nvPicPr>
+            <p:blipFill>
+              <a:blip r:embed="rId14"/>
+              <a:stretch>
+                <a:fillRect/>
+              </a:stretch>
+            </p:blipFill>
+            <p:spPr>
+              <a:xfrm>
+                <a:off x="8639474" y="2648188"/>
+                <a:ext cx="507240" cy="288000"/>
+              </a:xfrm>
+              <a:prstGeom prst="rect">
+                <a:avLst/>
+              </a:prstGeom>
+            </p:spPr>
+          </p:pic>
+        </mc:Fallback>
+      </mc:AlternateContent>
+      <mc:AlternateContent xmlns:mc="http://schemas.openxmlformats.org/markup-compatibility/2006">
+        <mc:Choice xmlns:p14="http://schemas.microsoft.com/office/powerpoint/2010/main" Requires="p14">
+          <p:contentPart p14:bwMode="auto" r:id="rId15">
+            <p14:nvContentPartPr>
+              <p14:cNvPr id="20" name="Entrada de lápiz 19">
+                <a:extLst>
+                  <a:ext uri="{FF2B5EF4-FFF2-40B4-BE49-F238E27FC236}">
+                    <a16:creationId xmlns:a16="http://schemas.microsoft.com/office/drawing/2014/main" id="{16CBF81E-2094-4348-39BE-8BACD5BF1804}"/>
+                  </a:ext>
+                </a:extLst>
+              </p14:cNvPr>
+              <p14:cNvContentPartPr/>
+              <p14:nvPr/>
+            </p14:nvContentPartPr>
+            <p14:xfrm>
+              <a:off x="8172554" y="1800388"/>
+              <a:ext cx="1707120" cy="1680840"/>
+            </p14:xfrm>
+          </p:contentPart>
+        </mc:Choice>
+        <mc:Fallback>
+          <p:pic>
+            <p:nvPicPr>
+              <p:cNvPr id="20" name="Entrada de lápiz 19">
+                <a:extLst>
+                  <a:ext uri="{FF2B5EF4-FFF2-40B4-BE49-F238E27FC236}">
+                    <a16:creationId xmlns:a16="http://schemas.microsoft.com/office/drawing/2014/main" id="{16CBF81E-2094-4348-39BE-8BACD5BF1804}"/>
+                  </a:ext>
+                </a:extLst>
+              </p:cNvPr>
+              <p:cNvPicPr/>
+              <p:nvPr/>
+            </p:nvPicPr>
+            <p:blipFill>
+              <a:blip r:embed="rId16"/>
+              <a:stretch>
+                <a:fillRect/>
+              </a:stretch>
+            </p:blipFill>
+            <p:spPr>
+              <a:xfrm>
+                <a:off x="8118914" y="1692748"/>
+                <a:ext cx="1814760" cy="1896480"/>
+              </a:xfrm>
+              <a:prstGeom prst="rect">
+                <a:avLst/>
+              </a:prstGeom>
+            </p:spPr>
+          </p:pic>
+        </mc:Fallback>
+      </mc:AlternateContent>
+      <mc:AlternateContent xmlns:mc="http://schemas.openxmlformats.org/markup-compatibility/2006">
+        <mc:Choice xmlns:p14="http://schemas.microsoft.com/office/powerpoint/2010/main" Requires="p14">
+          <p:contentPart p14:bwMode="auto" r:id="rId17">
+            <p14:nvContentPartPr>
+              <p14:cNvPr id="21" name="Entrada de lápiz 20">
+                <a:extLst>
+                  <a:ext uri="{FF2B5EF4-FFF2-40B4-BE49-F238E27FC236}">
+                    <a16:creationId xmlns:a16="http://schemas.microsoft.com/office/drawing/2014/main" id="{28A9B9F4-4CC8-7221-71EB-465C76330275}"/>
+                  </a:ext>
+                </a:extLst>
+              </p14:cNvPr>
+              <p14:cNvContentPartPr/>
+              <p14:nvPr/>
+            </p14:nvContentPartPr>
+            <p14:xfrm>
+              <a:off x="9298274" y="3685348"/>
+              <a:ext cx="36720" cy="97920"/>
+            </p14:xfrm>
+          </p:contentPart>
+        </mc:Choice>
+        <mc:Fallback>
+          <p:pic>
+            <p:nvPicPr>
+              <p:cNvPr id="21" name="Entrada de lápiz 20">
+                <a:extLst>
+                  <a:ext uri="{FF2B5EF4-FFF2-40B4-BE49-F238E27FC236}">
+                    <a16:creationId xmlns:a16="http://schemas.microsoft.com/office/drawing/2014/main" id="{28A9B9F4-4CC8-7221-71EB-465C76330275}"/>
+                  </a:ext>
+                </a:extLst>
+              </p:cNvPr>
+              <p:cNvPicPr/>
+              <p:nvPr/>
+            </p:nvPicPr>
+            <p:blipFill>
+              <a:blip r:embed="rId18"/>
+              <a:stretch>
+                <a:fillRect/>
+              </a:stretch>
+            </p:blipFill>
+            <p:spPr>
+              <a:xfrm>
+                <a:off x="9244634" y="3577348"/>
+                <a:ext cx="144360" cy="313560"/>
+              </a:xfrm>
+              <a:prstGeom prst="rect">
+                <a:avLst/>
+              </a:prstGeom>
+            </p:spPr>
+          </p:pic>
+        </mc:Fallback>
+      </mc:AlternateContent>
+      <mc:AlternateContent xmlns:mc="http://schemas.openxmlformats.org/markup-compatibility/2006">
+        <mc:Choice xmlns:p14="http://schemas.microsoft.com/office/powerpoint/2010/main" Requires="p14">
+          <p:contentPart p14:bwMode="auto" r:id="rId19">
+            <p14:nvContentPartPr>
+              <p14:cNvPr id="22" name="Entrada de lápiz 21">
+                <a:extLst>
+                  <a:ext uri="{FF2B5EF4-FFF2-40B4-BE49-F238E27FC236}">
+                    <a16:creationId xmlns:a16="http://schemas.microsoft.com/office/drawing/2014/main" id="{0903B0C8-2916-D420-B50F-7BD3C5A3F66A}"/>
+                  </a:ext>
+                </a:extLst>
+              </p14:cNvPr>
+              <p14:cNvContentPartPr/>
+              <p14:nvPr/>
+            </p14:nvContentPartPr>
+            <p14:xfrm>
+              <a:off x="9206114" y="3633508"/>
+              <a:ext cx="162720" cy="92520"/>
+            </p14:xfrm>
+          </p:contentPart>
+        </mc:Choice>
+        <mc:Fallback>
+          <p:pic>
+            <p:nvPicPr>
+              <p:cNvPr id="22" name="Entrada de lápiz 21">
+                <a:extLst>
+                  <a:ext uri="{FF2B5EF4-FFF2-40B4-BE49-F238E27FC236}">
+                    <a16:creationId xmlns:a16="http://schemas.microsoft.com/office/drawing/2014/main" id="{0903B0C8-2916-D420-B50F-7BD3C5A3F66A}"/>
+                  </a:ext>
+                </a:extLst>
+              </p:cNvPr>
+              <p:cNvPicPr/>
+              <p:nvPr/>
+            </p:nvPicPr>
+            <p:blipFill>
+              <a:blip r:embed="rId20"/>
+              <a:stretch>
+                <a:fillRect/>
+              </a:stretch>
+            </p:blipFill>
+            <p:spPr>
+              <a:xfrm>
+                <a:off x="9152474" y="3525508"/>
+                <a:ext cx="270360" cy="308160"/>
+              </a:xfrm>
+              <a:prstGeom prst="rect">
+                <a:avLst/>
+              </a:prstGeom>
+            </p:spPr>
+          </p:pic>
+        </mc:Fallback>
+      </mc:AlternateContent>
+      <mc:AlternateContent xmlns:mc="http://schemas.openxmlformats.org/markup-compatibility/2006">
+        <mc:Choice xmlns:p14="http://schemas.microsoft.com/office/powerpoint/2010/main" Requires="p14">
+          <p:contentPart p14:bwMode="auto" r:id="rId21">
+            <p14:nvContentPartPr>
+              <p14:cNvPr id="23" name="Entrada de lápiz 22">
+                <a:extLst>
+                  <a:ext uri="{FF2B5EF4-FFF2-40B4-BE49-F238E27FC236}">
+                    <a16:creationId xmlns:a16="http://schemas.microsoft.com/office/drawing/2014/main" id="{83A56E1E-BF70-571D-2E8D-48A68F457B85}"/>
+                  </a:ext>
+                </a:extLst>
+              </p14:cNvPr>
+              <p14:cNvContentPartPr/>
+              <p14:nvPr/>
+            </p14:nvContentPartPr>
+            <p14:xfrm>
+              <a:off x="8799314" y="3427948"/>
+              <a:ext cx="595440" cy="530280"/>
+            </p14:xfrm>
+          </p:contentPart>
+        </mc:Choice>
+        <mc:Fallback>
+          <p:pic>
+            <p:nvPicPr>
+              <p:cNvPr id="23" name="Entrada de lápiz 22">
+                <a:extLst>
+                  <a:ext uri="{FF2B5EF4-FFF2-40B4-BE49-F238E27FC236}">
+                    <a16:creationId xmlns:a16="http://schemas.microsoft.com/office/drawing/2014/main" id="{83A56E1E-BF70-571D-2E8D-48A68F457B85}"/>
+                  </a:ext>
+                </a:extLst>
+              </p:cNvPr>
+              <p:cNvPicPr/>
+              <p:nvPr/>
+            </p:nvPicPr>
+            <p:blipFill>
+              <a:blip r:embed="rId22"/>
+              <a:stretch>
+                <a:fillRect/>
+              </a:stretch>
+            </p:blipFill>
+            <p:spPr>
+              <a:xfrm>
+                <a:off x="8745674" y="3319948"/>
+                <a:ext cx="703080" cy="745920"/>
+              </a:xfrm>
+              <a:prstGeom prst="rect">
+                <a:avLst/>
+              </a:prstGeom>
+            </p:spPr>
+          </p:pic>
+        </mc:Fallback>
+      </mc:AlternateContent>
     </p:spTree>
     <p:extLst>
       <p:ext uri="{BB962C8B-B14F-4D97-AF65-F5344CB8AC3E}">
@@ -7021,6 +9343,372 @@
           </a:p>
         </p:txBody>
       </p:sp>
+      <p:pic>
+        <p:nvPicPr>
+          <p:cNvPr id="4" name="Imagen 3">
+            <a:extLst>
+              <a:ext uri="{FF2B5EF4-FFF2-40B4-BE49-F238E27FC236}">
+                <a16:creationId xmlns:a16="http://schemas.microsoft.com/office/drawing/2014/main" id="{289E6702-24B9-90BE-2853-3EC2C013EB57}"/>
+              </a:ext>
+            </a:extLst>
+          </p:cNvPr>
+          <p:cNvPicPr>
+            <a:picLocks noChangeAspect="1"/>
+          </p:cNvPicPr>
+          <p:nvPr/>
+        </p:nvPicPr>
+        <p:blipFill>
+          <a:blip r:embed="rId2"/>
+          <a:stretch>
+            <a:fillRect/>
+          </a:stretch>
+        </p:blipFill>
+        <p:spPr>
+          <a:xfrm>
+            <a:off x="1356651" y="1757129"/>
+            <a:ext cx="9478698" cy="3343742"/>
+          </a:xfrm>
+          <a:prstGeom prst="rect">
+            <a:avLst/>
+          </a:prstGeom>
+        </p:spPr>
+      </p:pic>
+      <mc:AlternateContent xmlns:mc="http://schemas.openxmlformats.org/markup-compatibility/2006">
+        <mc:Choice xmlns:p14="http://schemas.microsoft.com/office/powerpoint/2010/main" Requires="p14">
+          <p:contentPart p14:bwMode="auto" r:id="rId3">
+            <p14:nvContentPartPr>
+              <p14:cNvPr id="5" name="Entrada de lápiz 4">
+                <a:extLst>
+                  <a:ext uri="{FF2B5EF4-FFF2-40B4-BE49-F238E27FC236}">
+                    <a16:creationId xmlns:a16="http://schemas.microsoft.com/office/drawing/2014/main" id="{A78B63BB-5DEF-4366-FCC2-53812EA43030}"/>
+                  </a:ext>
+                </a:extLst>
+              </p14:cNvPr>
+              <p14:cNvContentPartPr/>
+              <p14:nvPr/>
+            </p14:nvContentPartPr>
+            <p14:xfrm>
+              <a:off x="9087314" y="3840148"/>
+              <a:ext cx="360" cy="360"/>
+            </p14:xfrm>
+          </p:contentPart>
+        </mc:Choice>
+        <mc:Fallback>
+          <p:pic>
+            <p:nvPicPr>
+              <p:cNvPr id="5" name="Entrada de lápiz 4">
+                <a:extLst>
+                  <a:ext uri="{FF2B5EF4-FFF2-40B4-BE49-F238E27FC236}">
+                    <a16:creationId xmlns:a16="http://schemas.microsoft.com/office/drawing/2014/main" id="{A78B63BB-5DEF-4366-FCC2-53812EA43030}"/>
+                  </a:ext>
+                </a:extLst>
+              </p:cNvPr>
+              <p:cNvPicPr/>
+              <p:nvPr/>
+            </p:nvPicPr>
+            <p:blipFill>
+              <a:blip r:embed="rId4"/>
+              <a:stretch>
+                <a:fillRect/>
+              </a:stretch>
+            </p:blipFill>
+            <p:spPr>
+              <a:xfrm>
+                <a:off x="9033314" y="3732148"/>
+                <a:ext cx="108000" cy="216000"/>
+              </a:xfrm>
+              <a:prstGeom prst="rect">
+                <a:avLst/>
+              </a:prstGeom>
+            </p:spPr>
+          </p:pic>
+        </mc:Fallback>
+      </mc:AlternateContent>
+      <mc:AlternateContent xmlns:mc="http://schemas.openxmlformats.org/markup-compatibility/2006">
+        <mc:Choice xmlns:p14="http://schemas.microsoft.com/office/powerpoint/2010/main" Requires="p14">
+          <p:contentPart p14:bwMode="auto" r:id="rId5">
+            <p14:nvContentPartPr>
+              <p14:cNvPr id="6" name="Entrada de lápiz 5">
+                <a:extLst>
+                  <a:ext uri="{FF2B5EF4-FFF2-40B4-BE49-F238E27FC236}">
+                    <a16:creationId xmlns:a16="http://schemas.microsoft.com/office/drawing/2014/main" id="{4EF91FC3-6198-EC88-D6E2-96682D6983A7}"/>
+                  </a:ext>
+                </a:extLst>
+              </p14:cNvPr>
+              <p14:cNvContentPartPr/>
+              <p14:nvPr/>
+            </p14:nvContentPartPr>
+            <p14:xfrm>
+              <a:off x="9270194" y="3192868"/>
+              <a:ext cx="360" cy="360"/>
+            </p14:xfrm>
+          </p:contentPart>
+        </mc:Choice>
+        <mc:Fallback>
+          <p:pic>
+            <p:nvPicPr>
+              <p:cNvPr id="6" name="Entrada de lápiz 5">
+                <a:extLst>
+                  <a:ext uri="{FF2B5EF4-FFF2-40B4-BE49-F238E27FC236}">
+                    <a16:creationId xmlns:a16="http://schemas.microsoft.com/office/drawing/2014/main" id="{4EF91FC3-6198-EC88-D6E2-96682D6983A7}"/>
+                  </a:ext>
+                </a:extLst>
+              </p:cNvPr>
+              <p:cNvPicPr/>
+              <p:nvPr/>
+            </p:nvPicPr>
+            <p:blipFill>
+              <a:blip r:embed="rId4"/>
+              <a:stretch>
+                <a:fillRect/>
+              </a:stretch>
+            </p:blipFill>
+            <p:spPr>
+              <a:xfrm>
+                <a:off x="9216194" y="3085228"/>
+                <a:ext cx="108000" cy="216000"/>
+              </a:xfrm>
+              <a:prstGeom prst="rect">
+                <a:avLst/>
+              </a:prstGeom>
+            </p:spPr>
+          </p:pic>
+        </mc:Fallback>
+      </mc:AlternateContent>
+      <mc:AlternateContent xmlns:mc="http://schemas.openxmlformats.org/markup-compatibility/2006">
+        <mc:Choice xmlns:p14="http://schemas.microsoft.com/office/powerpoint/2010/main" Requires="p14">
+          <p:contentPart p14:bwMode="auto" r:id="rId6">
+            <p14:nvContentPartPr>
+              <p14:cNvPr id="7" name="Entrada de lápiz 6">
+                <a:extLst>
+                  <a:ext uri="{FF2B5EF4-FFF2-40B4-BE49-F238E27FC236}">
+                    <a16:creationId xmlns:a16="http://schemas.microsoft.com/office/drawing/2014/main" id="{663E8E72-D89B-335B-1A61-4A57F135980A}"/>
+                  </a:ext>
+                </a:extLst>
+              </p14:cNvPr>
+              <p14:cNvContentPartPr/>
+              <p14:nvPr/>
+            </p14:nvContentPartPr>
+            <p14:xfrm>
+              <a:off x="9832514" y="3305548"/>
+              <a:ext cx="360" cy="360"/>
+            </p14:xfrm>
+          </p:contentPart>
+        </mc:Choice>
+        <mc:Fallback>
+          <p:pic>
+            <p:nvPicPr>
+              <p:cNvPr id="7" name="Entrada de lápiz 6">
+                <a:extLst>
+                  <a:ext uri="{FF2B5EF4-FFF2-40B4-BE49-F238E27FC236}">
+                    <a16:creationId xmlns:a16="http://schemas.microsoft.com/office/drawing/2014/main" id="{663E8E72-D89B-335B-1A61-4A57F135980A}"/>
+                  </a:ext>
+                </a:extLst>
+              </p:cNvPr>
+              <p:cNvPicPr/>
+              <p:nvPr/>
+            </p:nvPicPr>
+            <p:blipFill>
+              <a:blip r:embed="rId4"/>
+              <a:stretch>
+                <a:fillRect/>
+              </a:stretch>
+            </p:blipFill>
+            <p:spPr>
+              <a:xfrm>
+                <a:off x="9778874" y="3197908"/>
+                <a:ext cx="108000" cy="216000"/>
+              </a:xfrm>
+              <a:prstGeom prst="rect">
+                <a:avLst/>
+              </a:prstGeom>
+            </p:spPr>
+          </p:pic>
+        </mc:Fallback>
+      </mc:AlternateContent>
+      <mc:AlternateContent xmlns:mc="http://schemas.openxmlformats.org/markup-compatibility/2006">
+        <mc:Choice xmlns:p14="http://schemas.microsoft.com/office/powerpoint/2010/main" Requires="p14">
+          <p:contentPart p14:bwMode="auto" r:id="rId7">
+            <p14:nvContentPartPr>
+              <p14:cNvPr id="8" name="Entrada de lápiz 7">
+                <a:extLst>
+                  <a:ext uri="{FF2B5EF4-FFF2-40B4-BE49-F238E27FC236}">
+                    <a16:creationId xmlns:a16="http://schemas.microsoft.com/office/drawing/2014/main" id="{E1559443-607A-05EC-9EC1-1AE66F5BADC3}"/>
+                  </a:ext>
+                </a:extLst>
+              </p14:cNvPr>
+              <p14:cNvContentPartPr/>
+              <p14:nvPr/>
+            </p14:nvContentPartPr>
+            <p14:xfrm>
+              <a:off x="9748634" y="3474028"/>
+              <a:ext cx="360" cy="360"/>
+            </p14:xfrm>
+          </p:contentPart>
+        </mc:Choice>
+        <mc:Fallback>
+          <p:pic>
+            <p:nvPicPr>
+              <p:cNvPr id="8" name="Entrada de lápiz 7">
+                <a:extLst>
+                  <a:ext uri="{FF2B5EF4-FFF2-40B4-BE49-F238E27FC236}">
+                    <a16:creationId xmlns:a16="http://schemas.microsoft.com/office/drawing/2014/main" id="{E1559443-607A-05EC-9EC1-1AE66F5BADC3}"/>
+                  </a:ext>
+                </a:extLst>
+              </p:cNvPr>
+              <p:cNvPicPr/>
+              <p:nvPr/>
+            </p:nvPicPr>
+            <p:blipFill>
+              <a:blip r:embed="rId4"/>
+              <a:stretch>
+                <a:fillRect/>
+              </a:stretch>
+            </p:blipFill>
+            <p:spPr>
+              <a:xfrm>
+                <a:off x="9694994" y="3366388"/>
+                <a:ext cx="108000" cy="216000"/>
+              </a:xfrm>
+              <a:prstGeom prst="rect">
+                <a:avLst/>
+              </a:prstGeom>
+            </p:spPr>
+          </p:pic>
+        </mc:Fallback>
+      </mc:AlternateContent>
+      <mc:AlternateContent xmlns:mc="http://schemas.openxmlformats.org/markup-compatibility/2006">
+        <mc:Choice xmlns:p14="http://schemas.microsoft.com/office/powerpoint/2010/main" Requires="p14">
+          <p:contentPart p14:bwMode="auto" r:id="rId8">
+            <p14:nvContentPartPr>
+              <p14:cNvPr id="9" name="Entrada de lápiz 8">
+                <a:extLst>
+                  <a:ext uri="{FF2B5EF4-FFF2-40B4-BE49-F238E27FC236}">
+                    <a16:creationId xmlns:a16="http://schemas.microsoft.com/office/drawing/2014/main" id="{62EC4387-2143-F964-3B3B-BA995BF876F3}"/>
+                  </a:ext>
+                </a:extLst>
+              </p14:cNvPr>
+              <p14:cNvContentPartPr/>
+              <p14:nvPr/>
+            </p14:nvContentPartPr>
+            <p14:xfrm>
+              <a:off x="9802634" y="4416868"/>
+              <a:ext cx="450000" cy="501480"/>
+            </p14:xfrm>
+          </p:contentPart>
+        </mc:Choice>
+        <mc:Fallback>
+          <p:pic>
+            <p:nvPicPr>
+              <p:cNvPr id="9" name="Entrada de lápiz 8">
+                <a:extLst>
+                  <a:ext uri="{FF2B5EF4-FFF2-40B4-BE49-F238E27FC236}">
+                    <a16:creationId xmlns:a16="http://schemas.microsoft.com/office/drawing/2014/main" id="{62EC4387-2143-F964-3B3B-BA995BF876F3}"/>
+                  </a:ext>
+                </a:extLst>
+              </p:cNvPr>
+              <p:cNvPicPr/>
+              <p:nvPr/>
+            </p:nvPicPr>
+            <p:blipFill>
+              <a:blip r:embed="rId9"/>
+              <a:stretch>
+                <a:fillRect/>
+              </a:stretch>
+            </p:blipFill>
+            <p:spPr>
+              <a:xfrm>
+                <a:off x="9748994" y="4309228"/>
+                <a:ext cx="557640" cy="717120"/>
+              </a:xfrm>
+              <a:prstGeom prst="rect">
+                <a:avLst/>
+              </a:prstGeom>
+            </p:spPr>
+          </p:pic>
+        </mc:Fallback>
+      </mc:AlternateContent>
+      <mc:AlternateContent xmlns:mc="http://schemas.openxmlformats.org/markup-compatibility/2006">
+        <mc:Choice xmlns:p14="http://schemas.microsoft.com/office/powerpoint/2010/main" Requires="p14">
+          <p:contentPart p14:bwMode="auto" r:id="rId10">
+            <p14:nvContentPartPr>
+              <p14:cNvPr id="10" name="Entrada de lápiz 9">
+                <a:extLst>
+                  <a:ext uri="{FF2B5EF4-FFF2-40B4-BE49-F238E27FC236}">
+                    <a16:creationId xmlns:a16="http://schemas.microsoft.com/office/drawing/2014/main" id="{DE2F5E21-4BF6-FFDC-09C2-860112B0BEA4}"/>
+                  </a:ext>
+                </a:extLst>
+              </p14:cNvPr>
+              <p14:cNvContentPartPr/>
+              <p14:nvPr/>
+            </p14:nvContentPartPr>
+            <p14:xfrm>
+              <a:off x="2208074" y="2123668"/>
+              <a:ext cx="699480" cy="139680"/>
+            </p14:xfrm>
+          </p:contentPart>
+        </mc:Choice>
+        <mc:Fallback>
+          <p:pic>
+            <p:nvPicPr>
+              <p:cNvPr id="10" name="Entrada de lápiz 9">
+                <a:extLst>
+                  <a:ext uri="{FF2B5EF4-FFF2-40B4-BE49-F238E27FC236}">
+                    <a16:creationId xmlns:a16="http://schemas.microsoft.com/office/drawing/2014/main" id="{DE2F5E21-4BF6-FFDC-09C2-860112B0BEA4}"/>
+                  </a:ext>
+                </a:extLst>
+              </p:cNvPr>
+              <p:cNvPicPr/>
+              <p:nvPr/>
+            </p:nvPicPr>
+            <p:blipFill>
+              <a:blip r:embed="rId11"/>
+              <a:stretch>
+                <a:fillRect/>
+              </a:stretch>
+            </p:blipFill>
+            <p:spPr>
+              <a:xfrm>
+                <a:off x="2154434" y="2016028"/>
+                <a:ext cx="807120" cy="355320"/>
+              </a:xfrm>
+              <a:prstGeom prst="rect">
+                <a:avLst/>
+              </a:prstGeom>
+            </p:spPr>
+          </p:pic>
+        </mc:Fallback>
+      </mc:AlternateContent>
+      <p:pic>
+        <p:nvPicPr>
+          <p:cNvPr id="12" name="Imagen 11">
+            <a:extLst>
+              <a:ext uri="{FF2B5EF4-FFF2-40B4-BE49-F238E27FC236}">
+                <a16:creationId xmlns:a16="http://schemas.microsoft.com/office/drawing/2014/main" id="{64A48AFB-89D4-F34A-A3F3-D4A39982A2EA}"/>
+              </a:ext>
+            </a:extLst>
+          </p:cNvPr>
+          <p:cNvPicPr>
+            <a:picLocks noChangeAspect="1"/>
+          </p:cNvPicPr>
+          <p:nvPr/>
+        </p:nvPicPr>
+        <p:blipFill>
+          <a:blip r:embed="rId12"/>
+          <a:stretch>
+            <a:fillRect/>
+          </a:stretch>
+        </p:blipFill>
+        <p:spPr>
+          <a:xfrm>
+            <a:off x="631070" y="4416868"/>
+            <a:ext cx="7303368" cy="1733999"/>
+          </a:xfrm>
+          <a:prstGeom prst="rect">
+            <a:avLst/>
+          </a:prstGeom>
+        </p:spPr>
+      </p:pic>
     </p:spTree>
     <p:extLst>
       <p:ext uri="{BB962C8B-B14F-4D97-AF65-F5344CB8AC3E}">
@@ -7072,10 +9760,55 @@
           <a:bodyPr/>
           <a:lstStyle/>
           <a:p>
-            <a:endParaRPr lang="es-GT"/>
-          </a:p>
-        </p:txBody>
-      </p:sp>
+            <a:r>
+              <a:rPr lang="es-GT" dirty="0" err="1"/>
+              <a:t>Click</a:t>
+            </a:r>
+            <a:r>
+              <a:rPr lang="es-GT" dirty="0"/>
+              <a:t> en el </a:t>
+            </a:r>
+            <a:r>
+              <a:rPr lang="es-GT" dirty="0" err="1"/>
+              <a:t>cheq</a:t>
+            </a:r>
+            <a:br>
+              <a:rPr lang="es-GT" dirty="0"/>
+            </a:br>
+            <a:endParaRPr lang="es-GT" dirty="0"/>
+          </a:p>
+        </p:txBody>
+      </p:sp>
+      <p:pic>
+        <p:nvPicPr>
+          <p:cNvPr id="4" name="Imagen 3">
+            <a:extLst>
+              <a:ext uri="{FF2B5EF4-FFF2-40B4-BE49-F238E27FC236}">
+                <a16:creationId xmlns:a16="http://schemas.microsoft.com/office/drawing/2014/main" id="{7AD85BEE-B4AD-F1DB-80B2-56AF672A5D39}"/>
+              </a:ext>
+            </a:extLst>
+          </p:cNvPr>
+          <p:cNvPicPr>
+            <a:picLocks noChangeAspect="1"/>
+          </p:cNvPicPr>
+          <p:nvPr/>
+        </p:nvPicPr>
+        <p:blipFill>
+          <a:blip r:embed="rId2"/>
+          <a:stretch>
+            <a:fillRect/>
+          </a:stretch>
+        </p:blipFill>
+        <p:spPr>
+          <a:xfrm>
+            <a:off x="1847651" y="1337134"/>
+            <a:ext cx="3765358" cy="4183731"/>
+          </a:xfrm>
+          <a:prstGeom prst="rect">
+            <a:avLst/>
+          </a:prstGeom>
+        </p:spPr>
+      </p:pic>
     </p:spTree>
     <p:extLst>
       <p:ext uri="{BB962C8B-B14F-4D97-AF65-F5344CB8AC3E}">
@@ -7127,10 +9860,43 @@
           <a:bodyPr/>
           <a:lstStyle/>
           <a:p>
-            <a:endParaRPr lang="es-GT"/>
-          </a:p>
-        </p:txBody>
-      </p:sp>
+            <a:r>
+              <a:rPr lang="es-GT" dirty="0"/>
+              <a:t>Ahora si ya se puede alargar o acortar a voluntad </a:t>
+            </a:r>
+          </a:p>
+        </p:txBody>
+      </p:sp>
+      <p:pic>
+        <p:nvPicPr>
+          <p:cNvPr id="4" name="Imagen 3">
+            <a:extLst>
+              <a:ext uri="{FF2B5EF4-FFF2-40B4-BE49-F238E27FC236}">
+                <a16:creationId xmlns:a16="http://schemas.microsoft.com/office/drawing/2014/main" id="{0442CEEC-E2A5-8873-606D-36192491C96F}"/>
+              </a:ext>
+            </a:extLst>
+          </p:cNvPr>
+          <p:cNvPicPr>
+            <a:picLocks noChangeAspect="1"/>
+          </p:cNvPicPr>
+          <p:nvPr/>
+        </p:nvPicPr>
+        <p:blipFill>
+          <a:blip r:embed="rId2"/>
+          <a:stretch>
+            <a:fillRect/>
+          </a:stretch>
+        </p:blipFill>
+        <p:spPr>
+          <a:xfrm>
+            <a:off x="2947548" y="2419209"/>
+            <a:ext cx="6296904" cy="2019582"/>
+          </a:xfrm>
+          <a:prstGeom prst="rect">
+            <a:avLst/>
+          </a:prstGeom>
+        </p:spPr>
+      </p:pic>
     </p:spTree>
     <p:extLst>
       <p:ext uri="{BB962C8B-B14F-4D97-AF65-F5344CB8AC3E}">
@@ -7182,7 +9948,75 @@
           <a:bodyPr/>
           <a:lstStyle/>
           <a:p>
-            <a:endParaRPr lang="es-GT"/>
+            <a:r>
+              <a:rPr lang="es-GT" dirty="0"/>
+              <a:t>Como entrar al block editor, CLICK DERECHO </a:t>
+            </a:r>
+          </a:p>
+        </p:txBody>
+      </p:sp>
+      <p:pic>
+        <p:nvPicPr>
+          <p:cNvPr id="4" name="Imagen 3">
+            <a:extLst>
+              <a:ext uri="{FF2B5EF4-FFF2-40B4-BE49-F238E27FC236}">
+                <a16:creationId xmlns:a16="http://schemas.microsoft.com/office/drawing/2014/main" id="{ECF73120-099D-F23E-342A-8FA08D3A6AEC}"/>
+              </a:ext>
+            </a:extLst>
+          </p:cNvPr>
+          <p:cNvPicPr>
+            <a:picLocks noChangeAspect="1"/>
+          </p:cNvPicPr>
+          <p:nvPr/>
+        </p:nvPicPr>
+        <p:blipFill>
+          <a:blip r:embed="rId2"/>
+          <a:stretch>
+            <a:fillRect/>
+          </a:stretch>
+        </p:blipFill>
+        <p:spPr>
+          <a:xfrm>
+            <a:off x="1783046" y="1535943"/>
+            <a:ext cx="3727376" cy="4681948"/>
+          </a:xfrm>
+          <a:prstGeom prst="rect">
+            <a:avLst/>
+          </a:prstGeom>
+        </p:spPr>
+      </p:pic>
+      <p:sp>
+        <p:nvSpPr>
+          <p:cNvPr id="6" name="CuadroTexto 5">
+            <a:extLst>
+              <a:ext uri="{FF2B5EF4-FFF2-40B4-BE49-F238E27FC236}">
+                <a16:creationId xmlns:a16="http://schemas.microsoft.com/office/drawing/2014/main" id="{577F1B65-2E1F-8D90-4CCA-A55D8B870922}"/>
+              </a:ext>
+            </a:extLst>
+          </p:cNvPr>
+          <p:cNvSpPr txBox="1"/>
+          <p:nvPr/>
+        </p:nvSpPr>
+        <p:spPr>
+          <a:xfrm>
+            <a:off x="6681580" y="1917949"/>
+            <a:ext cx="3278346" cy="954107"/>
+          </a:xfrm>
+          <a:prstGeom prst="rect">
+            <a:avLst/>
+          </a:prstGeom>
+          <a:noFill/>
+        </p:spPr>
+        <p:txBody>
+          <a:bodyPr wrap="square" rtlCol="0">
+            <a:spAutoFit/>
+          </a:bodyPr>
+          <a:lstStyle/>
+          <a:p>
+            <a:r>
+              <a:rPr lang="es-GT" sz="2800" dirty="0"/>
+              <a:t>CLIC DERECHO SOBRE LA IMAGEN </a:t>
+            </a:r>
           </a:p>
         </p:txBody>
       </p:sp>
@@ -7221,7 +10055,7 @@
           <p:cNvPr id="2" name="Título 1">
             <a:extLst>
               <a:ext uri="{FF2B5EF4-FFF2-40B4-BE49-F238E27FC236}">
-                <a16:creationId xmlns:a16="http://schemas.microsoft.com/office/drawing/2014/main" id="{8E8094F2-D8C5-AD01-6420-01A2FCA93E5D}"/>
+                <a16:creationId xmlns:a16="http://schemas.microsoft.com/office/drawing/2014/main" id="{A281192A-FDFD-A25D-C530-A2442575B0C0}"/>
               </a:ext>
             </a:extLst>
           </p:cNvPr>
@@ -7237,14 +10071,47 @@
           <a:bodyPr/>
           <a:lstStyle/>
           <a:p>
-            <a:endParaRPr lang="es-GT"/>
-          </a:p>
-        </p:txBody>
-      </p:sp>
+            <a:r>
+              <a:rPr lang="es-GT" dirty="0"/>
+              <a:t>Ahora si ya entramos al editor </a:t>
+            </a:r>
+          </a:p>
+        </p:txBody>
+      </p:sp>
+      <p:pic>
+        <p:nvPicPr>
+          <p:cNvPr id="4" name="Imagen 3">
+            <a:extLst>
+              <a:ext uri="{FF2B5EF4-FFF2-40B4-BE49-F238E27FC236}">
+                <a16:creationId xmlns:a16="http://schemas.microsoft.com/office/drawing/2014/main" id="{15750B59-92BF-D4DF-4D52-39DD5A3A0ED3}"/>
+              </a:ext>
+            </a:extLst>
+          </p:cNvPr>
+          <p:cNvPicPr>
+            <a:picLocks noChangeAspect="1"/>
+          </p:cNvPicPr>
+          <p:nvPr/>
+        </p:nvPicPr>
+        <p:blipFill>
+          <a:blip r:embed="rId2"/>
+          <a:stretch>
+            <a:fillRect/>
+          </a:stretch>
+        </p:blipFill>
+        <p:spPr>
+          <a:xfrm>
+            <a:off x="1127447" y="1980125"/>
+            <a:ext cx="8930953" cy="4742545"/>
+          </a:xfrm>
+          <a:prstGeom prst="rect">
+            <a:avLst/>
+          </a:prstGeom>
+        </p:spPr>
+      </p:pic>
     </p:spTree>
     <p:extLst>
       <p:ext uri="{BB962C8B-B14F-4D97-AF65-F5344CB8AC3E}">
-        <p14:creationId xmlns:p14="http://schemas.microsoft.com/office/powerpoint/2010/main" val="394983608"/>
+        <p14:creationId xmlns:p14="http://schemas.microsoft.com/office/powerpoint/2010/main" val="1749222439"/>
       </p:ext>
     </p:extLst>
   </p:cSld>
@@ -7361,7 +10228,7 @@
           <p:cNvPr id="2" name="Título 1">
             <a:extLst>
               <a:ext uri="{FF2B5EF4-FFF2-40B4-BE49-F238E27FC236}">
-                <a16:creationId xmlns:a16="http://schemas.microsoft.com/office/drawing/2014/main" id="{1C509C3F-F87B-A99A-879D-8547DBA86514}"/>
+                <a16:creationId xmlns:a16="http://schemas.microsoft.com/office/drawing/2014/main" id="{52FCD9CB-3CF1-575A-065B-D48FDFCFD39E}"/>
               </a:ext>
             </a:extLst>
           </p:cNvPr>
@@ -7372,19 +10239,29 @@
             <p:ph type="title"/>
           </p:nvPr>
         </p:nvSpPr>
-        <p:spPr/>
-        <p:txBody>
-          <a:bodyPr/>
+        <p:spPr>
+          <a:xfrm>
+            <a:off x="570914" y="1280161"/>
+            <a:ext cx="10515600" cy="3013052"/>
+          </a:xfrm>
+        </p:spPr>
+        <p:txBody>
+          <a:bodyPr>
+            <a:normAutofit/>
+          </a:bodyPr>
           <a:lstStyle/>
           <a:p>
-            <a:endParaRPr lang="es-GT"/>
+            <a:r>
+              <a:rPr lang="es-GT" sz="8800" b="1" dirty="0"/>
+              <a:t>PARAMETRO ALIGMENT </a:t>
+            </a:r>
           </a:p>
         </p:txBody>
       </p:sp>
     </p:spTree>
     <p:extLst>
       <p:ext uri="{BB962C8B-B14F-4D97-AF65-F5344CB8AC3E}">
-        <p14:creationId xmlns:p14="http://schemas.microsoft.com/office/powerpoint/2010/main" val="2935884083"/>
+        <p14:creationId xmlns:p14="http://schemas.microsoft.com/office/powerpoint/2010/main" val="1672325947"/>
       </p:ext>
     </p:extLst>
   </p:cSld>
@@ -7416,7 +10293,7 @@
           <p:cNvPr id="2" name="Título 1">
             <a:extLst>
               <a:ext uri="{FF2B5EF4-FFF2-40B4-BE49-F238E27FC236}">
-                <a16:creationId xmlns:a16="http://schemas.microsoft.com/office/drawing/2014/main" id="{4FD3BFDF-9FCC-8D8D-ED25-B0EDA7D1123C}"/>
+                <a16:creationId xmlns:a16="http://schemas.microsoft.com/office/drawing/2014/main" id="{07D9D5BF-A6D2-44F6-D1BD-1EEB87CE7728}"/>
               </a:ext>
             </a:extLst>
           </p:cNvPr>
@@ -7436,10 +10313,40 @@
           </a:p>
         </p:txBody>
       </p:sp>
+      <p:pic>
+        <p:nvPicPr>
+          <p:cNvPr id="4" name="Imagen 3">
+            <a:extLst>
+              <a:ext uri="{FF2B5EF4-FFF2-40B4-BE49-F238E27FC236}">
+                <a16:creationId xmlns:a16="http://schemas.microsoft.com/office/drawing/2014/main" id="{58B8A9CB-71D2-8413-3421-43ED8B2EB91C}"/>
+              </a:ext>
+            </a:extLst>
+          </p:cNvPr>
+          <p:cNvPicPr>
+            <a:picLocks noChangeAspect="1"/>
+          </p:cNvPicPr>
+          <p:nvPr/>
+        </p:nvPicPr>
+        <p:blipFill>
+          <a:blip r:embed="rId2"/>
+          <a:stretch>
+            <a:fillRect/>
+          </a:stretch>
+        </p:blipFill>
+        <p:spPr>
+          <a:xfrm>
+            <a:off x="2488185" y="2330926"/>
+            <a:ext cx="7215630" cy="3436828"/>
+          </a:xfrm>
+          <a:prstGeom prst="rect">
+            <a:avLst/>
+          </a:prstGeom>
+        </p:spPr>
+      </p:pic>
     </p:spTree>
     <p:extLst>
       <p:ext uri="{BB962C8B-B14F-4D97-AF65-F5344CB8AC3E}">
-        <p14:creationId xmlns:p14="http://schemas.microsoft.com/office/powerpoint/2010/main" val="1363416865"/>
+        <p14:creationId xmlns:p14="http://schemas.microsoft.com/office/powerpoint/2010/main" val="3649431523"/>
       </p:ext>
     </p:extLst>
   </p:cSld>
@@ -7471,7 +10378,7 @@
           <p:cNvPr id="2" name="Título 1">
             <a:extLst>
               <a:ext uri="{FF2B5EF4-FFF2-40B4-BE49-F238E27FC236}">
-                <a16:creationId xmlns:a16="http://schemas.microsoft.com/office/drawing/2014/main" id="{98ECB0CE-B0B5-10D8-F00B-B6EA2A4FFE8D}"/>
+                <a16:creationId xmlns:a16="http://schemas.microsoft.com/office/drawing/2014/main" id="{4758E7AB-A6CA-9678-2D2D-E4398E14BDB3}"/>
               </a:ext>
             </a:extLst>
           </p:cNvPr>
@@ -7491,10 +10398,216 @@
           </a:p>
         </p:txBody>
       </p:sp>
+      <p:pic>
+        <p:nvPicPr>
+          <p:cNvPr id="4" name="Imagen 3">
+            <a:extLst>
+              <a:ext uri="{FF2B5EF4-FFF2-40B4-BE49-F238E27FC236}">
+                <a16:creationId xmlns:a16="http://schemas.microsoft.com/office/drawing/2014/main" id="{374D1B9A-B2AD-40B8-2D73-B6E09BA696D6}"/>
+              </a:ext>
+            </a:extLst>
+          </p:cNvPr>
+          <p:cNvPicPr>
+            <a:picLocks noChangeAspect="1"/>
+          </p:cNvPicPr>
+          <p:nvPr/>
+        </p:nvPicPr>
+        <p:blipFill>
+          <a:blip r:embed="rId2"/>
+          <a:stretch>
+            <a:fillRect/>
+          </a:stretch>
+        </p:blipFill>
+        <p:spPr>
+          <a:xfrm>
+            <a:off x="2365693" y="1180733"/>
+            <a:ext cx="6454750" cy="2535795"/>
+          </a:xfrm>
+          <a:prstGeom prst="rect">
+            <a:avLst/>
+          </a:prstGeom>
+        </p:spPr>
+      </p:pic>
+      <mc:AlternateContent xmlns:mc="http://schemas.openxmlformats.org/markup-compatibility/2006">
+        <mc:Choice xmlns:p14="http://schemas.microsoft.com/office/powerpoint/2010/main" Requires="p14">
+          <p:contentPart p14:bwMode="auto" r:id="rId3">
+            <p14:nvContentPartPr>
+              <p14:cNvPr id="5" name="Entrada de lápiz 4">
+                <a:extLst>
+                  <a:ext uri="{FF2B5EF4-FFF2-40B4-BE49-F238E27FC236}">
+                    <a16:creationId xmlns:a16="http://schemas.microsoft.com/office/drawing/2014/main" id="{92DEC952-5C5E-DF64-1891-089B393249CE}"/>
+                  </a:ext>
+                </a:extLst>
+              </p14:cNvPr>
+              <p14:cNvContentPartPr/>
+              <p14:nvPr/>
+            </p14:nvContentPartPr>
+            <p14:xfrm>
+              <a:off x="3683714" y="2677348"/>
+              <a:ext cx="775080" cy="413640"/>
+            </p14:xfrm>
+          </p:contentPart>
+        </mc:Choice>
+        <mc:Fallback>
+          <p:pic>
+            <p:nvPicPr>
+              <p:cNvPr id="5" name="Entrada de lápiz 4">
+                <a:extLst>
+                  <a:ext uri="{FF2B5EF4-FFF2-40B4-BE49-F238E27FC236}">
+                    <a16:creationId xmlns:a16="http://schemas.microsoft.com/office/drawing/2014/main" id="{92DEC952-5C5E-DF64-1891-089B393249CE}"/>
+                  </a:ext>
+                </a:extLst>
+              </p:cNvPr>
+              <p:cNvPicPr/>
+              <p:nvPr/>
+            </p:nvPicPr>
+            <p:blipFill>
+              <a:blip r:embed="rId4"/>
+              <a:stretch>
+                <a:fillRect/>
+              </a:stretch>
+            </p:blipFill>
+            <p:spPr>
+              <a:xfrm>
+                <a:off x="3630074" y="2569348"/>
+                <a:ext cx="882720" cy="629280"/>
+              </a:xfrm>
+              <a:prstGeom prst="rect">
+                <a:avLst/>
+              </a:prstGeom>
+            </p:spPr>
+          </p:pic>
+        </mc:Fallback>
+      </mc:AlternateContent>
+      <mc:AlternateContent xmlns:mc="http://schemas.openxmlformats.org/markup-compatibility/2006">
+        <mc:Choice xmlns:p14="http://schemas.microsoft.com/office/powerpoint/2010/main" Requires="p14">
+          <p:contentPart p14:bwMode="auto" r:id="rId5">
+            <p14:nvContentPartPr>
+              <p14:cNvPr id="6" name="Entrada de lápiz 5">
+                <a:extLst>
+                  <a:ext uri="{FF2B5EF4-FFF2-40B4-BE49-F238E27FC236}">
+                    <a16:creationId xmlns:a16="http://schemas.microsoft.com/office/drawing/2014/main" id="{4E746705-3332-3D92-C94C-757CF136A3EF}"/>
+                  </a:ext>
+                </a:extLst>
+              </p14:cNvPr>
+              <p14:cNvContentPartPr/>
+              <p14:nvPr/>
+            </p14:nvContentPartPr>
+            <p14:xfrm>
+              <a:off x="6679274" y="2474308"/>
+              <a:ext cx="2066400" cy="391320"/>
+            </p14:xfrm>
+          </p:contentPart>
+        </mc:Choice>
+        <mc:Fallback>
+          <p:pic>
+            <p:nvPicPr>
+              <p:cNvPr id="6" name="Entrada de lápiz 5">
+                <a:extLst>
+                  <a:ext uri="{FF2B5EF4-FFF2-40B4-BE49-F238E27FC236}">
+                    <a16:creationId xmlns:a16="http://schemas.microsoft.com/office/drawing/2014/main" id="{4E746705-3332-3D92-C94C-757CF136A3EF}"/>
+                  </a:ext>
+                </a:extLst>
+              </p:cNvPr>
+              <p:cNvPicPr/>
+              <p:nvPr/>
+            </p:nvPicPr>
+            <p:blipFill>
+              <a:blip r:embed="rId6"/>
+              <a:stretch>
+                <a:fillRect/>
+              </a:stretch>
+            </p:blipFill>
+            <p:spPr>
+              <a:xfrm>
+                <a:off x="6625274" y="2366308"/>
+                <a:ext cx="2174040" cy="606960"/>
+              </a:xfrm>
+              <a:prstGeom prst="rect">
+                <a:avLst/>
+              </a:prstGeom>
+            </p:spPr>
+          </p:pic>
+        </mc:Fallback>
+      </mc:AlternateContent>
+      <p:sp>
+        <p:nvSpPr>
+          <p:cNvPr id="7" name="CuadroTexto 6">
+            <a:extLst>
+              <a:ext uri="{FF2B5EF4-FFF2-40B4-BE49-F238E27FC236}">
+                <a16:creationId xmlns:a16="http://schemas.microsoft.com/office/drawing/2014/main" id="{E5F8A4B1-D396-0AF1-25DF-9D4F36E7E97F}"/>
+              </a:ext>
+            </a:extLst>
+          </p:cNvPr>
+          <p:cNvSpPr txBox="1"/>
+          <p:nvPr/>
+        </p:nvSpPr>
+        <p:spPr>
+          <a:xfrm>
+            <a:off x="1434905" y="4346917"/>
+            <a:ext cx="5486400" cy="1200329"/>
+          </a:xfrm>
+          <a:prstGeom prst="rect">
+            <a:avLst/>
+          </a:prstGeom>
+          <a:noFill/>
+        </p:spPr>
+        <p:txBody>
+          <a:bodyPr wrap="square" rtlCol="0">
+            <a:spAutoFit/>
+          </a:bodyPr>
+          <a:lstStyle/>
+          <a:p>
+            <a:r>
+              <a:rPr lang="es-GT" dirty="0"/>
+              <a:t>LE DAMOS CLICK LUEGNO LO ALINEAMOS A LA HORIZONTAL </a:t>
+            </a:r>
+          </a:p>
+          <a:p>
+            <a:endParaRPr lang="es-GT" dirty="0"/>
+          </a:p>
+          <a:p>
+            <a:r>
+              <a:rPr lang="es-GT" dirty="0"/>
+              <a:t>LUEGO LE DAMOS EN CLOS O EN EL CHECK </a:t>
+            </a:r>
+          </a:p>
+        </p:txBody>
+      </p:sp>
+      <p:pic>
+        <p:nvPicPr>
+          <p:cNvPr id="9" name="Imagen 8">
+            <a:extLst>
+              <a:ext uri="{FF2B5EF4-FFF2-40B4-BE49-F238E27FC236}">
+                <a16:creationId xmlns:a16="http://schemas.microsoft.com/office/drawing/2014/main" id="{34CDC1E7-17AE-29C6-15C2-F1412A7BF0CD}"/>
+              </a:ext>
+            </a:extLst>
+          </p:cNvPr>
+          <p:cNvPicPr>
+            <a:picLocks noChangeAspect="1"/>
+          </p:cNvPicPr>
+          <p:nvPr/>
+        </p:nvPicPr>
+        <p:blipFill>
+          <a:blip r:embed="rId7"/>
+          <a:stretch>
+            <a:fillRect/>
+          </a:stretch>
+        </p:blipFill>
+        <p:spPr>
+          <a:xfrm>
+            <a:off x="8726658" y="2761836"/>
+            <a:ext cx="1505160" cy="2429214"/>
+          </a:xfrm>
+          <a:prstGeom prst="rect">
+            <a:avLst/>
+          </a:prstGeom>
+        </p:spPr>
+      </p:pic>
     </p:spTree>
     <p:extLst>
       <p:ext uri="{BB962C8B-B14F-4D97-AF65-F5344CB8AC3E}">
-        <p14:creationId xmlns:p14="http://schemas.microsoft.com/office/powerpoint/2010/main" val="123172610"/>
+        <p14:creationId xmlns:p14="http://schemas.microsoft.com/office/powerpoint/2010/main" val="620608512"/>
       </p:ext>
     </p:extLst>
   </p:cSld>
@@ -7526,7 +10639,7 @@
           <p:cNvPr id="2" name="Título 1">
             <a:extLst>
               <a:ext uri="{FF2B5EF4-FFF2-40B4-BE49-F238E27FC236}">
-                <a16:creationId xmlns:a16="http://schemas.microsoft.com/office/drawing/2014/main" id="{A7386C69-38DA-9BE5-57F4-6EA92756509E}"/>
+                <a16:creationId xmlns:a16="http://schemas.microsoft.com/office/drawing/2014/main" id="{2A6F63DE-C33C-84D2-CFA6-C9C81A9D2F84}"/>
               </a:ext>
             </a:extLst>
           </p:cNvPr>
@@ -7543,13 +10656,78 @@
           <a:lstStyle/>
           <a:p>
             <a:endParaRPr lang="es-GT"/>
+          </a:p>
+        </p:txBody>
+      </p:sp>
+      <p:pic>
+        <p:nvPicPr>
+          <p:cNvPr id="4" name="Imagen 3">
+            <a:extLst>
+              <a:ext uri="{FF2B5EF4-FFF2-40B4-BE49-F238E27FC236}">
+                <a16:creationId xmlns:a16="http://schemas.microsoft.com/office/drawing/2014/main" id="{E4976A0F-A3FE-6985-7B28-D37A11C19E68}"/>
+              </a:ext>
+            </a:extLst>
+          </p:cNvPr>
+          <p:cNvPicPr>
+            <a:picLocks noChangeAspect="1"/>
+          </p:cNvPicPr>
+          <p:nvPr/>
+        </p:nvPicPr>
+        <p:blipFill>
+          <a:blip r:embed="rId2"/>
+          <a:stretch>
+            <a:fillRect/>
+          </a:stretch>
+        </p:blipFill>
+        <p:spPr>
+          <a:xfrm>
+            <a:off x="2162197" y="703721"/>
+            <a:ext cx="7133489" cy="3010150"/>
+          </a:xfrm>
+          <a:prstGeom prst="rect">
+            <a:avLst/>
+          </a:prstGeom>
+        </p:spPr>
+      </p:pic>
+      <p:sp>
+        <p:nvSpPr>
+          <p:cNvPr id="5" name="CuadroTexto 4">
+            <a:extLst>
+              <a:ext uri="{FF2B5EF4-FFF2-40B4-BE49-F238E27FC236}">
+                <a16:creationId xmlns:a16="http://schemas.microsoft.com/office/drawing/2014/main" id="{AC63E529-3D1A-336E-9B44-EE49FE060318}"/>
+              </a:ext>
+            </a:extLst>
+          </p:cNvPr>
+          <p:cNvSpPr txBox="1"/>
+          <p:nvPr/>
+        </p:nvSpPr>
+        <p:spPr>
+          <a:xfrm>
+            <a:off x="1181686" y="4248443"/>
+            <a:ext cx="5406865" cy="369332"/>
+          </a:xfrm>
+          <a:prstGeom prst="rect">
+            <a:avLst/>
+          </a:prstGeom>
+          <a:noFill/>
+        </p:spPr>
+        <p:txBody>
+          <a:bodyPr wrap="none" rtlCol="0">
+            <a:spAutoFit/>
+          </a:bodyPr>
+          <a:lstStyle/>
+          <a:p>
+            <a:r>
+              <a:rPr lang="es-GT" dirty="0"/>
+              <a:t>YA PUEDE ROTAR A VOLUNTAD CUANDO LO MOVAMOS </a:t>
+            </a:r>
           </a:p>
         </p:txBody>
       </p:sp>
     </p:spTree>
     <p:extLst>
       <p:ext uri="{BB962C8B-B14F-4D97-AF65-F5344CB8AC3E}">
-        <p14:creationId xmlns:p14="http://schemas.microsoft.com/office/powerpoint/2010/main" val="1490314433"/>
+        <p14:creationId xmlns:p14="http://schemas.microsoft.com/office/powerpoint/2010/main" val="1787512125"/>
       </p:ext>
     </p:extLst>
   </p:cSld>
@@ -7581,7 +10759,7 @@
           <p:cNvPr id="2" name="Título 1">
             <a:extLst>
               <a:ext uri="{FF2B5EF4-FFF2-40B4-BE49-F238E27FC236}">
-                <a16:creationId xmlns:a16="http://schemas.microsoft.com/office/drawing/2014/main" id="{EEF01E30-01FC-E6FE-83BF-AD056652A2E8}"/>
+                <a16:creationId xmlns:a16="http://schemas.microsoft.com/office/drawing/2014/main" id="{698EEDC9-F639-12A9-CF98-E9EDC40317B4}"/>
               </a:ext>
             </a:extLst>
           </p:cNvPr>
@@ -7601,10 +10779,619 @@
           </a:p>
         </p:txBody>
       </p:sp>
+      <p:pic>
+        <p:nvPicPr>
+          <p:cNvPr id="4" name="Imagen 3">
+            <a:extLst>
+              <a:ext uri="{FF2B5EF4-FFF2-40B4-BE49-F238E27FC236}">
+                <a16:creationId xmlns:a16="http://schemas.microsoft.com/office/drawing/2014/main" id="{0CD8D129-2290-59FC-03E0-F8411ABE84ED}"/>
+              </a:ext>
+            </a:extLst>
+          </p:cNvPr>
+          <p:cNvPicPr>
+            <a:picLocks noChangeAspect="1"/>
+          </p:cNvPicPr>
+          <p:nvPr/>
+        </p:nvPicPr>
+        <p:blipFill>
+          <a:blip r:embed="rId2"/>
+          <a:stretch>
+            <a:fillRect/>
+          </a:stretch>
+        </p:blipFill>
+        <p:spPr>
+          <a:xfrm>
+            <a:off x="1164393" y="1287194"/>
+            <a:ext cx="8878476" cy="3945988"/>
+          </a:xfrm>
+          <a:prstGeom prst="rect">
+            <a:avLst/>
+          </a:prstGeom>
+        </p:spPr>
+      </p:pic>
     </p:spTree>
     <p:extLst>
       <p:ext uri="{BB962C8B-B14F-4D97-AF65-F5344CB8AC3E}">
-        <p14:creationId xmlns:p14="http://schemas.microsoft.com/office/powerpoint/2010/main" val="1206364583"/>
+        <p14:creationId xmlns:p14="http://schemas.microsoft.com/office/powerpoint/2010/main" val="723065345"/>
+      </p:ext>
+    </p:extLst>
+  </p:cSld>
+  <p:clrMapOvr>
+    <a:masterClrMapping/>
+  </p:clrMapOvr>
+</p:sld>
+</file>
+
+<file path=ppt/slides/slide55.xml><?xml version="1.0" encoding="utf-8"?>
+<p:sld xmlns:a="http://schemas.openxmlformats.org/drawingml/2006/main" xmlns:r="http://schemas.openxmlformats.org/officeDocument/2006/relationships" xmlns:p="http://schemas.openxmlformats.org/presentationml/2006/main">
+  <p:cSld>
+    <p:spTree>
+      <p:nvGrpSpPr>
+        <p:cNvPr id="1" name=""/>
+        <p:cNvGrpSpPr/>
+        <p:nvPr/>
+      </p:nvGrpSpPr>
+      <p:grpSpPr>
+        <a:xfrm>
+          <a:off x="0" y="0"/>
+          <a:ext cx="0" cy="0"/>
+          <a:chOff x="0" y="0"/>
+          <a:chExt cx="0" cy="0"/>
+        </a:xfrm>
+      </p:grpSpPr>
+      <p:sp>
+        <p:nvSpPr>
+          <p:cNvPr id="2" name="Título 1">
+            <a:extLst>
+              <a:ext uri="{FF2B5EF4-FFF2-40B4-BE49-F238E27FC236}">
+                <a16:creationId xmlns:a16="http://schemas.microsoft.com/office/drawing/2014/main" id="{85D9C473-8127-45AE-CA8E-BC3B1056E08A}"/>
+              </a:ext>
+            </a:extLst>
+          </p:cNvPr>
+          <p:cNvSpPr>
+            <a:spLocks noGrp="1"/>
+          </p:cNvSpPr>
+          <p:nvPr>
+            <p:ph type="title"/>
+          </p:nvPr>
+        </p:nvSpPr>
+        <p:spPr>
+          <a:xfrm>
+            <a:off x="599049" y="2433076"/>
+            <a:ext cx="10515600" cy="1325563"/>
+          </a:xfrm>
+        </p:spPr>
+        <p:txBody>
+          <a:bodyPr/>
+          <a:lstStyle/>
+          <a:p>
+            <a:r>
+              <a:rPr lang="es-GT" dirty="0"/>
+              <a:t>AGREGAR UNA MASCARA, OBSTRUYA A LO QUE SE VE ATRÁS  </a:t>
+            </a:r>
+          </a:p>
+        </p:txBody>
+      </p:sp>
+    </p:spTree>
+    <p:extLst>
+      <p:ext uri="{BB962C8B-B14F-4D97-AF65-F5344CB8AC3E}">
+        <p14:creationId xmlns:p14="http://schemas.microsoft.com/office/powerpoint/2010/main" val="3620249477"/>
+      </p:ext>
+    </p:extLst>
+  </p:cSld>
+  <p:clrMapOvr>
+    <a:masterClrMapping/>
+  </p:clrMapOvr>
+</p:sld>
+</file>
+
+<file path=ppt/slides/slide56.xml><?xml version="1.0" encoding="utf-8"?>
+<p:sld xmlns:a="http://schemas.openxmlformats.org/drawingml/2006/main" xmlns:r="http://schemas.openxmlformats.org/officeDocument/2006/relationships" xmlns:p="http://schemas.openxmlformats.org/presentationml/2006/main">
+  <p:cSld>
+    <p:spTree>
+      <p:nvGrpSpPr>
+        <p:cNvPr id="1" name=""/>
+        <p:cNvGrpSpPr/>
+        <p:nvPr/>
+      </p:nvGrpSpPr>
+      <p:grpSpPr>
+        <a:xfrm>
+          <a:off x="0" y="0"/>
+          <a:ext cx="0" cy="0"/>
+          <a:chOff x="0" y="0"/>
+          <a:chExt cx="0" cy="0"/>
+        </a:xfrm>
+      </p:grpSpPr>
+      <p:sp>
+        <p:nvSpPr>
+          <p:cNvPr id="2" name="Título 1">
+            <a:extLst>
+              <a:ext uri="{FF2B5EF4-FFF2-40B4-BE49-F238E27FC236}">
+                <a16:creationId xmlns:a16="http://schemas.microsoft.com/office/drawing/2014/main" id="{F9B95AE7-09C7-7240-7642-0996E604871E}"/>
+              </a:ext>
+            </a:extLst>
+          </p:cNvPr>
+          <p:cNvSpPr>
+            <a:spLocks noGrp="1"/>
+          </p:cNvSpPr>
+          <p:nvPr>
+            <p:ph type="title"/>
+          </p:nvPr>
+        </p:nvSpPr>
+        <p:spPr/>
+        <p:txBody>
+          <a:bodyPr/>
+          <a:lstStyle/>
+          <a:p>
+            <a:endParaRPr lang="es-GT"/>
+          </a:p>
+        </p:txBody>
+      </p:sp>
+      <p:pic>
+        <p:nvPicPr>
+          <p:cNvPr id="4" name="Imagen 3">
+            <a:extLst>
+              <a:ext uri="{FF2B5EF4-FFF2-40B4-BE49-F238E27FC236}">
+                <a16:creationId xmlns:a16="http://schemas.microsoft.com/office/drawing/2014/main" id="{0C325DCB-2BD8-7E9B-BB23-188CDC8CA5EA}"/>
+              </a:ext>
+            </a:extLst>
+          </p:cNvPr>
+          <p:cNvPicPr>
+            <a:picLocks noChangeAspect="1"/>
+          </p:cNvPicPr>
+          <p:nvPr/>
+        </p:nvPicPr>
+        <p:blipFill>
+          <a:blip r:embed="rId2"/>
+          <a:stretch>
+            <a:fillRect/>
+          </a:stretch>
+        </p:blipFill>
+        <p:spPr>
+          <a:xfrm>
+            <a:off x="838200" y="365125"/>
+            <a:ext cx="4525006" cy="6020640"/>
+          </a:xfrm>
+          <a:prstGeom prst="rect">
+            <a:avLst/>
+          </a:prstGeom>
+        </p:spPr>
+      </p:pic>
+      <p:pic>
+        <p:nvPicPr>
+          <p:cNvPr id="6" name="Imagen 5">
+            <a:extLst>
+              <a:ext uri="{FF2B5EF4-FFF2-40B4-BE49-F238E27FC236}">
+                <a16:creationId xmlns:a16="http://schemas.microsoft.com/office/drawing/2014/main" id="{013822AE-2E93-28DA-0CDB-91F022C07A29}"/>
+              </a:ext>
+            </a:extLst>
+          </p:cNvPr>
+          <p:cNvPicPr>
+            <a:picLocks noChangeAspect="1"/>
+          </p:cNvPicPr>
+          <p:nvPr/>
+        </p:nvPicPr>
+        <p:blipFill>
+          <a:blip r:embed="rId3"/>
+          <a:stretch>
+            <a:fillRect/>
+          </a:stretch>
+        </p:blipFill>
+        <p:spPr>
+          <a:xfrm>
+            <a:off x="5611307" y="232273"/>
+            <a:ext cx="5494392" cy="4747690"/>
+          </a:xfrm>
+          <a:prstGeom prst="rect">
+            <a:avLst/>
+          </a:prstGeom>
+        </p:spPr>
+      </p:pic>
+      <p:sp>
+        <p:nvSpPr>
+          <p:cNvPr id="7" name="CuadroTexto 6">
+            <a:extLst>
+              <a:ext uri="{FF2B5EF4-FFF2-40B4-BE49-F238E27FC236}">
+                <a16:creationId xmlns:a16="http://schemas.microsoft.com/office/drawing/2014/main" id="{12E05652-72A9-3714-2FD3-737B18053978}"/>
+              </a:ext>
+            </a:extLst>
+          </p:cNvPr>
+          <p:cNvSpPr txBox="1"/>
+          <p:nvPr/>
+        </p:nvSpPr>
+        <p:spPr>
+          <a:xfrm>
+            <a:off x="6905479" y="5373858"/>
+            <a:ext cx="2906047" cy="830997"/>
+          </a:xfrm>
+          <a:prstGeom prst="rect">
+            <a:avLst/>
+          </a:prstGeom>
+          <a:noFill/>
+        </p:spPr>
+        <p:txBody>
+          <a:bodyPr wrap="square" rtlCol="0">
+            <a:spAutoFit/>
+          </a:bodyPr>
+          <a:lstStyle/>
+          <a:p>
+            <a:r>
+              <a:rPr lang="es-GT" sz="2400" b="1" dirty="0"/>
+              <a:t>HAY 2 FORMAS DE ENTRAR AL MENU </a:t>
+            </a:r>
+          </a:p>
+        </p:txBody>
+      </p:sp>
+    </p:spTree>
+    <p:extLst>
+      <p:ext uri="{BB962C8B-B14F-4D97-AF65-F5344CB8AC3E}">
+        <p14:creationId xmlns:p14="http://schemas.microsoft.com/office/powerpoint/2010/main" val="1809090232"/>
+      </p:ext>
+    </p:extLst>
+  </p:cSld>
+  <p:clrMapOvr>
+    <a:masterClrMapping/>
+  </p:clrMapOvr>
+</p:sld>
+</file>
+
+<file path=ppt/slides/slide57.xml><?xml version="1.0" encoding="utf-8"?>
+<p:sld xmlns:a="http://schemas.openxmlformats.org/drawingml/2006/main" xmlns:r="http://schemas.openxmlformats.org/officeDocument/2006/relationships" xmlns:p="http://schemas.openxmlformats.org/presentationml/2006/main">
+  <p:cSld>
+    <p:spTree>
+      <p:nvGrpSpPr>
+        <p:cNvPr id="1" name=""/>
+        <p:cNvGrpSpPr/>
+        <p:nvPr/>
+      </p:nvGrpSpPr>
+      <p:grpSpPr>
+        <a:xfrm>
+          <a:off x="0" y="0"/>
+          <a:ext cx="0" cy="0"/>
+          <a:chOff x="0" y="0"/>
+          <a:chExt cx="0" cy="0"/>
+        </a:xfrm>
+      </p:grpSpPr>
+      <p:sp>
+        <p:nvSpPr>
+          <p:cNvPr id="2" name="Título 1">
+            <a:extLst>
+              <a:ext uri="{FF2B5EF4-FFF2-40B4-BE49-F238E27FC236}">
+                <a16:creationId xmlns:a16="http://schemas.microsoft.com/office/drawing/2014/main" id="{E4667F80-24AA-D808-9763-4AA3D02671D4}"/>
+              </a:ext>
+            </a:extLst>
+          </p:cNvPr>
+          <p:cNvSpPr>
+            <a:spLocks noGrp="1"/>
+          </p:cNvSpPr>
+          <p:nvPr>
+            <p:ph type="title"/>
+          </p:nvPr>
+        </p:nvSpPr>
+        <p:spPr/>
+        <p:txBody>
+          <a:bodyPr/>
+          <a:lstStyle/>
+          <a:p>
+            <a:r>
+              <a:rPr lang="es-GT" dirty="0"/>
+              <a:t>QUITAR PRIMERO EL EFECTO CLICK DERECHO Y EN ICONO </a:t>
+            </a:r>
+          </a:p>
+        </p:txBody>
+      </p:sp>
+      <p:pic>
+        <p:nvPicPr>
+          <p:cNvPr id="4" name="Imagen 3">
+            <a:extLst>
+              <a:ext uri="{FF2B5EF4-FFF2-40B4-BE49-F238E27FC236}">
+                <a16:creationId xmlns:a16="http://schemas.microsoft.com/office/drawing/2014/main" id="{A8E45B61-6C78-71CB-8173-464B0468D4C5}"/>
+              </a:ext>
+            </a:extLst>
+          </p:cNvPr>
+          <p:cNvPicPr>
+            <a:picLocks noChangeAspect="1"/>
+          </p:cNvPicPr>
+          <p:nvPr/>
+        </p:nvPicPr>
+        <p:blipFill>
+          <a:blip r:embed="rId2"/>
+          <a:stretch>
+            <a:fillRect/>
+          </a:stretch>
+        </p:blipFill>
+        <p:spPr>
+          <a:xfrm>
+            <a:off x="3066260" y="1690688"/>
+            <a:ext cx="6059480" cy="4859683"/>
+          </a:xfrm>
+          <a:prstGeom prst="rect">
+            <a:avLst/>
+          </a:prstGeom>
+        </p:spPr>
+      </p:pic>
+      <mc:AlternateContent xmlns:mc="http://schemas.openxmlformats.org/markup-compatibility/2006">
+        <mc:Choice xmlns:p14="http://schemas.microsoft.com/office/powerpoint/2010/main" Requires="p14">
+          <p:contentPart p14:bwMode="auto" r:id="rId3">
+            <p14:nvContentPartPr>
+              <p14:cNvPr id="5" name="Entrada de lápiz 4">
+                <a:extLst>
+                  <a:ext uri="{FF2B5EF4-FFF2-40B4-BE49-F238E27FC236}">
+                    <a16:creationId xmlns:a16="http://schemas.microsoft.com/office/drawing/2014/main" id="{517728A1-0DC9-70FE-3D40-878E198B4AE3}"/>
+                  </a:ext>
+                </a:extLst>
+              </p14:cNvPr>
+              <p14:cNvContentPartPr/>
+              <p14:nvPr/>
+            </p14:nvContentPartPr>
+            <p14:xfrm>
+              <a:off x="6877994" y="4321108"/>
+              <a:ext cx="1071000" cy="252360"/>
+            </p14:xfrm>
+          </p:contentPart>
+        </mc:Choice>
+        <mc:Fallback>
+          <p:pic>
+            <p:nvPicPr>
+              <p:cNvPr id="5" name="Entrada de lápiz 4">
+                <a:extLst>
+                  <a:ext uri="{FF2B5EF4-FFF2-40B4-BE49-F238E27FC236}">
+                    <a16:creationId xmlns:a16="http://schemas.microsoft.com/office/drawing/2014/main" id="{517728A1-0DC9-70FE-3D40-878E198B4AE3}"/>
+                  </a:ext>
+                </a:extLst>
+              </p:cNvPr>
+              <p:cNvPicPr/>
+              <p:nvPr/>
+            </p:nvPicPr>
+            <p:blipFill>
+              <a:blip r:embed="rId4"/>
+              <a:stretch>
+                <a:fillRect/>
+              </a:stretch>
+            </p:blipFill>
+            <p:spPr>
+              <a:xfrm>
+                <a:off x="6824354" y="4213108"/>
+                <a:ext cx="1178640" cy="468000"/>
+              </a:xfrm>
+              <a:prstGeom prst="rect">
+                <a:avLst/>
+              </a:prstGeom>
+            </p:spPr>
+          </p:pic>
+        </mc:Fallback>
+      </mc:AlternateContent>
+    </p:spTree>
+    <p:extLst>
+      <p:ext uri="{BB962C8B-B14F-4D97-AF65-F5344CB8AC3E}">
+        <p14:creationId xmlns:p14="http://schemas.microsoft.com/office/powerpoint/2010/main" val="664210546"/>
+      </p:ext>
+    </p:extLst>
+  </p:cSld>
+  <p:clrMapOvr>
+    <a:masterClrMapping/>
+  </p:clrMapOvr>
+</p:sld>
+</file>
+
+<file path=ppt/slides/slide58.xml><?xml version="1.0" encoding="utf-8"?>
+<p:sld xmlns:a="http://schemas.openxmlformats.org/drawingml/2006/main" xmlns:r="http://schemas.openxmlformats.org/officeDocument/2006/relationships" xmlns:p="http://schemas.openxmlformats.org/presentationml/2006/main">
+  <p:cSld>
+    <p:spTree>
+      <p:nvGrpSpPr>
+        <p:cNvPr id="1" name=""/>
+        <p:cNvGrpSpPr/>
+        <p:nvPr/>
+      </p:nvGrpSpPr>
+      <p:grpSpPr>
+        <a:xfrm>
+          <a:off x="0" y="0"/>
+          <a:ext cx="0" cy="0"/>
+          <a:chOff x="0" y="0"/>
+          <a:chExt cx="0" cy="0"/>
+        </a:xfrm>
+      </p:grpSpPr>
+      <p:sp>
+        <p:nvSpPr>
+          <p:cNvPr id="2" name="Título 1">
+            <a:extLst>
+              <a:ext uri="{FF2B5EF4-FFF2-40B4-BE49-F238E27FC236}">
+                <a16:creationId xmlns:a16="http://schemas.microsoft.com/office/drawing/2014/main" id="{A40EACD6-55FA-E6C2-2E19-813FE27FABF2}"/>
+              </a:ext>
+            </a:extLst>
+          </p:cNvPr>
+          <p:cNvSpPr>
+            <a:spLocks noGrp="1"/>
+          </p:cNvSpPr>
+          <p:nvPr>
+            <p:ph type="title"/>
+          </p:nvPr>
+        </p:nvSpPr>
+        <p:spPr/>
+        <p:txBody>
+          <a:bodyPr/>
+          <a:lstStyle/>
+          <a:p>
+            <a:r>
+              <a:rPr lang="es-GT" dirty="0"/>
+              <a:t>YA SE QUITO </a:t>
+            </a:r>
+          </a:p>
+        </p:txBody>
+      </p:sp>
+      <mc:AlternateContent xmlns:mc="http://schemas.openxmlformats.org/markup-compatibility/2006">
+        <mc:Choice xmlns:p14="http://schemas.microsoft.com/office/powerpoint/2010/main" Requires="p14">
+          <p:contentPart p14:bwMode="auto" r:id="rId2">
+            <p14:nvContentPartPr>
+              <p14:cNvPr id="3" name="Entrada de lápiz 2">
+                <a:extLst>
+                  <a:ext uri="{FF2B5EF4-FFF2-40B4-BE49-F238E27FC236}">
+                    <a16:creationId xmlns:a16="http://schemas.microsoft.com/office/drawing/2014/main" id="{3B16F12D-E9D7-1580-9727-BBFF26CC2D1D}"/>
+                  </a:ext>
+                </a:extLst>
+              </p14:cNvPr>
+              <p14:cNvContentPartPr/>
+              <p14:nvPr/>
+            </p14:nvContentPartPr>
+            <p14:xfrm>
+              <a:off x="3558794" y="4656268"/>
+              <a:ext cx="360" cy="360"/>
+            </p14:xfrm>
+          </p:contentPart>
+        </mc:Choice>
+        <mc:Fallback>
+          <p:pic>
+            <p:nvPicPr>
+              <p:cNvPr id="3" name="Entrada de lápiz 2">
+                <a:extLst>
+                  <a:ext uri="{FF2B5EF4-FFF2-40B4-BE49-F238E27FC236}">
+                    <a16:creationId xmlns:a16="http://schemas.microsoft.com/office/drawing/2014/main" id="{3B16F12D-E9D7-1580-9727-BBFF26CC2D1D}"/>
+                  </a:ext>
+                </a:extLst>
+              </p:cNvPr>
+              <p:cNvPicPr/>
+              <p:nvPr/>
+            </p:nvPicPr>
+            <p:blipFill>
+              <a:blip r:embed="rId3"/>
+              <a:stretch>
+                <a:fillRect/>
+              </a:stretch>
+            </p:blipFill>
+            <p:spPr>
+              <a:xfrm>
+                <a:off x="3504794" y="4548268"/>
+                <a:ext cx="108000" cy="216000"/>
+              </a:xfrm>
+              <a:prstGeom prst="rect">
+                <a:avLst/>
+              </a:prstGeom>
+            </p:spPr>
+          </p:pic>
+        </mc:Fallback>
+      </mc:AlternateContent>
+      <p:pic>
+        <p:nvPicPr>
+          <p:cNvPr id="5" name="Imagen 4">
+            <a:extLst>
+              <a:ext uri="{FF2B5EF4-FFF2-40B4-BE49-F238E27FC236}">
+                <a16:creationId xmlns:a16="http://schemas.microsoft.com/office/drawing/2014/main" id="{0E5E48B2-2A05-D1F2-B135-C1063A1C0CF9}"/>
+              </a:ext>
+            </a:extLst>
+          </p:cNvPr>
+          <p:cNvPicPr>
+            <a:picLocks noChangeAspect="1"/>
+          </p:cNvPicPr>
+          <p:nvPr/>
+        </p:nvPicPr>
+        <p:blipFill>
+          <a:blip r:embed="rId4"/>
+          <a:stretch>
+            <a:fillRect/>
+          </a:stretch>
+        </p:blipFill>
+        <p:spPr>
+          <a:xfrm>
+            <a:off x="1088606" y="2217709"/>
+            <a:ext cx="7763958" cy="3210373"/>
+          </a:xfrm>
+          <a:prstGeom prst="rect">
+            <a:avLst/>
+          </a:prstGeom>
+        </p:spPr>
+      </p:pic>
+    </p:spTree>
+    <p:extLst>
+      <p:ext uri="{BB962C8B-B14F-4D97-AF65-F5344CB8AC3E}">
+        <p14:creationId xmlns:p14="http://schemas.microsoft.com/office/powerpoint/2010/main" val="1472705066"/>
+      </p:ext>
+    </p:extLst>
+  </p:cSld>
+  <p:clrMapOvr>
+    <a:masterClrMapping/>
+  </p:clrMapOvr>
+</p:sld>
+</file>
+
+<file path=ppt/slides/slide59.xml><?xml version="1.0" encoding="utf-8"?>
+<p:sld xmlns:a="http://schemas.openxmlformats.org/drawingml/2006/main" xmlns:r="http://schemas.openxmlformats.org/officeDocument/2006/relationships" xmlns:p="http://schemas.openxmlformats.org/presentationml/2006/main">
+  <p:cSld>
+    <p:spTree>
+      <p:nvGrpSpPr>
+        <p:cNvPr id="1" name=""/>
+        <p:cNvGrpSpPr/>
+        <p:nvPr/>
+      </p:nvGrpSpPr>
+      <p:grpSpPr>
+        <a:xfrm>
+          <a:off x="0" y="0"/>
+          <a:ext cx="0" cy="0"/>
+          <a:chOff x="0" y="0"/>
+          <a:chExt cx="0" cy="0"/>
+        </a:xfrm>
+      </p:grpSpPr>
+      <p:sp>
+        <p:nvSpPr>
+          <p:cNvPr id="2" name="Título 1">
+            <a:extLst>
+              <a:ext uri="{FF2B5EF4-FFF2-40B4-BE49-F238E27FC236}">
+                <a16:creationId xmlns:a16="http://schemas.microsoft.com/office/drawing/2014/main" id="{81290B2E-71D2-BD81-BC7B-F0FB4D56695B}"/>
+              </a:ext>
+            </a:extLst>
+          </p:cNvPr>
+          <p:cNvSpPr>
+            <a:spLocks noGrp="1"/>
+          </p:cNvSpPr>
+          <p:nvPr>
+            <p:ph type="title"/>
+          </p:nvPr>
+        </p:nvSpPr>
+        <p:spPr/>
+        <p:txBody>
+          <a:bodyPr/>
+          <a:lstStyle/>
+          <a:p>
+            <a:r>
+              <a:rPr lang="es-GT" dirty="0"/>
+              <a:t>AHORA EL COMANDO WIPEOUT</a:t>
+            </a:r>
+          </a:p>
+        </p:txBody>
+      </p:sp>
+      <p:pic>
+        <p:nvPicPr>
+          <p:cNvPr id="4" name="Imagen 3">
+            <a:extLst>
+              <a:ext uri="{FF2B5EF4-FFF2-40B4-BE49-F238E27FC236}">
+                <a16:creationId xmlns:a16="http://schemas.microsoft.com/office/drawing/2014/main" id="{6D96D6FA-CB2A-E988-1B06-CE96BCF87482}"/>
+              </a:ext>
+            </a:extLst>
+          </p:cNvPr>
+          <p:cNvPicPr>
+            <a:picLocks noChangeAspect="1"/>
+          </p:cNvPicPr>
+          <p:nvPr/>
+        </p:nvPicPr>
+        <p:blipFill>
+          <a:blip r:embed="rId2"/>
+          <a:stretch>
+            <a:fillRect/>
+          </a:stretch>
+        </p:blipFill>
+        <p:spPr>
+          <a:xfrm>
+            <a:off x="1537230" y="2074592"/>
+            <a:ext cx="6754168" cy="3524742"/>
+          </a:xfrm>
+          <a:prstGeom prst="rect">
+            <a:avLst/>
+          </a:prstGeom>
+        </p:spPr>
+      </p:pic>
+    </p:spTree>
+    <p:extLst>
+      <p:ext uri="{BB962C8B-B14F-4D97-AF65-F5344CB8AC3E}">
+        <p14:creationId xmlns:p14="http://schemas.microsoft.com/office/powerpoint/2010/main" val="2418961040"/>
       </p:ext>
     </p:extLst>
   </p:cSld>
@@ -7699,6 +11486,843 @@
 </p:sld>
 </file>
 
+<file path=ppt/slides/slide60.xml><?xml version="1.0" encoding="utf-8"?>
+<p:sld xmlns:a="http://schemas.openxmlformats.org/drawingml/2006/main" xmlns:r="http://schemas.openxmlformats.org/officeDocument/2006/relationships" xmlns:p="http://schemas.openxmlformats.org/presentationml/2006/main">
+  <p:cSld>
+    <p:spTree>
+      <p:nvGrpSpPr>
+        <p:cNvPr id="1" name=""/>
+        <p:cNvGrpSpPr/>
+        <p:nvPr/>
+      </p:nvGrpSpPr>
+      <p:grpSpPr>
+        <a:xfrm>
+          <a:off x="0" y="0"/>
+          <a:ext cx="0" cy="0"/>
+          <a:chOff x="0" y="0"/>
+          <a:chExt cx="0" cy="0"/>
+        </a:xfrm>
+      </p:grpSpPr>
+      <p:sp>
+        <p:nvSpPr>
+          <p:cNvPr id="2" name="Título 1">
+            <a:extLst>
+              <a:ext uri="{FF2B5EF4-FFF2-40B4-BE49-F238E27FC236}">
+                <a16:creationId xmlns:a16="http://schemas.microsoft.com/office/drawing/2014/main" id="{118FAB17-9A1D-7FF7-6EFA-F987153AD569}"/>
+              </a:ext>
+            </a:extLst>
+          </p:cNvPr>
+          <p:cNvSpPr>
+            <a:spLocks noGrp="1"/>
+          </p:cNvSpPr>
+          <p:nvPr>
+            <p:ph type="title"/>
+          </p:nvPr>
+        </p:nvSpPr>
+        <p:spPr/>
+        <p:txBody>
+          <a:bodyPr/>
+          <a:lstStyle/>
+          <a:p>
+            <a:endParaRPr lang="es-GT"/>
+          </a:p>
+        </p:txBody>
+      </p:sp>
+      <p:pic>
+        <p:nvPicPr>
+          <p:cNvPr id="4" name="Imagen 3">
+            <a:extLst>
+              <a:ext uri="{FF2B5EF4-FFF2-40B4-BE49-F238E27FC236}">
+                <a16:creationId xmlns:a16="http://schemas.microsoft.com/office/drawing/2014/main" id="{201C850D-BBDE-5F0F-87EA-805E331F4C6C}"/>
+              </a:ext>
+            </a:extLst>
+          </p:cNvPr>
+          <p:cNvPicPr>
+            <a:picLocks noChangeAspect="1"/>
+          </p:cNvPicPr>
+          <p:nvPr/>
+        </p:nvPicPr>
+        <p:blipFill>
+          <a:blip r:embed="rId2"/>
+          <a:stretch>
+            <a:fillRect/>
+          </a:stretch>
+        </p:blipFill>
+        <p:spPr>
+          <a:xfrm>
+            <a:off x="297044" y="829342"/>
+            <a:ext cx="7079570" cy="5199315"/>
+          </a:xfrm>
+          <a:prstGeom prst="rect">
+            <a:avLst/>
+          </a:prstGeom>
+        </p:spPr>
+      </p:pic>
+      <p:sp>
+        <p:nvSpPr>
+          <p:cNvPr id="5" name="CuadroTexto 4">
+            <a:extLst>
+              <a:ext uri="{FF2B5EF4-FFF2-40B4-BE49-F238E27FC236}">
+                <a16:creationId xmlns:a16="http://schemas.microsoft.com/office/drawing/2014/main" id="{EA6E96A3-8D8C-FAA5-780D-173EAF8A4AB4}"/>
+              </a:ext>
+            </a:extLst>
+          </p:cNvPr>
+          <p:cNvSpPr txBox="1"/>
+          <p:nvPr/>
+        </p:nvSpPr>
+        <p:spPr>
+          <a:xfrm>
+            <a:off x="7906043" y="2588454"/>
+            <a:ext cx="2644726" cy="1200329"/>
+          </a:xfrm>
+          <a:prstGeom prst="rect">
+            <a:avLst/>
+          </a:prstGeom>
+          <a:noFill/>
+        </p:spPr>
+        <p:txBody>
+          <a:bodyPr wrap="square" rtlCol="0">
+            <a:spAutoFit/>
+          </a:bodyPr>
+          <a:lstStyle/>
+          <a:p>
+            <a:r>
+              <a:rPr lang="es-GT" dirty="0"/>
+              <a:t>LO SELECCIONAMOS, CLICK DERECHO Y LO MANDAMOS ATTRAS </a:t>
+            </a:r>
+          </a:p>
+          <a:p>
+            <a:endParaRPr lang="es-GT" dirty="0"/>
+          </a:p>
+        </p:txBody>
+      </p:sp>
+      <mc:AlternateContent xmlns:mc="http://schemas.openxmlformats.org/markup-compatibility/2006">
+        <mc:Choice xmlns:p14="http://schemas.microsoft.com/office/powerpoint/2010/main" Requires="p14">
+          <p:contentPart p14:bwMode="auto" r:id="rId3">
+            <p14:nvContentPartPr>
+              <p14:cNvPr id="6" name="Entrada de lápiz 5">
+                <a:extLst>
+                  <a:ext uri="{FF2B5EF4-FFF2-40B4-BE49-F238E27FC236}">
+                    <a16:creationId xmlns:a16="http://schemas.microsoft.com/office/drawing/2014/main" id="{910B2719-5D62-856C-713D-61F120B46204}"/>
+                  </a:ext>
+                </a:extLst>
+              </p14:cNvPr>
+              <p14:cNvContentPartPr/>
+              <p14:nvPr/>
+            </p14:nvContentPartPr>
+            <p14:xfrm>
+              <a:off x="4177634" y="3466108"/>
+              <a:ext cx="768600" cy="23760"/>
+            </p14:xfrm>
+          </p:contentPart>
+        </mc:Choice>
+        <mc:Fallback>
+          <p:pic>
+            <p:nvPicPr>
+              <p:cNvPr id="6" name="Entrada de lápiz 5">
+                <a:extLst>
+                  <a:ext uri="{FF2B5EF4-FFF2-40B4-BE49-F238E27FC236}">
+                    <a16:creationId xmlns:a16="http://schemas.microsoft.com/office/drawing/2014/main" id="{910B2719-5D62-856C-713D-61F120B46204}"/>
+                  </a:ext>
+                </a:extLst>
+              </p:cNvPr>
+              <p:cNvPicPr/>
+              <p:nvPr/>
+            </p:nvPicPr>
+            <p:blipFill>
+              <a:blip r:embed="rId4"/>
+              <a:stretch>
+                <a:fillRect/>
+              </a:stretch>
+            </p:blipFill>
+            <p:spPr>
+              <a:xfrm>
+                <a:off x="4123634" y="3358468"/>
+                <a:ext cx="876240" cy="239400"/>
+              </a:xfrm>
+              <a:prstGeom prst="rect">
+                <a:avLst/>
+              </a:prstGeom>
+            </p:spPr>
+          </p:pic>
+        </mc:Fallback>
+      </mc:AlternateContent>
+      <mc:AlternateContent xmlns:mc="http://schemas.openxmlformats.org/markup-compatibility/2006">
+        <mc:Choice xmlns:p14="http://schemas.microsoft.com/office/powerpoint/2010/main" Requires="p14">
+          <p:contentPart p14:bwMode="auto" r:id="rId5">
+            <p14:nvContentPartPr>
+              <p14:cNvPr id="7" name="Entrada de lápiz 6">
+                <a:extLst>
+                  <a:ext uri="{FF2B5EF4-FFF2-40B4-BE49-F238E27FC236}">
+                    <a16:creationId xmlns:a16="http://schemas.microsoft.com/office/drawing/2014/main" id="{F35FD8E9-0D29-0347-80BC-095EC587CF46}"/>
+                  </a:ext>
+                </a:extLst>
+              </p14:cNvPr>
+              <p14:cNvContentPartPr/>
+              <p14:nvPr/>
+            </p14:nvContentPartPr>
+            <p14:xfrm>
+              <a:off x="5514314" y="3699748"/>
+              <a:ext cx="1418040" cy="181080"/>
+            </p14:xfrm>
+          </p:contentPart>
+        </mc:Choice>
+        <mc:Fallback>
+          <p:pic>
+            <p:nvPicPr>
+              <p:cNvPr id="7" name="Entrada de lápiz 6">
+                <a:extLst>
+                  <a:ext uri="{FF2B5EF4-FFF2-40B4-BE49-F238E27FC236}">
+                    <a16:creationId xmlns:a16="http://schemas.microsoft.com/office/drawing/2014/main" id="{F35FD8E9-0D29-0347-80BC-095EC587CF46}"/>
+                  </a:ext>
+                </a:extLst>
+              </p:cNvPr>
+              <p:cNvPicPr/>
+              <p:nvPr/>
+            </p:nvPicPr>
+            <p:blipFill>
+              <a:blip r:embed="rId6"/>
+              <a:stretch>
+                <a:fillRect/>
+              </a:stretch>
+            </p:blipFill>
+            <p:spPr>
+              <a:xfrm>
+                <a:off x="5460314" y="3591748"/>
+                <a:ext cx="1525680" cy="396720"/>
+              </a:xfrm>
+              <a:prstGeom prst="rect">
+                <a:avLst/>
+              </a:prstGeom>
+            </p:spPr>
+          </p:pic>
+        </mc:Fallback>
+      </mc:AlternateContent>
+    </p:spTree>
+    <p:extLst>
+      <p:ext uri="{BB962C8B-B14F-4D97-AF65-F5344CB8AC3E}">
+        <p14:creationId xmlns:p14="http://schemas.microsoft.com/office/powerpoint/2010/main" val="2206237519"/>
+      </p:ext>
+    </p:extLst>
+  </p:cSld>
+  <p:clrMapOvr>
+    <a:masterClrMapping/>
+  </p:clrMapOvr>
+</p:sld>
+</file>
+
+<file path=ppt/slides/slide61.xml><?xml version="1.0" encoding="utf-8"?>
+<p:sld xmlns:a="http://schemas.openxmlformats.org/drawingml/2006/main" xmlns:r="http://schemas.openxmlformats.org/officeDocument/2006/relationships" xmlns:p="http://schemas.openxmlformats.org/presentationml/2006/main">
+  <p:cSld>
+    <p:spTree>
+      <p:nvGrpSpPr>
+        <p:cNvPr id="1" name=""/>
+        <p:cNvGrpSpPr/>
+        <p:nvPr/>
+      </p:nvGrpSpPr>
+      <p:grpSpPr>
+        <a:xfrm>
+          <a:off x="0" y="0"/>
+          <a:ext cx="0" cy="0"/>
+          <a:chOff x="0" y="0"/>
+          <a:chExt cx="0" cy="0"/>
+        </a:xfrm>
+      </p:grpSpPr>
+      <p:sp>
+        <p:nvSpPr>
+          <p:cNvPr id="2" name="Título 1">
+            <a:extLst>
+              <a:ext uri="{FF2B5EF4-FFF2-40B4-BE49-F238E27FC236}">
+                <a16:creationId xmlns:a16="http://schemas.microsoft.com/office/drawing/2014/main" id="{95C18A5E-153B-F442-9116-9706499BF1C2}"/>
+              </a:ext>
+            </a:extLst>
+          </p:cNvPr>
+          <p:cNvSpPr>
+            <a:spLocks noGrp="1"/>
+          </p:cNvSpPr>
+          <p:nvPr>
+            <p:ph type="title"/>
+          </p:nvPr>
+        </p:nvSpPr>
+        <p:spPr/>
+        <p:txBody>
+          <a:bodyPr/>
+          <a:lstStyle/>
+          <a:p>
+            <a:r>
+              <a:rPr lang="es-GT" dirty="0"/>
+              <a:t>AHORA HACEMOS OTRA VEZ EL STRECH PARA INCLUIR EL WIPOUT</a:t>
+            </a:r>
+          </a:p>
+        </p:txBody>
+      </p:sp>
+      <mc:AlternateContent xmlns:mc="http://schemas.openxmlformats.org/markup-compatibility/2006">
+        <mc:Choice xmlns:p14="http://schemas.microsoft.com/office/powerpoint/2010/main" Requires="p14">
+          <p:contentPart p14:bwMode="auto" r:id="rId2">
+            <p14:nvContentPartPr>
+              <p14:cNvPr id="3" name="Entrada de lápiz 2">
+                <a:extLst>
+                  <a:ext uri="{FF2B5EF4-FFF2-40B4-BE49-F238E27FC236}">
+                    <a16:creationId xmlns:a16="http://schemas.microsoft.com/office/drawing/2014/main" id="{08665AB5-ED89-4A24-2879-1DB3A94E0A0D}"/>
+                  </a:ext>
+                </a:extLst>
+              </p14:cNvPr>
+              <p14:cNvContentPartPr/>
+              <p14:nvPr/>
+            </p14:nvContentPartPr>
+            <p14:xfrm>
+              <a:off x="3573194" y="1003708"/>
+              <a:ext cx="360" cy="23040"/>
+            </p14:xfrm>
+          </p:contentPart>
+        </mc:Choice>
+        <mc:Fallback>
+          <p:pic>
+            <p:nvPicPr>
+              <p:cNvPr id="3" name="Entrada de lápiz 2">
+                <a:extLst>
+                  <a:ext uri="{FF2B5EF4-FFF2-40B4-BE49-F238E27FC236}">
+                    <a16:creationId xmlns:a16="http://schemas.microsoft.com/office/drawing/2014/main" id="{08665AB5-ED89-4A24-2879-1DB3A94E0A0D}"/>
+                  </a:ext>
+                </a:extLst>
+              </p:cNvPr>
+              <p:cNvPicPr/>
+              <p:nvPr/>
+            </p:nvPicPr>
+            <p:blipFill>
+              <a:blip r:embed="rId3"/>
+              <a:stretch>
+                <a:fillRect/>
+              </a:stretch>
+            </p:blipFill>
+            <p:spPr>
+              <a:xfrm>
+                <a:off x="3519194" y="895708"/>
+                <a:ext cx="108000" cy="238680"/>
+              </a:xfrm>
+              <a:prstGeom prst="rect">
+                <a:avLst/>
+              </a:prstGeom>
+            </p:spPr>
+          </p:pic>
+        </mc:Fallback>
+      </mc:AlternateContent>
+      <p:pic>
+        <p:nvPicPr>
+          <p:cNvPr id="5" name="Imagen 4">
+            <a:extLst>
+              <a:ext uri="{FF2B5EF4-FFF2-40B4-BE49-F238E27FC236}">
+                <a16:creationId xmlns:a16="http://schemas.microsoft.com/office/drawing/2014/main" id="{C65AA689-C6B8-D5D2-4209-757AE587587F}"/>
+              </a:ext>
+            </a:extLst>
+          </p:cNvPr>
+          <p:cNvPicPr>
+            <a:picLocks noChangeAspect="1"/>
+          </p:cNvPicPr>
+          <p:nvPr/>
+        </p:nvPicPr>
+        <p:blipFill>
+          <a:blip r:embed="rId4"/>
+          <a:stretch>
+            <a:fillRect/>
+          </a:stretch>
+        </p:blipFill>
+        <p:spPr>
+          <a:xfrm>
+            <a:off x="1819027" y="2329271"/>
+            <a:ext cx="7926214" cy="3371178"/>
+          </a:xfrm>
+          <a:prstGeom prst="rect">
+            <a:avLst/>
+          </a:prstGeom>
+        </p:spPr>
+      </p:pic>
+    </p:spTree>
+    <p:extLst>
+      <p:ext uri="{BB962C8B-B14F-4D97-AF65-F5344CB8AC3E}">
+        <p14:creationId xmlns:p14="http://schemas.microsoft.com/office/powerpoint/2010/main" val="2990159786"/>
+      </p:ext>
+    </p:extLst>
+  </p:cSld>
+  <p:clrMapOvr>
+    <a:masterClrMapping/>
+  </p:clrMapOvr>
+</p:sld>
+</file>
+
+<file path=ppt/slides/slide62.xml><?xml version="1.0" encoding="utf-8"?>
+<p:sld xmlns:a="http://schemas.openxmlformats.org/drawingml/2006/main" xmlns:r="http://schemas.openxmlformats.org/officeDocument/2006/relationships" xmlns:p="http://schemas.openxmlformats.org/presentationml/2006/main">
+  <p:cSld>
+    <p:spTree>
+      <p:nvGrpSpPr>
+        <p:cNvPr id="1" name=""/>
+        <p:cNvGrpSpPr/>
+        <p:nvPr/>
+      </p:nvGrpSpPr>
+      <p:grpSpPr>
+        <a:xfrm>
+          <a:off x="0" y="0"/>
+          <a:ext cx="0" cy="0"/>
+          <a:chOff x="0" y="0"/>
+          <a:chExt cx="0" cy="0"/>
+        </a:xfrm>
+      </p:grpSpPr>
+      <p:sp>
+        <p:nvSpPr>
+          <p:cNvPr id="2" name="Título 1">
+            <a:extLst>
+              <a:ext uri="{FF2B5EF4-FFF2-40B4-BE49-F238E27FC236}">
+                <a16:creationId xmlns:a16="http://schemas.microsoft.com/office/drawing/2014/main" id="{3927E706-9131-1E4C-7635-4F6B57719C86}"/>
+              </a:ext>
+            </a:extLst>
+          </p:cNvPr>
+          <p:cNvSpPr>
+            <a:spLocks noGrp="1"/>
+          </p:cNvSpPr>
+          <p:nvPr>
+            <p:ph type="title"/>
+          </p:nvPr>
+        </p:nvSpPr>
+        <p:spPr/>
+        <p:txBody>
+          <a:bodyPr/>
+          <a:lstStyle/>
+          <a:p>
+            <a:r>
+              <a:rPr lang="es-GT" dirty="0"/>
+              <a:t>ENTER Y CLOSE </a:t>
+            </a:r>
+          </a:p>
+        </p:txBody>
+      </p:sp>
+      <p:pic>
+        <p:nvPicPr>
+          <p:cNvPr id="4" name="Imagen 3">
+            <a:extLst>
+              <a:ext uri="{FF2B5EF4-FFF2-40B4-BE49-F238E27FC236}">
+                <a16:creationId xmlns:a16="http://schemas.microsoft.com/office/drawing/2014/main" id="{17587BDA-98C8-5429-9E5B-6D234982A13E}"/>
+              </a:ext>
+            </a:extLst>
+          </p:cNvPr>
+          <p:cNvPicPr>
+            <a:picLocks noChangeAspect="1"/>
+          </p:cNvPicPr>
+          <p:nvPr/>
+        </p:nvPicPr>
+        <p:blipFill>
+          <a:blip r:embed="rId2"/>
+          <a:stretch>
+            <a:fillRect/>
+          </a:stretch>
+        </p:blipFill>
+        <p:spPr>
+          <a:xfrm>
+            <a:off x="2142712" y="1316034"/>
+            <a:ext cx="5186556" cy="4892212"/>
+          </a:xfrm>
+          <a:prstGeom prst="rect">
+            <a:avLst/>
+          </a:prstGeom>
+        </p:spPr>
+      </p:pic>
+    </p:spTree>
+    <p:extLst>
+      <p:ext uri="{BB962C8B-B14F-4D97-AF65-F5344CB8AC3E}">
+        <p14:creationId xmlns:p14="http://schemas.microsoft.com/office/powerpoint/2010/main" val="1708716749"/>
+      </p:ext>
+    </p:extLst>
+  </p:cSld>
+  <p:clrMapOvr>
+    <a:masterClrMapping/>
+  </p:clrMapOvr>
+</p:sld>
+</file>
+
+<file path=ppt/slides/slide63.xml><?xml version="1.0" encoding="utf-8"?>
+<p:sld xmlns:a="http://schemas.openxmlformats.org/drawingml/2006/main" xmlns:r="http://schemas.openxmlformats.org/officeDocument/2006/relationships" xmlns:p="http://schemas.openxmlformats.org/presentationml/2006/main">
+  <p:cSld>
+    <p:spTree>
+      <p:nvGrpSpPr>
+        <p:cNvPr id="1" name=""/>
+        <p:cNvGrpSpPr/>
+        <p:nvPr/>
+      </p:nvGrpSpPr>
+      <p:grpSpPr>
+        <a:xfrm>
+          <a:off x="0" y="0"/>
+          <a:ext cx="0" cy="0"/>
+          <a:chOff x="0" y="0"/>
+          <a:chExt cx="0" cy="0"/>
+        </a:xfrm>
+      </p:grpSpPr>
+      <p:sp>
+        <p:nvSpPr>
+          <p:cNvPr id="2" name="Título 1">
+            <a:extLst>
+              <a:ext uri="{FF2B5EF4-FFF2-40B4-BE49-F238E27FC236}">
+                <a16:creationId xmlns:a16="http://schemas.microsoft.com/office/drawing/2014/main" id="{D7AC6786-583C-12A4-597D-0DEBCA209312}"/>
+              </a:ext>
+            </a:extLst>
+          </p:cNvPr>
+          <p:cNvSpPr>
+            <a:spLocks noGrp="1"/>
+          </p:cNvSpPr>
+          <p:nvPr>
+            <p:ph type="title"/>
+          </p:nvPr>
+        </p:nvSpPr>
+        <p:spPr/>
+        <p:txBody>
+          <a:bodyPr/>
+          <a:lstStyle/>
+          <a:p>
+            <a:endParaRPr lang="es-GT"/>
+          </a:p>
+        </p:txBody>
+      </p:sp>
+    </p:spTree>
+    <p:extLst>
+      <p:ext uri="{BB962C8B-B14F-4D97-AF65-F5344CB8AC3E}">
+        <p14:creationId xmlns:p14="http://schemas.microsoft.com/office/powerpoint/2010/main" val="2300353400"/>
+      </p:ext>
+    </p:extLst>
+  </p:cSld>
+  <p:clrMapOvr>
+    <a:masterClrMapping/>
+  </p:clrMapOvr>
+</p:sld>
+</file>
+
+<file path=ppt/slides/slide64.xml><?xml version="1.0" encoding="utf-8"?>
+<p:sld xmlns:a="http://schemas.openxmlformats.org/drawingml/2006/main" xmlns:r="http://schemas.openxmlformats.org/officeDocument/2006/relationships" xmlns:p="http://schemas.openxmlformats.org/presentationml/2006/main">
+  <p:cSld>
+    <p:spTree>
+      <p:nvGrpSpPr>
+        <p:cNvPr id="1" name=""/>
+        <p:cNvGrpSpPr/>
+        <p:nvPr/>
+      </p:nvGrpSpPr>
+      <p:grpSpPr>
+        <a:xfrm>
+          <a:off x="0" y="0"/>
+          <a:ext cx="0" cy="0"/>
+          <a:chOff x="0" y="0"/>
+          <a:chExt cx="0" cy="0"/>
+        </a:xfrm>
+      </p:grpSpPr>
+      <p:sp>
+        <p:nvSpPr>
+          <p:cNvPr id="2" name="Título 1">
+            <a:extLst>
+              <a:ext uri="{FF2B5EF4-FFF2-40B4-BE49-F238E27FC236}">
+                <a16:creationId xmlns:a16="http://schemas.microsoft.com/office/drawing/2014/main" id="{17B07655-7365-89CF-0FA1-395BDA1FF5EE}"/>
+              </a:ext>
+            </a:extLst>
+          </p:cNvPr>
+          <p:cNvSpPr>
+            <a:spLocks noGrp="1"/>
+          </p:cNvSpPr>
+          <p:nvPr>
+            <p:ph type="title"/>
+          </p:nvPr>
+        </p:nvSpPr>
+        <p:spPr/>
+        <p:txBody>
+          <a:bodyPr/>
+          <a:lstStyle/>
+          <a:p>
+            <a:endParaRPr lang="es-GT"/>
+          </a:p>
+        </p:txBody>
+      </p:sp>
+    </p:spTree>
+    <p:extLst>
+      <p:ext uri="{BB962C8B-B14F-4D97-AF65-F5344CB8AC3E}">
+        <p14:creationId xmlns:p14="http://schemas.microsoft.com/office/powerpoint/2010/main" val="2457209543"/>
+      </p:ext>
+    </p:extLst>
+  </p:cSld>
+  <p:clrMapOvr>
+    <a:masterClrMapping/>
+  </p:clrMapOvr>
+</p:sld>
+</file>
+
+<file path=ppt/slides/slide65.xml><?xml version="1.0" encoding="utf-8"?>
+<p:sld xmlns:a="http://schemas.openxmlformats.org/drawingml/2006/main" xmlns:r="http://schemas.openxmlformats.org/officeDocument/2006/relationships" xmlns:p="http://schemas.openxmlformats.org/presentationml/2006/main">
+  <p:cSld>
+    <p:spTree>
+      <p:nvGrpSpPr>
+        <p:cNvPr id="1" name=""/>
+        <p:cNvGrpSpPr/>
+        <p:nvPr/>
+      </p:nvGrpSpPr>
+      <p:grpSpPr>
+        <a:xfrm>
+          <a:off x="0" y="0"/>
+          <a:ext cx="0" cy="0"/>
+          <a:chOff x="0" y="0"/>
+          <a:chExt cx="0" cy="0"/>
+        </a:xfrm>
+      </p:grpSpPr>
+      <p:sp>
+        <p:nvSpPr>
+          <p:cNvPr id="2" name="Título 1">
+            <a:extLst>
+              <a:ext uri="{FF2B5EF4-FFF2-40B4-BE49-F238E27FC236}">
+                <a16:creationId xmlns:a16="http://schemas.microsoft.com/office/drawing/2014/main" id="{86D5D456-CF77-454A-597F-925CCAD05833}"/>
+              </a:ext>
+            </a:extLst>
+          </p:cNvPr>
+          <p:cNvSpPr>
+            <a:spLocks noGrp="1"/>
+          </p:cNvSpPr>
+          <p:nvPr>
+            <p:ph type="title"/>
+          </p:nvPr>
+        </p:nvSpPr>
+        <p:spPr/>
+        <p:txBody>
+          <a:bodyPr/>
+          <a:lstStyle/>
+          <a:p>
+            <a:endParaRPr lang="es-GT"/>
+          </a:p>
+        </p:txBody>
+      </p:sp>
+    </p:spTree>
+    <p:extLst>
+      <p:ext uri="{BB962C8B-B14F-4D97-AF65-F5344CB8AC3E}">
+        <p14:creationId xmlns:p14="http://schemas.microsoft.com/office/powerpoint/2010/main" val="3934949120"/>
+      </p:ext>
+    </p:extLst>
+  </p:cSld>
+  <p:clrMapOvr>
+    <a:masterClrMapping/>
+  </p:clrMapOvr>
+</p:sld>
+</file>
+
+<file path=ppt/slides/slide66.xml><?xml version="1.0" encoding="utf-8"?>
+<p:sld xmlns:a="http://schemas.openxmlformats.org/drawingml/2006/main" xmlns:r="http://schemas.openxmlformats.org/officeDocument/2006/relationships" xmlns:p="http://schemas.openxmlformats.org/presentationml/2006/main">
+  <p:cSld>
+    <p:spTree>
+      <p:nvGrpSpPr>
+        <p:cNvPr id="1" name=""/>
+        <p:cNvGrpSpPr/>
+        <p:nvPr/>
+      </p:nvGrpSpPr>
+      <p:grpSpPr>
+        <a:xfrm>
+          <a:off x="0" y="0"/>
+          <a:ext cx="0" cy="0"/>
+          <a:chOff x="0" y="0"/>
+          <a:chExt cx="0" cy="0"/>
+        </a:xfrm>
+      </p:grpSpPr>
+      <p:sp>
+        <p:nvSpPr>
+          <p:cNvPr id="2" name="Título 1">
+            <a:extLst>
+              <a:ext uri="{FF2B5EF4-FFF2-40B4-BE49-F238E27FC236}">
+                <a16:creationId xmlns:a16="http://schemas.microsoft.com/office/drawing/2014/main" id="{FBD3E8DE-74E7-B8B9-2EB8-AA031DF33F66}"/>
+              </a:ext>
+            </a:extLst>
+          </p:cNvPr>
+          <p:cNvSpPr>
+            <a:spLocks noGrp="1"/>
+          </p:cNvSpPr>
+          <p:nvPr>
+            <p:ph type="title"/>
+          </p:nvPr>
+        </p:nvSpPr>
+        <p:spPr/>
+        <p:txBody>
+          <a:bodyPr/>
+          <a:lstStyle/>
+          <a:p>
+            <a:endParaRPr lang="es-GT"/>
+          </a:p>
+        </p:txBody>
+      </p:sp>
+    </p:spTree>
+    <p:extLst>
+      <p:ext uri="{BB962C8B-B14F-4D97-AF65-F5344CB8AC3E}">
+        <p14:creationId xmlns:p14="http://schemas.microsoft.com/office/powerpoint/2010/main" val="98101679"/>
+      </p:ext>
+    </p:extLst>
+  </p:cSld>
+  <p:clrMapOvr>
+    <a:masterClrMapping/>
+  </p:clrMapOvr>
+</p:sld>
+</file>
+
+<file path=ppt/slides/slide67.xml><?xml version="1.0" encoding="utf-8"?>
+<p:sld xmlns:a="http://schemas.openxmlformats.org/drawingml/2006/main" xmlns:r="http://schemas.openxmlformats.org/officeDocument/2006/relationships" xmlns:p="http://schemas.openxmlformats.org/presentationml/2006/main">
+  <p:cSld>
+    <p:spTree>
+      <p:nvGrpSpPr>
+        <p:cNvPr id="1" name=""/>
+        <p:cNvGrpSpPr/>
+        <p:nvPr/>
+      </p:nvGrpSpPr>
+      <p:grpSpPr>
+        <a:xfrm>
+          <a:off x="0" y="0"/>
+          <a:ext cx="0" cy="0"/>
+          <a:chOff x="0" y="0"/>
+          <a:chExt cx="0" cy="0"/>
+        </a:xfrm>
+      </p:grpSpPr>
+      <p:sp>
+        <p:nvSpPr>
+          <p:cNvPr id="2" name="Título 1">
+            <a:extLst>
+              <a:ext uri="{FF2B5EF4-FFF2-40B4-BE49-F238E27FC236}">
+                <a16:creationId xmlns:a16="http://schemas.microsoft.com/office/drawing/2014/main" id="{5506CDA4-BE88-5C28-0644-7B1178ED7D59}"/>
+              </a:ext>
+            </a:extLst>
+          </p:cNvPr>
+          <p:cNvSpPr>
+            <a:spLocks noGrp="1"/>
+          </p:cNvSpPr>
+          <p:nvPr>
+            <p:ph type="title"/>
+          </p:nvPr>
+        </p:nvSpPr>
+        <p:spPr/>
+        <p:txBody>
+          <a:bodyPr/>
+          <a:lstStyle/>
+          <a:p>
+            <a:endParaRPr lang="es-GT"/>
+          </a:p>
+        </p:txBody>
+      </p:sp>
+    </p:spTree>
+    <p:extLst>
+      <p:ext uri="{BB962C8B-B14F-4D97-AF65-F5344CB8AC3E}">
+        <p14:creationId xmlns:p14="http://schemas.microsoft.com/office/powerpoint/2010/main" val="287840022"/>
+      </p:ext>
+    </p:extLst>
+  </p:cSld>
+  <p:clrMapOvr>
+    <a:masterClrMapping/>
+  </p:clrMapOvr>
+</p:sld>
+</file>
+
+<file path=ppt/slides/slide68.xml><?xml version="1.0" encoding="utf-8"?>
+<p:sld xmlns:a="http://schemas.openxmlformats.org/drawingml/2006/main" xmlns:r="http://schemas.openxmlformats.org/officeDocument/2006/relationships" xmlns:p="http://schemas.openxmlformats.org/presentationml/2006/main">
+  <p:cSld>
+    <p:spTree>
+      <p:nvGrpSpPr>
+        <p:cNvPr id="1" name=""/>
+        <p:cNvGrpSpPr/>
+        <p:nvPr/>
+      </p:nvGrpSpPr>
+      <p:grpSpPr>
+        <a:xfrm>
+          <a:off x="0" y="0"/>
+          <a:ext cx="0" cy="0"/>
+          <a:chOff x="0" y="0"/>
+          <a:chExt cx="0" cy="0"/>
+        </a:xfrm>
+      </p:grpSpPr>
+      <p:sp>
+        <p:nvSpPr>
+          <p:cNvPr id="2" name="Título 1">
+            <a:extLst>
+              <a:ext uri="{FF2B5EF4-FFF2-40B4-BE49-F238E27FC236}">
+                <a16:creationId xmlns:a16="http://schemas.microsoft.com/office/drawing/2014/main" id="{8E8094F2-D8C5-AD01-6420-01A2FCA93E5D}"/>
+              </a:ext>
+            </a:extLst>
+          </p:cNvPr>
+          <p:cNvSpPr>
+            <a:spLocks noGrp="1"/>
+          </p:cNvSpPr>
+          <p:nvPr>
+            <p:ph type="title"/>
+          </p:nvPr>
+        </p:nvSpPr>
+        <p:spPr/>
+        <p:txBody>
+          <a:bodyPr/>
+          <a:lstStyle/>
+          <a:p>
+            <a:endParaRPr lang="es-GT"/>
+          </a:p>
+        </p:txBody>
+      </p:sp>
+    </p:spTree>
+    <p:extLst>
+      <p:ext uri="{BB962C8B-B14F-4D97-AF65-F5344CB8AC3E}">
+        <p14:creationId xmlns:p14="http://schemas.microsoft.com/office/powerpoint/2010/main" val="394983608"/>
+      </p:ext>
+    </p:extLst>
+  </p:cSld>
+  <p:clrMapOvr>
+    <a:masterClrMapping/>
+  </p:clrMapOvr>
+</p:sld>
+</file>
+
+<file path=ppt/slides/slide69.xml><?xml version="1.0" encoding="utf-8"?>
+<p:sld xmlns:a="http://schemas.openxmlformats.org/drawingml/2006/main" xmlns:r="http://schemas.openxmlformats.org/officeDocument/2006/relationships" xmlns:p="http://schemas.openxmlformats.org/presentationml/2006/main">
+  <p:cSld>
+    <p:spTree>
+      <p:nvGrpSpPr>
+        <p:cNvPr id="1" name=""/>
+        <p:cNvGrpSpPr/>
+        <p:nvPr/>
+      </p:nvGrpSpPr>
+      <p:grpSpPr>
+        <a:xfrm>
+          <a:off x="0" y="0"/>
+          <a:ext cx="0" cy="0"/>
+          <a:chOff x="0" y="0"/>
+          <a:chExt cx="0" cy="0"/>
+        </a:xfrm>
+      </p:grpSpPr>
+      <p:sp>
+        <p:nvSpPr>
+          <p:cNvPr id="2" name="Título 1">
+            <a:extLst>
+              <a:ext uri="{FF2B5EF4-FFF2-40B4-BE49-F238E27FC236}">
+                <a16:creationId xmlns:a16="http://schemas.microsoft.com/office/drawing/2014/main" id="{1C509C3F-F87B-A99A-879D-8547DBA86514}"/>
+              </a:ext>
+            </a:extLst>
+          </p:cNvPr>
+          <p:cNvSpPr>
+            <a:spLocks noGrp="1"/>
+          </p:cNvSpPr>
+          <p:nvPr>
+            <p:ph type="title"/>
+          </p:nvPr>
+        </p:nvSpPr>
+        <p:spPr/>
+        <p:txBody>
+          <a:bodyPr/>
+          <a:lstStyle/>
+          <a:p>
+            <a:endParaRPr lang="es-GT"/>
+          </a:p>
+        </p:txBody>
+      </p:sp>
+    </p:spTree>
+    <p:extLst>
+      <p:ext uri="{BB962C8B-B14F-4D97-AF65-F5344CB8AC3E}">
+        <p14:creationId xmlns:p14="http://schemas.microsoft.com/office/powerpoint/2010/main" val="2935884083"/>
+      </p:ext>
+    </p:extLst>
+  </p:cSld>
+  <p:clrMapOvr>
+    <a:masterClrMapping/>
+  </p:clrMapOvr>
+</p:sld>
+</file>
+
 <file path=ppt/slides/slide7.xml><?xml version="1.0" encoding="utf-8"?>
 <p:sld xmlns:a="http://schemas.openxmlformats.org/drawingml/2006/main" xmlns:r="http://schemas.openxmlformats.org/officeDocument/2006/relationships" xmlns:p="http://schemas.openxmlformats.org/presentationml/2006/main">
   <p:cSld>
@@ -7775,6 +12399,226 @@
     <p:extLst>
       <p:ext uri="{BB962C8B-B14F-4D97-AF65-F5344CB8AC3E}">
         <p14:creationId xmlns:p14="http://schemas.microsoft.com/office/powerpoint/2010/main" val="2954650829"/>
+      </p:ext>
+    </p:extLst>
+  </p:cSld>
+  <p:clrMapOvr>
+    <a:masterClrMapping/>
+  </p:clrMapOvr>
+</p:sld>
+</file>
+
+<file path=ppt/slides/slide70.xml><?xml version="1.0" encoding="utf-8"?>
+<p:sld xmlns:a="http://schemas.openxmlformats.org/drawingml/2006/main" xmlns:r="http://schemas.openxmlformats.org/officeDocument/2006/relationships" xmlns:p="http://schemas.openxmlformats.org/presentationml/2006/main">
+  <p:cSld>
+    <p:spTree>
+      <p:nvGrpSpPr>
+        <p:cNvPr id="1" name=""/>
+        <p:cNvGrpSpPr/>
+        <p:nvPr/>
+      </p:nvGrpSpPr>
+      <p:grpSpPr>
+        <a:xfrm>
+          <a:off x="0" y="0"/>
+          <a:ext cx="0" cy="0"/>
+          <a:chOff x="0" y="0"/>
+          <a:chExt cx="0" cy="0"/>
+        </a:xfrm>
+      </p:grpSpPr>
+      <p:sp>
+        <p:nvSpPr>
+          <p:cNvPr id="2" name="Título 1">
+            <a:extLst>
+              <a:ext uri="{FF2B5EF4-FFF2-40B4-BE49-F238E27FC236}">
+                <a16:creationId xmlns:a16="http://schemas.microsoft.com/office/drawing/2014/main" id="{4FD3BFDF-9FCC-8D8D-ED25-B0EDA7D1123C}"/>
+              </a:ext>
+            </a:extLst>
+          </p:cNvPr>
+          <p:cNvSpPr>
+            <a:spLocks noGrp="1"/>
+          </p:cNvSpPr>
+          <p:nvPr>
+            <p:ph type="title"/>
+          </p:nvPr>
+        </p:nvSpPr>
+        <p:spPr/>
+        <p:txBody>
+          <a:bodyPr/>
+          <a:lstStyle/>
+          <a:p>
+            <a:endParaRPr lang="es-GT"/>
+          </a:p>
+        </p:txBody>
+      </p:sp>
+    </p:spTree>
+    <p:extLst>
+      <p:ext uri="{BB962C8B-B14F-4D97-AF65-F5344CB8AC3E}">
+        <p14:creationId xmlns:p14="http://schemas.microsoft.com/office/powerpoint/2010/main" val="1363416865"/>
+      </p:ext>
+    </p:extLst>
+  </p:cSld>
+  <p:clrMapOvr>
+    <a:masterClrMapping/>
+  </p:clrMapOvr>
+</p:sld>
+</file>
+
+<file path=ppt/slides/slide71.xml><?xml version="1.0" encoding="utf-8"?>
+<p:sld xmlns:a="http://schemas.openxmlformats.org/drawingml/2006/main" xmlns:r="http://schemas.openxmlformats.org/officeDocument/2006/relationships" xmlns:p="http://schemas.openxmlformats.org/presentationml/2006/main">
+  <p:cSld>
+    <p:spTree>
+      <p:nvGrpSpPr>
+        <p:cNvPr id="1" name=""/>
+        <p:cNvGrpSpPr/>
+        <p:nvPr/>
+      </p:nvGrpSpPr>
+      <p:grpSpPr>
+        <a:xfrm>
+          <a:off x="0" y="0"/>
+          <a:ext cx="0" cy="0"/>
+          <a:chOff x="0" y="0"/>
+          <a:chExt cx="0" cy="0"/>
+        </a:xfrm>
+      </p:grpSpPr>
+      <p:sp>
+        <p:nvSpPr>
+          <p:cNvPr id="2" name="Título 1">
+            <a:extLst>
+              <a:ext uri="{FF2B5EF4-FFF2-40B4-BE49-F238E27FC236}">
+                <a16:creationId xmlns:a16="http://schemas.microsoft.com/office/drawing/2014/main" id="{98ECB0CE-B0B5-10D8-F00B-B6EA2A4FFE8D}"/>
+              </a:ext>
+            </a:extLst>
+          </p:cNvPr>
+          <p:cNvSpPr>
+            <a:spLocks noGrp="1"/>
+          </p:cNvSpPr>
+          <p:nvPr>
+            <p:ph type="title"/>
+          </p:nvPr>
+        </p:nvSpPr>
+        <p:spPr/>
+        <p:txBody>
+          <a:bodyPr/>
+          <a:lstStyle/>
+          <a:p>
+            <a:endParaRPr lang="es-GT"/>
+          </a:p>
+        </p:txBody>
+      </p:sp>
+    </p:spTree>
+    <p:extLst>
+      <p:ext uri="{BB962C8B-B14F-4D97-AF65-F5344CB8AC3E}">
+        <p14:creationId xmlns:p14="http://schemas.microsoft.com/office/powerpoint/2010/main" val="123172610"/>
+      </p:ext>
+    </p:extLst>
+  </p:cSld>
+  <p:clrMapOvr>
+    <a:masterClrMapping/>
+  </p:clrMapOvr>
+</p:sld>
+</file>
+
+<file path=ppt/slides/slide72.xml><?xml version="1.0" encoding="utf-8"?>
+<p:sld xmlns:a="http://schemas.openxmlformats.org/drawingml/2006/main" xmlns:r="http://schemas.openxmlformats.org/officeDocument/2006/relationships" xmlns:p="http://schemas.openxmlformats.org/presentationml/2006/main">
+  <p:cSld>
+    <p:spTree>
+      <p:nvGrpSpPr>
+        <p:cNvPr id="1" name=""/>
+        <p:cNvGrpSpPr/>
+        <p:nvPr/>
+      </p:nvGrpSpPr>
+      <p:grpSpPr>
+        <a:xfrm>
+          <a:off x="0" y="0"/>
+          <a:ext cx="0" cy="0"/>
+          <a:chOff x="0" y="0"/>
+          <a:chExt cx="0" cy="0"/>
+        </a:xfrm>
+      </p:grpSpPr>
+      <p:sp>
+        <p:nvSpPr>
+          <p:cNvPr id="2" name="Título 1">
+            <a:extLst>
+              <a:ext uri="{FF2B5EF4-FFF2-40B4-BE49-F238E27FC236}">
+                <a16:creationId xmlns:a16="http://schemas.microsoft.com/office/drawing/2014/main" id="{A7386C69-38DA-9BE5-57F4-6EA92756509E}"/>
+              </a:ext>
+            </a:extLst>
+          </p:cNvPr>
+          <p:cNvSpPr>
+            <a:spLocks noGrp="1"/>
+          </p:cNvSpPr>
+          <p:nvPr>
+            <p:ph type="title"/>
+          </p:nvPr>
+        </p:nvSpPr>
+        <p:spPr/>
+        <p:txBody>
+          <a:bodyPr/>
+          <a:lstStyle/>
+          <a:p>
+            <a:endParaRPr lang="es-GT"/>
+          </a:p>
+        </p:txBody>
+      </p:sp>
+    </p:spTree>
+    <p:extLst>
+      <p:ext uri="{BB962C8B-B14F-4D97-AF65-F5344CB8AC3E}">
+        <p14:creationId xmlns:p14="http://schemas.microsoft.com/office/powerpoint/2010/main" val="1490314433"/>
+      </p:ext>
+    </p:extLst>
+  </p:cSld>
+  <p:clrMapOvr>
+    <a:masterClrMapping/>
+  </p:clrMapOvr>
+</p:sld>
+</file>
+
+<file path=ppt/slides/slide73.xml><?xml version="1.0" encoding="utf-8"?>
+<p:sld xmlns:a="http://schemas.openxmlformats.org/drawingml/2006/main" xmlns:r="http://schemas.openxmlformats.org/officeDocument/2006/relationships" xmlns:p="http://schemas.openxmlformats.org/presentationml/2006/main">
+  <p:cSld>
+    <p:spTree>
+      <p:nvGrpSpPr>
+        <p:cNvPr id="1" name=""/>
+        <p:cNvGrpSpPr/>
+        <p:nvPr/>
+      </p:nvGrpSpPr>
+      <p:grpSpPr>
+        <a:xfrm>
+          <a:off x="0" y="0"/>
+          <a:ext cx="0" cy="0"/>
+          <a:chOff x="0" y="0"/>
+          <a:chExt cx="0" cy="0"/>
+        </a:xfrm>
+      </p:grpSpPr>
+      <p:sp>
+        <p:nvSpPr>
+          <p:cNvPr id="2" name="Título 1">
+            <a:extLst>
+              <a:ext uri="{FF2B5EF4-FFF2-40B4-BE49-F238E27FC236}">
+                <a16:creationId xmlns:a16="http://schemas.microsoft.com/office/drawing/2014/main" id="{EEF01E30-01FC-E6FE-83BF-AD056652A2E8}"/>
+              </a:ext>
+            </a:extLst>
+          </p:cNvPr>
+          <p:cNvSpPr>
+            <a:spLocks noGrp="1"/>
+          </p:cNvSpPr>
+          <p:nvPr>
+            <p:ph type="title"/>
+          </p:nvPr>
+        </p:nvSpPr>
+        <p:spPr/>
+        <p:txBody>
+          <a:bodyPr/>
+          <a:lstStyle/>
+          <a:p>
+            <a:endParaRPr lang="es-GT"/>
+          </a:p>
+        </p:txBody>
+      </p:sp>
+    </p:spTree>
+    <p:extLst>
+      <p:ext uri="{BB962C8B-B14F-4D97-AF65-F5344CB8AC3E}">
+        <p14:creationId xmlns:p14="http://schemas.microsoft.com/office/powerpoint/2010/main" val="1206364583"/>
       </p:ext>
     </p:extLst>
   </p:cSld>
